--- a/downloads/presentations/modules/lesson-14-data-pipelines-for-public-health-ai.pptx
+++ b/downloads/presentations/modules/lesson-14-data-pipelines-for-public-health-ai.pptx
@@ -25,9 +25,11 @@
     <p:sldId id="273" r:id="rId19"/>
     <p:sldId id="274" r:id="rId20"/>
     <p:sldId id="275" r:id="rId21"/>
+    <p:sldId id="276" r:id="rId22"/>
+    <p:sldId id="277" r:id="rId23"/>
   </p:sldIdLst>
   <p:notesMasterIdLst>
-    <p:notesMasterId r:id="rId22"/>
+    <p:notesMasterId r:id="rId24"/>
   </p:notesMasterIdLst>
   <p:sldSz cx="12192000" cy="6858000"/>
   <p:notesSz cx="6858000" cy="12192000"/>
@@ -610,10 +612,9 @@
           <a:p>
             <a:r>
               <a:rPr lang="en-US" dirty="0"/>
-              <a:t>Risks, Failure Modes, and Guardrails
-Silent feed failure. A data feed can stop or change without visible failure in the AI interface. Guardrails include automated feed monitoring, expected volume thresholds, error queues, and notification procedures.
-Schema and terminology changes. Source systems may change field names, formats, codes, or units. Guardrails include schema validation, terminology governance, release notes, and regression testing.
-Unclear fallback process. Staff may continue using AI outputs when data are stale or incomplete. Guardrails include visible freshness indicators, pause rules, and manual fallback procedures.</a:t>
+              <a:t>Public Health Example
+A syndromic surveillance team may use AI to identify unusual emergency department visit patterns. The model depends on timely data feeds from hospitals, correct parsing of chief complaint text, reliable facility identifiers, and consistent geographic information. If one large hospital feed stops or a field changes after an EHR upgrade, the AI tool may miss a signal or generate a false alert. Pipeline monitoring is therefore part of outbreak detection readiness.
+A second example is an AI tool that drafts summaries of lab-based cases. The tool may rely on an ELR feed, a terminology mapping table, a deduplication process, and a case management interface. If any of those steps fail, the summary may omit a result, duplicate a patient, or misrepresent reportability. The pipeline must be reviewed before the AI output can be trusted.</a:t>
             </a:r>
             <a:endParaRPr lang="en-US" dirty="0"/>
           </a:p>
@@ -701,8 +702,10 @@
           <a:p>
             <a:r>
               <a:rPr lang="en-US" dirty="0"/>
-              <a:t>Risks, Failure Modes, and Guardrails
-Weak lineage. If transformations are not documented, staff may not be able to explain or correct AI errors. Guardrails include lineage documentation, version control, and audit trails.</a:t>
+              <a:t>Technical Deep Dive
+Pipeline design begins with the source and ends with the user-facing decision or output. In between, data may be received, staged, validated, transformed, standardized, linked, loaded, indexed, analyzed, and displayed. Each step should have an owner, a purpose, a quality check, and a documented failure process.
+Batch pipelines move data on a schedule, such as nightly files or weekly extracts. Real-time pipelines move data as events occur, such as laboratory reports or eCR messages. Event-driven pipelines trigger actions when a defined event occurs, such as creating a review task when a high-priority result arrives. AI workflows may use any of these models, but the monitoring and risk profile differ for each.
+Metadata and version control are essential for AI-supported pipelines. Staff need to know which data dictionary, code mapping, model version, prompt template, transformation rule, and document collection were used at a specific time. This is especially important when an agency investigates an incident or compares AI performance before and after a system change.</a:t>
             </a:r>
             <a:endParaRPr lang="en-US" dirty="0"/>
           </a:p>
@@ -790,8 +793,10 @@
           <a:p>
             <a:r>
               <a:rPr lang="en-US" dirty="0"/>
-              <a:t>Application to AI-Supported Workflows
-Generative AI may use pipeline outputs to summarize records, but the summary should indicate source freshness and preserve traceability. Predictive models may rely on engineered features created by a pipeline, so the feature pipeline must be monitored for drift and missingness. RAG systems depend on document ingestion pipelines, which must track document source, version, permissions, and refresh schedules. Agentic workflows may depend on event-driven pipelines, making failure handling and approval points especially important.</a:t>
+              <a:t>Risks, Failure Modes, and Guardrails
+Silent feed failure. A data feed can stop or change without visible failure in the AI interface. Guardrails include automated feed monitoring, expected volume thresholds, error queues, and notification procedures.
+Schema and terminology changes. Source systems may change field names, formats, codes, or units. Guardrails include schema validation, terminology governance, release notes, and regression testing.
+Unclear fallback process. Staff may continue using AI outputs when data are stale or incomplete. Guardrails include visible freshness indicators, pause rules, and manual fallback procedures.</a:t>
             </a:r>
             <a:endParaRPr lang="en-US" dirty="0"/>
           </a:p>
@@ -879,10 +884,8 @@
           <a:p>
             <a:r>
               <a:rPr lang="en-US" dirty="0"/>
-              <a:t>Reflection Questions
-Which public health data feeds are most important to daily decisions in your program?
-Which pipelines are automatically monitored, and which depend on manual review?
-What failures would materially affect an AI output?</a:t>
+              <a:t>Risks, Failure Modes, and Guardrails
+Weak lineage. If transformations are not documented, staff may not be able to explain or correct AI errors. Guardrails include lineage documentation, version control, and audit trails.</a:t>
             </a:r>
             <a:endParaRPr lang="en-US" dirty="0"/>
           </a:p>
@@ -970,9 +973,8 @@
           <a:p>
             <a:r>
               <a:rPr lang="en-US" dirty="0"/>
-              <a:t>Reflection Questions
-How would staff know if an AI output was based on stale or incomplete data?
-Who has authority to pause AI use when a pipeline fails?</a:t>
+              <a:t>Application to AI-Supported Workflows
+Generative AI may use pipeline outputs to summarize records, but the summary should indicate source freshness and preserve traceability. Predictive models may rely on engineered features created by a pipeline, so the feature pipeline must be monitored for drift and missingness. RAG systems depend on document ingestion pipelines, which must track document source, version, permissions, and refresh schedules. Agentic workflows may depend on event-driven pipelines, making failure handling and approval points especially important.</a:t>
             </a:r>
             <a:endParaRPr lang="en-US" dirty="0"/>
           </a:p>
@@ -1060,9 +1062,10 @@
           <a:p>
             <a:r>
               <a:rPr lang="en-US" dirty="0"/>
-              <a:t>Practical Exercise
-Create a data pipeline readiness checklist for one AI-supported workflow. Identify the data source, update frequency, required fields, validation checks, transformations, lineage documentation, monitoring indicators, error notification process, and fallback procedure.
-Document at least three pipeline failure scenarios and describe how each should be detected, escalated, and communicated to users.</a:t>
+              <a:t>Reflection Questions
+Which public health data feeds are most important to daily decisions in your program?
+Which pipelines are automatically monitored, and which depend on manual review?
+What failures would materially affect an AI output?</a:t>
             </a:r>
             <a:endParaRPr lang="en-US" dirty="0"/>
           </a:p>
@@ -1150,10 +1153,9 @@
           <a:p>
             <a:r>
               <a:rPr lang="en-US" dirty="0"/>
-              <a:t>Expected Artifact or Evidence
-Data pipeline map
-Pipeline readiness checklist
-Failure and escalation plan</a:t>
+              <a:t>Reflection Questions
+How would staff know if an AI output was based on stale or incomplete data?
+Who has authority to pause AI use when a pipeline fails?</a:t>
             </a:r>
             <a:endParaRPr lang="en-US" dirty="0"/>
           </a:p>
@@ -1241,8 +1243,9 @@
           <a:p>
             <a:r>
               <a:rPr lang="en-US" dirty="0"/>
-              <a:t>Expected Artifact or Evidence
-Known data limitations statement</a:t>
+              <a:t>Practical Exercise
+Create a data pipeline readiness checklist for one AI-supported workflow. Identify the data source, update frequency, required fields, validation checks, transformations, lineage documentation, monitoring indicators, error notification process, and fallback procedure.
+Document at least three pipeline failure scenarios and describe how each should be detected, escalated, and communicated to users.</a:t>
             </a:r>
             <a:endParaRPr lang="en-US" dirty="0"/>
           </a:p>
@@ -1330,11 +1333,10 @@
           <a:p>
             <a:r>
               <a:rPr lang="en-US" dirty="0"/>
-              <a:t>Expected Assignment
+              <a:t>Expected Artifact or Evidence
 Data pipeline map
 Pipeline readiness checklist
-Failure and escalation plan
-Known data limitations statement</a:t>
+Failure and escalation plan</a:t>
             </a:r>
             <a:endParaRPr lang="en-US" dirty="0"/>
           </a:p>
@@ -1422,12 +1424,8 @@
           <a:p>
             <a:r>
               <a:rPr lang="en-US" dirty="0"/>
-              <a:t>Knowledge Check
-1. What is the strongest reason to document data lineage for an AI-supported workflow?
-2. Which pipeline type is most likely to trigger a workflow immediately after a defined event?
-3. What is a practical guardrail for silent feed failure?
-4. Why should source freshness be visible to users?
-5. What is strong evidence of completion for this module?</a:t>
+              <a:t>Expected Artifact or Evidence
+Known data limitations statement</a:t>
             </a:r>
             <a:endParaRPr lang="en-US" dirty="0"/>
           </a:p>
@@ -1607,11 +1605,11 @@
           <a:p>
             <a:r>
               <a:rPr lang="en-US" dirty="0"/>
-              <a:t>References and Resources
-CDC Data Modernization Initiative materials: https://www.cdc.gov/data-modernization/php/index.html
-CDC Public Health Data Strategy: https://www.cdc.gov/public-health-data-strategy/php/about/index.html
-NIST AI Risk Management Framework: https://www.nist.gov/itl/ai-risk-management-framework
-Agency data governance and system monitoring documentation</a:t>
+              <a:t>Expected Assignment
+Data pipeline map
+Pipeline readiness checklist
+Failure and escalation plan
+Known data limitations statement</a:t>
             </a:r>
             <a:endParaRPr lang="en-US" dirty="0"/>
           </a:p>
@@ -1635,6 +1633,191 @@
             <a:fld id="{F7021451-1387-4CA6-816F-3879F97B5CBC}" type="slidenum">
               <a:rPr lang="en-US"/>
               <a:t>20</a:t>
+            </a:fld>
+            <a:endParaRPr lang="en-US"/>
+          </a:p>
+        </p:txBody>
+      </p:sp>
+    </p:spTree>
+    <p:extLst>
+      <p:ext uri="{BB962C8B-B14F-4D97-AF65-F5344CB8AC3E}">
+        <p14:creationId xmlns:p14="http://schemas.microsoft.com/office/powerpoint/2010/main" val="1024086991"/>
+      </p:ext>
+    </p:extLst>
+  </p:cSld>
+  <p:clrMapOvr>
+    <a:masterClrMapping/>
+  </p:clrMapOvr>
+</p:notes>
+</file>
+
+<file path=ppt/notesSlides/notesSlide21.xml><?xml version="1.0" encoding="utf-8"?>
+<p:notes xmlns:a="http://schemas.openxmlformats.org/drawingml/2006/main" xmlns:r="http://schemas.openxmlformats.org/officeDocument/2006/relationships" xmlns:p="http://schemas.openxmlformats.org/presentationml/2006/main">
+  <p:cSld>
+    <p:spTree>
+      <p:nvGrpSpPr>
+        <p:cNvPr id="1" name=""/>
+        <p:cNvGrpSpPr/>
+        <p:nvPr/>
+      </p:nvGrpSpPr>
+      <p:grpSpPr>
+        <a:xfrm>
+          <a:off x="0" y="0"/>
+          <a:ext cx="0" cy="0"/>
+          <a:chOff x="0" y="0"/>
+          <a:chExt cx="0" cy="0"/>
+        </a:xfrm>
+      </p:grpSpPr>
+      <p:sp>
+        <p:nvSpPr>
+          <p:cNvPr id="2" name="Slide Image Placeholder 1"/>
+          <p:cNvSpPr>
+            <a:spLocks noGrp="1" noRot="1" noChangeAspect="1"/>
+          </p:cNvSpPr>
+          <p:nvPr>
+            <p:ph type="sldImg"/>
+          </p:nvPr>
+        </p:nvSpPr>
+        <p:spPr/>
+      </p:sp>
+      <p:sp>
+        <p:nvSpPr>
+          <p:cNvPr id="3" name="Notes Placeholder 2"/>
+          <p:cNvSpPr>
+            <a:spLocks noGrp="1"/>
+          </p:cNvSpPr>
+          <p:nvPr>
+            <p:ph type="body" idx="1"/>
+          </p:nvPr>
+        </p:nvSpPr>
+        <p:spPr/>
+        <p:txBody>
+          <a:bodyPr/>
+          <a:lstStyle/>
+          <a:p>
+            <a:r>
+              <a:rPr lang="en-US" dirty="0"/>
+              <a:t>Knowledge Check
+1. What is the strongest reason to document data lineage for an AI-supported workflow?
+2. Which pipeline type is most likely to trigger a workflow immediately after a defined event?
+3. What is a practical guardrail for silent feed failure?
+4. Why should source freshness be visible to users?
+5. What is strong evidence of completion for this module?</a:t>
+            </a:r>
+            <a:endParaRPr lang="en-US" dirty="0"/>
+          </a:p>
+        </p:txBody>
+      </p:sp>
+      <p:sp>
+        <p:nvSpPr>
+          <p:cNvPr id="4" name="Slide Number Placeholder 3"/>
+          <p:cNvSpPr>
+            <a:spLocks noGrp="1"/>
+          </p:cNvSpPr>
+          <p:nvPr>
+            <p:ph type="sldNum" sz="quarter" idx="10"/>
+          </p:nvPr>
+        </p:nvSpPr>
+        <p:spPr/>
+        <p:txBody>
+          <a:bodyPr/>
+          <a:lstStyle/>
+          <a:p>
+            <a:fld id="{F7021451-1387-4CA6-816F-3879F97B5CBC}" type="slidenum">
+              <a:rPr lang="en-US"/>
+              <a:t>21</a:t>
+            </a:fld>
+            <a:endParaRPr lang="en-US"/>
+          </a:p>
+        </p:txBody>
+      </p:sp>
+    </p:spTree>
+    <p:extLst>
+      <p:ext uri="{BB962C8B-B14F-4D97-AF65-F5344CB8AC3E}">
+        <p14:creationId xmlns:p14="http://schemas.microsoft.com/office/powerpoint/2010/main" val="1024086991"/>
+      </p:ext>
+    </p:extLst>
+  </p:cSld>
+  <p:clrMapOvr>
+    <a:masterClrMapping/>
+  </p:clrMapOvr>
+</p:notes>
+</file>
+
+<file path=ppt/notesSlides/notesSlide22.xml><?xml version="1.0" encoding="utf-8"?>
+<p:notes xmlns:a="http://schemas.openxmlformats.org/drawingml/2006/main" xmlns:r="http://schemas.openxmlformats.org/officeDocument/2006/relationships" xmlns:p="http://schemas.openxmlformats.org/presentationml/2006/main">
+  <p:cSld>
+    <p:spTree>
+      <p:nvGrpSpPr>
+        <p:cNvPr id="1" name=""/>
+        <p:cNvGrpSpPr/>
+        <p:nvPr/>
+      </p:nvGrpSpPr>
+      <p:grpSpPr>
+        <a:xfrm>
+          <a:off x="0" y="0"/>
+          <a:ext cx="0" cy="0"/>
+          <a:chOff x="0" y="0"/>
+          <a:chExt cx="0" cy="0"/>
+        </a:xfrm>
+      </p:grpSpPr>
+      <p:sp>
+        <p:nvSpPr>
+          <p:cNvPr id="2" name="Slide Image Placeholder 1"/>
+          <p:cNvSpPr>
+            <a:spLocks noGrp="1" noRot="1" noChangeAspect="1"/>
+          </p:cNvSpPr>
+          <p:nvPr>
+            <p:ph type="sldImg"/>
+          </p:nvPr>
+        </p:nvSpPr>
+        <p:spPr/>
+      </p:sp>
+      <p:sp>
+        <p:nvSpPr>
+          <p:cNvPr id="3" name="Notes Placeholder 2"/>
+          <p:cNvSpPr>
+            <a:spLocks noGrp="1"/>
+          </p:cNvSpPr>
+          <p:nvPr>
+            <p:ph type="body" idx="1"/>
+          </p:nvPr>
+        </p:nvSpPr>
+        <p:spPr/>
+        <p:txBody>
+          <a:bodyPr/>
+          <a:lstStyle/>
+          <a:p>
+            <a:r>
+              <a:rPr lang="en-US" dirty="0"/>
+              <a:t>References and Resources
+CDC Data Modernization Initiative materials: https://www.cdc.gov/data-modernization/php/index.html
+CDC Public Health Data Strategy: https://www.cdc.gov/public-health-data-strategy/php/about/index.html
+NIST AI Risk Management Framework: https://www.nist.gov/itl/ai-risk-management-framework
+Agency data governance and system monitoring documentation</a:t>
+            </a:r>
+            <a:endParaRPr lang="en-US" dirty="0"/>
+          </a:p>
+        </p:txBody>
+      </p:sp>
+      <p:sp>
+        <p:nvSpPr>
+          <p:cNvPr id="4" name="Slide Number Placeholder 3"/>
+          <p:cNvSpPr>
+            <a:spLocks noGrp="1"/>
+          </p:cNvSpPr>
+          <p:nvPr>
+            <p:ph type="sldNum" sz="quarter" idx="10"/>
+          </p:nvPr>
+        </p:nvSpPr>
+        <p:spPr/>
+        <p:txBody>
+          <a:bodyPr/>
+          <a:lstStyle/>
+          <a:p>
+            <a:fld id="{F7021451-1387-4CA6-816F-3879F97B5CBC}" type="slidenum">
+              <a:rPr lang="en-US"/>
+              <a:t>22</a:t>
             </a:fld>
             <a:endParaRPr lang="en-US"/>
           </a:p>
@@ -1699,12 +1882,11 @@
           <a:p>
             <a:r>
               <a:rPr lang="en-US" dirty="0"/>
-              <a:t>Learning Objectives
-Describe the major steps in public health data pipelines, including ingestion, validation, transformation, storage, access, and monitoring.
-Distinguish between batch, real-time, and event-driven data flows.
-Explain how pipeline failures can affect AI outputs and operational decisions.
-Identify metadata, lineage, version control, and audit needs for AI-supported workflows.
-Produce a data pipeline readiness checklist for a public health AI use case.</a:t>
+              <a:t>Related Playbook Plays
+Play 12: Execute Governance and Oversight - This lesson informs Play 12 by helping learners connect the lesson topic to execute governance and oversight work in the AI Playbook.
+Play 3: Establish AI Governance - This lesson informs Play 3 by helping learners connect the lesson topic to establish ai governance work in the AI Playbook sequence.
+Play 13: Monitor and Evaluate AI Systems - This lesson informs Play 13 by helping learners connect the lesson topic to monitor and evaluate ai systems work in the AI Playbook.
+Play 11: Build and Deploy AI Solutions - This lesson informs Play 11 by helping learners connect the lesson topic to build and deploy ai solutions work in the AI Playbook.</a:t>
             </a:r>
             <a:endParaRPr lang="en-US" dirty="0"/>
           </a:p>
@@ -1792,8 +1974,13 @@
           <a:p>
             <a:r>
               <a:rPr lang="en-US" dirty="0"/>
-              <a:t>Module Overview
-Data pipelines are the operational pathways that move public health data from source systems into analytic, reporting, and workflow environments. AI tools depend on these pathways even when users do not see them. A model that classifies cases, summarizes laboratory reports, or predicts service demand can only work responsibly if the data feeding the model are timely, complete, transformed correctly, and monitored. This module helps learners understand the pipeline steps that shape AI outputs and the safeguards needed when pipeline failures could affect public health action.</a:t>
+              <a:t>Related Toolkit Resources
+Tool 16: Incident Response Checklist (Checklist) - Use Incident Response Checklist to translate this lesson into a documented public health AI planning, governance,.
+Tool 17: Compliance Audit Checklist (Checklist) - Use Compliance Audit Checklist to translate this lesson into a documented public health AI planning, governance, implementation,.
+Tool 18: Policy Update &amp; Version Control Log (Log) - Use this tool to complete or strengthen the practical exercise for the module using fictional, de-identified, or generalized.
+Tool 19: Plain-Language AI Public Notice Template (Template) - Use Plain-Language AI Public Notice Template to translate this lesson into a documented public health AI planning, governance,.
+Tool 44: Performance Monitoring Dashboard (Dashboard) - Use this tool to complete or strengthen the practical exercise for the module using fictional, de-identified, or generalized.
+Tool 45: Continuous Improvement Log (Log) - Use Continuous Improvement Log to translate this lesson into a documented public health AI planning, governance, implementation,.</a:t>
             </a:r>
             <a:endParaRPr lang="en-US" dirty="0"/>
           </a:p>
@@ -1881,10 +2068,12 @@
           <a:p>
             <a:r>
               <a:rPr lang="en-US" dirty="0"/>
-              <a:t>Why This Topic Matters for Public Health AI
-Data pipeline readiness matters because AI systems can amplify routine data management problems. A delayed file, changed field name, failed interface, missing date, duplicate record, or outdated transformation rule may not be obvious to an end user. The AI tool may continue generating fluent summaries or confident classifications even after the data feed has become unreliable.
-Public health agencies need pipeline visibility before they rely on AI for operational workflows. Visibility means knowing where data originate, how often they update, what transformations occur, what validation checks run, and who is alerted when something fails. A pipeline should not be treated as a hidden technical detail. It is part of the safety infrastructure for AI.
-Pipeline review also supports public accountability. When an AI output affects case prioritization, outreach, resource allocation, or public messaging, the agency may need to explain which data were used and whether those data were current. A well-documented pipeline makes that explanation possible.</a:t>
+              <a:t>Learning Objectives
+Describe the major steps in public health data pipelines, including ingestion, validation, transformation, storage, access, and monitoring.
+Distinguish between batch, real-time, and event-driven data flows.
+Explain how pipeline failures can affect AI outputs and operational decisions.
+Identify metadata, lineage, version control, and audit needs for AI-supported workflows.
+Produce a data pipeline readiness checklist for a public health AI use case.</a:t>
             </a:r>
             <a:endParaRPr lang="en-US" dirty="0"/>
           </a:p>
@@ -1972,10 +2161,8 @@
           <a:p>
             <a:r>
               <a:rPr lang="en-US" dirty="0"/>
-              <a:t>Core Concepts
-Data pipeline. A data pipeline is a set of technical and operational steps that moves data from a source to a destination where the data can be used. In public health, pipelines may include laboratory interfaces, EHR feeds, IIS submissions, syndromic surveillance feeds, vital records extracts, HIE connections, and program datasets. Each step creates an opportunity to improve or degrade data quality.
-ETL and ELT. ETL stands for extract, transform, load, while ELT stands for extract, load, transform. ETL transforms data before they enter the target system, while ELT loads data first and transforms them later. The distinction matters for AI because staff need to know where data were changed and which version was used by the AI tool.
-Pipeline monitoring. Pipeline monitoring is the routine process of checking whether data feeds, transformations, and outputs are working as intended. Monitoring may include file receipt, schema validation, required-field checks, timeliness checks, duplicate review, error queues, and volume trends. Monitoring should be tied to escalation when failures affect AI use.</a:t>
+              <a:t>Module Overview
+Data pipelines are the operational pathways that move public health data from source systems into analytic, reporting, and workflow environments. AI tools depend on these pathways even when users do not see them. A model that classifies cases, summarizes laboratory reports, or predicts service demand can only work responsibly if the data feeding the model are timely, complete, transformed correctly, and monitored. This module helps learners understand the pipeline steps that shape AI outputs and the safeguards needed when pipeline failures could affect public health action.</a:t>
             </a:r>
             <a:endParaRPr lang="en-US" dirty="0"/>
           </a:p>
@@ -2063,8 +2250,10 @@
           <a:p>
             <a:r>
               <a:rPr lang="en-US" dirty="0"/>
-              <a:t>Core Concepts
-Data lineage. Data lineage shows where data came from, what happened to them, and where they were used. Lineage supports validation, troubleshooting, incident response, and public records review. In AI workflows, lineage helps staff trace a questionable output back to its source data and transformation history.</a:t>
+              <a:t>Why This Topic Matters for Public Health AI
+Data pipeline readiness matters because AI systems can amplify routine data management problems. A delayed file, changed field name, failed interface, missing date, duplicate record, or outdated transformation rule may not be obvious to an end user. The AI tool may continue generating fluent summaries or confident classifications even after the data feed has become unreliable.
+Public health agencies need pipeline visibility before they rely on AI for operational workflows. Visibility means knowing where data originate, how often they update, what transformations occur, what validation checks run, and who is alerted when something fails. A pipeline should not be treated as a hidden technical detail. It is part of the safety infrastructure for AI.
+Pipeline review also supports public accountability. When an AI output affects case prioritization, outreach, resource allocation, or public messaging, the agency may need to explain which data were used and whether those data were current. A well-documented pipeline makes that explanation possible.</a:t>
             </a:r>
             <a:endParaRPr lang="en-US" dirty="0"/>
           </a:p>
@@ -2152,9 +2341,10 @@
           <a:p>
             <a:r>
               <a:rPr lang="en-US" dirty="0"/>
-              <a:t>Public Health Example
-A syndromic surveillance team may use AI to identify unusual emergency department visit patterns. The model depends on timely data feeds from hospitals, correct parsing of chief complaint text, reliable facility identifiers, and consistent geographic information. If one large hospital feed stops or a field changes after an EHR upgrade, the AI tool may miss a signal or generate a false alert. Pipeline monitoring is therefore part of outbreak detection readiness.
-A second example is an AI tool that drafts summaries of lab-based cases. The tool may rely on an ELR feed, a terminology mapping table, a deduplication process, and a case management interface. If any of those steps fail, the summary may omit a result, duplicate a patient, or misrepresent reportability. The pipeline must be reviewed before the AI output can be trusted.</a:t>
+              <a:t>Core Concepts
+Data pipeline. A data pipeline is a set of technical and operational steps that moves data from a source to a destination where the data can be used. In public health, pipelines may include laboratory interfaces, EHR feeds, IIS submissions, syndromic surveillance feeds, vital records extracts, HIE connections, and program datasets. Each step creates an opportunity to improve or degrade data quality.
+ETL and ELT. ETL stands for extract, transform, load, while ELT stands for extract, load, transform. ETL transforms data before they enter the target system, while ELT loads data first and transforms them later. The distinction matters for AI because staff need to know where data were changed and which version was used by the AI tool.
+Pipeline monitoring. Pipeline monitoring is the routine process of checking whether data feeds, transformations, and outputs are working as intended. Monitoring may include file receipt, schema validation, required-field checks, timeliness checks, duplicate review, error queues, and volume trends. Monitoring should be tied to escalation when failures affect AI use.</a:t>
             </a:r>
             <a:endParaRPr lang="en-US" dirty="0"/>
           </a:p>
@@ -2242,10 +2432,8 @@
           <a:p>
             <a:r>
               <a:rPr lang="en-US" dirty="0"/>
-              <a:t>Technical Deep Dive
-Pipeline design begins with the source and ends with the user-facing decision or output. In between, data may be received, staged, validated, transformed, standardized, linked, loaded, indexed, analyzed, and displayed. Each step should have an owner, a purpose, a quality check, and a documented failure process.
-Batch pipelines move data on a schedule, such as nightly files or weekly extracts. Real-time pipelines move data as events occur, such as laboratory reports or eCR messages. Event-driven pipelines trigger actions when a defined event occurs, such as creating a review task when a high-priority result arrives. AI workflows may use any of these models, but the monitoring and risk profile differ for each.
-Metadata and version control are essential for AI-supported pipelines. Staff need to know which data dictionary, code mapping, model version, prompt template, transformation rule, and document collection were used at a specific time. This is especially important when an agency investigates an incident or compares AI performance before and after a system change.</a:t>
+              <a:t>Core Concepts
+Data lineage. Data lineage shows where data came from, what happened to them, and where they were used. Lineage supports validation, troubleshooting, incident response, and public records review. In AI workflows, lineage helps staff trace a questionable output back to its source data and transformation history.</a:t>
             </a:r>
             <a:endParaRPr lang="en-US" dirty="0"/>
           </a:p>
@@ -2868,7 +3056,32 @@
       </p:sp>
       <p:sp>
         <p:nvSpPr>
-          <p:cNvPr id="3" name="Text 1"/>
+          <p:cNvPr id="3" name="Shape 1"/>
+          <p:cNvSpPr/>
+          <p:nvPr/>
+        </p:nvSpPr>
+        <p:spPr>
+          <a:xfrm>
+            <a:off x="0" y="164592"/>
+            <a:ext cx="146304" cy="6693408"/>
+          </a:xfrm>
+          <a:prstGeom prst="rect">
+            <a:avLst/>
+          </a:prstGeom>
+          <a:solidFill>
+            <a:srgbClr val="2F8A28"/>
+          </a:solidFill>
+          <a:ln w="12700">
+            <a:solidFill>
+              <a:srgbClr val="2F8A28"/>
+            </a:solidFill>
+            <a:prstDash val="solid"/>
+          </a:ln>
+        </p:spPr>
+      </p:sp>
+      <p:sp>
+        <p:nvSpPr>
+          <p:cNvPr id="4" name="Text 2"/>
           <p:cNvSpPr/>
           <p:nvPr/>
         </p:nvSpPr>
@@ -2907,7 +3120,7 @@
       </p:sp>
       <p:sp>
         <p:nvSpPr>
-          <p:cNvPr id="4" name="Text 2"/>
+          <p:cNvPr id="5" name="Text 3"/>
           <p:cNvSpPr/>
           <p:nvPr/>
         </p:nvSpPr>
@@ -2946,7 +3159,7 @@
       </p:sp>
       <p:sp>
         <p:nvSpPr>
-          <p:cNvPr id="5" name="Text 3"/>
+          <p:cNvPr id="6" name="Text 4"/>
           <p:cNvSpPr/>
           <p:nvPr/>
         </p:nvSpPr>
@@ -2985,13 +3198,77 @@
       </p:sp>
       <p:sp>
         <p:nvSpPr>
-          <p:cNvPr id="6" name="Text 4"/>
+          <p:cNvPr id="7" name="Shape 5"/>
           <p:cNvSpPr/>
           <p:nvPr/>
         </p:nvSpPr>
         <p:spPr>
           <a:xfrm>
             <a:off x="640080" y="658368"/>
+            <a:ext cx="420624" cy="420624"/>
+          </a:xfrm>
+          <a:prstGeom prst="ellipse">
+            <a:avLst/>
+          </a:prstGeom>
+          <a:solidFill>
+            <a:srgbClr val="0068B7"/>
+          </a:solidFill>
+          <a:ln w="12700">
+            <a:solidFill>
+              <a:srgbClr val="0068B7"/>
+            </a:solidFill>
+            <a:prstDash val="solid"/>
+          </a:ln>
+        </p:spPr>
+      </p:sp>
+      <p:sp>
+        <p:nvSpPr>
+          <p:cNvPr id="8" name="Text 6"/>
+          <p:cNvSpPr/>
+          <p:nvPr/>
+        </p:nvSpPr>
+        <p:spPr>
+          <a:xfrm>
+            <a:off x="640080" y="731520"/>
+            <a:ext cx="420624" cy="164592"/>
+          </a:xfrm>
+          <a:prstGeom prst="rect">
+            <a:avLst/>
+          </a:prstGeom>
+          <a:noFill/>
+          <a:ln/>
+        </p:spPr>
+        <p:txBody>
+          <a:bodyPr wrap="square" lIns="0" tIns="0" rIns="0" bIns="0" rtlCol="0" anchor="ctr"/>
+          <a:lstStyle/>
+          <a:p>
+            <a:pPr algn="ctr" indent="0" marL="0">
+              <a:buNone/>
+            </a:pPr>
+            <a:r>
+              <a:rPr lang="en-US" sz="1100" b="1" dirty="0">
+                <a:solidFill>
+                  <a:srgbClr val="FFFFFF"/>
+                </a:solidFill>
+                <a:latin typeface="Aptos" pitchFamily="34" charset="0"/>
+                <a:ea typeface="Aptos" pitchFamily="34" charset="-122"/>
+                <a:cs typeface="Aptos" pitchFamily="34" charset="-120"/>
+              </a:rPr>
+              <a:t>5</a:t>
+            </a:r>
+            <a:endParaRPr lang="en-US" sz="1100" dirty="0"/>
+          </a:p>
+        </p:txBody>
+      </p:sp>
+      <p:sp>
+        <p:nvSpPr>
+          <p:cNvPr id="9" name="Text 7"/>
+          <p:cNvSpPr/>
+          <p:nvPr/>
+        </p:nvSpPr>
+        <p:spPr>
+          <a:xfrm>
+            <a:off x="640080" y="621792"/>
             <a:ext cx="10881360" cy="566928"/>
           </a:xfrm>
           <a:prstGeom prst="rect">
@@ -3018,7 +3295,7 @@
                 <a:ea typeface="Aptos Display" pitchFamily="34" charset="-122"/>
                 <a:cs typeface="Aptos Display" pitchFamily="34" charset="-120"/>
               </a:rPr>
-              <a:t>Risks, Failure Modes, and Guardrails</a:t>
+              <a:t>Public Health Example</a:t>
             </a:r>
             <a:endParaRPr lang="en-US" sz="2700" dirty="0"/>
           </a:p>
@@ -3026,32 +3303,178 @@
       </p:sp>
       <p:sp>
         <p:nvSpPr>
-          <p:cNvPr id="7" name="Text 5"/>
-          <p:cNvSpPr/>
-          <p:nvPr/>
-        </p:nvSpPr>
-        <p:spPr>
-          <a:xfrm>
-            <a:off x="822960" y="1325880"/>
-            <a:ext cx="10378440" cy="4800600"/>
-          </a:xfrm>
-          <a:prstGeom prst="rect">
-            <a:avLst/>
-          </a:prstGeom>
-          <a:noFill/>
-          <a:ln/>
-        </p:spPr>
-        <p:txBody>
-          <a:bodyPr wrap="square" lIns="1016" tIns="1016" rIns="1016" bIns="1016" rtlCol="0" anchor="t">
+          <p:cNvPr id="10" name="Text 8"/>
+          <p:cNvSpPr/>
+          <p:nvPr/>
+        </p:nvSpPr>
+        <p:spPr>
+          <a:xfrm>
+            <a:off x="868680" y="1417320"/>
+            <a:ext cx="6675120" cy="4434840"/>
+          </a:xfrm>
+          <a:prstGeom prst="rect">
+            <a:avLst/>
+          </a:prstGeom>
+          <a:noFill/>
+          <a:ln/>
+        </p:spPr>
+        <p:txBody>
+          <a:bodyPr wrap="square" lIns="635" tIns="635" rIns="635" bIns="635" rtlCol="0" anchor="t">
             <a:normAutofit/>
           </a:bodyPr>
           <a:lstStyle/>
           <a:p>
+            <a:r>
+              <a:rPr lang="en-US" sz="1700" dirty="0">
+                <a:solidFill>
+                  <a:srgbClr val="17364A"/>
+                </a:solidFill>
+                <a:latin typeface="Aptos" pitchFamily="34" charset="0"/>
+                <a:ea typeface="Aptos" pitchFamily="34" charset="-122"/>
+                <a:cs typeface="Aptos" pitchFamily="34" charset="-120"/>
+              </a:rPr>
+              <a:t>A syndromic surveillance team may use AI to identify unusual emergency department visit patterns.</a:t>
+            </a:r>
+            <a:endParaRPr lang="en-US" sz="1700" dirty="0"/>
+          </a:p>
+          <a:p>
+            <a:r>
+              <a:rPr lang="en-US" sz="1700" dirty="0">
+                <a:solidFill>
+                  <a:srgbClr val="17364A"/>
+                </a:solidFill>
+                <a:latin typeface="Aptos" pitchFamily="34" charset="0"/>
+                <a:ea typeface="Aptos" pitchFamily="34" charset="-122"/>
+                <a:cs typeface="Aptos" pitchFamily="34" charset="-120"/>
+              </a:rPr>
+              <a:t>The model depends on timely data feeds from hospitals, correct parsing of chief complaint text, reliable facility.</a:t>
+            </a:r>
+            <a:endParaRPr lang="en-US" sz="1700" dirty="0"/>
+          </a:p>
+          <a:p>
+            <a:r>
+              <a:rPr lang="en-US" sz="1700" dirty="0">
+                <a:solidFill>
+                  <a:srgbClr val="17364A"/>
+                </a:solidFill>
+                <a:latin typeface="Aptos" pitchFamily="34" charset="0"/>
+                <a:ea typeface="Aptos" pitchFamily="34" charset="-122"/>
+                <a:cs typeface="Aptos" pitchFamily="34" charset="-120"/>
+              </a:rPr>
+              <a:t>If one large hospital feed stops or a field changes after an EHR upgrade, the AI tool may miss a signal or generate a false.</a:t>
+            </a:r>
+            <a:endParaRPr lang="en-US" sz="1700" dirty="0"/>
+          </a:p>
+          <a:p>
+            <a:r>
+              <a:rPr lang="en-US" sz="1700" dirty="0">
+                <a:solidFill>
+                  <a:srgbClr val="17364A"/>
+                </a:solidFill>
+                <a:latin typeface="Aptos" pitchFamily="34" charset="0"/>
+                <a:ea typeface="Aptos" pitchFamily="34" charset="-122"/>
+                <a:cs typeface="Aptos" pitchFamily="34" charset="-120"/>
+              </a:rPr>
+              <a:t>Pipeline monitoring is therefore part of outbreak detection readiness.</a:t>
+            </a:r>
+            <a:endParaRPr lang="en-US" sz="1700" dirty="0"/>
+          </a:p>
+        </p:txBody>
+      </p:sp>
+      <p:sp>
+        <p:nvSpPr>
+          <p:cNvPr id="11" name="Shape 9"/>
+          <p:cNvSpPr/>
+          <p:nvPr/>
+        </p:nvSpPr>
+        <p:spPr>
+          <a:xfrm>
+            <a:off x="7909560" y="1417320"/>
+            <a:ext cx="3154680" cy="1828800"/>
+          </a:xfrm>
+          <a:prstGeom prst="roundRect">
+            <a:avLst>
+              <a:gd name="adj" fmla="val 6000"/>
+            </a:avLst>
+          </a:prstGeom>
+          <a:solidFill>
+            <a:srgbClr val="EEF8ED"/>
+          </a:solidFill>
+          <a:ln w="12700">
+            <a:solidFill>
+              <a:srgbClr val="B9D7E6"/>
+            </a:solidFill>
+            <a:prstDash val="solid"/>
+          </a:ln>
+        </p:spPr>
+      </p:sp>
+      <p:sp>
+        <p:nvSpPr>
+          <p:cNvPr id="12" name="Text 10"/>
+          <p:cNvSpPr/>
+          <p:nvPr/>
+        </p:nvSpPr>
+        <p:spPr>
+          <a:xfrm>
+            <a:off x="8074152" y="1563624"/>
+            <a:ext cx="2825496" cy="201168"/>
+          </a:xfrm>
+          <a:prstGeom prst="rect">
+            <a:avLst/>
+          </a:prstGeom>
+          <a:noFill/>
+          <a:ln/>
+        </p:spPr>
+        <p:txBody>
+          <a:bodyPr wrap="square" lIns="0" tIns="0" rIns="0" bIns="0" rtlCol="0" anchor="ctr"/>
+          <a:lstStyle/>
+          <a:p>
             <a:pPr indent="0" marL="0">
               <a:buNone/>
             </a:pPr>
             <a:r>
-              <a:rPr lang="en-US" sz="1420" dirty="0">
+              <a:rPr lang="en-US" sz="950" b="1" dirty="0">
+                <a:solidFill>
+                  <a:srgbClr val="0068B7"/>
+                </a:solidFill>
+                <a:latin typeface="Aptos" pitchFamily="34" charset="0"/>
+                <a:ea typeface="Aptos" pitchFamily="34" charset="-122"/>
+                <a:cs typeface="Aptos" pitchFamily="34" charset="-120"/>
+              </a:rPr>
+              <a:t>Key idea</a:t>
+            </a:r>
+            <a:endParaRPr lang="en-US" sz="950" dirty="0"/>
+          </a:p>
+        </p:txBody>
+      </p:sp>
+      <p:sp>
+        <p:nvSpPr>
+          <p:cNvPr id="13" name="Text 11"/>
+          <p:cNvSpPr/>
+          <p:nvPr/>
+        </p:nvSpPr>
+        <p:spPr>
+          <a:xfrm>
+            <a:off x="8074152" y="1856232"/>
+            <a:ext cx="2825496" cy="1261872"/>
+          </a:xfrm>
+          <a:prstGeom prst="rect">
+            <a:avLst/>
+          </a:prstGeom>
+          <a:noFill/>
+          <a:ln/>
+        </p:spPr>
+        <p:txBody>
+          <a:bodyPr wrap="square" lIns="0" tIns="0" rIns="0" bIns="0" rtlCol="0" anchor="t">
+            <a:normAutofit/>
+          </a:bodyPr>
+          <a:lstStyle/>
+          <a:p>
+            <a:pPr indent="0" marL="0">
+              <a:buNone/>
+            </a:pPr>
+            <a:r>
+              <a:rPr lang="en-US" sz="1250" dirty="0">
                 <a:solidFill>
                   <a:srgbClr val="17364A"/>
                 </a:solidFill>
@@ -3059,9 +3482,116 @@
                 <a:ea typeface="Aptos" pitchFamily="34" charset="-122"/>
                 <a:cs typeface="Aptos" pitchFamily="34" charset="-120"/>
               </a:rPr>
-              <a:t>Silent feed failure. A data feed can stop or change without visible failure in the AI interface. Guardrails include automated feed monitoring, expected volume thresholds, error queues, and notification procedures. Schema and terminology changes. Source systems may change field names, formats, codes, or units. Guardrails include schema validation, terminology governance, release notes, and regression testing. Unclear fallback process. Staff may continue using AI outputs when data are stale or incomplete. Guardrails include visible freshness indicators, pause rules, and manual fallback procedures.</a:t>
-            </a:r>
-            <a:endParaRPr lang="en-US" sz="1420" dirty="0"/>
+              <a:t>A syndromic surveillance team may use AI to identify unusual emergency department visit patterns.</a:t>
+            </a:r>
+            <a:endParaRPr lang="en-US" sz="1250" dirty="0"/>
+          </a:p>
+        </p:txBody>
+      </p:sp>
+      <p:sp>
+        <p:nvSpPr>
+          <p:cNvPr id="14" name="Shape 12"/>
+          <p:cNvSpPr/>
+          <p:nvPr/>
+        </p:nvSpPr>
+        <p:spPr>
+          <a:xfrm>
+            <a:off x="7909560" y="3520440"/>
+            <a:ext cx="3154680" cy="1737360"/>
+          </a:xfrm>
+          <a:prstGeom prst="roundRect">
+            <a:avLst>
+              <a:gd name="adj" fmla="val 6316"/>
+            </a:avLst>
+          </a:prstGeom>
+          <a:solidFill>
+            <a:srgbClr val="EAF6F8"/>
+          </a:solidFill>
+          <a:ln w="12700">
+            <a:solidFill>
+              <a:srgbClr val="B9D7E6"/>
+            </a:solidFill>
+            <a:prstDash val="solid"/>
+          </a:ln>
+        </p:spPr>
+      </p:sp>
+      <p:sp>
+        <p:nvSpPr>
+          <p:cNvPr id="15" name="Text 13"/>
+          <p:cNvSpPr/>
+          <p:nvPr/>
+        </p:nvSpPr>
+        <p:spPr>
+          <a:xfrm>
+            <a:off x="8074152" y="3666744"/>
+            <a:ext cx="2825496" cy="201168"/>
+          </a:xfrm>
+          <a:prstGeom prst="rect">
+            <a:avLst/>
+          </a:prstGeom>
+          <a:noFill/>
+          <a:ln/>
+        </p:spPr>
+        <p:txBody>
+          <a:bodyPr wrap="square" lIns="0" tIns="0" rIns="0" bIns="0" rtlCol="0" anchor="ctr"/>
+          <a:lstStyle/>
+          <a:p>
+            <a:pPr indent="0" marL="0">
+              <a:buNone/>
+            </a:pPr>
+            <a:r>
+              <a:rPr lang="en-US" sz="950" b="1" dirty="0">
+                <a:solidFill>
+                  <a:srgbClr val="0068B7"/>
+                </a:solidFill>
+                <a:latin typeface="Aptos" pitchFamily="34" charset="0"/>
+                <a:ea typeface="Aptos" pitchFamily="34" charset="-122"/>
+                <a:cs typeface="Aptos" pitchFamily="34" charset="-120"/>
+              </a:rPr>
+              <a:t>Use this for</a:t>
+            </a:r>
+            <a:endParaRPr lang="en-US" sz="950" dirty="0"/>
+          </a:p>
+        </p:txBody>
+      </p:sp>
+      <p:sp>
+        <p:nvSpPr>
+          <p:cNvPr id="16" name="Text 14"/>
+          <p:cNvSpPr/>
+          <p:nvPr/>
+        </p:nvSpPr>
+        <p:spPr>
+          <a:xfrm>
+            <a:off x="8074152" y="3959352"/>
+            <a:ext cx="2825496" cy="1170432"/>
+          </a:xfrm>
+          <a:prstGeom prst="rect">
+            <a:avLst/>
+          </a:prstGeom>
+          <a:noFill/>
+          <a:ln/>
+        </p:spPr>
+        <p:txBody>
+          <a:bodyPr wrap="square" lIns="0" tIns="0" rIns="0" bIns="0" rtlCol="0" anchor="t">
+            <a:normAutofit/>
+          </a:bodyPr>
+          <a:lstStyle/>
+          <a:p>
+            <a:pPr indent="0" marL="0">
+              <a:buNone/>
+            </a:pPr>
+            <a:r>
+              <a:rPr lang="en-US" sz="1250" dirty="0">
+                <a:solidFill>
+                  <a:srgbClr val="17364A"/>
+                </a:solidFill>
+                <a:latin typeface="Aptos" pitchFamily="34" charset="0"/>
+                <a:ea typeface="Aptos" pitchFamily="34" charset="-122"/>
+                <a:cs typeface="Aptos" pitchFamily="34" charset="-120"/>
+              </a:rPr>
+              <a:t>Connect the concept to public health decisions, safeguards, documentation, or implementation work.</a:t>
+            </a:r>
+            <a:endParaRPr lang="en-US" sz="1250" dirty="0"/>
           </a:p>
         </p:txBody>
       </p:sp>
@@ -3124,7 +3654,32 @@
       </p:sp>
       <p:sp>
         <p:nvSpPr>
-          <p:cNvPr id="3" name="Text 1"/>
+          <p:cNvPr id="3" name="Shape 1"/>
+          <p:cNvSpPr/>
+          <p:nvPr/>
+        </p:nvSpPr>
+        <p:spPr>
+          <a:xfrm>
+            <a:off x="0" y="164592"/>
+            <a:ext cx="146304" cy="6693408"/>
+          </a:xfrm>
+          <a:prstGeom prst="rect">
+            <a:avLst/>
+          </a:prstGeom>
+          <a:solidFill>
+            <a:srgbClr val="2F8A28"/>
+          </a:solidFill>
+          <a:ln w="12700">
+            <a:solidFill>
+              <a:srgbClr val="2F8A28"/>
+            </a:solidFill>
+            <a:prstDash val="solid"/>
+          </a:ln>
+        </p:spPr>
+      </p:sp>
+      <p:sp>
+        <p:nvSpPr>
+          <p:cNvPr id="4" name="Text 2"/>
           <p:cNvSpPr/>
           <p:nvPr/>
         </p:nvSpPr>
@@ -3163,7 +3718,7 @@
       </p:sp>
       <p:sp>
         <p:nvSpPr>
-          <p:cNvPr id="4" name="Text 2"/>
+          <p:cNvPr id="5" name="Text 3"/>
           <p:cNvSpPr/>
           <p:nvPr/>
         </p:nvSpPr>
@@ -3202,7 +3757,7 @@
       </p:sp>
       <p:sp>
         <p:nvSpPr>
-          <p:cNvPr id="5" name="Text 3"/>
+          <p:cNvPr id="6" name="Text 4"/>
           <p:cNvSpPr/>
           <p:nvPr/>
         </p:nvSpPr>
@@ -3241,13 +3796,77 @@
       </p:sp>
       <p:sp>
         <p:nvSpPr>
-          <p:cNvPr id="6" name="Text 4"/>
+          <p:cNvPr id="7" name="Shape 5"/>
           <p:cNvSpPr/>
           <p:nvPr/>
         </p:nvSpPr>
         <p:spPr>
           <a:xfrm>
             <a:off x="640080" y="658368"/>
+            <a:ext cx="420624" cy="420624"/>
+          </a:xfrm>
+          <a:prstGeom prst="ellipse">
+            <a:avLst/>
+          </a:prstGeom>
+          <a:solidFill>
+            <a:srgbClr val="0068B7"/>
+          </a:solidFill>
+          <a:ln w="12700">
+            <a:solidFill>
+              <a:srgbClr val="0068B7"/>
+            </a:solidFill>
+            <a:prstDash val="solid"/>
+          </a:ln>
+        </p:spPr>
+      </p:sp>
+      <p:sp>
+        <p:nvSpPr>
+          <p:cNvPr id="8" name="Text 6"/>
+          <p:cNvSpPr/>
+          <p:nvPr/>
+        </p:nvSpPr>
+        <p:spPr>
+          <a:xfrm>
+            <a:off x="640080" y="731520"/>
+            <a:ext cx="420624" cy="164592"/>
+          </a:xfrm>
+          <a:prstGeom prst="rect">
+            <a:avLst/>
+          </a:prstGeom>
+          <a:noFill/>
+          <a:ln/>
+        </p:spPr>
+        <p:txBody>
+          <a:bodyPr wrap="square" lIns="0" tIns="0" rIns="0" bIns="0" rtlCol="0" anchor="ctr"/>
+          <a:lstStyle/>
+          <a:p>
+            <a:pPr algn="ctr" indent="0" marL="0">
+              <a:buNone/>
+            </a:pPr>
+            <a:r>
+              <a:rPr lang="en-US" sz="1100" b="1" dirty="0">
+                <a:solidFill>
+                  <a:srgbClr val="FFFFFF"/>
+                </a:solidFill>
+                <a:latin typeface="Aptos" pitchFamily="34" charset="0"/>
+                <a:ea typeface="Aptos" pitchFamily="34" charset="-122"/>
+                <a:cs typeface="Aptos" pitchFamily="34" charset="-120"/>
+              </a:rPr>
+              <a:t>6</a:t>
+            </a:r>
+            <a:endParaRPr lang="en-US" sz="1100" dirty="0"/>
+          </a:p>
+        </p:txBody>
+      </p:sp>
+      <p:sp>
+        <p:nvSpPr>
+          <p:cNvPr id="9" name="Text 7"/>
+          <p:cNvSpPr/>
+          <p:nvPr/>
+        </p:nvSpPr>
+        <p:spPr>
+          <a:xfrm>
+            <a:off x="640080" y="621792"/>
             <a:ext cx="10881360" cy="566928"/>
           </a:xfrm>
           <a:prstGeom prst="rect">
@@ -3274,7 +3893,7 @@
                 <a:ea typeface="Aptos Display" pitchFamily="34" charset="-122"/>
                 <a:cs typeface="Aptos Display" pitchFamily="34" charset="-120"/>
               </a:rPr>
-              <a:t>Risks, Failure Modes, and Guardrails Continued</a:t>
+              <a:t>Technical Deep Dive</a:t>
             </a:r>
             <a:endParaRPr lang="en-US" sz="2700" dirty="0"/>
           </a:p>
@@ -3282,32 +3901,178 @@
       </p:sp>
       <p:sp>
         <p:nvSpPr>
-          <p:cNvPr id="7" name="Text 5"/>
-          <p:cNvSpPr/>
-          <p:nvPr/>
-        </p:nvSpPr>
-        <p:spPr>
-          <a:xfrm>
-            <a:off x="822960" y="1325880"/>
-            <a:ext cx="10378440" cy="4800600"/>
-          </a:xfrm>
-          <a:prstGeom prst="rect">
-            <a:avLst/>
-          </a:prstGeom>
-          <a:noFill/>
-          <a:ln/>
-        </p:spPr>
-        <p:txBody>
-          <a:bodyPr wrap="square" lIns="1016" tIns="1016" rIns="1016" bIns="1016" rtlCol="0" anchor="t">
+          <p:cNvPr id="10" name="Text 8"/>
+          <p:cNvSpPr/>
+          <p:nvPr/>
+        </p:nvSpPr>
+        <p:spPr>
+          <a:xfrm>
+            <a:off x="868680" y="1417320"/>
+            <a:ext cx="6675120" cy="4434840"/>
+          </a:xfrm>
+          <a:prstGeom prst="rect">
+            <a:avLst/>
+          </a:prstGeom>
+          <a:noFill/>
+          <a:ln/>
+        </p:spPr>
+        <p:txBody>
+          <a:bodyPr wrap="square" lIns="635" tIns="635" rIns="635" bIns="635" rtlCol="0" anchor="t">
             <a:normAutofit/>
           </a:bodyPr>
           <a:lstStyle/>
           <a:p>
+            <a:r>
+              <a:rPr lang="en-US" sz="1700" dirty="0">
+                <a:solidFill>
+                  <a:srgbClr val="17364A"/>
+                </a:solidFill>
+                <a:latin typeface="Aptos" pitchFamily="34" charset="0"/>
+                <a:ea typeface="Aptos" pitchFamily="34" charset="-122"/>
+                <a:cs typeface="Aptos" pitchFamily="34" charset="-120"/>
+              </a:rPr>
+              <a:t>Pipeline design begins with the source and ends with the user-facing decision or output.</a:t>
+            </a:r>
+            <a:endParaRPr lang="en-US" sz="1700" dirty="0"/>
+          </a:p>
+          <a:p>
+            <a:r>
+              <a:rPr lang="en-US" sz="1700" dirty="0">
+                <a:solidFill>
+                  <a:srgbClr val="17364A"/>
+                </a:solidFill>
+                <a:latin typeface="Aptos" pitchFamily="34" charset="0"/>
+                <a:ea typeface="Aptos" pitchFamily="34" charset="-122"/>
+                <a:cs typeface="Aptos" pitchFamily="34" charset="-120"/>
+              </a:rPr>
+              <a:t>In between, data may be received, staged, validated, transformed, standardized, linked, loaded, indexed, analyzed, and.</a:t>
+            </a:r>
+            <a:endParaRPr lang="en-US" sz="1700" dirty="0"/>
+          </a:p>
+          <a:p>
+            <a:r>
+              <a:rPr lang="en-US" sz="1700" dirty="0">
+                <a:solidFill>
+                  <a:srgbClr val="17364A"/>
+                </a:solidFill>
+                <a:latin typeface="Aptos" pitchFamily="34" charset="0"/>
+                <a:ea typeface="Aptos" pitchFamily="34" charset="-122"/>
+                <a:cs typeface="Aptos" pitchFamily="34" charset="-120"/>
+              </a:rPr>
+              <a:t>Each step should have an owner, a purpose, a quality check, and a documented failure process.</a:t>
+            </a:r>
+            <a:endParaRPr lang="en-US" sz="1700" dirty="0"/>
+          </a:p>
+          <a:p>
+            <a:r>
+              <a:rPr lang="en-US" sz="1700" dirty="0">
+                <a:solidFill>
+                  <a:srgbClr val="17364A"/>
+                </a:solidFill>
+                <a:latin typeface="Aptos" pitchFamily="34" charset="0"/>
+                <a:ea typeface="Aptos" pitchFamily="34" charset="-122"/>
+                <a:cs typeface="Aptos" pitchFamily="34" charset="-120"/>
+              </a:rPr>
+              <a:t>Batch pipelines move data on a schedule, such as nightly files or weekly extracts.</a:t>
+            </a:r>
+            <a:endParaRPr lang="en-US" sz="1700" dirty="0"/>
+          </a:p>
+        </p:txBody>
+      </p:sp>
+      <p:sp>
+        <p:nvSpPr>
+          <p:cNvPr id="11" name="Shape 9"/>
+          <p:cNvSpPr/>
+          <p:nvPr/>
+        </p:nvSpPr>
+        <p:spPr>
+          <a:xfrm>
+            <a:off x="7909560" y="1417320"/>
+            <a:ext cx="3154680" cy="1828800"/>
+          </a:xfrm>
+          <a:prstGeom prst="roundRect">
+            <a:avLst>
+              <a:gd name="adj" fmla="val 6000"/>
+            </a:avLst>
+          </a:prstGeom>
+          <a:solidFill>
+            <a:srgbClr val="EEF8ED"/>
+          </a:solidFill>
+          <a:ln w="12700">
+            <a:solidFill>
+              <a:srgbClr val="B9D7E6"/>
+            </a:solidFill>
+            <a:prstDash val="solid"/>
+          </a:ln>
+        </p:spPr>
+      </p:sp>
+      <p:sp>
+        <p:nvSpPr>
+          <p:cNvPr id="12" name="Text 10"/>
+          <p:cNvSpPr/>
+          <p:nvPr/>
+        </p:nvSpPr>
+        <p:spPr>
+          <a:xfrm>
+            <a:off x="8074152" y="1563624"/>
+            <a:ext cx="2825496" cy="201168"/>
+          </a:xfrm>
+          <a:prstGeom prst="rect">
+            <a:avLst/>
+          </a:prstGeom>
+          <a:noFill/>
+          <a:ln/>
+        </p:spPr>
+        <p:txBody>
+          <a:bodyPr wrap="square" lIns="0" tIns="0" rIns="0" bIns="0" rtlCol="0" anchor="ctr"/>
+          <a:lstStyle/>
+          <a:p>
             <a:pPr indent="0" marL="0">
               <a:buNone/>
             </a:pPr>
             <a:r>
-              <a:rPr lang="en-US" sz="1420" dirty="0">
+              <a:rPr lang="en-US" sz="950" b="1" dirty="0">
+                <a:solidFill>
+                  <a:srgbClr val="0068B7"/>
+                </a:solidFill>
+                <a:latin typeface="Aptos" pitchFamily="34" charset="0"/>
+                <a:ea typeface="Aptos" pitchFamily="34" charset="-122"/>
+                <a:cs typeface="Aptos" pitchFamily="34" charset="-120"/>
+              </a:rPr>
+              <a:t>Key idea</a:t>
+            </a:r>
+            <a:endParaRPr lang="en-US" sz="950" dirty="0"/>
+          </a:p>
+        </p:txBody>
+      </p:sp>
+      <p:sp>
+        <p:nvSpPr>
+          <p:cNvPr id="13" name="Text 11"/>
+          <p:cNvSpPr/>
+          <p:nvPr/>
+        </p:nvSpPr>
+        <p:spPr>
+          <a:xfrm>
+            <a:off x="8074152" y="1856232"/>
+            <a:ext cx="2825496" cy="1261872"/>
+          </a:xfrm>
+          <a:prstGeom prst="rect">
+            <a:avLst/>
+          </a:prstGeom>
+          <a:noFill/>
+          <a:ln/>
+        </p:spPr>
+        <p:txBody>
+          <a:bodyPr wrap="square" lIns="0" tIns="0" rIns="0" bIns="0" rtlCol="0" anchor="t">
+            <a:normAutofit/>
+          </a:bodyPr>
+          <a:lstStyle/>
+          <a:p>
+            <a:pPr indent="0" marL="0">
+              <a:buNone/>
+            </a:pPr>
+            <a:r>
+              <a:rPr lang="en-US" sz="1250" dirty="0">
                 <a:solidFill>
                   <a:srgbClr val="17364A"/>
                 </a:solidFill>
@@ -3315,9 +4080,116 @@
                 <a:ea typeface="Aptos" pitchFamily="34" charset="-122"/>
                 <a:cs typeface="Aptos" pitchFamily="34" charset="-120"/>
               </a:rPr>
-              <a:t>Weak lineage. If transformations are not documented, staff may not be able to explain or correct AI errors. Guardrails include lineage documentation, version control, and audit trails.</a:t>
-            </a:r>
-            <a:endParaRPr lang="en-US" sz="1420" dirty="0"/>
+              <a:t>Pipeline design begins with the source and ends with the user-facing decision or output.</a:t>
+            </a:r>
+            <a:endParaRPr lang="en-US" sz="1250" dirty="0"/>
+          </a:p>
+        </p:txBody>
+      </p:sp>
+      <p:sp>
+        <p:nvSpPr>
+          <p:cNvPr id="14" name="Shape 12"/>
+          <p:cNvSpPr/>
+          <p:nvPr/>
+        </p:nvSpPr>
+        <p:spPr>
+          <a:xfrm>
+            <a:off x="7909560" y="3520440"/>
+            <a:ext cx="3154680" cy="1737360"/>
+          </a:xfrm>
+          <a:prstGeom prst="roundRect">
+            <a:avLst>
+              <a:gd name="adj" fmla="val 6316"/>
+            </a:avLst>
+          </a:prstGeom>
+          <a:solidFill>
+            <a:srgbClr val="EAF6F8"/>
+          </a:solidFill>
+          <a:ln w="12700">
+            <a:solidFill>
+              <a:srgbClr val="B9D7E6"/>
+            </a:solidFill>
+            <a:prstDash val="solid"/>
+          </a:ln>
+        </p:spPr>
+      </p:sp>
+      <p:sp>
+        <p:nvSpPr>
+          <p:cNvPr id="15" name="Text 13"/>
+          <p:cNvSpPr/>
+          <p:nvPr/>
+        </p:nvSpPr>
+        <p:spPr>
+          <a:xfrm>
+            <a:off x="8074152" y="3666744"/>
+            <a:ext cx="2825496" cy="201168"/>
+          </a:xfrm>
+          <a:prstGeom prst="rect">
+            <a:avLst/>
+          </a:prstGeom>
+          <a:noFill/>
+          <a:ln/>
+        </p:spPr>
+        <p:txBody>
+          <a:bodyPr wrap="square" lIns="0" tIns="0" rIns="0" bIns="0" rtlCol="0" anchor="ctr"/>
+          <a:lstStyle/>
+          <a:p>
+            <a:pPr indent="0" marL="0">
+              <a:buNone/>
+            </a:pPr>
+            <a:r>
+              <a:rPr lang="en-US" sz="950" b="1" dirty="0">
+                <a:solidFill>
+                  <a:srgbClr val="0068B7"/>
+                </a:solidFill>
+                <a:latin typeface="Aptos" pitchFamily="34" charset="0"/>
+                <a:ea typeface="Aptos" pitchFamily="34" charset="-122"/>
+                <a:cs typeface="Aptos" pitchFamily="34" charset="-120"/>
+              </a:rPr>
+              <a:t>Use this for</a:t>
+            </a:r>
+            <a:endParaRPr lang="en-US" sz="950" dirty="0"/>
+          </a:p>
+        </p:txBody>
+      </p:sp>
+      <p:sp>
+        <p:nvSpPr>
+          <p:cNvPr id="16" name="Text 14"/>
+          <p:cNvSpPr/>
+          <p:nvPr/>
+        </p:nvSpPr>
+        <p:spPr>
+          <a:xfrm>
+            <a:off x="8074152" y="3959352"/>
+            <a:ext cx="2825496" cy="1170432"/>
+          </a:xfrm>
+          <a:prstGeom prst="rect">
+            <a:avLst/>
+          </a:prstGeom>
+          <a:noFill/>
+          <a:ln/>
+        </p:spPr>
+        <p:txBody>
+          <a:bodyPr wrap="square" lIns="0" tIns="0" rIns="0" bIns="0" rtlCol="0" anchor="t">
+            <a:normAutofit/>
+          </a:bodyPr>
+          <a:lstStyle/>
+          <a:p>
+            <a:pPr indent="0" marL="0">
+              <a:buNone/>
+            </a:pPr>
+            <a:r>
+              <a:rPr lang="en-US" sz="1250" dirty="0">
+                <a:solidFill>
+                  <a:srgbClr val="17364A"/>
+                </a:solidFill>
+                <a:latin typeface="Aptos" pitchFamily="34" charset="0"/>
+                <a:ea typeface="Aptos" pitchFamily="34" charset="-122"/>
+                <a:cs typeface="Aptos" pitchFamily="34" charset="-120"/>
+              </a:rPr>
+              <a:t>Connect the concept to public health decisions, safeguards, documentation, or implementation work.</a:t>
+            </a:r>
+            <a:endParaRPr lang="en-US" sz="1250" dirty="0"/>
           </a:p>
         </p:txBody>
       </p:sp>
@@ -3380,7 +4252,32 @@
       </p:sp>
       <p:sp>
         <p:nvSpPr>
-          <p:cNvPr id="3" name="Text 1"/>
+          <p:cNvPr id="3" name="Shape 1"/>
+          <p:cNvSpPr/>
+          <p:nvPr/>
+        </p:nvSpPr>
+        <p:spPr>
+          <a:xfrm>
+            <a:off x="0" y="164592"/>
+            <a:ext cx="146304" cy="6693408"/>
+          </a:xfrm>
+          <a:prstGeom prst="rect">
+            <a:avLst/>
+          </a:prstGeom>
+          <a:solidFill>
+            <a:srgbClr val="2F8A28"/>
+          </a:solidFill>
+          <a:ln w="12700">
+            <a:solidFill>
+              <a:srgbClr val="2F8A28"/>
+            </a:solidFill>
+            <a:prstDash val="solid"/>
+          </a:ln>
+        </p:spPr>
+      </p:sp>
+      <p:sp>
+        <p:nvSpPr>
+          <p:cNvPr id="4" name="Text 2"/>
           <p:cNvSpPr/>
           <p:nvPr/>
         </p:nvSpPr>
@@ -3419,7 +4316,7 @@
       </p:sp>
       <p:sp>
         <p:nvSpPr>
-          <p:cNvPr id="4" name="Text 2"/>
+          <p:cNvPr id="5" name="Text 3"/>
           <p:cNvSpPr/>
           <p:nvPr/>
         </p:nvSpPr>
@@ -3458,7 +4355,7 @@
       </p:sp>
       <p:sp>
         <p:nvSpPr>
-          <p:cNvPr id="5" name="Text 3"/>
+          <p:cNvPr id="6" name="Text 4"/>
           <p:cNvSpPr/>
           <p:nvPr/>
         </p:nvSpPr>
@@ -3497,13 +4394,77 @@
       </p:sp>
       <p:sp>
         <p:nvSpPr>
-          <p:cNvPr id="6" name="Text 4"/>
+          <p:cNvPr id="7" name="Shape 5"/>
           <p:cNvSpPr/>
           <p:nvPr/>
         </p:nvSpPr>
         <p:spPr>
           <a:xfrm>
             <a:off x="640080" y="658368"/>
+            <a:ext cx="420624" cy="420624"/>
+          </a:xfrm>
+          <a:prstGeom prst="ellipse">
+            <a:avLst/>
+          </a:prstGeom>
+          <a:solidFill>
+            <a:srgbClr val="0068B7"/>
+          </a:solidFill>
+          <a:ln w="12700">
+            <a:solidFill>
+              <a:srgbClr val="0068B7"/>
+            </a:solidFill>
+            <a:prstDash val="solid"/>
+          </a:ln>
+        </p:spPr>
+      </p:sp>
+      <p:sp>
+        <p:nvSpPr>
+          <p:cNvPr id="8" name="Text 6"/>
+          <p:cNvSpPr/>
+          <p:nvPr/>
+        </p:nvSpPr>
+        <p:spPr>
+          <a:xfrm>
+            <a:off x="640080" y="731520"/>
+            <a:ext cx="420624" cy="164592"/>
+          </a:xfrm>
+          <a:prstGeom prst="rect">
+            <a:avLst/>
+          </a:prstGeom>
+          <a:noFill/>
+          <a:ln/>
+        </p:spPr>
+        <p:txBody>
+          <a:bodyPr wrap="square" lIns="0" tIns="0" rIns="0" bIns="0" rtlCol="0" anchor="ctr"/>
+          <a:lstStyle/>
+          <a:p>
+            <a:pPr algn="ctr" indent="0" marL="0">
+              <a:buNone/>
+            </a:pPr>
+            <a:r>
+              <a:rPr lang="en-US" sz="1100" b="1" dirty="0">
+                <a:solidFill>
+                  <a:srgbClr val="FFFFFF"/>
+                </a:solidFill>
+                <a:latin typeface="Aptos" pitchFamily="34" charset="0"/>
+                <a:ea typeface="Aptos" pitchFamily="34" charset="-122"/>
+                <a:cs typeface="Aptos" pitchFamily="34" charset="-120"/>
+              </a:rPr>
+              <a:t>7</a:t>
+            </a:r>
+            <a:endParaRPr lang="en-US" sz="1100" dirty="0"/>
+          </a:p>
+        </p:txBody>
+      </p:sp>
+      <p:sp>
+        <p:nvSpPr>
+          <p:cNvPr id="9" name="Text 7"/>
+          <p:cNvSpPr/>
+          <p:nvPr/>
+        </p:nvSpPr>
+        <p:spPr>
+          <a:xfrm>
+            <a:off x="640080" y="621792"/>
             <a:ext cx="10881360" cy="566928"/>
           </a:xfrm>
           <a:prstGeom prst="rect">
@@ -3530,7 +4491,7 @@
                 <a:ea typeface="Aptos Display" pitchFamily="34" charset="-122"/>
                 <a:cs typeface="Aptos Display" pitchFamily="34" charset="-120"/>
               </a:rPr>
-              <a:t>Application to AI-Supported Workflows</a:t>
+              <a:t>Risks, Failure Modes, and Guardrails</a:t>
             </a:r>
             <a:endParaRPr lang="en-US" sz="2700" dirty="0"/>
           </a:p>
@@ -3538,32 +4499,178 @@
       </p:sp>
       <p:sp>
         <p:nvSpPr>
-          <p:cNvPr id="7" name="Text 5"/>
-          <p:cNvSpPr/>
-          <p:nvPr/>
-        </p:nvSpPr>
-        <p:spPr>
-          <a:xfrm>
-            <a:off x="822960" y="1325880"/>
-            <a:ext cx="10378440" cy="4800600"/>
-          </a:xfrm>
-          <a:prstGeom prst="rect">
-            <a:avLst/>
-          </a:prstGeom>
-          <a:noFill/>
-          <a:ln/>
-        </p:spPr>
-        <p:txBody>
-          <a:bodyPr wrap="square" lIns="1016" tIns="1016" rIns="1016" bIns="1016" rtlCol="0" anchor="t">
+          <p:cNvPr id="10" name="Text 8"/>
+          <p:cNvSpPr/>
+          <p:nvPr/>
+        </p:nvSpPr>
+        <p:spPr>
+          <a:xfrm>
+            <a:off x="868680" y="1417320"/>
+            <a:ext cx="6675120" cy="4434840"/>
+          </a:xfrm>
+          <a:prstGeom prst="rect">
+            <a:avLst/>
+          </a:prstGeom>
+          <a:noFill/>
+          <a:ln/>
+        </p:spPr>
+        <p:txBody>
+          <a:bodyPr wrap="square" lIns="635" tIns="635" rIns="635" bIns="635" rtlCol="0" anchor="t">
             <a:normAutofit/>
           </a:bodyPr>
           <a:lstStyle/>
           <a:p>
+            <a:r>
+              <a:rPr lang="en-US" sz="1700" dirty="0">
+                <a:solidFill>
+                  <a:srgbClr val="17364A"/>
+                </a:solidFill>
+                <a:latin typeface="Aptos" pitchFamily="34" charset="0"/>
+                <a:ea typeface="Aptos" pitchFamily="34" charset="-122"/>
+                <a:cs typeface="Aptos" pitchFamily="34" charset="-120"/>
+              </a:rPr>
+              <a:t>Silent feed failure.</a:t>
+            </a:r>
+            <a:endParaRPr lang="en-US" sz="1700" dirty="0"/>
+          </a:p>
+          <a:p>
+            <a:r>
+              <a:rPr lang="en-US" sz="1700" dirty="0">
+                <a:solidFill>
+                  <a:srgbClr val="17364A"/>
+                </a:solidFill>
+                <a:latin typeface="Aptos" pitchFamily="34" charset="0"/>
+                <a:ea typeface="Aptos" pitchFamily="34" charset="-122"/>
+                <a:cs typeface="Aptos" pitchFamily="34" charset="-120"/>
+              </a:rPr>
+              <a:t>A data feed can stop or change without visible failure in the AI interface.</a:t>
+            </a:r>
+            <a:endParaRPr lang="en-US" sz="1700" dirty="0"/>
+          </a:p>
+          <a:p>
+            <a:r>
+              <a:rPr lang="en-US" sz="1700" dirty="0">
+                <a:solidFill>
+                  <a:srgbClr val="17364A"/>
+                </a:solidFill>
+                <a:latin typeface="Aptos" pitchFamily="34" charset="0"/>
+                <a:ea typeface="Aptos" pitchFamily="34" charset="-122"/>
+                <a:cs typeface="Aptos" pitchFamily="34" charset="-120"/>
+              </a:rPr>
+              <a:t>Guardrails include automated feed monitoring, expected volume thresholds, error queues, and notification procedures.</a:t>
+            </a:r>
+            <a:endParaRPr lang="en-US" sz="1700" dirty="0"/>
+          </a:p>
+          <a:p>
+            <a:r>
+              <a:rPr lang="en-US" sz="1700" dirty="0">
+                <a:solidFill>
+                  <a:srgbClr val="17364A"/>
+                </a:solidFill>
+                <a:latin typeface="Aptos" pitchFamily="34" charset="0"/>
+                <a:ea typeface="Aptos" pitchFamily="34" charset="-122"/>
+                <a:cs typeface="Aptos" pitchFamily="34" charset="-120"/>
+              </a:rPr>
+              <a:t>Schema and terminology changes.</a:t>
+            </a:r>
+            <a:endParaRPr lang="en-US" sz="1700" dirty="0"/>
+          </a:p>
+        </p:txBody>
+      </p:sp>
+      <p:sp>
+        <p:nvSpPr>
+          <p:cNvPr id="11" name="Shape 9"/>
+          <p:cNvSpPr/>
+          <p:nvPr/>
+        </p:nvSpPr>
+        <p:spPr>
+          <a:xfrm>
+            <a:off x="7909560" y="1417320"/>
+            <a:ext cx="3154680" cy="1828800"/>
+          </a:xfrm>
+          <a:prstGeom prst="roundRect">
+            <a:avLst>
+              <a:gd name="adj" fmla="val 6000"/>
+            </a:avLst>
+          </a:prstGeom>
+          <a:solidFill>
+            <a:srgbClr val="EEF8ED"/>
+          </a:solidFill>
+          <a:ln w="12700">
+            <a:solidFill>
+              <a:srgbClr val="B9D7E6"/>
+            </a:solidFill>
+            <a:prstDash val="solid"/>
+          </a:ln>
+        </p:spPr>
+      </p:sp>
+      <p:sp>
+        <p:nvSpPr>
+          <p:cNvPr id="12" name="Text 10"/>
+          <p:cNvSpPr/>
+          <p:nvPr/>
+        </p:nvSpPr>
+        <p:spPr>
+          <a:xfrm>
+            <a:off x="8074152" y="1563624"/>
+            <a:ext cx="2825496" cy="201168"/>
+          </a:xfrm>
+          <a:prstGeom prst="rect">
+            <a:avLst/>
+          </a:prstGeom>
+          <a:noFill/>
+          <a:ln/>
+        </p:spPr>
+        <p:txBody>
+          <a:bodyPr wrap="square" lIns="0" tIns="0" rIns="0" bIns="0" rtlCol="0" anchor="ctr"/>
+          <a:lstStyle/>
+          <a:p>
             <a:pPr indent="0" marL="0">
               <a:buNone/>
             </a:pPr>
             <a:r>
-              <a:rPr lang="en-US" sz="1420" dirty="0">
+              <a:rPr lang="en-US" sz="950" b="1" dirty="0">
+                <a:solidFill>
+                  <a:srgbClr val="0068B7"/>
+                </a:solidFill>
+                <a:latin typeface="Aptos" pitchFamily="34" charset="0"/>
+                <a:ea typeface="Aptos" pitchFamily="34" charset="-122"/>
+                <a:cs typeface="Aptos" pitchFamily="34" charset="-120"/>
+              </a:rPr>
+              <a:t>Key idea</a:t>
+            </a:r>
+            <a:endParaRPr lang="en-US" sz="950" dirty="0"/>
+          </a:p>
+        </p:txBody>
+      </p:sp>
+      <p:sp>
+        <p:nvSpPr>
+          <p:cNvPr id="13" name="Text 11"/>
+          <p:cNvSpPr/>
+          <p:nvPr/>
+        </p:nvSpPr>
+        <p:spPr>
+          <a:xfrm>
+            <a:off x="8074152" y="1856232"/>
+            <a:ext cx="2825496" cy="1261872"/>
+          </a:xfrm>
+          <a:prstGeom prst="rect">
+            <a:avLst/>
+          </a:prstGeom>
+          <a:noFill/>
+          <a:ln/>
+        </p:spPr>
+        <p:txBody>
+          <a:bodyPr wrap="square" lIns="0" tIns="0" rIns="0" bIns="0" rtlCol="0" anchor="t">
+            <a:normAutofit/>
+          </a:bodyPr>
+          <a:lstStyle/>
+          <a:p>
+            <a:pPr indent="0" marL="0">
+              <a:buNone/>
+            </a:pPr>
+            <a:r>
+              <a:rPr lang="en-US" sz="1250" dirty="0">
                 <a:solidFill>
                   <a:srgbClr val="17364A"/>
                 </a:solidFill>
@@ -3571,9 +4678,116 @@
                 <a:ea typeface="Aptos" pitchFamily="34" charset="-122"/>
                 <a:cs typeface="Aptos" pitchFamily="34" charset="-120"/>
               </a:rPr>
-              <a:t>Generative AI may use pipeline outputs to summarize records, but the summary should indicate source freshness and preserve traceability. Predictive models may rely on engineered features created by a pipeline, so the feature pipeline must be monitored for drift and missingness. RAG systems depend on document ingestion pipelines, which must track document source, version, permissions, and refresh schedules. Agentic workflows may depend on event-driven pipelines, making failure handling and approval points especially important.</a:t>
-            </a:r>
-            <a:endParaRPr lang="en-US" sz="1420" dirty="0"/>
+              <a:t>Silent feed failure.</a:t>
+            </a:r>
+            <a:endParaRPr lang="en-US" sz="1250" dirty="0"/>
+          </a:p>
+        </p:txBody>
+      </p:sp>
+      <p:sp>
+        <p:nvSpPr>
+          <p:cNvPr id="14" name="Shape 12"/>
+          <p:cNvSpPr/>
+          <p:nvPr/>
+        </p:nvSpPr>
+        <p:spPr>
+          <a:xfrm>
+            <a:off x="7909560" y="3520440"/>
+            <a:ext cx="3154680" cy="1737360"/>
+          </a:xfrm>
+          <a:prstGeom prst="roundRect">
+            <a:avLst>
+              <a:gd name="adj" fmla="val 6316"/>
+            </a:avLst>
+          </a:prstGeom>
+          <a:solidFill>
+            <a:srgbClr val="EAF6F8"/>
+          </a:solidFill>
+          <a:ln w="12700">
+            <a:solidFill>
+              <a:srgbClr val="B9D7E6"/>
+            </a:solidFill>
+            <a:prstDash val="solid"/>
+          </a:ln>
+        </p:spPr>
+      </p:sp>
+      <p:sp>
+        <p:nvSpPr>
+          <p:cNvPr id="15" name="Text 13"/>
+          <p:cNvSpPr/>
+          <p:nvPr/>
+        </p:nvSpPr>
+        <p:spPr>
+          <a:xfrm>
+            <a:off x="8074152" y="3666744"/>
+            <a:ext cx="2825496" cy="201168"/>
+          </a:xfrm>
+          <a:prstGeom prst="rect">
+            <a:avLst/>
+          </a:prstGeom>
+          <a:noFill/>
+          <a:ln/>
+        </p:spPr>
+        <p:txBody>
+          <a:bodyPr wrap="square" lIns="0" tIns="0" rIns="0" bIns="0" rtlCol="0" anchor="ctr"/>
+          <a:lstStyle/>
+          <a:p>
+            <a:pPr indent="0" marL="0">
+              <a:buNone/>
+            </a:pPr>
+            <a:r>
+              <a:rPr lang="en-US" sz="950" b="1" dirty="0">
+                <a:solidFill>
+                  <a:srgbClr val="0068B7"/>
+                </a:solidFill>
+                <a:latin typeface="Aptos" pitchFamily="34" charset="0"/>
+                <a:ea typeface="Aptos" pitchFamily="34" charset="-122"/>
+                <a:cs typeface="Aptos" pitchFamily="34" charset="-120"/>
+              </a:rPr>
+              <a:t>Use this for</a:t>
+            </a:r>
+            <a:endParaRPr lang="en-US" sz="950" dirty="0"/>
+          </a:p>
+        </p:txBody>
+      </p:sp>
+      <p:sp>
+        <p:nvSpPr>
+          <p:cNvPr id="16" name="Text 14"/>
+          <p:cNvSpPr/>
+          <p:nvPr/>
+        </p:nvSpPr>
+        <p:spPr>
+          <a:xfrm>
+            <a:off x="8074152" y="3959352"/>
+            <a:ext cx="2825496" cy="1170432"/>
+          </a:xfrm>
+          <a:prstGeom prst="rect">
+            <a:avLst/>
+          </a:prstGeom>
+          <a:noFill/>
+          <a:ln/>
+        </p:spPr>
+        <p:txBody>
+          <a:bodyPr wrap="square" lIns="0" tIns="0" rIns="0" bIns="0" rtlCol="0" anchor="t">
+            <a:normAutofit/>
+          </a:bodyPr>
+          <a:lstStyle/>
+          <a:p>
+            <a:pPr indent="0" marL="0">
+              <a:buNone/>
+            </a:pPr>
+            <a:r>
+              <a:rPr lang="en-US" sz="1250" dirty="0">
+                <a:solidFill>
+                  <a:srgbClr val="17364A"/>
+                </a:solidFill>
+                <a:latin typeface="Aptos" pitchFamily="34" charset="0"/>
+                <a:ea typeface="Aptos" pitchFamily="34" charset="-122"/>
+                <a:cs typeface="Aptos" pitchFamily="34" charset="-120"/>
+              </a:rPr>
+              <a:t>Connect the concept to public health decisions, safeguards, documentation, or implementation work.</a:t>
+            </a:r>
+            <a:endParaRPr lang="en-US" sz="1250" dirty="0"/>
           </a:p>
         </p:txBody>
       </p:sp>
@@ -3636,7 +4850,32 @@
       </p:sp>
       <p:sp>
         <p:nvSpPr>
-          <p:cNvPr id="3" name="Text 1"/>
+          <p:cNvPr id="3" name="Shape 1"/>
+          <p:cNvSpPr/>
+          <p:nvPr/>
+        </p:nvSpPr>
+        <p:spPr>
+          <a:xfrm>
+            <a:off x="0" y="164592"/>
+            <a:ext cx="146304" cy="6693408"/>
+          </a:xfrm>
+          <a:prstGeom prst="rect">
+            <a:avLst/>
+          </a:prstGeom>
+          <a:solidFill>
+            <a:srgbClr val="2F8A28"/>
+          </a:solidFill>
+          <a:ln w="12700">
+            <a:solidFill>
+              <a:srgbClr val="2F8A28"/>
+            </a:solidFill>
+            <a:prstDash val="solid"/>
+          </a:ln>
+        </p:spPr>
+      </p:sp>
+      <p:sp>
+        <p:nvSpPr>
+          <p:cNvPr id="4" name="Text 2"/>
           <p:cNvSpPr/>
           <p:nvPr/>
         </p:nvSpPr>
@@ -3675,7 +4914,7 @@
       </p:sp>
       <p:sp>
         <p:nvSpPr>
-          <p:cNvPr id="4" name="Text 2"/>
+          <p:cNvPr id="5" name="Text 3"/>
           <p:cNvSpPr/>
           <p:nvPr/>
         </p:nvSpPr>
@@ -3714,7 +4953,7 @@
       </p:sp>
       <p:sp>
         <p:nvSpPr>
-          <p:cNvPr id="5" name="Text 3"/>
+          <p:cNvPr id="6" name="Text 4"/>
           <p:cNvSpPr/>
           <p:nvPr/>
         </p:nvSpPr>
@@ -3753,7 +4992,7 @@
       </p:sp>
       <p:sp>
         <p:nvSpPr>
-          <p:cNvPr id="6" name="Text 4"/>
+          <p:cNvPr id="7" name="Text 5"/>
           <p:cNvSpPr/>
           <p:nvPr/>
         </p:nvSpPr>
@@ -3786,7 +5025,7 @@
                 <a:ea typeface="Aptos Display" pitchFamily="34" charset="-122"/>
                 <a:cs typeface="Aptos Display" pitchFamily="34" charset="-120"/>
               </a:rPr>
-              <a:t>Reflection Questions</a:t>
+              <a:t>Risks, Failure Modes, and Guardrails Continued</a:t>
             </a:r>
             <a:endParaRPr lang="en-US" sz="2700" dirty="0"/>
           </a:p>
@@ -3794,32 +5033,164 @@
       </p:sp>
       <p:sp>
         <p:nvSpPr>
-          <p:cNvPr id="7" name="Text 5"/>
-          <p:cNvSpPr/>
-          <p:nvPr/>
-        </p:nvSpPr>
-        <p:spPr>
-          <a:xfrm>
-            <a:off x="822960" y="1325880"/>
-            <a:ext cx="10378440" cy="4800600"/>
-          </a:xfrm>
-          <a:prstGeom prst="rect">
-            <a:avLst/>
-          </a:prstGeom>
-          <a:noFill/>
-          <a:ln/>
-        </p:spPr>
-        <p:txBody>
-          <a:bodyPr wrap="square" lIns="1016" tIns="1016" rIns="1016" bIns="1016" rtlCol="0" anchor="t">
+          <p:cNvPr id="8" name="Text 6"/>
+          <p:cNvSpPr/>
+          <p:nvPr/>
+        </p:nvSpPr>
+        <p:spPr>
+          <a:xfrm>
+            <a:off x="868680" y="1417320"/>
+            <a:ext cx="6675120" cy="4434840"/>
+          </a:xfrm>
+          <a:prstGeom prst="rect">
+            <a:avLst/>
+          </a:prstGeom>
+          <a:noFill/>
+          <a:ln/>
+        </p:spPr>
+        <p:txBody>
+          <a:bodyPr wrap="square" lIns="635" tIns="635" rIns="635" bIns="635" rtlCol="0" anchor="t">
             <a:normAutofit/>
           </a:bodyPr>
           <a:lstStyle/>
           <a:p>
+            <a:r>
+              <a:rPr lang="en-US" sz="1700" dirty="0">
+                <a:solidFill>
+                  <a:srgbClr val="17364A"/>
+                </a:solidFill>
+                <a:latin typeface="Aptos" pitchFamily="34" charset="0"/>
+                <a:ea typeface="Aptos" pitchFamily="34" charset="-122"/>
+                <a:cs typeface="Aptos" pitchFamily="34" charset="-120"/>
+              </a:rPr>
+              <a:t>Weak lineage.</a:t>
+            </a:r>
+            <a:endParaRPr lang="en-US" sz="1700" dirty="0"/>
+          </a:p>
+          <a:p>
+            <a:r>
+              <a:rPr lang="en-US" sz="1700" dirty="0">
+                <a:solidFill>
+                  <a:srgbClr val="17364A"/>
+                </a:solidFill>
+                <a:latin typeface="Aptos" pitchFamily="34" charset="0"/>
+                <a:ea typeface="Aptos" pitchFamily="34" charset="-122"/>
+                <a:cs typeface="Aptos" pitchFamily="34" charset="-120"/>
+              </a:rPr>
+              <a:t>If transformations are not documented, staff may not be able to explain or correct AI errors.</a:t>
+            </a:r>
+            <a:endParaRPr lang="en-US" sz="1700" dirty="0"/>
+          </a:p>
+          <a:p>
+            <a:r>
+              <a:rPr lang="en-US" sz="1700" dirty="0">
+                <a:solidFill>
+                  <a:srgbClr val="17364A"/>
+                </a:solidFill>
+                <a:latin typeface="Aptos" pitchFamily="34" charset="0"/>
+                <a:ea typeface="Aptos" pitchFamily="34" charset="-122"/>
+                <a:cs typeface="Aptos" pitchFamily="34" charset="-120"/>
+              </a:rPr>
+              <a:t>Guardrails include lineage documentation, version control, and audit trails.</a:t>
+            </a:r>
+            <a:endParaRPr lang="en-US" sz="1700" dirty="0"/>
+          </a:p>
+        </p:txBody>
+      </p:sp>
+      <p:sp>
+        <p:nvSpPr>
+          <p:cNvPr id="9" name="Shape 7"/>
+          <p:cNvSpPr/>
+          <p:nvPr/>
+        </p:nvSpPr>
+        <p:spPr>
+          <a:xfrm>
+            <a:off x="7909560" y="1417320"/>
+            <a:ext cx="3154680" cy="1828800"/>
+          </a:xfrm>
+          <a:prstGeom prst="roundRect">
+            <a:avLst>
+              <a:gd name="adj" fmla="val 6000"/>
+            </a:avLst>
+          </a:prstGeom>
+          <a:solidFill>
+            <a:srgbClr val="EEF8ED"/>
+          </a:solidFill>
+          <a:ln w="12700">
+            <a:solidFill>
+              <a:srgbClr val="B9D7E6"/>
+            </a:solidFill>
+            <a:prstDash val="solid"/>
+          </a:ln>
+        </p:spPr>
+      </p:sp>
+      <p:sp>
+        <p:nvSpPr>
+          <p:cNvPr id="10" name="Text 8"/>
+          <p:cNvSpPr/>
+          <p:nvPr/>
+        </p:nvSpPr>
+        <p:spPr>
+          <a:xfrm>
+            <a:off x="8074152" y="1563624"/>
+            <a:ext cx="2825496" cy="201168"/>
+          </a:xfrm>
+          <a:prstGeom prst="rect">
+            <a:avLst/>
+          </a:prstGeom>
+          <a:noFill/>
+          <a:ln/>
+        </p:spPr>
+        <p:txBody>
+          <a:bodyPr wrap="square" lIns="0" tIns="0" rIns="0" bIns="0" rtlCol="0" anchor="ctr"/>
+          <a:lstStyle/>
+          <a:p>
             <a:pPr indent="0" marL="0">
               <a:buNone/>
             </a:pPr>
             <a:r>
-              <a:rPr lang="en-US" sz="1420" dirty="0">
+              <a:rPr lang="en-US" sz="950" b="1" dirty="0">
+                <a:solidFill>
+                  <a:srgbClr val="0068B7"/>
+                </a:solidFill>
+                <a:latin typeface="Aptos" pitchFamily="34" charset="0"/>
+                <a:ea typeface="Aptos" pitchFamily="34" charset="-122"/>
+                <a:cs typeface="Aptos" pitchFamily="34" charset="-120"/>
+              </a:rPr>
+              <a:t>Key idea</a:t>
+            </a:r>
+            <a:endParaRPr lang="en-US" sz="950" dirty="0"/>
+          </a:p>
+        </p:txBody>
+      </p:sp>
+      <p:sp>
+        <p:nvSpPr>
+          <p:cNvPr id="11" name="Text 9"/>
+          <p:cNvSpPr/>
+          <p:nvPr/>
+        </p:nvSpPr>
+        <p:spPr>
+          <a:xfrm>
+            <a:off x="8074152" y="1856232"/>
+            <a:ext cx="2825496" cy="1261872"/>
+          </a:xfrm>
+          <a:prstGeom prst="rect">
+            <a:avLst/>
+          </a:prstGeom>
+          <a:noFill/>
+          <a:ln/>
+        </p:spPr>
+        <p:txBody>
+          <a:bodyPr wrap="square" lIns="0" tIns="0" rIns="0" bIns="0" rtlCol="0" anchor="t">
+            <a:normAutofit/>
+          </a:bodyPr>
+          <a:lstStyle/>
+          <a:p>
+            <a:pPr indent="0" marL="0">
+              <a:buNone/>
+            </a:pPr>
+            <a:r>
+              <a:rPr lang="en-US" sz="1250" dirty="0">
                 <a:solidFill>
                   <a:srgbClr val="17364A"/>
                 </a:solidFill>
@@ -3827,9 +5198,116 @@
                 <a:ea typeface="Aptos" pitchFamily="34" charset="-122"/>
                 <a:cs typeface="Aptos" pitchFamily="34" charset="-120"/>
               </a:rPr>
-              <a:t>Which public health data feeds are most important to daily decisions in your program? Which pipelines are automatically monitored, and which depend on manual review? What failures would materially affect an AI output?</a:t>
-            </a:r>
-            <a:endParaRPr lang="en-US" sz="1420" dirty="0"/>
+              <a:t>Weak lineage.</a:t>
+            </a:r>
+            <a:endParaRPr lang="en-US" sz="1250" dirty="0"/>
+          </a:p>
+        </p:txBody>
+      </p:sp>
+      <p:sp>
+        <p:nvSpPr>
+          <p:cNvPr id="12" name="Shape 10"/>
+          <p:cNvSpPr/>
+          <p:nvPr/>
+        </p:nvSpPr>
+        <p:spPr>
+          <a:xfrm>
+            <a:off x="7909560" y="3520440"/>
+            <a:ext cx="3154680" cy="1737360"/>
+          </a:xfrm>
+          <a:prstGeom prst="roundRect">
+            <a:avLst>
+              <a:gd name="adj" fmla="val 6316"/>
+            </a:avLst>
+          </a:prstGeom>
+          <a:solidFill>
+            <a:srgbClr val="EAF6F8"/>
+          </a:solidFill>
+          <a:ln w="12700">
+            <a:solidFill>
+              <a:srgbClr val="B9D7E6"/>
+            </a:solidFill>
+            <a:prstDash val="solid"/>
+          </a:ln>
+        </p:spPr>
+      </p:sp>
+      <p:sp>
+        <p:nvSpPr>
+          <p:cNvPr id="13" name="Text 11"/>
+          <p:cNvSpPr/>
+          <p:nvPr/>
+        </p:nvSpPr>
+        <p:spPr>
+          <a:xfrm>
+            <a:off x="8074152" y="3666744"/>
+            <a:ext cx="2825496" cy="201168"/>
+          </a:xfrm>
+          <a:prstGeom prst="rect">
+            <a:avLst/>
+          </a:prstGeom>
+          <a:noFill/>
+          <a:ln/>
+        </p:spPr>
+        <p:txBody>
+          <a:bodyPr wrap="square" lIns="0" tIns="0" rIns="0" bIns="0" rtlCol="0" anchor="ctr"/>
+          <a:lstStyle/>
+          <a:p>
+            <a:pPr indent="0" marL="0">
+              <a:buNone/>
+            </a:pPr>
+            <a:r>
+              <a:rPr lang="en-US" sz="950" b="1" dirty="0">
+                <a:solidFill>
+                  <a:srgbClr val="0068B7"/>
+                </a:solidFill>
+                <a:latin typeface="Aptos" pitchFamily="34" charset="0"/>
+                <a:ea typeface="Aptos" pitchFamily="34" charset="-122"/>
+                <a:cs typeface="Aptos" pitchFamily="34" charset="-120"/>
+              </a:rPr>
+              <a:t>Use this for</a:t>
+            </a:r>
+            <a:endParaRPr lang="en-US" sz="950" dirty="0"/>
+          </a:p>
+        </p:txBody>
+      </p:sp>
+      <p:sp>
+        <p:nvSpPr>
+          <p:cNvPr id="14" name="Text 12"/>
+          <p:cNvSpPr/>
+          <p:nvPr/>
+        </p:nvSpPr>
+        <p:spPr>
+          <a:xfrm>
+            <a:off x="8074152" y="3959352"/>
+            <a:ext cx="2825496" cy="1170432"/>
+          </a:xfrm>
+          <a:prstGeom prst="rect">
+            <a:avLst/>
+          </a:prstGeom>
+          <a:noFill/>
+          <a:ln/>
+        </p:spPr>
+        <p:txBody>
+          <a:bodyPr wrap="square" lIns="0" tIns="0" rIns="0" bIns="0" rtlCol="0" anchor="t">
+            <a:normAutofit/>
+          </a:bodyPr>
+          <a:lstStyle/>
+          <a:p>
+            <a:pPr indent="0" marL="0">
+              <a:buNone/>
+            </a:pPr>
+            <a:r>
+              <a:rPr lang="en-US" sz="1250" dirty="0">
+                <a:solidFill>
+                  <a:srgbClr val="17364A"/>
+                </a:solidFill>
+                <a:latin typeface="Aptos" pitchFamily="34" charset="0"/>
+                <a:ea typeface="Aptos" pitchFamily="34" charset="-122"/>
+                <a:cs typeface="Aptos" pitchFamily="34" charset="-120"/>
+              </a:rPr>
+              <a:t>Connect the concept to public health decisions, safeguards, documentation, or implementation work.</a:t>
+            </a:r>
+            <a:endParaRPr lang="en-US" sz="1250" dirty="0"/>
           </a:p>
         </p:txBody>
       </p:sp>
@@ -3892,7 +5370,32 @@
       </p:sp>
       <p:sp>
         <p:nvSpPr>
-          <p:cNvPr id="3" name="Text 1"/>
+          <p:cNvPr id="3" name="Shape 1"/>
+          <p:cNvSpPr/>
+          <p:nvPr/>
+        </p:nvSpPr>
+        <p:spPr>
+          <a:xfrm>
+            <a:off x="0" y="164592"/>
+            <a:ext cx="146304" cy="6693408"/>
+          </a:xfrm>
+          <a:prstGeom prst="rect">
+            <a:avLst/>
+          </a:prstGeom>
+          <a:solidFill>
+            <a:srgbClr val="2F8A28"/>
+          </a:solidFill>
+          <a:ln w="12700">
+            <a:solidFill>
+              <a:srgbClr val="2F8A28"/>
+            </a:solidFill>
+            <a:prstDash val="solid"/>
+          </a:ln>
+        </p:spPr>
+      </p:sp>
+      <p:sp>
+        <p:nvSpPr>
+          <p:cNvPr id="4" name="Text 2"/>
           <p:cNvSpPr/>
           <p:nvPr/>
         </p:nvSpPr>
@@ -3931,7 +5434,7 @@
       </p:sp>
       <p:sp>
         <p:nvSpPr>
-          <p:cNvPr id="4" name="Text 2"/>
+          <p:cNvPr id="5" name="Text 3"/>
           <p:cNvSpPr/>
           <p:nvPr/>
         </p:nvSpPr>
@@ -3970,7 +5473,7 @@
       </p:sp>
       <p:sp>
         <p:nvSpPr>
-          <p:cNvPr id="5" name="Text 3"/>
+          <p:cNvPr id="6" name="Text 4"/>
           <p:cNvSpPr/>
           <p:nvPr/>
         </p:nvSpPr>
@@ -4009,13 +5512,77 @@
       </p:sp>
       <p:sp>
         <p:nvSpPr>
-          <p:cNvPr id="6" name="Text 4"/>
+          <p:cNvPr id="7" name="Shape 5"/>
           <p:cNvSpPr/>
           <p:nvPr/>
         </p:nvSpPr>
         <p:spPr>
           <a:xfrm>
             <a:off x="640080" y="658368"/>
+            <a:ext cx="420624" cy="420624"/>
+          </a:xfrm>
+          <a:prstGeom prst="ellipse">
+            <a:avLst/>
+          </a:prstGeom>
+          <a:solidFill>
+            <a:srgbClr val="0068B7"/>
+          </a:solidFill>
+          <a:ln w="12700">
+            <a:solidFill>
+              <a:srgbClr val="0068B7"/>
+            </a:solidFill>
+            <a:prstDash val="solid"/>
+          </a:ln>
+        </p:spPr>
+      </p:sp>
+      <p:sp>
+        <p:nvSpPr>
+          <p:cNvPr id="8" name="Text 6"/>
+          <p:cNvSpPr/>
+          <p:nvPr/>
+        </p:nvSpPr>
+        <p:spPr>
+          <a:xfrm>
+            <a:off x="640080" y="731520"/>
+            <a:ext cx="420624" cy="164592"/>
+          </a:xfrm>
+          <a:prstGeom prst="rect">
+            <a:avLst/>
+          </a:prstGeom>
+          <a:noFill/>
+          <a:ln/>
+        </p:spPr>
+        <p:txBody>
+          <a:bodyPr wrap="square" lIns="0" tIns="0" rIns="0" bIns="0" rtlCol="0" anchor="ctr"/>
+          <a:lstStyle/>
+          <a:p>
+            <a:pPr algn="ctr" indent="0" marL="0">
+              <a:buNone/>
+            </a:pPr>
+            <a:r>
+              <a:rPr lang="en-US" sz="1100" b="1" dirty="0">
+                <a:solidFill>
+                  <a:srgbClr val="FFFFFF"/>
+                </a:solidFill>
+                <a:latin typeface="Aptos" pitchFamily="34" charset="0"/>
+                <a:ea typeface="Aptos" pitchFamily="34" charset="-122"/>
+                <a:cs typeface="Aptos" pitchFamily="34" charset="-120"/>
+              </a:rPr>
+              <a:t>8</a:t>
+            </a:r>
+            <a:endParaRPr lang="en-US" sz="1100" dirty="0"/>
+          </a:p>
+        </p:txBody>
+      </p:sp>
+      <p:sp>
+        <p:nvSpPr>
+          <p:cNvPr id="9" name="Text 7"/>
+          <p:cNvSpPr/>
+          <p:nvPr/>
+        </p:nvSpPr>
+        <p:spPr>
+          <a:xfrm>
+            <a:off x="640080" y="621792"/>
             <a:ext cx="10881360" cy="566928"/>
           </a:xfrm>
           <a:prstGeom prst="rect">
@@ -4042,7 +5609,7 @@
                 <a:ea typeface="Aptos Display" pitchFamily="34" charset="-122"/>
                 <a:cs typeface="Aptos Display" pitchFamily="34" charset="-120"/>
               </a:rPr>
-              <a:t>Reflection Questions Continued</a:t>
+              <a:t>Application to AI-Supported Workflows</a:t>
             </a:r>
             <a:endParaRPr lang="en-US" sz="2700" dirty="0"/>
           </a:p>
@@ -4050,32 +5617,178 @@
       </p:sp>
       <p:sp>
         <p:nvSpPr>
-          <p:cNvPr id="7" name="Text 5"/>
-          <p:cNvSpPr/>
-          <p:nvPr/>
-        </p:nvSpPr>
-        <p:spPr>
-          <a:xfrm>
-            <a:off x="822960" y="1325880"/>
-            <a:ext cx="10378440" cy="4800600"/>
-          </a:xfrm>
-          <a:prstGeom prst="rect">
-            <a:avLst/>
-          </a:prstGeom>
-          <a:noFill/>
-          <a:ln/>
-        </p:spPr>
-        <p:txBody>
-          <a:bodyPr wrap="square" lIns="1016" tIns="1016" rIns="1016" bIns="1016" rtlCol="0" anchor="t">
+          <p:cNvPr id="10" name="Text 8"/>
+          <p:cNvSpPr/>
+          <p:nvPr/>
+        </p:nvSpPr>
+        <p:spPr>
+          <a:xfrm>
+            <a:off x="868680" y="1417320"/>
+            <a:ext cx="6675120" cy="4434840"/>
+          </a:xfrm>
+          <a:prstGeom prst="rect">
+            <a:avLst/>
+          </a:prstGeom>
+          <a:noFill/>
+          <a:ln/>
+        </p:spPr>
+        <p:txBody>
+          <a:bodyPr wrap="square" lIns="635" tIns="635" rIns="635" bIns="635" rtlCol="0" anchor="t">
             <a:normAutofit/>
           </a:bodyPr>
           <a:lstStyle/>
           <a:p>
+            <a:r>
+              <a:rPr lang="en-US" sz="1700" dirty="0">
+                <a:solidFill>
+                  <a:srgbClr val="17364A"/>
+                </a:solidFill>
+                <a:latin typeface="Aptos" pitchFamily="34" charset="0"/>
+                <a:ea typeface="Aptos" pitchFamily="34" charset="-122"/>
+                <a:cs typeface="Aptos" pitchFamily="34" charset="-120"/>
+              </a:rPr>
+              <a:t>Generative AI may use pipeline outputs to summarize records, but the summary should indicate source freshness and preserve.</a:t>
+            </a:r>
+            <a:endParaRPr lang="en-US" sz="1700" dirty="0"/>
+          </a:p>
+          <a:p>
+            <a:r>
+              <a:rPr lang="en-US" sz="1700" dirty="0">
+                <a:solidFill>
+                  <a:srgbClr val="17364A"/>
+                </a:solidFill>
+                <a:latin typeface="Aptos" pitchFamily="34" charset="0"/>
+                <a:ea typeface="Aptos" pitchFamily="34" charset="-122"/>
+                <a:cs typeface="Aptos" pitchFamily="34" charset="-120"/>
+              </a:rPr>
+              <a:t>Predictive models may rely on engineered features created by a pipeline, so the feature pipeline must be monitored for.</a:t>
+            </a:r>
+            <a:endParaRPr lang="en-US" sz="1700" dirty="0"/>
+          </a:p>
+          <a:p>
+            <a:r>
+              <a:rPr lang="en-US" sz="1700" dirty="0">
+                <a:solidFill>
+                  <a:srgbClr val="17364A"/>
+                </a:solidFill>
+                <a:latin typeface="Aptos" pitchFamily="34" charset="0"/>
+                <a:ea typeface="Aptos" pitchFamily="34" charset="-122"/>
+                <a:cs typeface="Aptos" pitchFamily="34" charset="-120"/>
+              </a:rPr>
+              <a:t>RAG systems depend on document ingestion pipelines, which must track document source, version, permissions, and refresh.</a:t>
+            </a:r>
+            <a:endParaRPr lang="en-US" sz="1700" dirty="0"/>
+          </a:p>
+          <a:p>
+            <a:r>
+              <a:rPr lang="en-US" sz="1700" dirty="0">
+                <a:solidFill>
+                  <a:srgbClr val="17364A"/>
+                </a:solidFill>
+                <a:latin typeface="Aptos" pitchFamily="34" charset="0"/>
+                <a:ea typeface="Aptos" pitchFamily="34" charset="-122"/>
+                <a:cs typeface="Aptos" pitchFamily="34" charset="-120"/>
+              </a:rPr>
+              <a:t>Agentic workflows may depend on event-driven pipelines, making failure handling and approval points especially important.</a:t>
+            </a:r>
+            <a:endParaRPr lang="en-US" sz="1700" dirty="0"/>
+          </a:p>
+        </p:txBody>
+      </p:sp>
+      <p:sp>
+        <p:nvSpPr>
+          <p:cNvPr id="11" name="Shape 9"/>
+          <p:cNvSpPr/>
+          <p:nvPr/>
+        </p:nvSpPr>
+        <p:spPr>
+          <a:xfrm>
+            <a:off x="7909560" y="1417320"/>
+            <a:ext cx="3154680" cy="1828800"/>
+          </a:xfrm>
+          <a:prstGeom prst="roundRect">
+            <a:avLst>
+              <a:gd name="adj" fmla="val 6000"/>
+            </a:avLst>
+          </a:prstGeom>
+          <a:solidFill>
+            <a:srgbClr val="EEF8ED"/>
+          </a:solidFill>
+          <a:ln w="12700">
+            <a:solidFill>
+              <a:srgbClr val="B9D7E6"/>
+            </a:solidFill>
+            <a:prstDash val="solid"/>
+          </a:ln>
+        </p:spPr>
+      </p:sp>
+      <p:sp>
+        <p:nvSpPr>
+          <p:cNvPr id="12" name="Text 10"/>
+          <p:cNvSpPr/>
+          <p:nvPr/>
+        </p:nvSpPr>
+        <p:spPr>
+          <a:xfrm>
+            <a:off x="8074152" y="1563624"/>
+            <a:ext cx="2825496" cy="201168"/>
+          </a:xfrm>
+          <a:prstGeom prst="rect">
+            <a:avLst/>
+          </a:prstGeom>
+          <a:noFill/>
+          <a:ln/>
+        </p:spPr>
+        <p:txBody>
+          <a:bodyPr wrap="square" lIns="0" tIns="0" rIns="0" bIns="0" rtlCol="0" anchor="ctr"/>
+          <a:lstStyle/>
+          <a:p>
             <a:pPr indent="0" marL="0">
               <a:buNone/>
             </a:pPr>
             <a:r>
-              <a:rPr lang="en-US" sz="1420" dirty="0">
+              <a:rPr lang="en-US" sz="950" b="1" dirty="0">
+                <a:solidFill>
+                  <a:srgbClr val="0068B7"/>
+                </a:solidFill>
+                <a:latin typeface="Aptos" pitchFamily="34" charset="0"/>
+                <a:ea typeface="Aptos" pitchFamily="34" charset="-122"/>
+                <a:cs typeface="Aptos" pitchFamily="34" charset="-120"/>
+              </a:rPr>
+              <a:t>Key idea</a:t>
+            </a:r>
+            <a:endParaRPr lang="en-US" sz="950" dirty="0"/>
+          </a:p>
+        </p:txBody>
+      </p:sp>
+      <p:sp>
+        <p:nvSpPr>
+          <p:cNvPr id="13" name="Text 11"/>
+          <p:cNvSpPr/>
+          <p:nvPr/>
+        </p:nvSpPr>
+        <p:spPr>
+          <a:xfrm>
+            <a:off x="8074152" y="1856232"/>
+            <a:ext cx="2825496" cy="1261872"/>
+          </a:xfrm>
+          <a:prstGeom prst="rect">
+            <a:avLst/>
+          </a:prstGeom>
+          <a:noFill/>
+          <a:ln/>
+        </p:spPr>
+        <p:txBody>
+          <a:bodyPr wrap="square" lIns="0" tIns="0" rIns="0" bIns="0" rtlCol="0" anchor="t">
+            <a:normAutofit/>
+          </a:bodyPr>
+          <a:lstStyle/>
+          <a:p>
+            <a:pPr indent="0" marL="0">
+              <a:buNone/>
+            </a:pPr>
+            <a:r>
+              <a:rPr lang="en-US" sz="1250" dirty="0">
                 <a:solidFill>
                   <a:srgbClr val="17364A"/>
                 </a:solidFill>
@@ -4083,9 +5796,116 @@
                 <a:ea typeface="Aptos" pitchFamily="34" charset="-122"/>
                 <a:cs typeface="Aptos" pitchFamily="34" charset="-120"/>
               </a:rPr>
-              <a:t>How would staff know if an AI output was based on stale or incomplete data? Who has authority to pause AI use when a pipeline fails?</a:t>
-            </a:r>
-            <a:endParaRPr lang="en-US" sz="1420" dirty="0"/>
+              <a:t>Generative AI may use pipeline outputs to summarize records, but the summary should indicate source freshness and preserve.</a:t>
+            </a:r>
+            <a:endParaRPr lang="en-US" sz="1250" dirty="0"/>
+          </a:p>
+        </p:txBody>
+      </p:sp>
+      <p:sp>
+        <p:nvSpPr>
+          <p:cNvPr id="14" name="Shape 12"/>
+          <p:cNvSpPr/>
+          <p:nvPr/>
+        </p:nvSpPr>
+        <p:spPr>
+          <a:xfrm>
+            <a:off x="7909560" y="3520440"/>
+            <a:ext cx="3154680" cy="1737360"/>
+          </a:xfrm>
+          <a:prstGeom prst="roundRect">
+            <a:avLst>
+              <a:gd name="adj" fmla="val 6316"/>
+            </a:avLst>
+          </a:prstGeom>
+          <a:solidFill>
+            <a:srgbClr val="EAF6F8"/>
+          </a:solidFill>
+          <a:ln w="12700">
+            <a:solidFill>
+              <a:srgbClr val="B9D7E6"/>
+            </a:solidFill>
+            <a:prstDash val="solid"/>
+          </a:ln>
+        </p:spPr>
+      </p:sp>
+      <p:sp>
+        <p:nvSpPr>
+          <p:cNvPr id="15" name="Text 13"/>
+          <p:cNvSpPr/>
+          <p:nvPr/>
+        </p:nvSpPr>
+        <p:spPr>
+          <a:xfrm>
+            <a:off x="8074152" y="3666744"/>
+            <a:ext cx="2825496" cy="201168"/>
+          </a:xfrm>
+          <a:prstGeom prst="rect">
+            <a:avLst/>
+          </a:prstGeom>
+          <a:noFill/>
+          <a:ln/>
+        </p:spPr>
+        <p:txBody>
+          <a:bodyPr wrap="square" lIns="0" tIns="0" rIns="0" bIns="0" rtlCol="0" anchor="ctr"/>
+          <a:lstStyle/>
+          <a:p>
+            <a:pPr indent="0" marL="0">
+              <a:buNone/>
+            </a:pPr>
+            <a:r>
+              <a:rPr lang="en-US" sz="950" b="1" dirty="0">
+                <a:solidFill>
+                  <a:srgbClr val="0068B7"/>
+                </a:solidFill>
+                <a:latin typeface="Aptos" pitchFamily="34" charset="0"/>
+                <a:ea typeface="Aptos" pitchFamily="34" charset="-122"/>
+                <a:cs typeface="Aptos" pitchFamily="34" charset="-120"/>
+              </a:rPr>
+              <a:t>Use this for</a:t>
+            </a:r>
+            <a:endParaRPr lang="en-US" sz="950" dirty="0"/>
+          </a:p>
+        </p:txBody>
+      </p:sp>
+      <p:sp>
+        <p:nvSpPr>
+          <p:cNvPr id="16" name="Text 14"/>
+          <p:cNvSpPr/>
+          <p:nvPr/>
+        </p:nvSpPr>
+        <p:spPr>
+          <a:xfrm>
+            <a:off x="8074152" y="3959352"/>
+            <a:ext cx="2825496" cy="1170432"/>
+          </a:xfrm>
+          <a:prstGeom prst="rect">
+            <a:avLst/>
+          </a:prstGeom>
+          <a:noFill/>
+          <a:ln/>
+        </p:spPr>
+        <p:txBody>
+          <a:bodyPr wrap="square" lIns="0" tIns="0" rIns="0" bIns="0" rtlCol="0" anchor="t">
+            <a:normAutofit/>
+          </a:bodyPr>
+          <a:lstStyle/>
+          <a:p>
+            <a:pPr indent="0" marL="0">
+              <a:buNone/>
+            </a:pPr>
+            <a:r>
+              <a:rPr lang="en-US" sz="1250" dirty="0">
+                <a:solidFill>
+                  <a:srgbClr val="17364A"/>
+                </a:solidFill>
+                <a:latin typeface="Aptos" pitchFamily="34" charset="0"/>
+                <a:ea typeface="Aptos" pitchFamily="34" charset="-122"/>
+                <a:cs typeface="Aptos" pitchFamily="34" charset="-120"/>
+              </a:rPr>
+              <a:t>Connect the concept to public health decisions, safeguards, documentation, or implementation work.</a:t>
+            </a:r>
+            <a:endParaRPr lang="en-US" sz="1250" dirty="0"/>
           </a:p>
         </p:txBody>
       </p:sp>
@@ -4148,7 +5968,32 @@
       </p:sp>
       <p:sp>
         <p:nvSpPr>
-          <p:cNvPr id="3" name="Text 1"/>
+          <p:cNvPr id="3" name="Shape 1"/>
+          <p:cNvSpPr/>
+          <p:nvPr/>
+        </p:nvSpPr>
+        <p:spPr>
+          <a:xfrm>
+            <a:off x="0" y="164592"/>
+            <a:ext cx="146304" cy="6693408"/>
+          </a:xfrm>
+          <a:prstGeom prst="rect">
+            <a:avLst/>
+          </a:prstGeom>
+          <a:solidFill>
+            <a:srgbClr val="2F8A28"/>
+          </a:solidFill>
+          <a:ln w="12700">
+            <a:solidFill>
+              <a:srgbClr val="2F8A28"/>
+            </a:solidFill>
+            <a:prstDash val="solid"/>
+          </a:ln>
+        </p:spPr>
+      </p:sp>
+      <p:sp>
+        <p:nvSpPr>
+          <p:cNvPr id="4" name="Text 2"/>
           <p:cNvSpPr/>
           <p:nvPr/>
         </p:nvSpPr>
@@ -4187,7 +6032,7 @@
       </p:sp>
       <p:sp>
         <p:nvSpPr>
-          <p:cNvPr id="4" name="Text 2"/>
+          <p:cNvPr id="5" name="Text 3"/>
           <p:cNvSpPr/>
           <p:nvPr/>
         </p:nvSpPr>
@@ -4226,7 +6071,7 @@
       </p:sp>
       <p:sp>
         <p:nvSpPr>
-          <p:cNvPr id="5" name="Text 3"/>
+          <p:cNvPr id="6" name="Text 4"/>
           <p:cNvSpPr/>
           <p:nvPr/>
         </p:nvSpPr>
@@ -4265,13 +6110,77 @@
       </p:sp>
       <p:sp>
         <p:nvSpPr>
-          <p:cNvPr id="6" name="Text 4"/>
+          <p:cNvPr id="7" name="Shape 5"/>
           <p:cNvSpPr/>
           <p:nvPr/>
         </p:nvSpPr>
         <p:spPr>
           <a:xfrm>
             <a:off x="640080" y="658368"/>
+            <a:ext cx="420624" cy="420624"/>
+          </a:xfrm>
+          <a:prstGeom prst="ellipse">
+            <a:avLst/>
+          </a:prstGeom>
+          <a:solidFill>
+            <a:srgbClr val="0068B7"/>
+          </a:solidFill>
+          <a:ln w="12700">
+            <a:solidFill>
+              <a:srgbClr val="0068B7"/>
+            </a:solidFill>
+            <a:prstDash val="solid"/>
+          </a:ln>
+        </p:spPr>
+      </p:sp>
+      <p:sp>
+        <p:nvSpPr>
+          <p:cNvPr id="8" name="Text 6"/>
+          <p:cNvSpPr/>
+          <p:nvPr/>
+        </p:nvSpPr>
+        <p:spPr>
+          <a:xfrm>
+            <a:off x="640080" y="731520"/>
+            <a:ext cx="420624" cy="164592"/>
+          </a:xfrm>
+          <a:prstGeom prst="rect">
+            <a:avLst/>
+          </a:prstGeom>
+          <a:noFill/>
+          <a:ln/>
+        </p:spPr>
+        <p:txBody>
+          <a:bodyPr wrap="square" lIns="0" tIns="0" rIns="0" bIns="0" rtlCol="0" anchor="ctr"/>
+          <a:lstStyle/>
+          <a:p>
+            <a:pPr algn="ctr" indent="0" marL="0">
+              <a:buNone/>
+            </a:pPr>
+            <a:r>
+              <a:rPr lang="en-US" sz="1100" b="1" dirty="0">
+                <a:solidFill>
+                  <a:srgbClr val="FFFFFF"/>
+                </a:solidFill>
+                <a:latin typeface="Aptos" pitchFamily="34" charset="0"/>
+                <a:ea typeface="Aptos" pitchFamily="34" charset="-122"/>
+                <a:cs typeface="Aptos" pitchFamily="34" charset="-120"/>
+              </a:rPr>
+              <a:t>9</a:t>
+            </a:r>
+            <a:endParaRPr lang="en-US" sz="1100" dirty="0"/>
+          </a:p>
+        </p:txBody>
+      </p:sp>
+      <p:sp>
+        <p:nvSpPr>
+          <p:cNvPr id="9" name="Text 7"/>
+          <p:cNvSpPr/>
+          <p:nvPr/>
+        </p:nvSpPr>
+        <p:spPr>
+          <a:xfrm>
+            <a:off x="640080" y="621792"/>
             <a:ext cx="10881360" cy="566928"/>
           </a:xfrm>
           <a:prstGeom prst="rect">
@@ -4298,7 +6207,7 @@
                 <a:ea typeface="Aptos Display" pitchFamily="34" charset="-122"/>
                 <a:cs typeface="Aptos Display" pitchFamily="34" charset="-120"/>
               </a:rPr>
-              <a:t>Practical Exercise</a:t>
+              <a:t>Reflection Questions</a:t>
             </a:r>
             <a:endParaRPr lang="en-US" sz="2700" dirty="0"/>
           </a:p>
@@ -4306,32 +6215,164 @@
       </p:sp>
       <p:sp>
         <p:nvSpPr>
-          <p:cNvPr id="7" name="Text 5"/>
-          <p:cNvSpPr/>
-          <p:nvPr/>
-        </p:nvSpPr>
-        <p:spPr>
-          <a:xfrm>
-            <a:off x="822960" y="1325880"/>
-            <a:ext cx="10378440" cy="4800600"/>
-          </a:xfrm>
-          <a:prstGeom prst="rect">
-            <a:avLst/>
-          </a:prstGeom>
-          <a:noFill/>
-          <a:ln/>
-        </p:spPr>
-        <p:txBody>
-          <a:bodyPr wrap="square" lIns="1016" tIns="1016" rIns="1016" bIns="1016" rtlCol="0" anchor="t">
+          <p:cNvPr id="10" name="Text 8"/>
+          <p:cNvSpPr/>
+          <p:nvPr/>
+        </p:nvSpPr>
+        <p:spPr>
+          <a:xfrm>
+            <a:off x="868680" y="1417320"/>
+            <a:ext cx="6675120" cy="4434840"/>
+          </a:xfrm>
+          <a:prstGeom prst="rect">
+            <a:avLst/>
+          </a:prstGeom>
+          <a:noFill/>
+          <a:ln/>
+        </p:spPr>
+        <p:txBody>
+          <a:bodyPr wrap="square" lIns="635" tIns="635" rIns="635" bIns="635" rtlCol="0" anchor="t">
             <a:normAutofit/>
           </a:bodyPr>
           <a:lstStyle/>
           <a:p>
+            <a:r>
+              <a:rPr lang="en-US" sz="1700" dirty="0">
+                <a:solidFill>
+                  <a:srgbClr val="17364A"/>
+                </a:solidFill>
+                <a:latin typeface="Aptos" pitchFamily="34" charset="0"/>
+                <a:ea typeface="Aptos" pitchFamily="34" charset="-122"/>
+                <a:cs typeface="Aptos" pitchFamily="34" charset="-120"/>
+              </a:rPr>
+              <a:t>Which public health data feeds are most important to daily decisions in your program?</a:t>
+            </a:r>
+            <a:endParaRPr lang="en-US" sz="1700" dirty="0"/>
+          </a:p>
+          <a:p>
+            <a:r>
+              <a:rPr lang="en-US" sz="1700" dirty="0">
+                <a:solidFill>
+                  <a:srgbClr val="17364A"/>
+                </a:solidFill>
+                <a:latin typeface="Aptos" pitchFamily="34" charset="0"/>
+                <a:ea typeface="Aptos" pitchFamily="34" charset="-122"/>
+                <a:cs typeface="Aptos" pitchFamily="34" charset="-120"/>
+              </a:rPr>
+              <a:t>Which pipelines are automatically monitored, and which depend on manual review?</a:t>
+            </a:r>
+            <a:endParaRPr lang="en-US" sz="1700" dirty="0"/>
+          </a:p>
+          <a:p>
+            <a:r>
+              <a:rPr lang="en-US" sz="1700" dirty="0">
+                <a:solidFill>
+                  <a:srgbClr val="17364A"/>
+                </a:solidFill>
+                <a:latin typeface="Aptos" pitchFamily="34" charset="0"/>
+                <a:ea typeface="Aptos" pitchFamily="34" charset="-122"/>
+                <a:cs typeface="Aptos" pitchFamily="34" charset="-120"/>
+              </a:rPr>
+              <a:t>What failures would materially affect an AI output?</a:t>
+            </a:r>
+            <a:endParaRPr lang="en-US" sz="1700" dirty="0"/>
+          </a:p>
+        </p:txBody>
+      </p:sp>
+      <p:sp>
+        <p:nvSpPr>
+          <p:cNvPr id="11" name="Shape 9"/>
+          <p:cNvSpPr/>
+          <p:nvPr/>
+        </p:nvSpPr>
+        <p:spPr>
+          <a:xfrm>
+            <a:off x="7909560" y="1417320"/>
+            <a:ext cx="3154680" cy="1828800"/>
+          </a:xfrm>
+          <a:prstGeom prst="roundRect">
+            <a:avLst>
+              <a:gd name="adj" fmla="val 6000"/>
+            </a:avLst>
+          </a:prstGeom>
+          <a:solidFill>
+            <a:srgbClr val="EEF8ED"/>
+          </a:solidFill>
+          <a:ln w="12700">
+            <a:solidFill>
+              <a:srgbClr val="B9D7E6"/>
+            </a:solidFill>
+            <a:prstDash val="solid"/>
+          </a:ln>
+        </p:spPr>
+      </p:sp>
+      <p:sp>
+        <p:nvSpPr>
+          <p:cNvPr id="12" name="Text 10"/>
+          <p:cNvSpPr/>
+          <p:nvPr/>
+        </p:nvSpPr>
+        <p:spPr>
+          <a:xfrm>
+            <a:off x="8074152" y="1563624"/>
+            <a:ext cx="2825496" cy="201168"/>
+          </a:xfrm>
+          <a:prstGeom prst="rect">
+            <a:avLst/>
+          </a:prstGeom>
+          <a:noFill/>
+          <a:ln/>
+        </p:spPr>
+        <p:txBody>
+          <a:bodyPr wrap="square" lIns="0" tIns="0" rIns="0" bIns="0" rtlCol="0" anchor="ctr"/>
+          <a:lstStyle/>
+          <a:p>
             <a:pPr indent="0" marL="0">
               <a:buNone/>
             </a:pPr>
             <a:r>
-              <a:rPr lang="en-US" sz="1420" dirty="0">
+              <a:rPr lang="en-US" sz="950" b="1" dirty="0">
+                <a:solidFill>
+                  <a:srgbClr val="0068B7"/>
+                </a:solidFill>
+                <a:latin typeface="Aptos" pitchFamily="34" charset="0"/>
+                <a:ea typeface="Aptos" pitchFamily="34" charset="-122"/>
+                <a:cs typeface="Aptos" pitchFamily="34" charset="-120"/>
+              </a:rPr>
+              <a:t>Key idea</a:t>
+            </a:r>
+            <a:endParaRPr lang="en-US" sz="950" dirty="0"/>
+          </a:p>
+        </p:txBody>
+      </p:sp>
+      <p:sp>
+        <p:nvSpPr>
+          <p:cNvPr id="13" name="Text 11"/>
+          <p:cNvSpPr/>
+          <p:nvPr/>
+        </p:nvSpPr>
+        <p:spPr>
+          <a:xfrm>
+            <a:off x="8074152" y="1856232"/>
+            <a:ext cx="2825496" cy="1261872"/>
+          </a:xfrm>
+          <a:prstGeom prst="rect">
+            <a:avLst/>
+          </a:prstGeom>
+          <a:noFill/>
+          <a:ln/>
+        </p:spPr>
+        <p:txBody>
+          <a:bodyPr wrap="square" lIns="0" tIns="0" rIns="0" bIns="0" rtlCol="0" anchor="t">
+            <a:normAutofit/>
+          </a:bodyPr>
+          <a:lstStyle/>
+          <a:p>
+            <a:pPr indent="0" marL="0">
+              <a:buNone/>
+            </a:pPr>
+            <a:r>
+              <a:rPr lang="en-US" sz="1250" dirty="0">
                 <a:solidFill>
                   <a:srgbClr val="17364A"/>
                 </a:solidFill>
@@ -4339,9 +6380,116 @@
                 <a:ea typeface="Aptos" pitchFamily="34" charset="-122"/>
                 <a:cs typeface="Aptos" pitchFamily="34" charset="-120"/>
               </a:rPr>
-              <a:t>Create a data pipeline readiness checklist for one AI-supported workflow. Identify the data source, update frequency, required fields, validation checks, transformations, lineage documentation, monitoring indicators, error notification process, and fallback procedure. Document at least three pipeline failure scenarios and describe how each should be detected, escalated, and communicated to users.</a:t>
-            </a:r>
-            <a:endParaRPr lang="en-US" sz="1420" dirty="0"/>
+              <a:t>Which public health data feeds are most important to daily decisions in your program?</a:t>
+            </a:r>
+            <a:endParaRPr lang="en-US" sz="1250" dirty="0"/>
+          </a:p>
+        </p:txBody>
+      </p:sp>
+      <p:sp>
+        <p:nvSpPr>
+          <p:cNvPr id="14" name="Shape 12"/>
+          <p:cNvSpPr/>
+          <p:nvPr/>
+        </p:nvSpPr>
+        <p:spPr>
+          <a:xfrm>
+            <a:off x="7909560" y="3520440"/>
+            <a:ext cx="3154680" cy="1737360"/>
+          </a:xfrm>
+          <a:prstGeom prst="roundRect">
+            <a:avLst>
+              <a:gd name="adj" fmla="val 6316"/>
+            </a:avLst>
+          </a:prstGeom>
+          <a:solidFill>
+            <a:srgbClr val="EAF6F8"/>
+          </a:solidFill>
+          <a:ln w="12700">
+            <a:solidFill>
+              <a:srgbClr val="B9D7E6"/>
+            </a:solidFill>
+            <a:prstDash val="solid"/>
+          </a:ln>
+        </p:spPr>
+      </p:sp>
+      <p:sp>
+        <p:nvSpPr>
+          <p:cNvPr id="15" name="Text 13"/>
+          <p:cNvSpPr/>
+          <p:nvPr/>
+        </p:nvSpPr>
+        <p:spPr>
+          <a:xfrm>
+            <a:off x="8074152" y="3666744"/>
+            <a:ext cx="2825496" cy="201168"/>
+          </a:xfrm>
+          <a:prstGeom prst="rect">
+            <a:avLst/>
+          </a:prstGeom>
+          <a:noFill/>
+          <a:ln/>
+        </p:spPr>
+        <p:txBody>
+          <a:bodyPr wrap="square" lIns="0" tIns="0" rIns="0" bIns="0" rtlCol="0" anchor="ctr"/>
+          <a:lstStyle/>
+          <a:p>
+            <a:pPr indent="0" marL="0">
+              <a:buNone/>
+            </a:pPr>
+            <a:r>
+              <a:rPr lang="en-US" sz="950" b="1" dirty="0">
+                <a:solidFill>
+                  <a:srgbClr val="0068B7"/>
+                </a:solidFill>
+                <a:latin typeface="Aptos" pitchFamily="34" charset="0"/>
+                <a:ea typeface="Aptos" pitchFamily="34" charset="-122"/>
+                <a:cs typeface="Aptos" pitchFamily="34" charset="-120"/>
+              </a:rPr>
+              <a:t>Use this for</a:t>
+            </a:r>
+            <a:endParaRPr lang="en-US" sz="950" dirty="0"/>
+          </a:p>
+        </p:txBody>
+      </p:sp>
+      <p:sp>
+        <p:nvSpPr>
+          <p:cNvPr id="16" name="Text 14"/>
+          <p:cNvSpPr/>
+          <p:nvPr/>
+        </p:nvSpPr>
+        <p:spPr>
+          <a:xfrm>
+            <a:off x="8074152" y="3959352"/>
+            <a:ext cx="2825496" cy="1170432"/>
+          </a:xfrm>
+          <a:prstGeom prst="rect">
+            <a:avLst/>
+          </a:prstGeom>
+          <a:noFill/>
+          <a:ln/>
+        </p:spPr>
+        <p:txBody>
+          <a:bodyPr wrap="square" lIns="0" tIns="0" rIns="0" bIns="0" rtlCol="0" anchor="t">
+            <a:normAutofit/>
+          </a:bodyPr>
+          <a:lstStyle/>
+          <a:p>
+            <a:pPr indent="0" marL="0">
+              <a:buNone/>
+            </a:pPr>
+            <a:r>
+              <a:rPr lang="en-US" sz="1250" dirty="0">
+                <a:solidFill>
+                  <a:srgbClr val="17364A"/>
+                </a:solidFill>
+                <a:latin typeface="Aptos" pitchFamily="34" charset="0"/>
+                <a:ea typeface="Aptos" pitchFamily="34" charset="-122"/>
+                <a:cs typeface="Aptos" pitchFamily="34" charset="-120"/>
+              </a:rPr>
+              <a:t>Connect the concept to public health decisions, safeguards, documentation, or implementation work.</a:t>
+            </a:r>
+            <a:endParaRPr lang="en-US" sz="1250" dirty="0"/>
           </a:p>
         </p:txBody>
       </p:sp>
@@ -4404,7 +6552,32 @@
       </p:sp>
       <p:sp>
         <p:nvSpPr>
-          <p:cNvPr id="3" name="Text 1"/>
+          <p:cNvPr id="3" name="Shape 1"/>
+          <p:cNvSpPr/>
+          <p:nvPr/>
+        </p:nvSpPr>
+        <p:spPr>
+          <a:xfrm>
+            <a:off x="0" y="164592"/>
+            <a:ext cx="146304" cy="6693408"/>
+          </a:xfrm>
+          <a:prstGeom prst="rect">
+            <a:avLst/>
+          </a:prstGeom>
+          <a:solidFill>
+            <a:srgbClr val="2F8A28"/>
+          </a:solidFill>
+          <a:ln w="12700">
+            <a:solidFill>
+              <a:srgbClr val="2F8A28"/>
+            </a:solidFill>
+            <a:prstDash val="solid"/>
+          </a:ln>
+        </p:spPr>
+      </p:sp>
+      <p:sp>
+        <p:nvSpPr>
+          <p:cNvPr id="4" name="Text 2"/>
           <p:cNvSpPr/>
           <p:nvPr/>
         </p:nvSpPr>
@@ -4443,7 +6616,7 @@
       </p:sp>
       <p:sp>
         <p:nvSpPr>
-          <p:cNvPr id="4" name="Text 2"/>
+          <p:cNvPr id="5" name="Text 3"/>
           <p:cNvSpPr/>
           <p:nvPr/>
         </p:nvSpPr>
@@ -4482,7 +6655,7 @@
       </p:sp>
       <p:sp>
         <p:nvSpPr>
-          <p:cNvPr id="5" name="Text 3"/>
+          <p:cNvPr id="6" name="Text 4"/>
           <p:cNvSpPr/>
           <p:nvPr/>
         </p:nvSpPr>
@@ -4521,7 +6694,7 @@
       </p:sp>
       <p:sp>
         <p:nvSpPr>
-          <p:cNvPr id="6" name="Text 4"/>
+          <p:cNvPr id="7" name="Text 5"/>
           <p:cNvSpPr/>
           <p:nvPr/>
         </p:nvSpPr>
@@ -4554,7 +6727,7 @@
                 <a:ea typeface="Aptos Display" pitchFamily="34" charset="-122"/>
                 <a:cs typeface="Aptos Display" pitchFamily="34" charset="-120"/>
               </a:rPr>
-              <a:t>Expected Artifact or Evidence</a:t>
+              <a:t>Reflection Questions Continued</a:t>
             </a:r>
             <a:endParaRPr lang="en-US" sz="2700" dirty="0"/>
           </a:p>
@@ -4562,32 +6735,150 @@
       </p:sp>
       <p:sp>
         <p:nvSpPr>
-          <p:cNvPr id="7" name="Text 5"/>
-          <p:cNvSpPr/>
-          <p:nvPr/>
-        </p:nvSpPr>
-        <p:spPr>
-          <a:xfrm>
-            <a:off x="822960" y="1325880"/>
-            <a:ext cx="10378440" cy="4800600"/>
-          </a:xfrm>
-          <a:prstGeom prst="rect">
-            <a:avLst/>
-          </a:prstGeom>
-          <a:noFill/>
-          <a:ln/>
-        </p:spPr>
-        <p:txBody>
-          <a:bodyPr wrap="square" lIns="1016" tIns="1016" rIns="1016" bIns="1016" rtlCol="0" anchor="t">
+          <p:cNvPr id="8" name="Text 6"/>
+          <p:cNvSpPr/>
+          <p:nvPr/>
+        </p:nvSpPr>
+        <p:spPr>
+          <a:xfrm>
+            <a:off x="868680" y="1417320"/>
+            <a:ext cx="6675120" cy="4434840"/>
+          </a:xfrm>
+          <a:prstGeom prst="rect">
+            <a:avLst/>
+          </a:prstGeom>
+          <a:noFill/>
+          <a:ln/>
+        </p:spPr>
+        <p:txBody>
+          <a:bodyPr wrap="square" lIns="635" tIns="635" rIns="635" bIns="635" rtlCol="0" anchor="t">
             <a:normAutofit/>
           </a:bodyPr>
           <a:lstStyle/>
           <a:p>
+            <a:r>
+              <a:rPr lang="en-US" sz="1700" dirty="0">
+                <a:solidFill>
+                  <a:srgbClr val="17364A"/>
+                </a:solidFill>
+                <a:latin typeface="Aptos" pitchFamily="34" charset="0"/>
+                <a:ea typeface="Aptos" pitchFamily="34" charset="-122"/>
+                <a:cs typeface="Aptos" pitchFamily="34" charset="-120"/>
+              </a:rPr>
+              <a:t>How would staff know if an AI output was based on stale or incomplete data?</a:t>
+            </a:r>
+            <a:endParaRPr lang="en-US" sz="1700" dirty="0"/>
+          </a:p>
+          <a:p>
+            <a:r>
+              <a:rPr lang="en-US" sz="1700" dirty="0">
+                <a:solidFill>
+                  <a:srgbClr val="17364A"/>
+                </a:solidFill>
+                <a:latin typeface="Aptos" pitchFamily="34" charset="0"/>
+                <a:ea typeface="Aptos" pitchFamily="34" charset="-122"/>
+                <a:cs typeface="Aptos" pitchFamily="34" charset="-120"/>
+              </a:rPr>
+              <a:t>Who has authority to pause AI use when a pipeline fails?</a:t>
+            </a:r>
+            <a:endParaRPr lang="en-US" sz="1700" dirty="0"/>
+          </a:p>
+        </p:txBody>
+      </p:sp>
+      <p:sp>
+        <p:nvSpPr>
+          <p:cNvPr id="9" name="Shape 7"/>
+          <p:cNvSpPr/>
+          <p:nvPr/>
+        </p:nvSpPr>
+        <p:spPr>
+          <a:xfrm>
+            <a:off x="7909560" y="1417320"/>
+            <a:ext cx="3154680" cy="1828800"/>
+          </a:xfrm>
+          <a:prstGeom prst="roundRect">
+            <a:avLst>
+              <a:gd name="adj" fmla="val 6000"/>
+            </a:avLst>
+          </a:prstGeom>
+          <a:solidFill>
+            <a:srgbClr val="EEF8ED"/>
+          </a:solidFill>
+          <a:ln w="12700">
+            <a:solidFill>
+              <a:srgbClr val="B9D7E6"/>
+            </a:solidFill>
+            <a:prstDash val="solid"/>
+          </a:ln>
+        </p:spPr>
+      </p:sp>
+      <p:sp>
+        <p:nvSpPr>
+          <p:cNvPr id="10" name="Text 8"/>
+          <p:cNvSpPr/>
+          <p:nvPr/>
+        </p:nvSpPr>
+        <p:spPr>
+          <a:xfrm>
+            <a:off x="8074152" y="1563624"/>
+            <a:ext cx="2825496" cy="201168"/>
+          </a:xfrm>
+          <a:prstGeom prst="rect">
+            <a:avLst/>
+          </a:prstGeom>
+          <a:noFill/>
+          <a:ln/>
+        </p:spPr>
+        <p:txBody>
+          <a:bodyPr wrap="square" lIns="0" tIns="0" rIns="0" bIns="0" rtlCol="0" anchor="ctr"/>
+          <a:lstStyle/>
+          <a:p>
             <a:pPr indent="0" marL="0">
               <a:buNone/>
             </a:pPr>
             <a:r>
-              <a:rPr lang="en-US" sz="1420" dirty="0">
+              <a:rPr lang="en-US" sz="950" b="1" dirty="0">
+                <a:solidFill>
+                  <a:srgbClr val="0068B7"/>
+                </a:solidFill>
+                <a:latin typeface="Aptos" pitchFamily="34" charset="0"/>
+                <a:ea typeface="Aptos" pitchFamily="34" charset="-122"/>
+                <a:cs typeface="Aptos" pitchFamily="34" charset="-120"/>
+              </a:rPr>
+              <a:t>Key idea</a:t>
+            </a:r>
+            <a:endParaRPr lang="en-US" sz="950" dirty="0"/>
+          </a:p>
+        </p:txBody>
+      </p:sp>
+      <p:sp>
+        <p:nvSpPr>
+          <p:cNvPr id="11" name="Text 9"/>
+          <p:cNvSpPr/>
+          <p:nvPr/>
+        </p:nvSpPr>
+        <p:spPr>
+          <a:xfrm>
+            <a:off x="8074152" y="1856232"/>
+            <a:ext cx="2825496" cy="1261872"/>
+          </a:xfrm>
+          <a:prstGeom prst="rect">
+            <a:avLst/>
+          </a:prstGeom>
+          <a:noFill/>
+          <a:ln/>
+        </p:spPr>
+        <p:txBody>
+          <a:bodyPr wrap="square" lIns="0" tIns="0" rIns="0" bIns="0" rtlCol="0" anchor="t">
+            <a:normAutofit/>
+          </a:bodyPr>
+          <a:lstStyle/>
+          <a:p>
+            <a:pPr indent="0" marL="0">
+              <a:buNone/>
+            </a:pPr>
+            <a:r>
+              <a:rPr lang="en-US" sz="1250" dirty="0">
                 <a:solidFill>
                   <a:srgbClr val="17364A"/>
                 </a:solidFill>
@@ -4595,9 +6886,116 @@
                 <a:ea typeface="Aptos" pitchFamily="34" charset="-122"/>
                 <a:cs typeface="Aptos" pitchFamily="34" charset="-120"/>
               </a:rPr>
-              <a:t>Data pipeline map Pipeline readiness checklist Failure and escalation plan</a:t>
-            </a:r>
-            <a:endParaRPr lang="en-US" sz="1420" dirty="0"/>
+              <a:t>How would staff know if an AI output was based on stale or incomplete data?</a:t>
+            </a:r>
+            <a:endParaRPr lang="en-US" sz="1250" dirty="0"/>
+          </a:p>
+        </p:txBody>
+      </p:sp>
+      <p:sp>
+        <p:nvSpPr>
+          <p:cNvPr id="12" name="Shape 10"/>
+          <p:cNvSpPr/>
+          <p:nvPr/>
+        </p:nvSpPr>
+        <p:spPr>
+          <a:xfrm>
+            <a:off x="7909560" y="3520440"/>
+            <a:ext cx="3154680" cy="1737360"/>
+          </a:xfrm>
+          <a:prstGeom prst="roundRect">
+            <a:avLst>
+              <a:gd name="adj" fmla="val 6316"/>
+            </a:avLst>
+          </a:prstGeom>
+          <a:solidFill>
+            <a:srgbClr val="EAF6F8"/>
+          </a:solidFill>
+          <a:ln w="12700">
+            <a:solidFill>
+              <a:srgbClr val="B9D7E6"/>
+            </a:solidFill>
+            <a:prstDash val="solid"/>
+          </a:ln>
+        </p:spPr>
+      </p:sp>
+      <p:sp>
+        <p:nvSpPr>
+          <p:cNvPr id="13" name="Text 11"/>
+          <p:cNvSpPr/>
+          <p:nvPr/>
+        </p:nvSpPr>
+        <p:spPr>
+          <a:xfrm>
+            <a:off x="8074152" y="3666744"/>
+            <a:ext cx="2825496" cy="201168"/>
+          </a:xfrm>
+          <a:prstGeom prst="rect">
+            <a:avLst/>
+          </a:prstGeom>
+          <a:noFill/>
+          <a:ln/>
+        </p:spPr>
+        <p:txBody>
+          <a:bodyPr wrap="square" lIns="0" tIns="0" rIns="0" bIns="0" rtlCol="0" anchor="ctr"/>
+          <a:lstStyle/>
+          <a:p>
+            <a:pPr indent="0" marL="0">
+              <a:buNone/>
+            </a:pPr>
+            <a:r>
+              <a:rPr lang="en-US" sz="950" b="1" dirty="0">
+                <a:solidFill>
+                  <a:srgbClr val="0068B7"/>
+                </a:solidFill>
+                <a:latin typeface="Aptos" pitchFamily="34" charset="0"/>
+                <a:ea typeface="Aptos" pitchFamily="34" charset="-122"/>
+                <a:cs typeface="Aptos" pitchFamily="34" charset="-120"/>
+              </a:rPr>
+              <a:t>Use this for</a:t>
+            </a:r>
+            <a:endParaRPr lang="en-US" sz="950" dirty="0"/>
+          </a:p>
+        </p:txBody>
+      </p:sp>
+      <p:sp>
+        <p:nvSpPr>
+          <p:cNvPr id="14" name="Text 12"/>
+          <p:cNvSpPr/>
+          <p:nvPr/>
+        </p:nvSpPr>
+        <p:spPr>
+          <a:xfrm>
+            <a:off x="8074152" y="3959352"/>
+            <a:ext cx="2825496" cy="1170432"/>
+          </a:xfrm>
+          <a:prstGeom prst="rect">
+            <a:avLst/>
+          </a:prstGeom>
+          <a:noFill/>
+          <a:ln/>
+        </p:spPr>
+        <p:txBody>
+          <a:bodyPr wrap="square" lIns="0" tIns="0" rIns="0" bIns="0" rtlCol="0" anchor="t">
+            <a:normAutofit/>
+          </a:bodyPr>
+          <a:lstStyle/>
+          <a:p>
+            <a:pPr indent="0" marL="0">
+              <a:buNone/>
+            </a:pPr>
+            <a:r>
+              <a:rPr lang="en-US" sz="1250" dirty="0">
+                <a:solidFill>
+                  <a:srgbClr val="17364A"/>
+                </a:solidFill>
+                <a:latin typeface="Aptos" pitchFamily="34" charset="0"/>
+                <a:ea typeface="Aptos" pitchFamily="34" charset="-122"/>
+                <a:cs typeface="Aptos" pitchFamily="34" charset="-120"/>
+              </a:rPr>
+              <a:t>Connect the concept to public health decisions, safeguards, documentation, or implementation work.</a:t>
+            </a:r>
+            <a:endParaRPr lang="en-US" sz="1250" dirty="0"/>
           </a:p>
         </p:txBody>
       </p:sp>
@@ -4660,7 +7058,32 @@
       </p:sp>
       <p:sp>
         <p:nvSpPr>
-          <p:cNvPr id="3" name="Text 1"/>
+          <p:cNvPr id="3" name="Shape 1"/>
+          <p:cNvSpPr/>
+          <p:nvPr/>
+        </p:nvSpPr>
+        <p:spPr>
+          <a:xfrm>
+            <a:off x="0" y="164592"/>
+            <a:ext cx="146304" cy="6693408"/>
+          </a:xfrm>
+          <a:prstGeom prst="rect">
+            <a:avLst/>
+          </a:prstGeom>
+          <a:solidFill>
+            <a:srgbClr val="2F8A28"/>
+          </a:solidFill>
+          <a:ln w="12700">
+            <a:solidFill>
+              <a:srgbClr val="2F8A28"/>
+            </a:solidFill>
+            <a:prstDash val="solid"/>
+          </a:ln>
+        </p:spPr>
+      </p:sp>
+      <p:sp>
+        <p:nvSpPr>
+          <p:cNvPr id="4" name="Text 2"/>
           <p:cNvSpPr/>
           <p:nvPr/>
         </p:nvSpPr>
@@ -4699,7 +7122,7 @@
       </p:sp>
       <p:sp>
         <p:nvSpPr>
-          <p:cNvPr id="4" name="Text 2"/>
+          <p:cNvPr id="5" name="Text 3"/>
           <p:cNvSpPr/>
           <p:nvPr/>
         </p:nvSpPr>
@@ -4738,7 +7161,7 @@
       </p:sp>
       <p:sp>
         <p:nvSpPr>
-          <p:cNvPr id="5" name="Text 3"/>
+          <p:cNvPr id="6" name="Text 4"/>
           <p:cNvSpPr/>
           <p:nvPr/>
         </p:nvSpPr>
@@ -4777,13 +7200,77 @@
       </p:sp>
       <p:sp>
         <p:nvSpPr>
-          <p:cNvPr id="6" name="Text 4"/>
+          <p:cNvPr id="7" name="Shape 5"/>
           <p:cNvSpPr/>
           <p:nvPr/>
         </p:nvSpPr>
         <p:spPr>
           <a:xfrm>
             <a:off x="640080" y="658368"/>
+            <a:ext cx="420624" cy="420624"/>
+          </a:xfrm>
+          <a:prstGeom prst="ellipse">
+            <a:avLst/>
+          </a:prstGeom>
+          <a:solidFill>
+            <a:srgbClr val="0068B7"/>
+          </a:solidFill>
+          <a:ln w="12700">
+            <a:solidFill>
+              <a:srgbClr val="0068B7"/>
+            </a:solidFill>
+            <a:prstDash val="solid"/>
+          </a:ln>
+        </p:spPr>
+      </p:sp>
+      <p:sp>
+        <p:nvSpPr>
+          <p:cNvPr id="8" name="Text 6"/>
+          <p:cNvSpPr/>
+          <p:nvPr/>
+        </p:nvSpPr>
+        <p:spPr>
+          <a:xfrm>
+            <a:off x="640080" y="731520"/>
+            <a:ext cx="420624" cy="164592"/>
+          </a:xfrm>
+          <a:prstGeom prst="rect">
+            <a:avLst/>
+          </a:prstGeom>
+          <a:noFill/>
+          <a:ln/>
+        </p:spPr>
+        <p:txBody>
+          <a:bodyPr wrap="square" lIns="0" tIns="0" rIns="0" bIns="0" rtlCol="0" anchor="ctr"/>
+          <a:lstStyle/>
+          <a:p>
+            <a:pPr algn="ctr" indent="0" marL="0">
+              <a:buNone/>
+            </a:pPr>
+            <a:r>
+              <a:rPr lang="en-US" sz="1100" b="1" dirty="0">
+                <a:solidFill>
+                  <a:srgbClr val="FFFFFF"/>
+                </a:solidFill>
+                <a:latin typeface="Aptos" pitchFamily="34" charset="0"/>
+                <a:ea typeface="Aptos" pitchFamily="34" charset="-122"/>
+                <a:cs typeface="Aptos" pitchFamily="34" charset="-120"/>
+              </a:rPr>
+              <a:t>10</a:t>
+            </a:r>
+            <a:endParaRPr lang="en-US" sz="1100" dirty="0"/>
+          </a:p>
+        </p:txBody>
+      </p:sp>
+      <p:sp>
+        <p:nvSpPr>
+          <p:cNvPr id="9" name="Text 7"/>
+          <p:cNvSpPr/>
+          <p:nvPr/>
+        </p:nvSpPr>
+        <p:spPr>
+          <a:xfrm>
+            <a:off x="640080" y="621792"/>
             <a:ext cx="10881360" cy="566928"/>
           </a:xfrm>
           <a:prstGeom prst="rect">
@@ -4810,7 +7297,7 @@
                 <a:ea typeface="Aptos Display" pitchFamily="34" charset="-122"/>
                 <a:cs typeface="Aptos Display" pitchFamily="34" charset="-120"/>
               </a:rPr>
-              <a:t>Expected Artifact or Evidence Continued</a:t>
+              <a:t>Practical Exercise</a:t>
             </a:r>
             <a:endParaRPr lang="en-US" sz="2700" dirty="0"/>
           </a:p>
@@ -4818,32 +7305,164 @@
       </p:sp>
       <p:sp>
         <p:nvSpPr>
-          <p:cNvPr id="7" name="Text 5"/>
-          <p:cNvSpPr/>
-          <p:nvPr/>
-        </p:nvSpPr>
-        <p:spPr>
-          <a:xfrm>
-            <a:off x="822960" y="1325880"/>
-            <a:ext cx="10378440" cy="4800600"/>
-          </a:xfrm>
-          <a:prstGeom prst="rect">
-            <a:avLst/>
-          </a:prstGeom>
-          <a:noFill/>
-          <a:ln/>
-        </p:spPr>
-        <p:txBody>
-          <a:bodyPr wrap="square" lIns="1016" tIns="1016" rIns="1016" bIns="1016" rtlCol="0" anchor="t">
+          <p:cNvPr id="10" name="Text 8"/>
+          <p:cNvSpPr/>
+          <p:nvPr/>
+        </p:nvSpPr>
+        <p:spPr>
+          <a:xfrm>
+            <a:off x="868680" y="1417320"/>
+            <a:ext cx="6675120" cy="4434840"/>
+          </a:xfrm>
+          <a:prstGeom prst="rect">
+            <a:avLst/>
+          </a:prstGeom>
+          <a:noFill/>
+          <a:ln/>
+        </p:spPr>
+        <p:txBody>
+          <a:bodyPr wrap="square" lIns="635" tIns="635" rIns="635" bIns="635" rtlCol="0" anchor="t">
             <a:normAutofit/>
           </a:bodyPr>
           <a:lstStyle/>
           <a:p>
+            <a:r>
+              <a:rPr lang="en-US" sz="1700" dirty="0">
+                <a:solidFill>
+                  <a:srgbClr val="17364A"/>
+                </a:solidFill>
+                <a:latin typeface="Aptos" pitchFamily="34" charset="0"/>
+                <a:ea typeface="Aptos" pitchFamily="34" charset="-122"/>
+                <a:cs typeface="Aptos" pitchFamily="34" charset="-120"/>
+              </a:rPr>
+              <a:t>Create a data pipeline readiness checklist for one AI-supported workflow.</a:t>
+            </a:r>
+            <a:endParaRPr lang="en-US" sz="1700" dirty="0"/>
+          </a:p>
+          <a:p>
+            <a:r>
+              <a:rPr lang="en-US" sz="1700" dirty="0">
+                <a:solidFill>
+                  <a:srgbClr val="17364A"/>
+                </a:solidFill>
+                <a:latin typeface="Aptos" pitchFamily="34" charset="0"/>
+                <a:ea typeface="Aptos" pitchFamily="34" charset="-122"/>
+                <a:cs typeface="Aptos" pitchFamily="34" charset="-120"/>
+              </a:rPr>
+              <a:t>Identify the data source, update frequency, required fields, validation checks, transformations, lineage documentation,.</a:t>
+            </a:r>
+            <a:endParaRPr lang="en-US" sz="1700" dirty="0"/>
+          </a:p>
+          <a:p>
+            <a:r>
+              <a:rPr lang="en-US" sz="1700" dirty="0">
+                <a:solidFill>
+                  <a:srgbClr val="17364A"/>
+                </a:solidFill>
+                <a:latin typeface="Aptos" pitchFamily="34" charset="0"/>
+                <a:ea typeface="Aptos" pitchFamily="34" charset="-122"/>
+                <a:cs typeface="Aptos" pitchFamily="34" charset="-120"/>
+              </a:rPr>
+              <a:t>Document at least three pipeline failure scenarios and describe how each should be detected, escalated, and communicated to.</a:t>
+            </a:r>
+            <a:endParaRPr lang="en-US" sz="1700" dirty="0"/>
+          </a:p>
+        </p:txBody>
+      </p:sp>
+      <p:sp>
+        <p:nvSpPr>
+          <p:cNvPr id="11" name="Shape 9"/>
+          <p:cNvSpPr/>
+          <p:nvPr/>
+        </p:nvSpPr>
+        <p:spPr>
+          <a:xfrm>
+            <a:off x="7909560" y="1417320"/>
+            <a:ext cx="3154680" cy="1828800"/>
+          </a:xfrm>
+          <a:prstGeom prst="roundRect">
+            <a:avLst>
+              <a:gd name="adj" fmla="val 6000"/>
+            </a:avLst>
+          </a:prstGeom>
+          <a:solidFill>
+            <a:srgbClr val="EEF8ED"/>
+          </a:solidFill>
+          <a:ln w="12700">
+            <a:solidFill>
+              <a:srgbClr val="B9D7E6"/>
+            </a:solidFill>
+            <a:prstDash val="solid"/>
+          </a:ln>
+        </p:spPr>
+      </p:sp>
+      <p:sp>
+        <p:nvSpPr>
+          <p:cNvPr id="12" name="Text 10"/>
+          <p:cNvSpPr/>
+          <p:nvPr/>
+        </p:nvSpPr>
+        <p:spPr>
+          <a:xfrm>
+            <a:off x="8074152" y="1563624"/>
+            <a:ext cx="2825496" cy="201168"/>
+          </a:xfrm>
+          <a:prstGeom prst="rect">
+            <a:avLst/>
+          </a:prstGeom>
+          <a:noFill/>
+          <a:ln/>
+        </p:spPr>
+        <p:txBody>
+          <a:bodyPr wrap="square" lIns="0" tIns="0" rIns="0" bIns="0" rtlCol="0" anchor="ctr"/>
+          <a:lstStyle/>
+          <a:p>
             <a:pPr indent="0" marL="0">
               <a:buNone/>
             </a:pPr>
             <a:r>
-              <a:rPr lang="en-US" sz="1420" dirty="0">
+              <a:rPr lang="en-US" sz="950" b="1" dirty="0">
+                <a:solidFill>
+                  <a:srgbClr val="0068B7"/>
+                </a:solidFill>
+                <a:latin typeface="Aptos" pitchFamily="34" charset="0"/>
+                <a:ea typeface="Aptos" pitchFamily="34" charset="-122"/>
+                <a:cs typeface="Aptos" pitchFamily="34" charset="-120"/>
+              </a:rPr>
+              <a:t>Key idea</a:t>
+            </a:r>
+            <a:endParaRPr lang="en-US" sz="950" dirty="0"/>
+          </a:p>
+        </p:txBody>
+      </p:sp>
+      <p:sp>
+        <p:nvSpPr>
+          <p:cNvPr id="13" name="Text 11"/>
+          <p:cNvSpPr/>
+          <p:nvPr/>
+        </p:nvSpPr>
+        <p:spPr>
+          <a:xfrm>
+            <a:off x="8074152" y="1856232"/>
+            <a:ext cx="2825496" cy="1261872"/>
+          </a:xfrm>
+          <a:prstGeom prst="rect">
+            <a:avLst/>
+          </a:prstGeom>
+          <a:noFill/>
+          <a:ln/>
+        </p:spPr>
+        <p:txBody>
+          <a:bodyPr wrap="square" lIns="0" tIns="0" rIns="0" bIns="0" rtlCol="0" anchor="t">
+            <a:normAutofit/>
+          </a:bodyPr>
+          <a:lstStyle/>
+          <a:p>
+            <a:pPr indent="0" marL="0">
+              <a:buNone/>
+            </a:pPr>
+            <a:r>
+              <a:rPr lang="en-US" sz="1250" dirty="0">
                 <a:solidFill>
                   <a:srgbClr val="17364A"/>
                 </a:solidFill>
@@ -4851,9 +7470,116 @@
                 <a:ea typeface="Aptos" pitchFamily="34" charset="-122"/>
                 <a:cs typeface="Aptos" pitchFamily="34" charset="-120"/>
               </a:rPr>
-              <a:t>Known data limitations statement</a:t>
-            </a:r>
-            <a:endParaRPr lang="en-US" sz="1420" dirty="0"/>
+              <a:t>Create a data pipeline readiness checklist for one AI-supported workflow.</a:t>
+            </a:r>
+            <a:endParaRPr lang="en-US" sz="1250" dirty="0"/>
+          </a:p>
+        </p:txBody>
+      </p:sp>
+      <p:sp>
+        <p:nvSpPr>
+          <p:cNvPr id="14" name="Shape 12"/>
+          <p:cNvSpPr/>
+          <p:nvPr/>
+        </p:nvSpPr>
+        <p:spPr>
+          <a:xfrm>
+            <a:off x="7909560" y="3520440"/>
+            <a:ext cx="3154680" cy="1737360"/>
+          </a:xfrm>
+          <a:prstGeom prst="roundRect">
+            <a:avLst>
+              <a:gd name="adj" fmla="val 6316"/>
+            </a:avLst>
+          </a:prstGeom>
+          <a:solidFill>
+            <a:srgbClr val="EAF6F8"/>
+          </a:solidFill>
+          <a:ln w="12700">
+            <a:solidFill>
+              <a:srgbClr val="B9D7E6"/>
+            </a:solidFill>
+            <a:prstDash val="solid"/>
+          </a:ln>
+        </p:spPr>
+      </p:sp>
+      <p:sp>
+        <p:nvSpPr>
+          <p:cNvPr id="15" name="Text 13"/>
+          <p:cNvSpPr/>
+          <p:nvPr/>
+        </p:nvSpPr>
+        <p:spPr>
+          <a:xfrm>
+            <a:off x="8074152" y="3666744"/>
+            <a:ext cx="2825496" cy="201168"/>
+          </a:xfrm>
+          <a:prstGeom prst="rect">
+            <a:avLst/>
+          </a:prstGeom>
+          <a:noFill/>
+          <a:ln/>
+        </p:spPr>
+        <p:txBody>
+          <a:bodyPr wrap="square" lIns="0" tIns="0" rIns="0" bIns="0" rtlCol="0" anchor="ctr"/>
+          <a:lstStyle/>
+          <a:p>
+            <a:pPr indent="0" marL="0">
+              <a:buNone/>
+            </a:pPr>
+            <a:r>
+              <a:rPr lang="en-US" sz="950" b="1" dirty="0">
+                <a:solidFill>
+                  <a:srgbClr val="0068B7"/>
+                </a:solidFill>
+                <a:latin typeface="Aptos" pitchFamily="34" charset="0"/>
+                <a:ea typeface="Aptos" pitchFamily="34" charset="-122"/>
+                <a:cs typeface="Aptos" pitchFamily="34" charset="-120"/>
+              </a:rPr>
+              <a:t>Use this for</a:t>
+            </a:r>
+            <a:endParaRPr lang="en-US" sz="950" dirty="0"/>
+          </a:p>
+        </p:txBody>
+      </p:sp>
+      <p:sp>
+        <p:nvSpPr>
+          <p:cNvPr id="16" name="Text 14"/>
+          <p:cNvSpPr/>
+          <p:nvPr/>
+        </p:nvSpPr>
+        <p:spPr>
+          <a:xfrm>
+            <a:off x="8074152" y="3959352"/>
+            <a:ext cx="2825496" cy="1170432"/>
+          </a:xfrm>
+          <a:prstGeom prst="rect">
+            <a:avLst/>
+          </a:prstGeom>
+          <a:noFill/>
+          <a:ln/>
+        </p:spPr>
+        <p:txBody>
+          <a:bodyPr wrap="square" lIns="0" tIns="0" rIns="0" bIns="0" rtlCol="0" anchor="t">
+            <a:normAutofit/>
+          </a:bodyPr>
+          <a:lstStyle/>
+          <a:p>
+            <a:pPr indent="0" marL="0">
+              <a:buNone/>
+            </a:pPr>
+            <a:r>
+              <a:rPr lang="en-US" sz="1250" dirty="0">
+                <a:solidFill>
+                  <a:srgbClr val="17364A"/>
+                </a:solidFill>
+                <a:latin typeface="Aptos" pitchFamily="34" charset="0"/>
+                <a:ea typeface="Aptos" pitchFamily="34" charset="-122"/>
+                <a:cs typeface="Aptos" pitchFamily="34" charset="-120"/>
+              </a:rPr>
+              <a:t>Connect the concept to public health decisions, safeguards, documentation, or implementation work.</a:t>
+            </a:r>
+            <a:endParaRPr lang="en-US" sz="1250" dirty="0"/>
           </a:p>
         </p:txBody>
       </p:sp>
@@ -4916,7 +7642,32 @@
       </p:sp>
       <p:sp>
         <p:nvSpPr>
-          <p:cNvPr id="3" name="Text 1"/>
+          <p:cNvPr id="3" name="Shape 1"/>
+          <p:cNvSpPr/>
+          <p:nvPr/>
+        </p:nvSpPr>
+        <p:spPr>
+          <a:xfrm>
+            <a:off x="0" y="164592"/>
+            <a:ext cx="146304" cy="6693408"/>
+          </a:xfrm>
+          <a:prstGeom prst="rect">
+            <a:avLst/>
+          </a:prstGeom>
+          <a:solidFill>
+            <a:srgbClr val="2F8A28"/>
+          </a:solidFill>
+          <a:ln w="12700">
+            <a:solidFill>
+              <a:srgbClr val="2F8A28"/>
+            </a:solidFill>
+            <a:prstDash val="solid"/>
+          </a:ln>
+        </p:spPr>
+      </p:sp>
+      <p:sp>
+        <p:nvSpPr>
+          <p:cNvPr id="4" name="Text 2"/>
           <p:cNvSpPr/>
           <p:nvPr/>
         </p:nvSpPr>
@@ -4955,7 +7706,7 @@
       </p:sp>
       <p:sp>
         <p:nvSpPr>
-          <p:cNvPr id="4" name="Text 2"/>
+          <p:cNvPr id="5" name="Text 3"/>
           <p:cNvSpPr/>
           <p:nvPr/>
         </p:nvSpPr>
@@ -4994,7 +7745,7 @@
       </p:sp>
       <p:sp>
         <p:nvSpPr>
-          <p:cNvPr id="5" name="Text 3"/>
+          <p:cNvPr id="6" name="Text 4"/>
           <p:cNvSpPr/>
           <p:nvPr/>
         </p:nvSpPr>
@@ -5033,13 +7784,77 @@
       </p:sp>
       <p:sp>
         <p:nvSpPr>
-          <p:cNvPr id="6" name="Text 4"/>
+          <p:cNvPr id="7" name="Shape 5"/>
           <p:cNvSpPr/>
           <p:nvPr/>
         </p:nvSpPr>
         <p:spPr>
           <a:xfrm>
             <a:off x="640080" y="658368"/>
+            <a:ext cx="420624" cy="420624"/>
+          </a:xfrm>
+          <a:prstGeom prst="ellipse">
+            <a:avLst/>
+          </a:prstGeom>
+          <a:solidFill>
+            <a:srgbClr val="0068B7"/>
+          </a:solidFill>
+          <a:ln w="12700">
+            <a:solidFill>
+              <a:srgbClr val="0068B7"/>
+            </a:solidFill>
+            <a:prstDash val="solid"/>
+          </a:ln>
+        </p:spPr>
+      </p:sp>
+      <p:sp>
+        <p:nvSpPr>
+          <p:cNvPr id="8" name="Text 6"/>
+          <p:cNvSpPr/>
+          <p:nvPr/>
+        </p:nvSpPr>
+        <p:spPr>
+          <a:xfrm>
+            <a:off x="640080" y="731520"/>
+            <a:ext cx="420624" cy="164592"/>
+          </a:xfrm>
+          <a:prstGeom prst="rect">
+            <a:avLst/>
+          </a:prstGeom>
+          <a:noFill/>
+          <a:ln/>
+        </p:spPr>
+        <p:txBody>
+          <a:bodyPr wrap="square" lIns="0" tIns="0" rIns="0" bIns="0" rtlCol="0" anchor="ctr"/>
+          <a:lstStyle/>
+          <a:p>
+            <a:pPr algn="ctr" indent="0" marL="0">
+              <a:buNone/>
+            </a:pPr>
+            <a:r>
+              <a:rPr lang="en-US" sz="1100" b="1" dirty="0">
+                <a:solidFill>
+                  <a:srgbClr val="FFFFFF"/>
+                </a:solidFill>
+                <a:latin typeface="Aptos" pitchFamily="34" charset="0"/>
+                <a:ea typeface="Aptos" pitchFamily="34" charset="-122"/>
+                <a:cs typeface="Aptos" pitchFamily="34" charset="-120"/>
+              </a:rPr>
+              <a:t>11</a:t>
+            </a:r>
+            <a:endParaRPr lang="en-US" sz="1100" dirty="0"/>
+          </a:p>
+        </p:txBody>
+      </p:sp>
+      <p:sp>
+        <p:nvSpPr>
+          <p:cNvPr id="9" name="Text 7"/>
+          <p:cNvSpPr/>
+          <p:nvPr/>
+        </p:nvSpPr>
+        <p:spPr>
+          <a:xfrm>
+            <a:off x="640080" y="621792"/>
             <a:ext cx="10881360" cy="566928"/>
           </a:xfrm>
           <a:prstGeom prst="rect">
@@ -5066,7 +7881,7 @@
                 <a:ea typeface="Aptos Display" pitchFamily="34" charset="-122"/>
                 <a:cs typeface="Aptos Display" pitchFamily="34" charset="-120"/>
               </a:rPr>
-              <a:t>Expected Assignment</a:t>
+              <a:t>Expected Artifact or Evidence</a:t>
             </a:r>
             <a:endParaRPr lang="en-US" sz="2700" dirty="0"/>
           </a:p>
@@ -5074,14 +7889,14 @@
       </p:sp>
       <p:sp>
         <p:nvSpPr>
-          <p:cNvPr id="7" name="Text 5"/>
-          <p:cNvSpPr/>
-          <p:nvPr/>
-        </p:nvSpPr>
-        <p:spPr>
-          <a:xfrm>
-            <a:off x="822960" y="1325880"/>
-            <a:ext cx="10378440" cy="4800600"/>
+          <p:cNvPr id="10" name="Text 8"/>
+          <p:cNvSpPr/>
+          <p:nvPr/>
+        </p:nvSpPr>
+        <p:spPr>
+          <a:xfrm>
+            <a:off x="868680" y="1417320"/>
+            <a:ext cx="6675120" cy="4434840"/>
           </a:xfrm>
           <a:prstGeom prst="rect">
             <a:avLst/>
@@ -5096,7 +7911,7 @@
           <a:lstStyle/>
           <a:p>
             <a:r>
-              <a:rPr lang="en-US" sz="1450" dirty="0">
+              <a:rPr lang="en-US" sz="1700" dirty="0">
                 <a:solidFill>
                   <a:srgbClr val="17364A"/>
                 </a:solidFill>
@@ -5106,11 +7921,11 @@
               </a:rPr>
               <a:t>Data pipeline map</a:t>
             </a:r>
-            <a:endParaRPr lang="en-US" sz="1450" dirty="0"/>
-          </a:p>
-          <a:p>
-            <a:r>
-              <a:rPr lang="en-US" sz="1450" dirty="0">
+            <a:endParaRPr lang="en-US" sz="1700" dirty="0"/>
+          </a:p>
+          <a:p>
+            <a:r>
+              <a:rPr lang="en-US" sz="1700" dirty="0">
                 <a:solidFill>
                   <a:srgbClr val="17364A"/>
                 </a:solidFill>
@@ -5120,11 +7935,11 @@
               </a:rPr>
               <a:t>Pipeline readiness checklist</a:t>
             </a:r>
-            <a:endParaRPr lang="en-US" sz="1450" dirty="0"/>
-          </a:p>
-          <a:p>
-            <a:r>
-              <a:rPr lang="en-US" sz="1450" dirty="0">
+            <a:endParaRPr lang="en-US" sz="1700" dirty="0"/>
+          </a:p>
+          <a:p>
+            <a:r>
+              <a:rPr lang="en-US" sz="1700" dirty="0">
                 <a:solidFill>
                   <a:srgbClr val="17364A"/>
                 </a:solidFill>
@@ -5134,11 +7949,104 @@
               </a:rPr>
               <a:t>Failure and escalation plan</a:t>
             </a:r>
-            <a:endParaRPr lang="en-US" sz="1450" dirty="0"/>
-          </a:p>
-          <a:p>
-            <a:r>
-              <a:rPr lang="en-US" sz="1450" dirty="0">
+            <a:endParaRPr lang="en-US" sz="1700" dirty="0"/>
+          </a:p>
+        </p:txBody>
+      </p:sp>
+      <p:sp>
+        <p:nvSpPr>
+          <p:cNvPr id="11" name="Shape 9"/>
+          <p:cNvSpPr/>
+          <p:nvPr/>
+        </p:nvSpPr>
+        <p:spPr>
+          <a:xfrm>
+            <a:off x="7909560" y="1417320"/>
+            <a:ext cx="3154680" cy="1828800"/>
+          </a:xfrm>
+          <a:prstGeom prst="roundRect">
+            <a:avLst>
+              <a:gd name="adj" fmla="val 6000"/>
+            </a:avLst>
+          </a:prstGeom>
+          <a:solidFill>
+            <a:srgbClr val="EEF8ED"/>
+          </a:solidFill>
+          <a:ln w="12700">
+            <a:solidFill>
+              <a:srgbClr val="B9D7E6"/>
+            </a:solidFill>
+            <a:prstDash val="solid"/>
+          </a:ln>
+        </p:spPr>
+      </p:sp>
+      <p:sp>
+        <p:nvSpPr>
+          <p:cNvPr id="12" name="Text 10"/>
+          <p:cNvSpPr/>
+          <p:nvPr/>
+        </p:nvSpPr>
+        <p:spPr>
+          <a:xfrm>
+            <a:off x="8074152" y="1563624"/>
+            <a:ext cx="2825496" cy="201168"/>
+          </a:xfrm>
+          <a:prstGeom prst="rect">
+            <a:avLst/>
+          </a:prstGeom>
+          <a:noFill/>
+          <a:ln/>
+        </p:spPr>
+        <p:txBody>
+          <a:bodyPr wrap="square" lIns="0" tIns="0" rIns="0" bIns="0" rtlCol="0" anchor="ctr"/>
+          <a:lstStyle/>
+          <a:p>
+            <a:pPr indent="0" marL="0">
+              <a:buNone/>
+            </a:pPr>
+            <a:r>
+              <a:rPr lang="en-US" sz="950" b="1" dirty="0">
+                <a:solidFill>
+                  <a:srgbClr val="0068B7"/>
+                </a:solidFill>
+                <a:latin typeface="Aptos" pitchFamily="34" charset="0"/>
+                <a:ea typeface="Aptos" pitchFamily="34" charset="-122"/>
+                <a:cs typeface="Aptos" pitchFamily="34" charset="-120"/>
+              </a:rPr>
+              <a:t>Key idea</a:t>
+            </a:r>
+            <a:endParaRPr lang="en-US" sz="950" dirty="0"/>
+          </a:p>
+        </p:txBody>
+      </p:sp>
+      <p:sp>
+        <p:nvSpPr>
+          <p:cNvPr id="13" name="Text 11"/>
+          <p:cNvSpPr/>
+          <p:nvPr/>
+        </p:nvSpPr>
+        <p:spPr>
+          <a:xfrm>
+            <a:off x="8074152" y="1856232"/>
+            <a:ext cx="2825496" cy="1261872"/>
+          </a:xfrm>
+          <a:prstGeom prst="rect">
+            <a:avLst/>
+          </a:prstGeom>
+          <a:noFill/>
+          <a:ln/>
+        </p:spPr>
+        <p:txBody>
+          <a:bodyPr wrap="square" lIns="0" tIns="0" rIns="0" bIns="0" rtlCol="0" anchor="t">
+            <a:normAutofit/>
+          </a:bodyPr>
+          <a:lstStyle/>
+          <a:p>
+            <a:pPr indent="0" marL="0">
+              <a:buNone/>
+            </a:pPr>
+            <a:r>
+              <a:rPr lang="en-US" sz="1250" dirty="0">
                 <a:solidFill>
                   <a:srgbClr val="17364A"/>
                 </a:solidFill>
@@ -5146,9 +8054,116 @@
                 <a:ea typeface="Aptos" pitchFamily="34" charset="-122"/>
                 <a:cs typeface="Aptos" pitchFamily="34" charset="-120"/>
               </a:rPr>
-              <a:t>Known data limitations statement</a:t>
-            </a:r>
-            <a:endParaRPr lang="en-US" sz="1450" dirty="0"/>
+              <a:t>Data pipeline map</a:t>
+            </a:r>
+            <a:endParaRPr lang="en-US" sz="1250" dirty="0"/>
+          </a:p>
+        </p:txBody>
+      </p:sp>
+      <p:sp>
+        <p:nvSpPr>
+          <p:cNvPr id="14" name="Shape 12"/>
+          <p:cNvSpPr/>
+          <p:nvPr/>
+        </p:nvSpPr>
+        <p:spPr>
+          <a:xfrm>
+            <a:off x="7909560" y="3520440"/>
+            <a:ext cx="3154680" cy="1737360"/>
+          </a:xfrm>
+          <a:prstGeom prst="roundRect">
+            <a:avLst>
+              <a:gd name="adj" fmla="val 6316"/>
+            </a:avLst>
+          </a:prstGeom>
+          <a:solidFill>
+            <a:srgbClr val="EAF6F8"/>
+          </a:solidFill>
+          <a:ln w="12700">
+            <a:solidFill>
+              <a:srgbClr val="B9D7E6"/>
+            </a:solidFill>
+            <a:prstDash val="solid"/>
+          </a:ln>
+        </p:spPr>
+      </p:sp>
+      <p:sp>
+        <p:nvSpPr>
+          <p:cNvPr id="15" name="Text 13"/>
+          <p:cNvSpPr/>
+          <p:nvPr/>
+        </p:nvSpPr>
+        <p:spPr>
+          <a:xfrm>
+            <a:off x="8074152" y="3666744"/>
+            <a:ext cx="2825496" cy="201168"/>
+          </a:xfrm>
+          <a:prstGeom prst="rect">
+            <a:avLst/>
+          </a:prstGeom>
+          <a:noFill/>
+          <a:ln/>
+        </p:spPr>
+        <p:txBody>
+          <a:bodyPr wrap="square" lIns="0" tIns="0" rIns="0" bIns="0" rtlCol="0" anchor="ctr"/>
+          <a:lstStyle/>
+          <a:p>
+            <a:pPr indent="0" marL="0">
+              <a:buNone/>
+            </a:pPr>
+            <a:r>
+              <a:rPr lang="en-US" sz="950" b="1" dirty="0">
+                <a:solidFill>
+                  <a:srgbClr val="0068B7"/>
+                </a:solidFill>
+                <a:latin typeface="Aptos" pitchFamily="34" charset="0"/>
+                <a:ea typeface="Aptos" pitchFamily="34" charset="-122"/>
+                <a:cs typeface="Aptos" pitchFamily="34" charset="-120"/>
+              </a:rPr>
+              <a:t>Use this for</a:t>
+            </a:r>
+            <a:endParaRPr lang="en-US" sz="950" dirty="0"/>
+          </a:p>
+        </p:txBody>
+      </p:sp>
+      <p:sp>
+        <p:nvSpPr>
+          <p:cNvPr id="16" name="Text 14"/>
+          <p:cNvSpPr/>
+          <p:nvPr/>
+        </p:nvSpPr>
+        <p:spPr>
+          <a:xfrm>
+            <a:off x="8074152" y="3959352"/>
+            <a:ext cx="2825496" cy="1170432"/>
+          </a:xfrm>
+          <a:prstGeom prst="rect">
+            <a:avLst/>
+          </a:prstGeom>
+          <a:noFill/>
+          <a:ln/>
+        </p:spPr>
+        <p:txBody>
+          <a:bodyPr wrap="square" lIns="0" tIns="0" rIns="0" bIns="0" rtlCol="0" anchor="t">
+            <a:normAutofit/>
+          </a:bodyPr>
+          <a:lstStyle/>
+          <a:p>
+            <a:pPr indent="0" marL="0">
+              <a:buNone/>
+            </a:pPr>
+            <a:r>
+              <a:rPr lang="en-US" sz="1250" dirty="0">
+                <a:solidFill>
+                  <a:srgbClr val="17364A"/>
+                </a:solidFill>
+                <a:latin typeface="Aptos" pitchFamily="34" charset="0"/>
+                <a:ea typeface="Aptos" pitchFamily="34" charset="-122"/>
+                <a:cs typeface="Aptos" pitchFamily="34" charset="-120"/>
+              </a:rPr>
+              <a:t>Connect the concept to public health decisions, safeguards, documentation, or implementation work.</a:t>
+            </a:r>
+            <a:endParaRPr lang="en-US" sz="1250" dirty="0"/>
           </a:p>
         </p:txBody>
       </p:sp>
@@ -5211,7 +8226,32 @@
       </p:sp>
       <p:sp>
         <p:nvSpPr>
-          <p:cNvPr id="3" name="Text 1"/>
+          <p:cNvPr id="3" name="Shape 1"/>
+          <p:cNvSpPr/>
+          <p:nvPr/>
+        </p:nvSpPr>
+        <p:spPr>
+          <a:xfrm>
+            <a:off x="0" y="164592"/>
+            <a:ext cx="146304" cy="6693408"/>
+          </a:xfrm>
+          <a:prstGeom prst="rect">
+            <a:avLst/>
+          </a:prstGeom>
+          <a:solidFill>
+            <a:srgbClr val="2F8A28"/>
+          </a:solidFill>
+          <a:ln w="12700">
+            <a:solidFill>
+              <a:srgbClr val="2F8A28"/>
+            </a:solidFill>
+            <a:prstDash val="solid"/>
+          </a:ln>
+        </p:spPr>
+      </p:sp>
+      <p:sp>
+        <p:nvSpPr>
+          <p:cNvPr id="4" name="Text 2"/>
           <p:cNvSpPr/>
           <p:nvPr/>
         </p:nvSpPr>
@@ -5250,7 +8290,7 @@
       </p:sp>
       <p:sp>
         <p:nvSpPr>
-          <p:cNvPr id="4" name="Text 2"/>
+          <p:cNvPr id="5" name="Text 3"/>
           <p:cNvSpPr/>
           <p:nvPr/>
         </p:nvSpPr>
@@ -5289,7 +8329,7 @@
       </p:sp>
       <p:sp>
         <p:nvSpPr>
-          <p:cNvPr id="5" name="Text 3"/>
+          <p:cNvPr id="6" name="Text 4"/>
           <p:cNvSpPr/>
           <p:nvPr/>
         </p:nvSpPr>
@@ -5328,7 +8368,7 @@
       </p:sp>
       <p:sp>
         <p:nvSpPr>
-          <p:cNvPr id="6" name="Text 4"/>
+          <p:cNvPr id="7" name="Text 5"/>
           <p:cNvSpPr/>
           <p:nvPr/>
         </p:nvSpPr>
@@ -5361,7 +8401,7 @@
                 <a:ea typeface="Aptos Display" pitchFamily="34" charset="-122"/>
                 <a:cs typeface="Aptos Display" pitchFamily="34" charset="-120"/>
               </a:rPr>
-              <a:t>Knowledge Check</a:t>
+              <a:t>Expected Artifact or Evidence Continued</a:t>
             </a:r>
             <a:endParaRPr lang="en-US" sz="2700" dirty="0"/>
           </a:p>
@@ -5369,14 +8409,14 @@
       </p:sp>
       <p:sp>
         <p:nvSpPr>
-          <p:cNvPr id="7" name="Text 5"/>
-          <p:cNvSpPr/>
-          <p:nvPr/>
-        </p:nvSpPr>
-        <p:spPr>
-          <a:xfrm>
-            <a:off x="822960" y="1325880"/>
-            <a:ext cx="10378440" cy="4800600"/>
+          <p:cNvPr id="8" name="Text 6"/>
+          <p:cNvSpPr/>
+          <p:nvPr/>
+        </p:nvSpPr>
+        <p:spPr>
+          <a:xfrm>
+            <a:off x="868680" y="1417320"/>
+            <a:ext cx="6675120" cy="4434840"/>
           </a:xfrm>
           <a:prstGeom prst="rect">
             <a:avLst/>
@@ -5391,7 +8431,7 @@
           <a:lstStyle/>
           <a:p>
             <a:r>
-              <a:rPr lang="en-US" sz="1450" dirty="0">
+              <a:rPr lang="en-US" sz="1700" dirty="0">
                 <a:solidFill>
                   <a:srgbClr val="17364A"/>
                 </a:solidFill>
@@ -5399,13 +8439,106 @@
                 <a:ea typeface="Aptos" pitchFamily="34" charset="-122"/>
                 <a:cs typeface="Aptos" pitchFamily="34" charset="-120"/>
               </a:rPr>
-              <a:t>1. What is the strongest reason to document data lineage for an AI-supported workflow?</a:t>
-            </a:r>
-            <a:endParaRPr lang="en-US" sz="1450" dirty="0"/>
-          </a:p>
-          <a:p>
-            <a:r>
-              <a:rPr lang="en-US" sz="1450" dirty="0">
+              <a:t>Known data limitations statement</a:t>
+            </a:r>
+            <a:endParaRPr lang="en-US" sz="1700" dirty="0"/>
+          </a:p>
+        </p:txBody>
+      </p:sp>
+      <p:sp>
+        <p:nvSpPr>
+          <p:cNvPr id="9" name="Shape 7"/>
+          <p:cNvSpPr/>
+          <p:nvPr/>
+        </p:nvSpPr>
+        <p:spPr>
+          <a:xfrm>
+            <a:off x="7909560" y="1417320"/>
+            <a:ext cx="3154680" cy="1828800"/>
+          </a:xfrm>
+          <a:prstGeom prst="roundRect">
+            <a:avLst>
+              <a:gd name="adj" fmla="val 6000"/>
+            </a:avLst>
+          </a:prstGeom>
+          <a:solidFill>
+            <a:srgbClr val="EEF8ED"/>
+          </a:solidFill>
+          <a:ln w="12700">
+            <a:solidFill>
+              <a:srgbClr val="B9D7E6"/>
+            </a:solidFill>
+            <a:prstDash val="solid"/>
+          </a:ln>
+        </p:spPr>
+      </p:sp>
+      <p:sp>
+        <p:nvSpPr>
+          <p:cNvPr id="10" name="Text 8"/>
+          <p:cNvSpPr/>
+          <p:nvPr/>
+        </p:nvSpPr>
+        <p:spPr>
+          <a:xfrm>
+            <a:off x="8074152" y="1563624"/>
+            <a:ext cx="2825496" cy="201168"/>
+          </a:xfrm>
+          <a:prstGeom prst="rect">
+            <a:avLst/>
+          </a:prstGeom>
+          <a:noFill/>
+          <a:ln/>
+        </p:spPr>
+        <p:txBody>
+          <a:bodyPr wrap="square" lIns="0" tIns="0" rIns="0" bIns="0" rtlCol="0" anchor="ctr"/>
+          <a:lstStyle/>
+          <a:p>
+            <a:pPr indent="0" marL="0">
+              <a:buNone/>
+            </a:pPr>
+            <a:r>
+              <a:rPr lang="en-US" sz="950" b="1" dirty="0">
+                <a:solidFill>
+                  <a:srgbClr val="0068B7"/>
+                </a:solidFill>
+                <a:latin typeface="Aptos" pitchFamily="34" charset="0"/>
+                <a:ea typeface="Aptos" pitchFamily="34" charset="-122"/>
+                <a:cs typeface="Aptos" pitchFamily="34" charset="-120"/>
+              </a:rPr>
+              <a:t>Key idea</a:t>
+            </a:r>
+            <a:endParaRPr lang="en-US" sz="950" dirty="0"/>
+          </a:p>
+        </p:txBody>
+      </p:sp>
+      <p:sp>
+        <p:nvSpPr>
+          <p:cNvPr id="11" name="Text 9"/>
+          <p:cNvSpPr/>
+          <p:nvPr/>
+        </p:nvSpPr>
+        <p:spPr>
+          <a:xfrm>
+            <a:off x="8074152" y="1856232"/>
+            <a:ext cx="2825496" cy="1261872"/>
+          </a:xfrm>
+          <a:prstGeom prst="rect">
+            <a:avLst/>
+          </a:prstGeom>
+          <a:noFill/>
+          <a:ln/>
+        </p:spPr>
+        <p:txBody>
+          <a:bodyPr wrap="square" lIns="0" tIns="0" rIns="0" bIns="0" rtlCol="0" anchor="t">
+            <a:normAutofit/>
+          </a:bodyPr>
+          <a:lstStyle/>
+          <a:p>
+            <a:pPr indent="0" marL="0">
+              <a:buNone/>
+            </a:pPr>
+            <a:r>
+              <a:rPr lang="en-US" sz="1250" dirty="0">
                 <a:solidFill>
                   <a:srgbClr val="17364A"/>
                 </a:solidFill>
@@ -5413,13 +8546,106 @@
                 <a:ea typeface="Aptos" pitchFamily="34" charset="-122"/>
                 <a:cs typeface="Aptos" pitchFamily="34" charset="-120"/>
               </a:rPr>
-              <a:t>2. Which pipeline type is most likely to trigger a workflow immediately after a defined event?</a:t>
-            </a:r>
-            <a:endParaRPr lang="en-US" sz="1450" dirty="0"/>
-          </a:p>
-          <a:p>
-            <a:r>
-              <a:rPr lang="en-US" sz="1450" dirty="0">
+              <a:t>Known data limitations statement</a:t>
+            </a:r>
+            <a:endParaRPr lang="en-US" sz="1250" dirty="0"/>
+          </a:p>
+        </p:txBody>
+      </p:sp>
+      <p:sp>
+        <p:nvSpPr>
+          <p:cNvPr id="12" name="Shape 10"/>
+          <p:cNvSpPr/>
+          <p:nvPr/>
+        </p:nvSpPr>
+        <p:spPr>
+          <a:xfrm>
+            <a:off x="7909560" y="3520440"/>
+            <a:ext cx="3154680" cy="1737360"/>
+          </a:xfrm>
+          <a:prstGeom prst="roundRect">
+            <a:avLst>
+              <a:gd name="adj" fmla="val 6316"/>
+            </a:avLst>
+          </a:prstGeom>
+          <a:solidFill>
+            <a:srgbClr val="EAF6F8"/>
+          </a:solidFill>
+          <a:ln w="12700">
+            <a:solidFill>
+              <a:srgbClr val="B9D7E6"/>
+            </a:solidFill>
+            <a:prstDash val="solid"/>
+          </a:ln>
+        </p:spPr>
+      </p:sp>
+      <p:sp>
+        <p:nvSpPr>
+          <p:cNvPr id="13" name="Text 11"/>
+          <p:cNvSpPr/>
+          <p:nvPr/>
+        </p:nvSpPr>
+        <p:spPr>
+          <a:xfrm>
+            <a:off x="8074152" y="3666744"/>
+            <a:ext cx="2825496" cy="201168"/>
+          </a:xfrm>
+          <a:prstGeom prst="rect">
+            <a:avLst/>
+          </a:prstGeom>
+          <a:noFill/>
+          <a:ln/>
+        </p:spPr>
+        <p:txBody>
+          <a:bodyPr wrap="square" lIns="0" tIns="0" rIns="0" bIns="0" rtlCol="0" anchor="ctr"/>
+          <a:lstStyle/>
+          <a:p>
+            <a:pPr indent="0" marL="0">
+              <a:buNone/>
+            </a:pPr>
+            <a:r>
+              <a:rPr lang="en-US" sz="950" b="1" dirty="0">
+                <a:solidFill>
+                  <a:srgbClr val="0068B7"/>
+                </a:solidFill>
+                <a:latin typeface="Aptos" pitchFamily="34" charset="0"/>
+                <a:ea typeface="Aptos" pitchFamily="34" charset="-122"/>
+                <a:cs typeface="Aptos" pitchFamily="34" charset="-120"/>
+              </a:rPr>
+              <a:t>Use this for</a:t>
+            </a:r>
+            <a:endParaRPr lang="en-US" sz="950" dirty="0"/>
+          </a:p>
+        </p:txBody>
+      </p:sp>
+      <p:sp>
+        <p:nvSpPr>
+          <p:cNvPr id="14" name="Text 12"/>
+          <p:cNvSpPr/>
+          <p:nvPr/>
+        </p:nvSpPr>
+        <p:spPr>
+          <a:xfrm>
+            <a:off x="8074152" y="3959352"/>
+            <a:ext cx="2825496" cy="1170432"/>
+          </a:xfrm>
+          <a:prstGeom prst="rect">
+            <a:avLst/>
+          </a:prstGeom>
+          <a:noFill/>
+          <a:ln/>
+        </p:spPr>
+        <p:txBody>
+          <a:bodyPr wrap="square" lIns="0" tIns="0" rIns="0" bIns="0" rtlCol="0" anchor="t">
+            <a:normAutofit/>
+          </a:bodyPr>
+          <a:lstStyle/>
+          <a:p>
+            <a:pPr indent="0" marL="0">
+              <a:buNone/>
+            </a:pPr>
+            <a:r>
+              <a:rPr lang="en-US" sz="1250" dirty="0">
                 <a:solidFill>
                   <a:srgbClr val="17364A"/>
                 </a:solidFill>
@@ -5427,37 +8653,9 @@
                 <a:ea typeface="Aptos" pitchFamily="34" charset="-122"/>
                 <a:cs typeface="Aptos" pitchFamily="34" charset="-120"/>
               </a:rPr>
-              <a:t>3. What is a practical guardrail for silent feed failure?</a:t>
-            </a:r>
-            <a:endParaRPr lang="en-US" sz="1450" dirty="0"/>
-          </a:p>
-          <a:p>
-            <a:r>
-              <a:rPr lang="en-US" sz="1450" dirty="0">
-                <a:solidFill>
-                  <a:srgbClr val="17364A"/>
-                </a:solidFill>
-                <a:latin typeface="Aptos" pitchFamily="34" charset="0"/>
-                <a:ea typeface="Aptos" pitchFamily="34" charset="-122"/>
-                <a:cs typeface="Aptos" pitchFamily="34" charset="-120"/>
-              </a:rPr>
-              <a:t>4. Why should source freshness be visible to users?</a:t>
-            </a:r>
-            <a:endParaRPr lang="en-US" sz="1450" dirty="0"/>
-          </a:p>
-          <a:p>
-            <a:r>
-              <a:rPr lang="en-US" sz="1450" dirty="0">
-                <a:solidFill>
-                  <a:srgbClr val="17364A"/>
-                </a:solidFill>
-                <a:latin typeface="Aptos" pitchFamily="34" charset="0"/>
-                <a:ea typeface="Aptos" pitchFamily="34" charset="-122"/>
-                <a:cs typeface="Aptos" pitchFamily="34" charset="-120"/>
-              </a:rPr>
-              <a:t>5. What is strong evidence of completion for this module?</a:t>
-            </a:r>
-            <a:endParaRPr lang="en-US" sz="1450" dirty="0"/>
+              <a:t>Connect the concept to public health decisions, safeguards, documentation, or implementation work.</a:t>
+            </a:r>
+            <a:endParaRPr lang="en-US" sz="1250" dirty="0"/>
           </a:p>
         </p:txBody>
       </p:sp>
@@ -5520,7 +8718,32 @@
       </p:sp>
       <p:sp>
         <p:nvSpPr>
-          <p:cNvPr id="3" name="Text 1"/>
+          <p:cNvPr id="3" name="Shape 1"/>
+          <p:cNvSpPr/>
+          <p:nvPr/>
+        </p:nvSpPr>
+        <p:spPr>
+          <a:xfrm>
+            <a:off x="0" y="164592"/>
+            <a:ext cx="146304" cy="6693408"/>
+          </a:xfrm>
+          <a:prstGeom prst="rect">
+            <a:avLst/>
+          </a:prstGeom>
+          <a:solidFill>
+            <a:srgbClr val="2F8A28"/>
+          </a:solidFill>
+          <a:ln w="12700">
+            <a:solidFill>
+              <a:srgbClr val="2F8A28"/>
+            </a:solidFill>
+            <a:prstDash val="solid"/>
+          </a:ln>
+        </p:spPr>
+      </p:sp>
+      <p:sp>
+        <p:nvSpPr>
+          <p:cNvPr id="4" name="Text 2"/>
           <p:cNvSpPr/>
           <p:nvPr/>
         </p:nvSpPr>
@@ -5559,7 +8782,7 @@
       </p:sp>
       <p:sp>
         <p:nvSpPr>
-          <p:cNvPr id="4" name="Text 2"/>
+          <p:cNvPr id="5" name="Text 3"/>
           <p:cNvSpPr/>
           <p:nvPr/>
         </p:nvSpPr>
@@ -5598,7 +8821,7 @@
       </p:sp>
       <p:sp>
         <p:nvSpPr>
-          <p:cNvPr id="5" name="Text 3"/>
+          <p:cNvPr id="6" name="Text 4"/>
           <p:cNvSpPr/>
           <p:nvPr/>
         </p:nvSpPr>
@@ -5637,7 +8860,7 @@
       </p:sp>
       <p:sp>
         <p:nvSpPr>
-          <p:cNvPr id="6" name="Text 4"/>
+          <p:cNvPr id="7" name="Text 5"/>
           <p:cNvSpPr/>
           <p:nvPr/>
         </p:nvSpPr>
@@ -5670,7 +8893,7 @@
                 <a:ea typeface="Aptos Display" pitchFamily="34" charset="-122"/>
                 <a:cs typeface="Aptos Display" pitchFamily="34" charset="-120"/>
               </a:rPr>
-              <a:t>Module Context</a:t>
+              <a:t>What this module helps you do</a:t>
             </a:r>
             <a:endParaRPr lang="en-US" sz="2700" dirty="0"/>
           </a:p>
@@ -5678,14 +8901,14 @@
       </p:sp>
       <p:sp>
         <p:nvSpPr>
-          <p:cNvPr id="7" name="Text 5"/>
-          <p:cNvSpPr/>
-          <p:nvPr/>
-        </p:nvSpPr>
-        <p:spPr>
-          <a:xfrm>
-            <a:off x="822960" y="1325880"/>
-            <a:ext cx="10378440" cy="1371600"/>
+          <p:cNvPr id="8" name="Text 6"/>
+          <p:cNvSpPr/>
+          <p:nvPr/>
+        </p:nvSpPr>
+        <p:spPr>
+          <a:xfrm>
+            <a:off x="868680" y="1417320"/>
+            <a:ext cx="6675120" cy="3291840"/>
           </a:xfrm>
           <a:prstGeom prst="rect">
             <a:avLst/>
@@ -5700,7 +8923,7 @@
           <a:lstStyle/>
           <a:p>
             <a:r>
-              <a:rPr lang="en-US" sz="1600" dirty="0">
+              <a:rPr lang="en-US" sz="1700" dirty="0">
                 <a:solidFill>
                   <a:srgbClr val="17364A"/>
                 </a:solidFill>
@@ -5708,13 +8931,13 @@
                 <a:ea typeface="Aptos" pitchFamily="34" charset="-122"/>
                 <a:cs typeface="Aptos" pitchFamily="34" charset="-120"/>
               </a:rPr>
-              <a:t>Level: applied/foundational</a:t>
-            </a:r>
-            <a:endParaRPr lang="en-US" sz="1600" dirty="0"/>
-          </a:p>
-          <a:p>
-            <a:r>
-              <a:rPr lang="en-US" sz="1600" dirty="0">
+              <a:t>Data pipelines are the operational pathways that move public health data from source systems into analytic, reporting, and workflow environments.</a:t>
+            </a:r>
+            <a:endParaRPr lang="en-US" sz="1700" dirty="0"/>
+          </a:p>
+          <a:p>
+            <a:r>
+              <a:rPr lang="en-US" sz="1700" dirty="0">
                 <a:solidFill>
                   <a:srgbClr val="17364A"/>
                 </a:solidFill>
@@ -5722,13 +8945,13 @@
                 <a:ea typeface="Aptos" pitchFamily="34" charset="-122"/>
                 <a:cs typeface="Aptos" pitchFamily="34" charset="-120"/>
               </a:rPr>
-              <a:t>Primary track: Technical Architecture Track</a:t>
-            </a:r>
-            <a:endParaRPr lang="en-US" sz="1600" dirty="0"/>
-          </a:p>
-          <a:p>
-            <a:r>
-              <a:rPr lang="en-US" sz="1600" dirty="0">
+              <a:t>AI tools depend on these pathways even when users do not see them.</a:t>
+            </a:r>
+            <a:endParaRPr lang="en-US" sz="1700" dirty="0"/>
+          </a:p>
+          <a:p>
+            <a:r>
+              <a:rPr lang="en-US" sz="1700" dirty="0">
                 <a:solidFill>
                   <a:srgbClr val="17364A"/>
                 </a:solidFill>
@@ -5736,31 +8959,111 @@
                 <a:ea typeface="Aptos" pitchFamily="34" charset="-122"/>
                 <a:cs typeface="Aptos" pitchFamily="34" charset="-120"/>
               </a:rPr>
-              <a:t>Appears in tracks: technical-architecture</a:t>
-            </a:r>
-            <a:endParaRPr lang="en-US" sz="1600" dirty="0"/>
-          </a:p>
-        </p:txBody>
-      </p:sp>
-      <p:sp>
-        <p:nvSpPr>
-          <p:cNvPr id="8" name="Text 6"/>
-          <p:cNvSpPr/>
-          <p:nvPr/>
-        </p:nvSpPr>
-        <p:spPr>
-          <a:xfrm>
-            <a:off x="822960" y="2743200"/>
-            <a:ext cx="10378440" cy="2834640"/>
-          </a:xfrm>
-          <a:prstGeom prst="rect">
-            <a:avLst/>
-          </a:prstGeom>
-          <a:noFill/>
-          <a:ln/>
-        </p:spPr>
-        <p:txBody>
-          <a:bodyPr wrap="square" lIns="1016" tIns="1016" rIns="1016" bIns="1016" rtlCol="0" anchor="t">
+              <a:t>A model that classifies cases, summarizes laboratory reports, or predicts service demand can only work responsibly if the data feeding the model are.</a:t>
+            </a:r>
+            <a:endParaRPr lang="en-US" sz="1700" dirty="0"/>
+          </a:p>
+          <a:p>
+            <a:r>
+              <a:rPr lang="en-US" sz="1700" dirty="0">
+                <a:solidFill>
+                  <a:srgbClr val="17364A"/>
+                </a:solidFill>
+                <a:latin typeface="Aptos" pitchFamily="34" charset="0"/>
+                <a:ea typeface="Aptos" pitchFamily="34" charset="-122"/>
+                <a:cs typeface="Aptos" pitchFamily="34" charset="-120"/>
+              </a:rPr>
+              <a:t>This module helps learners understand the pipeline steps that shape AI outputs and the safeguards needed when pipeline failures could affect public.</a:t>
+            </a:r>
+            <a:endParaRPr lang="en-US" sz="1700" dirty="0"/>
+          </a:p>
+        </p:txBody>
+      </p:sp>
+      <p:sp>
+        <p:nvSpPr>
+          <p:cNvPr id="9" name="Shape 7"/>
+          <p:cNvSpPr/>
+          <p:nvPr/>
+        </p:nvSpPr>
+        <p:spPr>
+          <a:xfrm>
+            <a:off x="7909560" y="1417320"/>
+            <a:ext cx="3154680" cy="1920240"/>
+          </a:xfrm>
+          <a:prstGeom prst="roundRect">
+            <a:avLst>
+              <a:gd name="adj" fmla="val 5714"/>
+            </a:avLst>
+          </a:prstGeom>
+          <a:solidFill>
+            <a:srgbClr val="EAF6F8"/>
+          </a:solidFill>
+          <a:ln w="12700">
+            <a:solidFill>
+              <a:srgbClr val="B9D7E6"/>
+            </a:solidFill>
+            <a:prstDash val="solid"/>
+          </a:ln>
+        </p:spPr>
+      </p:sp>
+      <p:sp>
+        <p:nvSpPr>
+          <p:cNvPr id="10" name="Text 8"/>
+          <p:cNvSpPr/>
+          <p:nvPr/>
+        </p:nvSpPr>
+        <p:spPr>
+          <a:xfrm>
+            <a:off x="8074152" y="1563624"/>
+            <a:ext cx="2825496" cy="201168"/>
+          </a:xfrm>
+          <a:prstGeom prst="rect">
+            <a:avLst/>
+          </a:prstGeom>
+          <a:noFill/>
+          <a:ln/>
+        </p:spPr>
+        <p:txBody>
+          <a:bodyPr wrap="square" lIns="0" tIns="0" rIns="0" bIns="0" rtlCol="0" anchor="ctr"/>
+          <a:lstStyle/>
+          <a:p>
+            <a:pPr indent="0" marL="0">
+              <a:buNone/>
+            </a:pPr>
+            <a:r>
+              <a:rPr lang="en-US" sz="950" b="1" dirty="0">
+                <a:solidFill>
+                  <a:srgbClr val="0068B7"/>
+                </a:solidFill>
+                <a:latin typeface="Aptos" pitchFamily="34" charset="0"/>
+                <a:ea typeface="Aptos" pitchFamily="34" charset="-122"/>
+                <a:cs typeface="Aptos" pitchFamily="34" charset="-120"/>
+              </a:rPr>
+              <a:t>Module details</a:t>
+            </a:r>
+            <a:endParaRPr lang="en-US" sz="950" dirty="0"/>
+          </a:p>
+        </p:txBody>
+      </p:sp>
+      <p:sp>
+        <p:nvSpPr>
+          <p:cNvPr id="11" name="Text 9"/>
+          <p:cNvSpPr/>
+          <p:nvPr/>
+        </p:nvSpPr>
+        <p:spPr>
+          <a:xfrm>
+            <a:off x="8074152" y="1856232"/>
+            <a:ext cx="2825496" cy="1353312"/>
+          </a:xfrm>
+          <a:prstGeom prst="rect">
+            <a:avLst/>
+          </a:prstGeom>
+          <a:noFill/>
+          <a:ln/>
+        </p:spPr>
+        <p:txBody>
+          <a:bodyPr wrap="square" lIns="0" tIns="0" rIns="0" bIns="0" rtlCol="0" anchor="t">
             <a:normAutofit/>
           </a:bodyPr>
           <a:lstStyle/>
@@ -5769,7 +9072,7 @@
               <a:buNone/>
             </a:pPr>
             <a:r>
-              <a:rPr lang="en-US" sz="1400" dirty="0">
+              <a:rPr lang="en-US" sz="1250" dirty="0">
                 <a:solidFill>
                   <a:srgbClr val="17364A"/>
                 </a:solidFill>
@@ -5777,9 +9080,150 @@
                 <a:ea typeface="Aptos" pitchFamily="34" charset="-122"/>
                 <a:cs typeface="Aptos" pitchFamily="34" charset="-120"/>
               </a:rPr>
-              <a:t>Data pipelines are the operational pathways that move public health data from source systems into analytic, reporting, and workflow environments. AI tools depend on these pathways even when users do not see them. A model that classifies cases, summarizes laboratory reports, or predicts service demand can only work responsibly if the data feeding the model are timely, complete, transformed correctly, and monitored. This module helps learners understand the pipeline steps that shape AI outputs and the safeguards needed when pipeline failures could affect public health action.</a:t>
-            </a:r>
-            <a:endParaRPr lang="en-US" sz="1400" dirty="0"/>
+              <a:t>Level: applied/foundational</a:t>
+            </a:r>
+            <a:endParaRPr lang="en-US" sz="1250" dirty="0"/>
+          </a:p>
+          <a:p>
+            <a:pPr indent="0" marL="0">
+              <a:buNone/>
+            </a:pPr>
+            <a:r>
+              <a:rPr lang="en-US" sz="1250" dirty="0">
+                <a:solidFill>
+                  <a:srgbClr val="17364A"/>
+                </a:solidFill>
+                <a:latin typeface="Aptos" pitchFamily="34" charset="0"/>
+                <a:ea typeface="Aptos" pitchFamily="34" charset="-122"/>
+                <a:cs typeface="Aptos" pitchFamily="34" charset="-120"/>
+              </a:rPr>
+              <a:t>Primary track: Technical Architecture Track</a:t>
+            </a:r>
+            <a:endParaRPr lang="en-US" sz="1250" dirty="0"/>
+          </a:p>
+          <a:p>
+            <a:pPr indent="0" marL="0">
+              <a:buNone/>
+            </a:pPr>
+            <a:r>
+              <a:rPr lang="en-US" sz="1250" dirty="0">
+                <a:solidFill>
+                  <a:srgbClr val="17364A"/>
+                </a:solidFill>
+                <a:latin typeface="Aptos" pitchFamily="34" charset="0"/>
+                <a:ea typeface="Aptos" pitchFamily="34" charset="-122"/>
+                <a:cs typeface="Aptos" pitchFamily="34" charset="-120"/>
+              </a:rPr>
+              <a:t>Appears in tracks: technical-architecture</a:t>
+            </a:r>
+            <a:endParaRPr lang="en-US" sz="1250" dirty="0"/>
+          </a:p>
+        </p:txBody>
+      </p:sp>
+      <p:sp>
+        <p:nvSpPr>
+          <p:cNvPr id="12" name="Shape 10"/>
+          <p:cNvSpPr/>
+          <p:nvPr/>
+        </p:nvSpPr>
+        <p:spPr>
+          <a:xfrm>
+            <a:off x="7909560" y="3611880"/>
+            <a:ext cx="3154680" cy="1783080"/>
+          </a:xfrm>
+          <a:prstGeom prst="roundRect">
+            <a:avLst>
+              <a:gd name="adj" fmla="val 6154"/>
+            </a:avLst>
+          </a:prstGeom>
+          <a:solidFill>
+            <a:srgbClr val="EEF8ED"/>
+          </a:solidFill>
+          <a:ln w="12700">
+            <a:solidFill>
+              <a:srgbClr val="B9D7E6"/>
+            </a:solidFill>
+            <a:prstDash val="solid"/>
+          </a:ln>
+        </p:spPr>
+      </p:sp>
+      <p:sp>
+        <p:nvSpPr>
+          <p:cNvPr id="13" name="Text 11"/>
+          <p:cNvSpPr/>
+          <p:nvPr/>
+        </p:nvSpPr>
+        <p:spPr>
+          <a:xfrm>
+            <a:off x="8074152" y="3758184"/>
+            <a:ext cx="2825496" cy="201168"/>
+          </a:xfrm>
+          <a:prstGeom prst="rect">
+            <a:avLst/>
+          </a:prstGeom>
+          <a:noFill/>
+          <a:ln/>
+        </p:spPr>
+        <p:txBody>
+          <a:bodyPr wrap="square" lIns="0" tIns="0" rIns="0" bIns="0" rtlCol="0" anchor="ctr"/>
+          <a:lstStyle/>
+          <a:p>
+            <a:pPr indent="0" marL="0">
+              <a:buNone/>
+            </a:pPr>
+            <a:r>
+              <a:rPr lang="en-US" sz="950" b="1" dirty="0">
+                <a:solidFill>
+                  <a:srgbClr val="0068B7"/>
+                </a:solidFill>
+                <a:latin typeface="Aptos" pitchFamily="34" charset="0"/>
+                <a:ea typeface="Aptos" pitchFamily="34" charset="-122"/>
+                <a:cs typeface="Aptos" pitchFamily="34" charset="-120"/>
+              </a:rPr>
+              <a:t>Learning approach</a:t>
+            </a:r>
+            <a:endParaRPr lang="en-US" sz="950" dirty="0"/>
+          </a:p>
+        </p:txBody>
+      </p:sp>
+      <p:sp>
+        <p:nvSpPr>
+          <p:cNvPr id="14" name="Text 12"/>
+          <p:cNvSpPr/>
+          <p:nvPr/>
+        </p:nvSpPr>
+        <p:spPr>
+          <a:xfrm>
+            <a:off x="8074152" y="4050792"/>
+            <a:ext cx="2825496" cy="1216152"/>
+          </a:xfrm>
+          <a:prstGeom prst="rect">
+            <a:avLst/>
+          </a:prstGeom>
+          <a:noFill/>
+          <a:ln/>
+        </p:spPr>
+        <p:txBody>
+          <a:bodyPr wrap="square" lIns="0" tIns="0" rIns="0" bIns="0" rtlCol="0" anchor="t">
+            <a:normAutofit/>
+          </a:bodyPr>
+          <a:lstStyle/>
+          <a:p>
+            <a:pPr indent="0" marL="0">
+              <a:buNone/>
+            </a:pPr>
+            <a:r>
+              <a:rPr lang="en-US" sz="1250" dirty="0">
+                <a:solidFill>
+                  <a:srgbClr val="17364A"/>
+                </a:solidFill>
+                <a:latin typeface="Aptos" pitchFamily="34" charset="0"/>
+                <a:ea typeface="Aptos" pitchFamily="34" charset="-122"/>
+                <a:cs typeface="Aptos" pitchFamily="34" charset="-120"/>
+              </a:rPr>
+              <a:t>Review the core ideas, complete the practical exercise, check your understanding, and use the related plays and tools to apply the lesson.</a:t>
+            </a:r>
+            <a:endParaRPr lang="en-US" sz="1250" dirty="0"/>
           </a:p>
         </p:txBody>
       </p:sp>
@@ -5842,7 +9286,32 @@
       </p:sp>
       <p:sp>
         <p:nvSpPr>
-          <p:cNvPr id="3" name="Text 1"/>
+          <p:cNvPr id="3" name="Shape 1"/>
+          <p:cNvSpPr/>
+          <p:nvPr/>
+        </p:nvSpPr>
+        <p:spPr>
+          <a:xfrm>
+            <a:off x="0" y="164592"/>
+            <a:ext cx="146304" cy="6693408"/>
+          </a:xfrm>
+          <a:prstGeom prst="rect">
+            <a:avLst/>
+          </a:prstGeom>
+          <a:solidFill>
+            <a:srgbClr val="2F8A28"/>
+          </a:solidFill>
+          <a:ln w="12700">
+            <a:solidFill>
+              <a:srgbClr val="2F8A28"/>
+            </a:solidFill>
+            <a:prstDash val="solid"/>
+          </a:ln>
+        </p:spPr>
+      </p:sp>
+      <p:sp>
+        <p:nvSpPr>
+          <p:cNvPr id="4" name="Text 2"/>
           <p:cNvSpPr/>
           <p:nvPr/>
         </p:nvSpPr>
@@ -5881,7 +9350,7 @@
       </p:sp>
       <p:sp>
         <p:nvSpPr>
-          <p:cNvPr id="4" name="Text 2"/>
+          <p:cNvPr id="5" name="Text 3"/>
           <p:cNvSpPr/>
           <p:nvPr/>
         </p:nvSpPr>
@@ -5920,7 +9389,7 @@
       </p:sp>
       <p:sp>
         <p:nvSpPr>
-          <p:cNvPr id="5" name="Text 3"/>
+          <p:cNvPr id="6" name="Text 4"/>
           <p:cNvSpPr/>
           <p:nvPr/>
         </p:nvSpPr>
@@ -5959,13 +9428,77 @@
       </p:sp>
       <p:sp>
         <p:nvSpPr>
-          <p:cNvPr id="6" name="Text 4"/>
+          <p:cNvPr id="7" name="Shape 5"/>
           <p:cNvSpPr/>
           <p:nvPr/>
         </p:nvSpPr>
         <p:spPr>
           <a:xfrm>
             <a:off x="640080" y="658368"/>
+            <a:ext cx="420624" cy="420624"/>
+          </a:xfrm>
+          <a:prstGeom prst="ellipse">
+            <a:avLst/>
+          </a:prstGeom>
+          <a:solidFill>
+            <a:srgbClr val="0068B7"/>
+          </a:solidFill>
+          <a:ln w="12700">
+            <a:solidFill>
+              <a:srgbClr val="0068B7"/>
+            </a:solidFill>
+            <a:prstDash val="solid"/>
+          </a:ln>
+        </p:spPr>
+      </p:sp>
+      <p:sp>
+        <p:nvSpPr>
+          <p:cNvPr id="8" name="Text 6"/>
+          <p:cNvSpPr/>
+          <p:nvPr/>
+        </p:nvSpPr>
+        <p:spPr>
+          <a:xfrm>
+            <a:off x="640080" y="731520"/>
+            <a:ext cx="420624" cy="164592"/>
+          </a:xfrm>
+          <a:prstGeom prst="rect">
+            <a:avLst/>
+          </a:prstGeom>
+          <a:noFill/>
+          <a:ln/>
+        </p:spPr>
+        <p:txBody>
+          <a:bodyPr wrap="square" lIns="0" tIns="0" rIns="0" bIns="0" rtlCol="0" anchor="ctr"/>
+          <a:lstStyle/>
+          <a:p>
+            <a:pPr algn="ctr" indent="0" marL="0">
+              <a:buNone/>
+            </a:pPr>
+            <a:r>
+              <a:rPr lang="en-US" sz="1100" b="1" dirty="0">
+                <a:solidFill>
+                  <a:srgbClr val="FFFFFF"/>
+                </a:solidFill>
+                <a:latin typeface="Aptos" pitchFamily="34" charset="0"/>
+                <a:ea typeface="Aptos" pitchFamily="34" charset="-122"/>
+                <a:cs typeface="Aptos" pitchFamily="34" charset="-120"/>
+              </a:rPr>
+              <a:t>12</a:t>
+            </a:r>
+            <a:endParaRPr lang="en-US" sz="1100" dirty="0"/>
+          </a:p>
+        </p:txBody>
+      </p:sp>
+      <p:sp>
+        <p:nvSpPr>
+          <p:cNvPr id="9" name="Text 7"/>
+          <p:cNvSpPr/>
+          <p:nvPr/>
+        </p:nvSpPr>
+        <p:spPr>
+          <a:xfrm>
+            <a:off x="640080" y="621792"/>
             <a:ext cx="10881360" cy="566928"/>
           </a:xfrm>
           <a:prstGeom prst="rect">
@@ -5992,7 +9525,7 @@
                 <a:ea typeface="Aptos Display" pitchFamily="34" charset="-122"/>
                 <a:cs typeface="Aptos Display" pitchFamily="34" charset="-120"/>
               </a:rPr>
-              <a:t>References and Resources</a:t>
+              <a:t>Expected Assignment</a:t>
             </a:r>
             <a:endParaRPr lang="en-US" sz="2700" dirty="0"/>
           </a:p>
@@ -6000,14 +9533,14 @@
       </p:sp>
       <p:sp>
         <p:nvSpPr>
-          <p:cNvPr id="7" name="Text 5"/>
-          <p:cNvSpPr/>
-          <p:nvPr/>
-        </p:nvSpPr>
-        <p:spPr>
-          <a:xfrm>
-            <a:off x="822960" y="1325880"/>
-            <a:ext cx="10378440" cy="4800600"/>
+          <p:cNvPr id="10" name="Text 8"/>
+          <p:cNvSpPr/>
+          <p:nvPr/>
+        </p:nvSpPr>
+        <p:spPr>
+          <a:xfrm>
+            <a:off x="868680" y="1417320"/>
+            <a:ext cx="6675120" cy="4434840"/>
           </a:xfrm>
           <a:prstGeom prst="rect">
             <a:avLst/>
@@ -6022,7 +9555,7 @@
           <a:lstStyle/>
           <a:p>
             <a:r>
-              <a:rPr lang="en-US" sz="1450" dirty="0">
+              <a:rPr lang="en-US" sz="1700" dirty="0">
                 <a:solidFill>
                   <a:srgbClr val="17364A"/>
                 </a:solidFill>
@@ -6030,13 +9563,1209 @@
                 <a:ea typeface="Aptos" pitchFamily="34" charset="-122"/>
                 <a:cs typeface="Aptos" pitchFamily="34" charset="-120"/>
               </a:rPr>
+              <a:t>Data pipeline map</a:t>
+            </a:r>
+            <a:endParaRPr lang="en-US" sz="1700" dirty="0"/>
+          </a:p>
+          <a:p>
+            <a:r>
+              <a:rPr lang="en-US" sz="1700" dirty="0">
+                <a:solidFill>
+                  <a:srgbClr val="17364A"/>
+                </a:solidFill>
+                <a:latin typeface="Aptos" pitchFamily="34" charset="0"/>
+                <a:ea typeface="Aptos" pitchFamily="34" charset="-122"/>
+                <a:cs typeface="Aptos" pitchFamily="34" charset="-120"/>
+              </a:rPr>
+              <a:t>Pipeline readiness checklist</a:t>
+            </a:r>
+            <a:endParaRPr lang="en-US" sz="1700" dirty="0"/>
+          </a:p>
+          <a:p>
+            <a:r>
+              <a:rPr lang="en-US" sz="1700" dirty="0">
+                <a:solidFill>
+                  <a:srgbClr val="17364A"/>
+                </a:solidFill>
+                <a:latin typeface="Aptos" pitchFamily="34" charset="0"/>
+                <a:ea typeface="Aptos" pitchFamily="34" charset="-122"/>
+                <a:cs typeface="Aptos" pitchFamily="34" charset="-120"/>
+              </a:rPr>
+              <a:t>Failure and escalation plan</a:t>
+            </a:r>
+            <a:endParaRPr lang="en-US" sz="1700" dirty="0"/>
+          </a:p>
+          <a:p>
+            <a:r>
+              <a:rPr lang="en-US" sz="1700" dirty="0">
+                <a:solidFill>
+                  <a:srgbClr val="17364A"/>
+                </a:solidFill>
+                <a:latin typeface="Aptos" pitchFamily="34" charset="0"/>
+                <a:ea typeface="Aptos" pitchFamily="34" charset="-122"/>
+                <a:cs typeface="Aptos" pitchFamily="34" charset="-120"/>
+              </a:rPr>
+              <a:t>Known data limitations statement</a:t>
+            </a:r>
+            <a:endParaRPr lang="en-US" sz="1700" dirty="0"/>
+          </a:p>
+        </p:txBody>
+      </p:sp>
+      <p:sp>
+        <p:nvSpPr>
+          <p:cNvPr id="11" name="Shape 9"/>
+          <p:cNvSpPr/>
+          <p:nvPr/>
+        </p:nvSpPr>
+        <p:spPr>
+          <a:xfrm>
+            <a:off x="7909560" y="1417320"/>
+            <a:ext cx="3154680" cy="1828800"/>
+          </a:xfrm>
+          <a:prstGeom prst="roundRect">
+            <a:avLst>
+              <a:gd name="adj" fmla="val 6000"/>
+            </a:avLst>
+          </a:prstGeom>
+          <a:solidFill>
+            <a:srgbClr val="EEF8ED"/>
+          </a:solidFill>
+          <a:ln w="12700">
+            <a:solidFill>
+              <a:srgbClr val="B9D7E6"/>
+            </a:solidFill>
+            <a:prstDash val="solid"/>
+          </a:ln>
+        </p:spPr>
+      </p:sp>
+      <p:sp>
+        <p:nvSpPr>
+          <p:cNvPr id="12" name="Text 10"/>
+          <p:cNvSpPr/>
+          <p:nvPr/>
+        </p:nvSpPr>
+        <p:spPr>
+          <a:xfrm>
+            <a:off x="8074152" y="1563624"/>
+            <a:ext cx="2825496" cy="201168"/>
+          </a:xfrm>
+          <a:prstGeom prst="rect">
+            <a:avLst/>
+          </a:prstGeom>
+          <a:noFill/>
+          <a:ln/>
+        </p:spPr>
+        <p:txBody>
+          <a:bodyPr wrap="square" lIns="0" tIns="0" rIns="0" bIns="0" rtlCol="0" anchor="ctr"/>
+          <a:lstStyle/>
+          <a:p>
+            <a:pPr indent="0" marL="0">
+              <a:buNone/>
+            </a:pPr>
+            <a:r>
+              <a:rPr lang="en-US" sz="950" b="1" dirty="0">
+                <a:solidFill>
+                  <a:srgbClr val="0068B7"/>
+                </a:solidFill>
+                <a:latin typeface="Aptos" pitchFamily="34" charset="0"/>
+                <a:ea typeface="Aptos" pitchFamily="34" charset="-122"/>
+                <a:cs typeface="Aptos" pitchFamily="34" charset="-120"/>
+              </a:rPr>
+              <a:t>Key idea</a:t>
+            </a:r>
+            <a:endParaRPr lang="en-US" sz="950" dirty="0"/>
+          </a:p>
+        </p:txBody>
+      </p:sp>
+      <p:sp>
+        <p:nvSpPr>
+          <p:cNvPr id="13" name="Text 11"/>
+          <p:cNvSpPr/>
+          <p:nvPr/>
+        </p:nvSpPr>
+        <p:spPr>
+          <a:xfrm>
+            <a:off x="8074152" y="1856232"/>
+            <a:ext cx="2825496" cy="1261872"/>
+          </a:xfrm>
+          <a:prstGeom prst="rect">
+            <a:avLst/>
+          </a:prstGeom>
+          <a:noFill/>
+          <a:ln/>
+        </p:spPr>
+        <p:txBody>
+          <a:bodyPr wrap="square" lIns="0" tIns="0" rIns="0" bIns="0" rtlCol="0" anchor="t">
+            <a:normAutofit/>
+          </a:bodyPr>
+          <a:lstStyle/>
+          <a:p>
+            <a:pPr indent="0" marL="0">
+              <a:buNone/>
+            </a:pPr>
+            <a:r>
+              <a:rPr lang="en-US" sz="1250" dirty="0">
+                <a:solidFill>
+                  <a:srgbClr val="17364A"/>
+                </a:solidFill>
+                <a:latin typeface="Aptos" pitchFamily="34" charset="0"/>
+                <a:ea typeface="Aptos" pitchFamily="34" charset="-122"/>
+                <a:cs typeface="Aptos" pitchFamily="34" charset="-120"/>
+              </a:rPr>
+              <a:t>Data pipeline map</a:t>
+            </a:r>
+            <a:endParaRPr lang="en-US" sz="1250" dirty="0"/>
+          </a:p>
+        </p:txBody>
+      </p:sp>
+      <p:sp>
+        <p:nvSpPr>
+          <p:cNvPr id="14" name="Shape 12"/>
+          <p:cNvSpPr/>
+          <p:nvPr/>
+        </p:nvSpPr>
+        <p:spPr>
+          <a:xfrm>
+            <a:off x="7909560" y="3520440"/>
+            <a:ext cx="3154680" cy="1737360"/>
+          </a:xfrm>
+          <a:prstGeom prst="roundRect">
+            <a:avLst>
+              <a:gd name="adj" fmla="val 6316"/>
+            </a:avLst>
+          </a:prstGeom>
+          <a:solidFill>
+            <a:srgbClr val="EAF6F8"/>
+          </a:solidFill>
+          <a:ln w="12700">
+            <a:solidFill>
+              <a:srgbClr val="B9D7E6"/>
+            </a:solidFill>
+            <a:prstDash val="solid"/>
+          </a:ln>
+        </p:spPr>
+      </p:sp>
+      <p:sp>
+        <p:nvSpPr>
+          <p:cNvPr id="15" name="Text 13"/>
+          <p:cNvSpPr/>
+          <p:nvPr/>
+        </p:nvSpPr>
+        <p:spPr>
+          <a:xfrm>
+            <a:off x="8074152" y="3666744"/>
+            <a:ext cx="2825496" cy="201168"/>
+          </a:xfrm>
+          <a:prstGeom prst="rect">
+            <a:avLst/>
+          </a:prstGeom>
+          <a:noFill/>
+          <a:ln/>
+        </p:spPr>
+        <p:txBody>
+          <a:bodyPr wrap="square" lIns="0" tIns="0" rIns="0" bIns="0" rtlCol="0" anchor="ctr"/>
+          <a:lstStyle/>
+          <a:p>
+            <a:pPr indent="0" marL="0">
+              <a:buNone/>
+            </a:pPr>
+            <a:r>
+              <a:rPr lang="en-US" sz="950" b="1" dirty="0">
+                <a:solidFill>
+                  <a:srgbClr val="0068B7"/>
+                </a:solidFill>
+                <a:latin typeface="Aptos" pitchFamily="34" charset="0"/>
+                <a:ea typeface="Aptos" pitchFamily="34" charset="-122"/>
+                <a:cs typeface="Aptos" pitchFamily="34" charset="-120"/>
+              </a:rPr>
+              <a:t>Use this for</a:t>
+            </a:r>
+            <a:endParaRPr lang="en-US" sz="950" dirty="0"/>
+          </a:p>
+        </p:txBody>
+      </p:sp>
+      <p:sp>
+        <p:nvSpPr>
+          <p:cNvPr id="16" name="Text 14"/>
+          <p:cNvSpPr/>
+          <p:nvPr/>
+        </p:nvSpPr>
+        <p:spPr>
+          <a:xfrm>
+            <a:off x="8074152" y="3959352"/>
+            <a:ext cx="2825496" cy="1170432"/>
+          </a:xfrm>
+          <a:prstGeom prst="rect">
+            <a:avLst/>
+          </a:prstGeom>
+          <a:noFill/>
+          <a:ln/>
+        </p:spPr>
+        <p:txBody>
+          <a:bodyPr wrap="square" lIns="0" tIns="0" rIns="0" bIns="0" rtlCol="0" anchor="t">
+            <a:normAutofit/>
+          </a:bodyPr>
+          <a:lstStyle/>
+          <a:p>
+            <a:pPr indent="0" marL="0">
+              <a:buNone/>
+            </a:pPr>
+            <a:r>
+              <a:rPr lang="en-US" sz="1250" dirty="0">
+                <a:solidFill>
+                  <a:srgbClr val="17364A"/>
+                </a:solidFill>
+                <a:latin typeface="Aptos" pitchFamily="34" charset="0"/>
+                <a:ea typeface="Aptos" pitchFamily="34" charset="-122"/>
+                <a:cs typeface="Aptos" pitchFamily="34" charset="-120"/>
+              </a:rPr>
+              <a:t>Connect the concept to public health decisions, safeguards, documentation, or implementation work.</a:t>
+            </a:r>
+            <a:endParaRPr lang="en-US" sz="1250" dirty="0"/>
+          </a:p>
+        </p:txBody>
+      </p:sp>
+    </p:spTree>
+  </p:cSld>
+  <p:clrMapOvr>
+    <a:masterClrMapping/>
+  </p:clrMapOvr>
+</p:sld>
+</file>
+
+<file path=ppt/slides/slide21.xml><?xml version="1.0" encoding="utf-8"?>
+<p:sld xmlns:a="http://schemas.openxmlformats.org/drawingml/2006/main" xmlns:r="http://schemas.openxmlformats.org/officeDocument/2006/relationships" xmlns:p="http://schemas.openxmlformats.org/presentationml/2006/main">
+  <p:cSld name="Slide 21">
+    <p:bg>
+      <p:bgPr>
+        <a:solidFill>
+          <a:srgbClr val="F7FBFD"/>
+        </a:solidFill>
+      </p:bgPr>
+    </p:bg>
+    <p:spTree>
+      <p:nvGrpSpPr>
+        <p:cNvPr id="1" name=""/>
+        <p:cNvGrpSpPr/>
+        <p:nvPr/>
+      </p:nvGrpSpPr>
+      <p:grpSpPr>
+        <a:xfrm>
+          <a:off x="0" y="0"/>
+          <a:ext cx="0" cy="0"/>
+          <a:chOff x="0" y="0"/>
+          <a:chExt cx="0" cy="0"/>
+        </a:xfrm>
+      </p:grpSpPr>
+      <p:sp>
+        <p:nvSpPr>
+          <p:cNvPr id="2" name="Shape 0"/>
+          <p:cNvSpPr/>
+          <p:nvPr/>
+        </p:nvSpPr>
+        <p:spPr>
+          <a:xfrm>
+            <a:off x="0" y="0"/>
+            <a:ext cx="12191695" cy="164592"/>
+          </a:xfrm>
+          <a:prstGeom prst="rect">
+            <a:avLst/>
+          </a:prstGeom>
+          <a:solidFill>
+            <a:srgbClr val="0068B7"/>
+          </a:solidFill>
+          <a:ln w="12700">
+            <a:solidFill>
+              <a:srgbClr val="0068B7"/>
+            </a:solidFill>
+            <a:prstDash val="solid"/>
+          </a:ln>
+        </p:spPr>
+      </p:sp>
+      <p:sp>
+        <p:nvSpPr>
+          <p:cNvPr id="3" name="Shape 1"/>
+          <p:cNvSpPr/>
+          <p:nvPr/>
+        </p:nvSpPr>
+        <p:spPr>
+          <a:xfrm>
+            <a:off x="0" y="164592"/>
+            <a:ext cx="146304" cy="6693408"/>
+          </a:xfrm>
+          <a:prstGeom prst="rect">
+            <a:avLst/>
+          </a:prstGeom>
+          <a:solidFill>
+            <a:srgbClr val="2F8A28"/>
+          </a:solidFill>
+          <a:ln w="12700">
+            <a:solidFill>
+              <a:srgbClr val="2F8A28"/>
+            </a:solidFill>
+            <a:prstDash val="solid"/>
+          </a:ln>
+        </p:spPr>
+      </p:sp>
+      <p:sp>
+        <p:nvSpPr>
+          <p:cNvPr id="4" name="Text 2"/>
+          <p:cNvSpPr/>
+          <p:nvPr/>
+        </p:nvSpPr>
+        <p:spPr>
+          <a:xfrm>
+            <a:off x="502920" y="292608"/>
+            <a:ext cx="10149840" cy="256032"/>
+          </a:xfrm>
+          <a:prstGeom prst="rect">
+            <a:avLst/>
+          </a:prstGeom>
+          <a:noFill/>
+          <a:ln/>
+        </p:spPr>
+        <p:txBody>
+          <a:bodyPr wrap="square" lIns="0" tIns="0" rIns="0" bIns="0" rtlCol="0" anchor="ctr"/>
+          <a:lstStyle/>
+          <a:p>
+            <a:pPr indent="0" marL="0">
+              <a:buNone/>
+            </a:pPr>
+            <a:r>
+              <a:rPr lang="en-US" sz="900" b="1" dirty="0">
+                <a:solidFill>
+                  <a:srgbClr val="5F7181"/>
+                </a:solidFill>
+                <a:latin typeface="Aptos" pitchFamily="34" charset="0"/>
+                <a:ea typeface="Aptos" pitchFamily="34" charset="-122"/>
+                <a:cs typeface="Aptos" pitchFamily="34" charset="-120"/>
+              </a:rPr>
+              <a:t>Data Pipelines for Public Health AI</a:t>
+            </a:r>
+            <a:endParaRPr lang="en-US" sz="900" dirty="0"/>
+          </a:p>
+        </p:txBody>
+      </p:sp>
+      <p:sp>
+        <p:nvSpPr>
+          <p:cNvPr id="5" name="Text 3"/>
+          <p:cNvSpPr/>
+          <p:nvPr/>
+        </p:nvSpPr>
+        <p:spPr>
+          <a:xfrm>
+            <a:off x="502920" y="6537960"/>
+            <a:ext cx="7772400" cy="201168"/>
+          </a:xfrm>
+          <a:prstGeom prst="rect">
+            <a:avLst/>
+          </a:prstGeom>
+          <a:noFill/>
+          <a:ln/>
+        </p:spPr>
+        <p:txBody>
+          <a:bodyPr wrap="square" lIns="0" tIns="0" rIns="0" bIns="0" rtlCol="0" anchor="ctr"/>
+          <a:lstStyle/>
+          <a:p>
+            <a:pPr indent="0" marL="0">
+              <a:buNone/>
+            </a:pPr>
+            <a:r>
+              <a:rPr lang="en-US" sz="800" dirty="0">
+                <a:solidFill>
+                  <a:srgbClr val="5F7181"/>
+                </a:solidFill>
+                <a:latin typeface="Aptos" pitchFamily="34" charset="0"/>
+                <a:ea typeface="Aptos" pitchFamily="34" charset="-122"/>
+                <a:cs typeface="Aptos" pitchFamily="34" charset="-120"/>
+              </a:rPr>
+              <a:t>AI Playbook and Toolkit for Public Health Departments</a:t>
+            </a:r>
+            <a:endParaRPr lang="en-US" sz="800" dirty="0"/>
+          </a:p>
+        </p:txBody>
+      </p:sp>
+      <p:sp>
+        <p:nvSpPr>
+          <p:cNvPr id="6" name="Text 4"/>
+          <p:cNvSpPr/>
+          <p:nvPr/>
+        </p:nvSpPr>
+        <p:spPr>
+          <a:xfrm>
+            <a:off x="9966960" y="6537960"/>
+            <a:ext cx="1645920" cy="201168"/>
+          </a:xfrm>
+          <a:prstGeom prst="rect">
+            <a:avLst/>
+          </a:prstGeom>
+          <a:noFill/>
+          <a:ln/>
+        </p:spPr>
+        <p:txBody>
+          <a:bodyPr wrap="square" lIns="0" tIns="0" rIns="0" bIns="0" rtlCol="0" anchor="ctr"/>
+          <a:lstStyle/>
+          <a:p>
+            <a:pPr algn="r" indent="0" marL="0">
+              <a:buNone/>
+            </a:pPr>
+            <a:r>
+              <a:rPr lang="en-US" sz="800" dirty="0">
+                <a:solidFill>
+                  <a:srgbClr val="5F7181"/>
+                </a:solidFill>
+                <a:latin typeface="Aptos" pitchFamily="34" charset="0"/>
+                <a:ea typeface="Aptos" pitchFamily="34" charset="-122"/>
+                <a:cs typeface="Aptos" pitchFamily="34" charset="-120"/>
+              </a:rPr>
+              <a:t>© Paula Soper</a:t>
+            </a:r>
+            <a:endParaRPr lang="en-US" sz="800" dirty="0"/>
+          </a:p>
+        </p:txBody>
+      </p:sp>
+      <p:sp>
+        <p:nvSpPr>
+          <p:cNvPr id="7" name="Shape 5"/>
+          <p:cNvSpPr/>
+          <p:nvPr/>
+        </p:nvSpPr>
+        <p:spPr>
+          <a:xfrm>
+            <a:off x="640080" y="658368"/>
+            <a:ext cx="420624" cy="420624"/>
+          </a:xfrm>
+          <a:prstGeom prst="ellipse">
+            <a:avLst/>
+          </a:prstGeom>
+          <a:solidFill>
+            <a:srgbClr val="0068B7"/>
+          </a:solidFill>
+          <a:ln w="12700">
+            <a:solidFill>
+              <a:srgbClr val="0068B7"/>
+            </a:solidFill>
+            <a:prstDash val="solid"/>
+          </a:ln>
+        </p:spPr>
+      </p:sp>
+      <p:sp>
+        <p:nvSpPr>
+          <p:cNvPr id="8" name="Text 6"/>
+          <p:cNvSpPr/>
+          <p:nvPr/>
+        </p:nvSpPr>
+        <p:spPr>
+          <a:xfrm>
+            <a:off x="640080" y="731520"/>
+            <a:ext cx="420624" cy="164592"/>
+          </a:xfrm>
+          <a:prstGeom prst="rect">
+            <a:avLst/>
+          </a:prstGeom>
+          <a:noFill/>
+          <a:ln/>
+        </p:spPr>
+        <p:txBody>
+          <a:bodyPr wrap="square" lIns="0" tIns="0" rIns="0" bIns="0" rtlCol="0" anchor="ctr"/>
+          <a:lstStyle/>
+          <a:p>
+            <a:pPr algn="ctr" indent="0" marL="0">
+              <a:buNone/>
+            </a:pPr>
+            <a:r>
+              <a:rPr lang="en-US" sz="1100" b="1" dirty="0">
+                <a:solidFill>
+                  <a:srgbClr val="FFFFFF"/>
+                </a:solidFill>
+                <a:latin typeface="Aptos" pitchFamily="34" charset="0"/>
+                <a:ea typeface="Aptos" pitchFamily="34" charset="-122"/>
+                <a:cs typeface="Aptos" pitchFamily="34" charset="-120"/>
+              </a:rPr>
+              <a:t>13</a:t>
+            </a:r>
+            <a:endParaRPr lang="en-US" sz="1100" dirty="0"/>
+          </a:p>
+        </p:txBody>
+      </p:sp>
+      <p:sp>
+        <p:nvSpPr>
+          <p:cNvPr id="9" name="Text 7"/>
+          <p:cNvSpPr/>
+          <p:nvPr/>
+        </p:nvSpPr>
+        <p:spPr>
+          <a:xfrm>
+            <a:off x="640080" y="621792"/>
+            <a:ext cx="10881360" cy="566928"/>
+          </a:xfrm>
+          <a:prstGeom prst="rect">
+            <a:avLst/>
+          </a:prstGeom>
+          <a:noFill/>
+          <a:ln/>
+        </p:spPr>
+        <p:txBody>
+          <a:bodyPr wrap="square" lIns="0" tIns="0" rIns="0" bIns="0" rtlCol="0" anchor="ctr">
+            <a:normAutofit/>
+          </a:bodyPr>
+          <a:lstStyle/>
+          <a:p>
+            <a:pPr indent="0" marL="0">
+              <a:buNone/>
+            </a:pPr>
+            <a:r>
+              <a:rPr lang="en-US" sz="2700" b="1" dirty="0">
+                <a:solidFill>
+                  <a:srgbClr val="003A63"/>
+                </a:solidFill>
+                <a:latin typeface="Aptos Display" pitchFamily="34" charset="0"/>
+                <a:ea typeface="Aptos Display" pitchFamily="34" charset="-122"/>
+                <a:cs typeface="Aptos Display" pitchFamily="34" charset="-120"/>
+              </a:rPr>
+              <a:t>Knowledge Check</a:t>
+            </a:r>
+            <a:endParaRPr lang="en-US" sz="2700" dirty="0"/>
+          </a:p>
+        </p:txBody>
+      </p:sp>
+      <p:sp>
+        <p:nvSpPr>
+          <p:cNvPr id="10" name="Text 8"/>
+          <p:cNvSpPr/>
+          <p:nvPr/>
+        </p:nvSpPr>
+        <p:spPr>
+          <a:xfrm>
+            <a:off x="868680" y="1417320"/>
+            <a:ext cx="6675120" cy="4434840"/>
+          </a:xfrm>
+          <a:prstGeom prst="rect">
+            <a:avLst/>
+          </a:prstGeom>
+          <a:noFill/>
+          <a:ln/>
+        </p:spPr>
+        <p:txBody>
+          <a:bodyPr wrap="square" lIns="635" tIns="635" rIns="635" bIns="635" rtlCol="0" anchor="t">
+            <a:normAutofit/>
+          </a:bodyPr>
+          <a:lstStyle/>
+          <a:p>
+            <a:r>
+              <a:rPr lang="en-US" sz="1700" dirty="0">
+                <a:solidFill>
+                  <a:srgbClr val="17364A"/>
+                </a:solidFill>
+                <a:latin typeface="Aptos" pitchFamily="34" charset="0"/>
+                <a:ea typeface="Aptos" pitchFamily="34" charset="-122"/>
+                <a:cs typeface="Aptos" pitchFamily="34" charset="-120"/>
+              </a:rPr>
+              <a:t>1. What is the strongest reason to document data lineage for an AI-supported workflow?</a:t>
+            </a:r>
+            <a:endParaRPr lang="en-US" sz="1700" dirty="0"/>
+          </a:p>
+          <a:p>
+            <a:r>
+              <a:rPr lang="en-US" sz="1700" dirty="0">
+                <a:solidFill>
+                  <a:srgbClr val="17364A"/>
+                </a:solidFill>
+                <a:latin typeface="Aptos" pitchFamily="34" charset="0"/>
+                <a:ea typeface="Aptos" pitchFamily="34" charset="-122"/>
+                <a:cs typeface="Aptos" pitchFamily="34" charset="-120"/>
+              </a:rPr>
+              <a:t>2. Which pipeline type is most likely to trigger a workflow immediately after a defined event?</a:t>
+            </a:r>
+            <a:endParaRPr lang="en-US" sz="1700" dirty="0"/>
+          </a:p>
+          <a:p>
+            <a:r>
+              <a:rPr lang="en-US" sz="1700" dirty="0">
+                <a:solidFill>
+                  <a:srgbClr val="17364A"/>
+                </a:solidFill>
+                <a:latin typeface="Aptos" pitchFamily="34" charset="0"/>
+                <a:ea typeface="Aptos" pitchFamily="34" charset="-122"/>
+                <a:cs typeface="Aptos" pitchFamily="34" charset="-120"/>
+              </a:rPr>
+              <a:t>3. What is a practical guardrail for silent feed failure?</a:t>
+            </a:r>
+            <a:endParaRPr lang="en-US" sz="1700" dirty="0"/>
+          </a:p>
+          <a:p>
+            <a:r>
+              <a:rPr lang="en-US" sz="1700" dirty="0">
+                <a:solidFill>
+                  <a:srgbClr val="17364A"/>
+                </a:solidFill>
+                <a:latin typeface="Aptos" pitchFamily="34" charset="0"/>
+                <a:ea typeface="Aptos" pitchFamily="34" charset="-122"/>
+                <a:cs typeface="Aptos" pitchFamily="34" charset="-120"/>
+              </a:rPr>
+              <a:t>4. Why should source freshness be visible to users?</a:t>
+            </a:r>
+            <a:endParaRPr lang="en-US" sz="1700" dirty="0"/>
+          </a:p>
+        </p:txBody>
+      </p:sp>
+      <p:sp>
+        <p:nvSpPr>
+          <p:cNvPr id="11" name="Shape 9"/>
+          <p:cNvSpPr/>
+          <p:nvPr/>
+        </p:nvSpPr>
+        <p:spPr>
+          <a:xfrm>
+            <a:off x="7909560" y="1417320"/>
+            <a:ext cx="3154680" cy="1828800"/>
+          </a:xfrm>
+          <a:prstGeom prst="roundRect">
+            <a:avLst>
+              <a:gd name="adj" fmla="val 6000"/>
+            </a:avLst>
+          </a:prstGeom>
+          <a:solidFill>
+            <a:srgbClr val="EEF8ED"/>
+          </a:solidFill>
+          <a:ln w="12700">
+            <a:solidFill>
+              <a:srgbClr val="B9D7E6"/>
+            </a:solidFill>
+            <a:prstDash val="solid"/>
+          </a:ln>
+        </p:spPr>
+      </p:sp>
+      <p:sp>
+        <p:nvSpPr>
+          <p:cNvPr id="12" name="Text 10"/>
+          <p:cNvSpPr/>
+          <p:nvPr/>
+        </p:nvSpPr>
+        <p:spPr>
+          <a:xfrm>
+            <a:off x="8074152" y="1563624"/>
+            <a:ext cx="2825496" cy="201168"/>
+          </a:xfrm>
+          <a:prstGeom prst="rect">
+            <a:avLst/>
+          </a:prstGeom>
+          <a:noFill/>
+          <a:ln/>
+        </p:spPr>
+        <p:txBody>
+          <a:bodyPr wrap="square" lIns="0" tIns="0" rIns="0" bIns="0" rtlCol="0" anchor="ctr"/>
+          <a:lstStyle/>
+          <a:p>
+            <a:pPr indent="0" marL="0">
+              <a:buNone/>
+            </a:pPr>
+            <a:r>
+              <a:rPr lang="en-US" sz="950" b="1" dirty="0">
+                <a:solidFill>
+                  <a:srgbClr val="0068B7"/>
+                </a:solidFill>
+                <a:latin typeface="Aptos" pitchFamily="34" charset="0"/>
+                <a:ea typeface="Aptos" pitchFamily="34" charset="-122"/>
+                <a:cs typeface="Aptos" pitchFamily="34" charset="-120"/>
+              </a:rPr>
+              <a:t>Key idea</a:t>
+            </a:r>
+            <a:endParaRPr lang="en-US" sz="950" dirty="0"/>
+          </a:p>
+        </p:txBody>
+      </p:sp>
+      <p:sp>
+        <p:nvSpPr>
+          <p:cNvPr id="13" name="Text 11"/>
+          <p:cNvSpPr/>
+          <p:nvPr/>
+        </p:nvSpPr>
+        <p:spPr>
+          <a:xfrm>
+            <a:off x="8074152" y="1856232"/>
+            <a:ext cx="2825496" cy="1261872"/>
+          </a:xfrm>
+          <a:prstGeom prst="rect">
+            <a:avLst/>
+          </a:prstGeom>
+          <a:noFill/>
+          <a:ln/>
+        </p:spPr>
+        <p:txBody>
+          <a:bodyPr wrap="square" lIns="0" tIns="0" rIns="0" bIns="0" rtlCol="0" anchor="t">
+            <a:normAutofit/>
+          </a:bodyPr>
+          <a:lstStyle/>
+          <a:p>
+            <a:pPr indent="0" marL="0">
+              <a:buNone/>
+            </a:pPr>
+            <a:r>
+              <a:rPr lang="en-US" sz="1250" dirty="0">
+                <a:solidFill>
+                  <a:srgbClr val="17364A"/>
+                </a:solidFill>
+                <a:latin typeface="Aptos" pitchFamily="34" charset="0"/>
+                <a:ea typeface="Aptos" pitchFamily="34" charset="-122"/>
+                <a:cs typeface="Aptos" pitchFamily="34" charset="-120"/>
+              </a:rPr>
+              <a:t>1. What is the strongest reason to document data lineage for an AI-supported workflow?</a:t>
+            </a:r>
+            <a:endParaRPr lang="en-US" sz="1250" dirty="0"/>
+          </a:p>
+        </p:txBody>
+      </p:sp>
+      <p:sp>
+        <p:nvSpPr>
+          <p:cNvPr id="14" name="Shape 12"/>
+          <p:cNvSpPr/>
+          <p:nvPr/>
+        </p:nvSpPr>
+        <p:spPr>
+          <a:xfrm>
+            <a:off x="7909560" y="3520440"/>
+            <a:ext cx="3154680" cy="1737360"/>
+          </a:xfrm>
+          <a:prstGeom prst="roundRect">
+            <a:avLst>
+              <a:gd name="adj" fmla="val 6316"/>
+            </a:avLst>
+          </a:prstGeom>
+          <a:solidFill>
+            <a:srgbClr val="EAF6F8"/>
+          </a:solidFill>
+          <a:ln w="12700">
+            <a:solidFill>
+              <a:srgbClr val="B9D7E6"/>
+            </a:solidFill>
+            <a:prstDash val="solid"/>
+          </a:ln>
+        </p:spPr>
+      </p:sp>
+      <p:sp>
+        <p:nvSpPr>
+          <p:cNvPr id="15" name="Text 13"/>
+          <p:cNvSpPr/>
+          <p:nvPr/>
+        </p:nvSpPr>
+        <p:spPr>
+          <a:xfrm>
+            <a:off x="8074152" y="3666744"/>
+            <a:ext cx="2825496" cy="201168"/>
+          </a:xfrm>
+          <a:prstGeom prst="rect">
+            <a:avLst/>
+          </a:prstGeom>
+          <a:noFill/>
+          <a:ln/>
+        </p:spPr>
+        <p:txBody>
+          <a:bodyPr wrap="square" lIns="0" tIns="0" rIns="0" bIns="0" rtlCol="0" anchor="ctr"/>
+          <a:lstStyle/>
+          <a:p>
+            <a:pPr indent="0" marL="0">
+              <a:buNone/>
+            </a:pPr>
+            <a:r>
+              <a:rPr lang="en-US" sz="950" b="1" dirty="0">
+                <a:solidFill>
+                  <a:srgbClr val="0068B7"/>
+                </a:solidFill>
+                <a:latin typeface="Aptos" pitchFamily="34" charset="0"/>
+                <a:ea typeface="Aptos" pitchFamily="34" charset="-122"/>
+                <a:cs typeface="Aptos" pitchFamily="34" charset="-120"/>
+              </a:rPr>
+              <a:t>Use this for</a:t>
+            </a:r>
+            <a:endParaRPr lang="en-US" sz="950" dirty="0"/>
+          </a:p>
+        </p:txBody>
+      </p:sp>
+      <p:sp>
+        <p:nvSpPr>
+          <p:cNvPr id="16" name="Text 14"/>
+          <p:cNvSpPr/>
+          <p:nvPr/>
+        </p:nvSpPr>
+        <p:spPr>
+          <a:xfrm>
+            <a:off x="8074152" y="3959352"/>
+            <a:ext cx="2825496" cy="1170432"/>
+          </a:xfrm>
+          <a:prstGeom prst="rect">
+            <a:avLst/>
+          </a:prstGeom>
+          <a:noFill/>
+          <a:ln/>
+        </p:spPr>
+        <p:txBody>
+          <a:bodyPr wrap="square" lIns="0" tIns="0" rIns="0" bIns="0" rtlCol="0" anchor="t">
+            <a:normAutofit/>
+          </a:bodyPr>
+          <a:lstStyle/>
+          <a:p>
+            <a:pPr indent="0" marL="0">
+              <a:buNone/>
+            </a:pPr>
+            <a:r>
+              <a:rPr lang="en-US" sz="1250" dirty="0">
+                <a:solidFill>
+                  <a:srgbClr val="17364A"/>
+                </a:solidFill>
+                <a:latin typeface="Aptos" pitchFamily="34" charset="0"/>
+                <a:ea typeface="Aptos" pitchFamily="34" charset="-122"/>
+                <a:cs typeface="Aptos" pitchFamily="34" charset="-120"/>
+              </a:rPr>
+              <a:t>Connect the concept to public health decisions, safeguards, documentation, or implementation work.</a:t>
+            </a:r>
+            <a:endParaRPr lang="en-US" sz="1250" dirty="0"/>
+          </a:p>
+        </p:txBody>
+      </p:sp>
+    </p:spTree>
+  </p:cSld>
+  <p:clrMapOvr>
+    <a:masterClrMapping/>
+  </p:clrMapOvr>
+</p:sld>
+</file>
+
+<file path=ppt/slides/slide22.xml><?xml version="1.0" encoding="utf-8"?>
+<p:sld xmlns:a="http://schemas.openxmlformats.org/drawingml/2006/main" xmlns:r="http://schemas.openxmlformats.org/officeDocument/2006/relationships" xmlns:p="http://schemas.openxmlformats.org/presentationml/2006/main">
+  <p:cSld name="Slide 22">
+    <p:bg>
+      <p:bgPr>
+        <a:solidFill>
+          <a:srgbClr val="F7FBFD"/>
+        </a:solidFill>
+      </p:bgPr>
+    </p:bg>
+    <p:spTree>
+      <p:nvGrpSpPr>
+        <p:cNvPr id="1" name=""/>
+        <p:cNvGrpSpPr/>
+        <p:nvPr/>
+      </p:nvGrpSpPr>
+      <p:grpSpPr>
+        <a:xfrm>
+          <a:off x="0" y="0"/>
+          <a:ext cx="0" cy="0"/>
+          <a:chOff x="0" y="0"/>
+          <a:chExt cx="0" cy="0"/>
+        </a:xfrm>
+      </p:grpSpPr>
+      <p:sp>
+        <p:nvSpPr>
+          <p:cNvPr id="2" name="Shape 0"/>
+          <p:cNvSpPr/>
+          <p:nvPr/>
+        </p:nvSpPr>
+        <p:spPr>
+          <a:xfrm>
+            <a:off x="0" y="0"/>
+            <a:ext cx="12191695" cy="164592"/>
+          </a:xfrm>
+          <a:prstGeom prst="rect">
+            <a:avLst/>
+          </a:prstGeom>
+          <a:solidFill>
+            <a:srgbClr val="0068B7"/>
+          </a:solidFill>
+          <a:ln w="12700">
+            <a:solidFill>
+              <a:srgbClr val="0068B7"/>
+            </a:solidFill>
+            <a:prstDash val="solid"/>
+          </a:ln>
+        </p:spPr>
+      </p:sp>
+      <p:sp>
+        <p:nvSpPr>
+          <p:cNvPr id="3" name="Shape 1"/>
+          <p:cNvSpPr/>
+          <p:nvPr/>
+        </p:nvSpPr>
+        <p:spPr>
+          <a:xfrm>
+            <a:off x="0" y="164592"/>
+            <a:ext cx="146304" cy="6693408"/>
+          </a:xfrm>
+          <a:prstGeom prst="rect">
+            <a:avLst/>
+          </a:prstGeom>
+          <a:solidFill>
+            <a:srgbClr val="2F8A28"/>
+          </a:solidFill>
+          <a:ln w="12700">
+            <a:solidFill>
+              <a:srgbClr val="2F8A28"/>
+            </a:solidFill>
+            <a:prstDash val="solid"/>
+          </a:ln>
+        </p:spPr>
+      </p:sp>
+      <p:sp>
+        <p:nvSpPr>
+          <p:cNvPr id="4" name="Text 2"/>
+          <p:cNvSpPr/>
+          <p:nvPr/>
+        </p:nvSpPr>
+        <p:spPr>
+          <a:xfrm>
+            <a:off x="502920" y="292608"/>
+            <a:ext cx="10149840" cy="256032"/>
+          </a:xfrm>
+          <a:prstGeom prst="rect">
+            <a:avLst/>
+          </a:prstGeom>
+          <a:noFill/>
+          <a:ln/>
+        </p:spPr>
+        <p:txBody>
+          <a:bodyPr wrap="square" lIns="0" tIns="0" rIns="0" bIns="0" rtlCol="0" anchor="ctr"/>
+          <a:lstStyle/>
+          <a:p>
+            <a:pPr indent="0" marL="0">
+              <a:buNone/>
+            </a:pPr>
+            <a:r>
+              <a:rPr lang="en-US" sz="900" b="1" dirty="0">
+                <a:solidFill>
+                  <a:srgbClr val="5F7181"/>
+                </a:solidFill>
+                <a:latin typeface="Aptos" pitchFamily="34" charset="0"/>
+                <a:ea typeface="Aptos" pitchFamily="34" charset="-122"/>
+                <a:cs typeface="Aptos" pitchFamily="34" charset="-120"/>
+              </a:rPr>
+              <a:t>Data Pipelines for Public Health AI</a:t>
+            </a:r>
+            <a:endParaRPr lang="en-US" sz="900" dirty="0"/>
+          </a:p>
+        </p:txBody>
+      </p:sp>
+      <p:sp>
+        <p:nvSpPr>
+          <p:cNvPr id="5" name="Text 3"/>
+          <p:cNvSpPr/>
+          <p:nvPr/>
+        </p:nvSpPr>
+        <p:spPr>
+          <a:xfrm>
+            <a:off x="502920" y="6537960"/>
+            <a:ext cx="7772400" cy="201168"/>
+          </a:xfrm>
+          <a:prstGeom prst="rect">
+            <a:avLst/>
+          </a:prstGeom>
+          <a:noFill/>
+          <a:ln/>
+        </p:spPr>
+        <p:txBody>
+          <a:bodyPr wrap="square" lIns="0" tIns="0" rIns="0" bIns="0" rtlCol="0" anchor="ctr"/>
+          <a:lstStyle/>
+          <a:p>
+            <a:pPr indent="0" marL="0">
+              <a:buNone/>
+            </a:pPr>
+            <a:r>
+              <a:rPr lang="en-US" sz="800" dirty="0">
+                <a:solidFill>
+                  <a:srgbClr val="5F7181"/>
+                </a:solidFill>
+                <a:latin typeface="Aptos" pitchFamily="34" charset="0"/>
+                <a:ea typeface="Aptos" pitchFamily="34" charset="-122"/>
+                <a:cs typeface="Aptos" pitchFamily="34" charset="-120"/>
+              </a:rPr>
+              <a:t>AI Playbook and Toolkit for Public Health Departments</a:t>
+            </a:r>
+            <a:endParaRPr lang="en-US" sz="800" dirty="0"/>
+          </a:p>
+        </p:txBody>
+      </p:sp>
+      <p:sp>
+        <p:nvSpPr>
+          <p:cNvPr id="6" name="Text 4"/>
+          <p:cNvSpPr/>
+          <p:nvPr/>
+        </p:nvSpPr>
+        <p:spPr>
+          <a:xfrm>
+            <a:off x="9966960" y="6537960"/>
+            <a:ext cx="1645920" cy="201168"/>
+          </a:xfrm>
+          <a:prstGeom prst="rect">
+            <a:avLst/>
+          </a:prstGeom>
+          <a:noFill/>
+          <a:ln/>
+        </p:spPr>
+        <p:txBody>
+          <a:bodyPr wrap="square" lIns="0" tIns="0" rIns="0" bIns="0" rtlCol="0" anchor="ctr"/>
+          <a:lstStyle/>
+          <a:p>
+            <a:pPr algn="r" indent="0" marL="0">
+              <a:buNone/>
+            </a:pPr>
+            <a:r>
+              <a:rPr lang="en-US" sz="800" dirty="0">
+                <a:solidFill>
+                  <a:srgbClr val="5F7181"/>
+                </a:solidFill>
+                <a:latin typeface="Aptos" pitchFamily="34" charset="0"/>
+                <a:ea typeface="Aptos" pitchFamily="34" charset="-122"/>
+                <a:cs typeface="Aptos" pitchFamily="34" charset="-120"/>
+              </a:rPr>
+              <a:t>© Paula Soper</a:t>
+            </a:r>
+            <a:endParaRPr lang="en-US" sz="800" dirty="0"/>
+          </a:p>
+        </p:txBody>
+      </p:sp>
+      <p:sp>
+        <p:nvSpPr>
+          <p:cNvPr id="7" name="Shape 5"/>
+          <p:cNvSpPr/>
+          <p:nvPr/>
+        </p:nvSpPr>
+        <p:spPr>
+          <a:xfrm>
+            <a:off x="640080" y="658368"/>
+            <a:ext cx="420624" cy="420624"/>
+          </a:xfrm>
+          <a:prstGeom prst="ellipse">
+            <a:avLst/>
+          </a:prstGeom>
+          <a:solidFill>
+            <a:srgbClr val="0068B7"/>
+          </a:solidFill>
+          <a:ln w="12700">
+            <a:solidFill>
+              <a:srgbClr val="0068B7"/>
+            </a:solidFill>
+            <a:prstDash val="solid"/>
+          </a:ln>
+        </p:spPr>
+      </p:sp>
+      <p:sp>
+        <p:nvSpPr>
+          <p:cNvPr id="8" name="Text 6"/>
+          <p:cNvSpPr/>
+          <p:nvPr/>
+        </p:nvSpPr>
+        <p:spPr>
+          <a:xfrm>
+            <a:off x="640080" y="731520"/>
+            <a:ext cx="420624" cy="164592"/>
+          </a:xfrm>
+          <a:prstGeom prst="rect">
+            <a:avLst/>
+          </a:prstGeom>
+          <a:noFill/>
+          <a:ln/>
+        </p:spPr>
+        <p:txBody>
+          <a:bodyPr wrap="square" lIns="0" tIns="0" rIns="0" bIns="0" rtlCol="0" anchor="ctr"/>
+          <a:lstStyle/>
+          <a:p>
+            <a:pPr algn="ctr" indent="0" marL="0">
+              <a:buNone/>
+            </a:pPr>
+            <a:r>
+              <a:rPr lang="en-US" sz="1100" b="1" dirty="0">
+                <a:solidFill>
+                  <a:srgbClr val="FFFFFF"/>
+                </a:solidFill>
+                <a:latin typeface="Aptos" pitchFamily="34" charset="0"/>
+                <a:ea typeface="Aptos" pitchFamily="34" charset="-122"/>
+                <a:cs typeface="Aptos" pitchFamily="34" charset="-120"/>
+              </a:rPr>
+              <a:t>14</a:t>
+            </a:r>
+            <a:endParaRPr lang="en-US" sz="1100" dirty="0"/>
+          </a:p>
+        </p:txBody>
+      </p:sp>
+      <p:sp>
+        <p:nvSpPr>
+          <p:cNvPr id="9" name="Text 7"/>
+          <p:cNvSpPr/>
+          <p:nvPr/>
+        </p:nvSpPr>
+        <p:spPr>
+          <a:xfrm>
+            <a:off x="640080" y="621792"/>
+            <a:ext cx="10881360" cy="566928"/>
+          </a:xfrm>
+          <a:prstGeom prst="rect">
+            <a:avLst/>
+          </a:prstGeom>
+          <a:noFill/>
+          <a:ln/>
+        </p:spPr>
+        <p:txBody>
+          <a:bodyPr wrap="square" lIns="0" tIns="0" rIns="0" bIns="0" rtlCol="0" anchor="ctr">
+            <a:normAutofit/>
+          </a:bodyPr>
+          <a:lstStyle/>
+          <a:p>
+            <a:pPr indent="0" marL="0">
+              <a:buNone/>
+            </a:pPr>
+            <a:r>
+              <a:rPr lang="en-US" sz="2700" b="1" dirty="0">
+                <a:solidFill>
+                  <a:srgbClr val="003A63"/>
+                </a:solidFill>
+                <a:latin typeface="Aptos Display" pitchFamily="34" charset="0"/>
+                <a:ea typeface="Aptos Display" pitchFamily="34" charset="-122"/>
+                <a:cs typeface="Aptos Display" pitchFamily="34" charset="-120"/>
+              </a:rPr>
+              <a:t>References and Resources</a:t>
+            </a:r>
+            <a:endParaRPr lang="en-US" sz="2700" dirty="0"/>
+          </a:p>
+        </p:txBody>
+      </p:sp>
+      <p:sp>
+        <p:nvSpPr>
+          <p:cNvPr id="10" name="Text 8"/>
+          <p:cNvSpPr/>
+          <p:nvPr/>
+        </p:nvSpPr>
+        <p:spPr>
+          <a:xfrm>
+            <a:off x="868680" y="1417320"/>
+            <a:ext cx="6675120" cy="4434840"/>
+          </a:xfrm>
+          <a:prstGeom prst="rect">
+            <a:avLst/>
+          </a:prstGeom>
+          <a:noFill/>
+          <a:ln/>
+        </p:spPr>
+        <p:txBody>
+          <a:bodyPr wrap="square" lIns="635" tIns="635" rIns="635" bIns="635" rtlCol="0" anchor="t">
+            <a:normAutofit/>
+          </a:bodyPr>
+          <a:lstStyle/>
+          <a:p>
+            <a:r>
+              <a:rPr lang="en-US" sz="1700" dirty="0">
+                <a:solidFill>
+                  <a:srgbClr val="17364A"/>
+                </a:solidFill>
+                <a:latin typeface="Aptos" pitchFamily="34" charset="0"/>
+                <a:ea typeface="Aptos" pitchFamily="34" charset="-122"/>
+                <a:cs typeface="Aptos" pitchFamily="34" charset="-120"/>
+              </a:rPr>
               <a:t>CDC Data Modernization Initiative materials: https://www.cdc.gov/data-modernization/php/index.html</a:t>
             </a:r>
-            <a:endParaRPr lang="en-US" sz="1450" dirty="0"/>
-          </a:p>
-          <a:p>
-            <a:r>
-              <a:rPr lang="en-US" sz="1450" dirty="0">
+            <a:endParaRPr lang="en-US" sz="1700" dirty="0"/>
+          </a:p>
+          <a:p>
+            <a:r>
+              <a:rPr lang="en-US" sz="1700" dirty="0">
                 <a:solidFill>
                   <a:srgbClr val="17364A"/>
                 </a:solidFill>
@@ -6046,11 +10775,11 @@
               </a:rPr>
               <a:t>CDC Public Health Data Strategy: https://www.cdc.gov/public-health-data-strategy/php/about/index.html</a:t>
             </a:r>
-            <a:endParaRPr lang="en-US" sz="1450" dirty="0"/>
-          </a:p>
-          <a:p>
-            <a:r>
-              <a:rPr lang="en-US" sz="1450" dirty="0">
+            <a:endParaRPr lang="en-US" sz="1700" dirty="0"/>
+          </a:p>
+          <a:p>
+            <a:r>
+              <a:rPr lang="en-US" sz="1700" dirty="0">
                 <a:solidFill>
                   <a:srgbClr val="17364A"/>
                 </a:solidFill>
@@ -6060,11 +10789,11 @@
               </a:rPr>
               <a:t>NIST AI Risk Management Framework: https://www.nist.gov/itl/ai-risk-management-framework</a:t>
             </a:r>
-            <a:endParaRPr lang="en-US" sz="1450" dirty="0"/>
-          </a:p>
-          <a:p>
-            <a:r>
-              <a:rPr lang="en-US" sz="1450" dirty="0">
+            <a:endParaRPr lang="en-US" sz="1700" dirty="0"/>
+          </a:p>
+          <a:p>
+            <a:r>
+              <a:rPr lang="en-US" sz="1700" dirty="0">
                 <a:solidFill>
                   <a:srgbClr val="17364A"/>
                 </a:solidFill>
@@ -6074,7 +10803,221 @@
               </a:rPr>
               <a:t>Agency data governance and system monitoring documentation</a:t>
             </a:r>
-            <a:endParaRPr lang="en-US" sz="1450" dirty="0"/>
+            <a:endParaRPr lang="en-US" sz="1700" dirty="0"/>
+          </a:p>
+        </p:txBody>
+      </p:sp>
+      <p:sp>
+        <p:nvSpPr>
+          <p:cNvPr id="11" name="Shape 9"/>
+          <p:cNvSpPr/>
+          <p:nvPr/>
+        </p:nvSpPr>
+        <p:spPr>
+          <a:xfrm>
+            <a:off x="7909560" y="1417320"/>
+            <a:ext cx="3154680" cy="1828800"/>
+          </a:xfrm>
+          <a:prstGeom prst="roundRect">
+            <a:avLst>
+              <a:gd name="adj" fmla="val 6000"/>
+            </a:avLst>
+          </a:prstGeom>
+          <a:solidFill>
+            <a:srgbClr val="EEF8ED"/>
+          </a:solidFill>
+          <a:ln w="12700">
+            <a:solidFill>
+              <a:srgbClr val="B9D7E6"/>
+            </a:solidFill>
+            <a:prstDash val="solid"/>
+          </a:ln>
+        </p:spPr>
+      </p:sp>
+      <p:sp>
+        <p:nvSpPr>
+          <p:cNvPr id="12" name="Text 10"/>
+          <p:cNvSpPr/>
+          <p:nvPr/>
+        </p:nvSpPr>
+        <p:spPr>
+          <a:xfrm>
+            <a:off x="8074152" y="1563624"/>
+            <a:ext cx="2825496" cy="201168"/>
+          </a:xfrm>
+          <a:prstGeom prst="rect">
+            <a:avLst/>
+          </a:prstGeom>
+          <a:noFill/>
+          <a:ln/>
+        </p:spPr>
+        <p:txBody>
+          <a:bodyPr wrap="square" lIns="0" tIns="0" rIns="0" bIns="0" rtlCol="0" anchor="ctr"/>
+          <a:lstStyle/>
+          <a:p>
+            <a:pPr indent="0" marL="0">
+              <a:buNone/>
+            </a:pPr>
+            <a:r>
+              <a:rPr lang="en-US" sz="950" b="1" dirty="0">
+                <a:solidFill>
+                  <a:srgbClr val="0068B7"/>
+                </a:solidFill>
+                <a:latin typeface="Aptos" pitchFamily="34" charset="0"/>
+                <a:ea typeface="Aptos" pitchFamily="34" charset="-122"/>
+                <a:cs typeface="Aptos" pitchFamily="34" charset="-120"/>
+              </a:rPr>
+              <a:t>Key idea</a:t>
+            </a:r>
+            <a:endParaRPr lang="en-US" sz="950" dirty="0"/>
+          </a:p>
+        </p:txBody>
+      </p:sp>
+      <p:sp>
+        <p:nvSpPr>
+          <p:cNvPr id="13" name="Text 11"/>
+          <p:cNvSpPr/>
+          <p:nvPr/>
+        </p:nvSpPr>
+        <p:spPr>
+          <a:xfrm>
+            <a:off x="8074152" y="1856232"/>
+            <a:ext cx="2825496" cy="1261872"/>
+          </a:xfrm>
+          <a:prstGeom prst="rect">
+            <a:avLst/>
+          </a:prstGeom>
+          <a:noFill/>
+          <a:ln/>
+        </p:spPr>
+        <p:txBody>
+          <a:bodyPr wrap="square" lIns="0" tIns="0" rIns="0" bIns="0" rtlCol="0" anchor="t">
+            <a:normAutofit/>
+          </a:bodyPr>
+          <a:lstStyle/>
+          <a:p>
+            <a:pPr indent="0" marL="0">
+              <a:buNone/>
+            </a:pPr>
+            <a:r>
+              <a:rPr lang="en-US" sz="1250" dirty="0">
+                <a:solidFill>
+                  <a:srgbClr val="17364A"/>
+                </a:solidFill>
+                <a:latin typeface="Aptos" pitchFamily="34" charset="0"/>
+                <a:ea typeface="Aptos" pitchFamily="34" charset="-122"/>
+                <a:cs typeface="Aptos" pitchFamily="34" charset="-120"/>
+              </a:rPr>
+              <a:t>CDC Data Modernization Initiative materials: https://www.cdc.gov/data-modernization/php/index.html</a:t>
+            </a:r>
+            <a:endParaRPr lang="en-US" sz="1250" dirty="0"/>
+          </a:p>
+        </p:txBody>
+      </p:sp>
+      <p:sp>
+        <p:nvSpPr>
+          <p:cNvPr id="14" name="Shape 12"/>
+          <p:cNvSpPr/>
+          <p:nvPr/>
+        </p:nvSpPr>
+        <p:spPr>
+          <a:xfrm>
+            <a:off x="7909560" y="3520440"/>
+            <a:ext cx="3154680" cy="1737360"/>
+          </a:xfrm>
+          <a:prstGeom prst="roundRect">
+            <a:avLst>
+              <a:gd name="adj" fmla="val 6316"/>
+            </a:avLst>
+          </a:prstGeom>
+          <a:solidFill>
+            <a:srgbClr val="EAF6F8"/>
+          </a:solidFill>
+          <a:ln w="12700">
+            <a:solidFill>
+              <a:srgbClr val="B9D7E6"/>
+            </a:solidFill>
+            <a:prstDash val="solid"/>
+          </a:ln>
+        </p:spPr>
+      </p:sp>
+      <p:sp>
+        <p:nvSpPr>
+          <p:cNvPr id="15" name="Text 13"/>
+          <p:cNvSpPr/>
+          <p:nvPr/>
+        </p:nvSpPr>
+        <p:spPr>
+          <a:xfrm>
+            <a:off x="8074152" y="3666744"/>
+            <a:ext cx="2825496" cy="201168"/>
+          </a:xfrm>
+          <a:prstGeom prst="rect">
+            <a:avLst/>
+          </a:prstGeom>
+          <a:noFill/>
+          <a:ln/>
+        </p:spPr>
+        <p:txBody>
+          <a:bodyPr wrap="square" lIns="0" tIns="0" rIns="0" bIns="0" rtlCol="0" anchor="ctr"/>
+          <a:lstStyle/>
+          <a:p>
+            <a:pPr indent="0" marL="0">
+              <a:buNone/>
+            </a:pPr>
+            <a:r>
+              <a:rPr lang="en-US" sz="950" b="1" dirty="0">
+                <a:solidFill>
+                  <a:srgbClr val="0068B7"/>
+                </a:solidFill>
+                <a:latin typeface="Aptos" pitchFamily="34" charset="0"/>
+                <a:ea typeface="Aptos" pitchFamily="34" charset="-122"/>
+                <a:cs typeface="Aptos" pitchFamily="34" charset="-120"/>
+              </a:rPr>
+              <a:t>Use this for</a:t>
+            </a:r>
+            <a:endParaRPr lang="en-US" sz="950" dirty="0"/>
+          </a:p>
+        </p:txBody>
+      </p:sp>
+      <p:sp>
+        <p:nvSpPr>
+          <p:cNvPr id="16" name="Text 14"/>
+          <p:cNvSpPr/>
+          <p:nvPr/>
+        </p:nvSpPr>
+        <p:spPr>
+          <a:xfrm>
+            <a:off x="8074152" y="3959352"/>
+            <a:ext cx="2825496" cy="1170432"/>
+          </a:xfrm>
+          <a:prstGeom prst="rect">
+            <a:avLst/>
+          </a:prstGeom>
+          <a:noFill/>
+          <a:ln/>
+        </p:spPr>
+        <p:txBody>
+          <a:bodyPr wrap="square" lIns="0" tIns="0" rIns="0" bIns="0" rtlCol="0" anchor="t">
+            <a:normAutofit/>
+          </a:bodyPr>
+          <a:lstStyle/>
+          <a:p>
+            <a:pPr indent="0" marL="0">
+              <a:buNone/>
+            </a:pPr>
+            <a:r>
+              <a:rPr lang="en-US" sz="1250" dirty="0">
+                <a:solidFill>
+                  <a:srgbClr val="17364A"/>
+                </a:solidFill>
+                <a:latin typeface="Aptos" pitchFamily="34" charset="0"/>
+                <a:ea typeface="Aptos" pitchFamily="34" charset="-122"/>
+                <a:cs typeface="Aptos" pitchFamily="34" charset="-120"/>
+              </a:rPr>
+              <a:t>Connect the concept to public health decisions, safeguards, documentation, or implementation work.</a:t>
+            </a:r>
+            <a:endParaRPr lang="en-US" sz="1250" dirty="0"/>
           </a:p>
         </p:txBody>
       </p:sp>
@@ -6137,7 +11080,32 @@
       </p:sp>
       <p:sp>
         <p:nvSpPr>
-          <p:cNvPr id="3" name="Text 1"/>
+          <p:cNvPr id="3" name="Shape 1"/>
+          <p:cNvSpPr/>
+          <p:nvPr/>
+        </p:nvSpPr>
+        <p:spPr>
+          <a:xfrm>
+            <a:off x="0" y="164592"/>
+            <a:ext cx="146304" cy="6693408"/>
+          </a:xfrm>
+          <a:prstGeom prst="rect">
+            <a:avLst/>
+          </a:prstGeom>
+          <a:solidFill>
+            <a:srgbClr val="2F8A28"/>
+          </a:solidFill>
+          <a:ln w="12700">
+            <a:solidFill>
+              <a:srgbClr val="2F8A28"/>
+            </a:solidFill>
+            <a:prstDash val="solid"/>
+          </a:ln>
+        </p:spPr>
+      </p:sp>
+      <p:sp>
+        <p:nvSpPr>
+          <p:cNvPr id="4" name="Text 2"/>
           <p:cNvSpPr/>
           <p:nvPr/>
         </p:nvSpPr>
@@ -6176,7 +11144,7 @@
       </p:sp>
       <p:sp>
         <p:nvSpPr>
-          <p:cNvPr id="4" name="Text 2"/>
+          <p:cNvPr id="5" name="Text 3"/>
           <p:cNvSpPr/>
           <p:nvPr/>
         </p:nvSpPr>
@@ -6215,7 +11183,7 @@
       </p:sp>
       <p:sp>
         <p:nvSpPr>
-          <p:cNvPr id="5" name="Text 3"/>
+          <p:cNvPr id="6" name="Text 4"/>
           <p:cNvSpPr/>
           <p:nvPr/>
         </p:nvSpPr>
@@ -6254,7 +11222,7 @@
       </p:sp>
       <p:sp>
         <p:nvSpPr>
-          <p:cNvPr id="6" name="Text 4"/>
+          <p:cNvPr id="7" name="Text 5"/>
           <p:cNvSpPr/>
           <p:nvPr/>
         </p:nvSpPr>
@@ -6287,7 +11255,7 @@
                 <a:ea typeface="Aptos Display" pitchFamily="34" charset="-122"/>
                 <a:cs typeface="Aptos Display" pitchFamily="34" charset="-120"/>
               </a:rPr>
-              <a:t>Learning Objectives</a:t>
+              <a:t>How this module connects to the playbook</a:t>
             </a:r>
             <a:endParaRPr lang="en-US" sz="2700" dirty="0"/>
           </a:p>
@@ -6295,14 +11263,14 @@
       </p:sp>
       <p:sp>
         <p:nvSpPr>
-          <p:cNvPr id="7" name="Text 5"/>
-          <p:cNvSpPr/>
-          <p:nvPr/>
-        </p:nvSpPr>
-        <p:spPr>
-          <a:xfrm>
-            <a:off x="822960" y="1325880"/>
-            <a:ext cx="10378440" cy="4800600"/>
+          <p:cNvPr id="8" name="Text 6"/>
+          <p:cNvSpPr/>
+          <p:nvPr/>
+        </p:nvSpPr>
+        <p:spPr>
+          <a:xfrm>
+            <a:off x="868680" y="1417320"/>
+            <a:ext cx="6903720" cy="4480560"/>
           </a:xfrm>
           <a:prstGeom prst="rect">
             <a:avLst/>
@@ -6317,7 +11285,7 @@
           <a:lstStyle/>
           <a:p>
             <a:r>
-              <a:rPr lang="en-US" sz="1450" dirty="0">
+              <a:rPr lang="en-US" sz="1540" dirty="0">
                 <a:solidFill>
                   <a:srgbClr val="17364A"/>
                 </a:solidFill>
@@ -6325,13 +11293,13 @@
                 <a:ea typeface="Aptos" pitchFamily="34" charset="-122"/>
                 <a:cs typeface="Aptos" pitchFamily="34" charset="-120"/>
               </a:rPr>
-              <a:t>Describe the major steps in public health data pipelines, including ingestion, validation, transformation, storage, access, and monitoring.</a:t>
-            </a:r>
-            <a:endParaRPr lang="en-US" sz="1450" dirty="0"/>
-          </a:p>
-          <a:p>
-            <a:r>
-              <a:rPr lang="en-US" sz="1450" dirty="0">
+              <a:t>Play 12: Execute Governance and Oversight - This lesson informs Play 12 by helping learners connect the lesson topic to execute.</a:t>
+            </a:r>
+            <a:endParaRPr lang="en-US" sz="1540" dirty="0"/>
+          </a:p>
+          <a:p>
+            <a:r>
+              <a:rPr lang="en-US" sz="1540" dirty="0">
                 <a:solidFill>
                   <a:srgbClr val="17364A"/>
                 </a:solidFill>
@@ -6339,13 +11307,13 @@
                 <a:ea typeface="Aptos" pitchFamily="34" charset="-122"/>
                 <a:cs typeface="Aptos" pitchFamily="34" charset="-120"/>
               </a:rPr>
-              <a:t>Distinguish between batch, real-time, and event-driven data flows.</a:t>
-            </a:r>
-            <a:endParaRPr lang="en-US" sz="1450" dirty="0"/>
-          </a:p>
-          <a:p>
-            <a:r>
-              <a:rPr lang="en-US" sz="1450" dirty="0">
+              <a:t>Play 3: Establish AI Governance - This lesson informs Play 3 by helping learners connect the lesson topic to establish ai governance.</a:t>
+            </a:r>
+            <a:endParaRPr lang="en-US" sz="1540" dirty="0"/>
+          </a:p>
+          <a:p>
+            <a:r>
+              <a:rPr lang="en-US" sz="1540" dirty="0">
                 <a:solidFill>
                   <a:srgbClr val="17364A"/>
                 </a:solidFill>
@@ -6353,13 +11321,13 @@
                 <a:ea typeface="Aptos" pitchFamily="34" charset="-122"/>
                 <a:cs typeface="Aptos" pitchFamily="34" charset="-120"/>
               </a:rPr>
-              <a:t>Explain how pipeline failures can affect AI outputs and operational decisions.</a:t>
-            </a:r>
-            <a:endParaRPr lang="en-US" sz="1450" dirty="0"/>
-          </a:p>
-          <a:p>
-            <a:r>
-              <a:rPr lang="en-US" sz="1450" dirty="0">
+              <a:t>Play 13: Monitor and Evaluate AI Systems - This lesson informs Play 13 by helping learners connect the lesson topic to monitor and.</a:t>
+            </a:r>
+            <a:endParaRPr lang="en-US" sz="1540" dirty="0"/>
+          </a:p>
+          <a:p>
+            <a:r>
+              <a:rPr lang="en-US" sz="1540" dirty="0">
                 <a:solidFill>
                   <a:srgbClr val="17364A"/>
                 </a:solidFill>
@@ -6367,13 +11335,106 @@
                 <a:ea typeface="Aptos" pitchFamily="34" charset="-122"/>
                 <a:cs typeface="Aptos" pitchFamily="34" charset="-120"/>
               </a:rPr>
-              <a:t>Identify metadata, lineage, version control, and audit needs for AI-supported workflows.</a:t>
-            </a:r>
-            <a:endParaRPr lang="en-US" sz="1450" dirty="0"/>
-          </a:p>
-          <a:p>
-            <a:r>
-              <a:rPr lang="en-US" sz="1450" dirty="0">
+              <a:t>Play 11: Build and Deploy AI Solutions - This lesson informs Play 11 by helping learners connect the lesson topic to build and deploy.</a:t>
+            </a:r>
+            <a:endParaRPr lang="en-US" sz="1540" dirty="0"/>
+          </a:p>
+        </p:txBody>
+      </p:sp>
+      <p:sp>
+        <p:nvSpPr>
+          <p:cNvPr id="9" name="Shape 7"/>
+          <p:cNvSpPr/>
+          <p:nvPr/>
+        </p:nvSpPr>
+        <p:spPr>
+          <a:xfrm>
+            <a:off x="8046720" y="1417320"/>
+            <a:ext cx="3063240" cy="2103120"/>
+          </a:xfrm>
+          <a:prstGeom prst="roundRect">
+            <a:avLst>
+              <a:gd name="adj" fmla="val 5217"/>
+            </a:avLst>
+          </a:prstGeom>
+          <a:solidFill>
+            <a:srgbClr val="EEF8ED"/>
+          </a:solidFill>
+          <a:ln w="12700">
+            <a:solidFill>
+              <a:srgbClr val="B9D7E6"/>
+            </a:solidFill>
+            <a:prstDash val="solid"/>
+          </a:ln>
+        </p:spPr>
+      </p:sp>
+      <p:sp>
+        <p:nvSpPr>
+          <p:cNvPr id="10" name="Text 8"/>
+          <p:cNvSpPr/>
+          <p:nvPr/>
+        </p:nvSpPr>
+        <p:spPr>
+          <a:xfrm>
+            <a:off x="8211312" y="1563624"/>
+            <a:ext cx="2734056" cy="201168"/>
+          </a:xfrm>
+          <a:prstGeom prst="rect">
+            <a:avLst/>
+          </a:prstGeom>
+          <a:noFill/>
+          <a:ln/>
+        </p:spPr>
+        <p:txBody>
+          <a:bodyPr wrap="square" lIns="0" tIns="0" rIns="0" bIns="0" rtlCol="0" anchor="ctr"/>
+          <a:lstStyle/>
+          <a:p>
+            <a:pPr indent="0" marL="0">
+              <a:buNone/>
+            </a:pPr>
+            <a:r>
+              <a:rPr lang="en-US" sz="950" b="1" dirty="0">
+                <a:solidFill>
+                  <a:srgbClr val="0068B7"/>
+                </a:solidFill>
+                <a:latin typeface="Aptos" pitchFamily="34" charset="0"/>
+                <a:ea typeface="Aptos" pitchFamily="34" charset="-122"/>
+                <a:cs typeface="Aptos" pitchFamily="34" charset="-120"/>
+              </a:rPr>
+              <a:t>Apply the lesson</a:t>
+            </a:r>
+            <a:endParaRPr lang="en-US" sz="950" dirty="0"/>
+          </a:p>
+        </p:txBody>
+      </p:sp>
+      <p:sp>
+        <p:nvSpPr>
+          <p:cNvPr id="11" name="Text 9"/>
+          <p:cNvSpPr/>
+          <p:nvPr/>
+        </p:nvSpPr>
+        <p:spPr>
+          <a:xfrm>
+            <a:off x="8211312" y="1856232"/>
+            <a:ext cx="2734056" cy="1536192"/>
+          </a:xfrm>
+          <a:prstGeom prst="rect">
+            <a:avLst/>
+          </a:prstGeom>
+          <a:noFill/>
+          <a:ln/>
+        </p:spPr>
+        <p:txBody>
+          <a:bodyPr wrap="square" lIns="0" tIns="0" rIns="0" bIns="0" rtlCol="0" anchor="t">
+            <a:normAutofit/>
+          </a:bodyPr>
+          <a:lstStyle/>
+          <a:p>
+            <a:pPr indent="0" marL="0">
+              <a:buNone/>
+            </a:pPr>
+            <a:r>
+              <a:rPr lang="en-US" sz="1250" dirty="0">
                 <a:solidFill>
                   <a:srgbClr val="17364A"/>
                 </a:solidFill>
@@ -6381,9 +11442,116 @@
                 <a:ea typeface="Aptos" pitchFamily="34" charset="-122"/>
                 <a:cs typeface="Aptos" pitchFamily="34" charset="-120"/>
               </a:rPr>
-              <a:t>Produce a data pipeline readiness checklist for a public health AI use case.</a:t>
-            </a:r>
-            <a:endParaRPr lang="en-US" sz="1450" dirty="0"/>
+              <a:t>Use the related plays to identify decisions, participants, timing, approvals, and documentation needed for responsible implementation.</a:t>
+            </a:r>
+            <a:endParaRPr lang="en-US" sz="1250" dirty="0"/>
+          </a:p>
+        </p:txBody>
+      </p:sp>
+      <p:sp>
+        <p:nvSpPr>
+          <p:cNvPr id="12" name="Shape 10"/>
+          <p:cNvSpPr/>
+          <p:nvPr/>
+        </p:nvSpPr>
+        <p:spPr>
+          <a:xfrm>
+            <a:off x="8046720" y="3794760"/>
+            <a:ext cx="3063240" cy="1508760"/>
+          </a:xfrm>
+          <a:prstGeom prst="roundRect">
+            <a:avLst>
+              <a:gd name="adj" fmla="val 7273"/>
+            </a:avLst>
+          </a:prstGeom>
+          <a:solidFill>
+            <a:srgbClr val="FFF4D9"/>
+          </a:solidFill>
+          <a:ln w="12700">
+            <a:solidFill>
+              <a:srgbClr val="B9D7E6"/>
+            </a:solidFill>
+            <a:prstDash val="solid"/>
+          </a:ln>
+        </p:spPr>
+      </p:sp>
+      <p:sp>
+        <p:nvSpPr>
+          <p:cNvPr id="13" name="Text 11"/>
+          <p:cNvSpPr/>
+          <p:nvPr/>
+        </p:nvSpPr>
+        <p:spPr>
+          <a:xfrm>
+            <a:off x="8211312" y="3941064"/>
+            <a:ext cx="2734056" cy="201168"/>
+          </a:xfrm>
+          <a:prstGeom prst="rect">
+            <a:avLst/>
+          </a:prstGeom>
+          <a:noFill/>
+          <a:ln/>
+        </p:spPr>
+        <p:txBody>
+          <a:bodyPr wrap="square" lIns="0" tIns="0" rIns="0" bIns="0" rtlCol="0" anchor="ctr"/>
+          <a:lstStyle/>
+          <a:p>
+            <a:pPr indent="0" marL="0">
+              <a:buNone/>
+            </a:pPr>
+            <a:r>
+              <a:rPr lang="en-US" sz="950" b="1" dirty="0">
+                <a:solidFill>
+                  <a:srgbClr val="0068B7"/>
+                </a:solidFill>
+                <a:latin typeface="Aptos" pitchFamily="34" charset="0"/>
+                <a:ea typeface="Aptos" pitchFamily="34" charset="-122"/>
+                <a:cs typeface="Aptos" pitchFamily="34" charset="-120"/>
+              </a:rPr>
+              <a:t>Keep in mind</a:t>
+            </a:r>
+            <a:endParaRPr lang="en-US" sz="950" dirty="0"/>
+          </a:p>
+        </p:txBody>
+      </p:sp>
+      <p:sp>
+        <p:nvSpPr>
+          <p:cNvPr id="14" name="Text 12"/>
+          <p:cNvSpPr/>
+          <p:nvPr/>
+        </p:nvSpPr>
+        <p:spPr>
+          <a:xfrm>
+            <a:off x="8211312" y="4233672"/>
+            <a:ext cx="2734056" cy="941832"/>
+          </a:xfrm>
+          <a:prstGeom prst="rect">
+            <a:avLst/>
+          </a:prstGeom>
+          <a:noFill/>
+          <a:ln/>
+        </p:spPr>
+        <p:txBody>
+          <a:bodyPr wrap="square" lIns="0" tIns="0" rIns="0" bIns="0" rtlCol="0" anchor="t">
+            <a:normAutofit/>
+          </a:bodyPr>
+          <a:lstStyle/>
+          <a:p>
+            <a:pPr indent="0" marL="0">
+              <a:buNone/>
+            </a:pPr>
+            <a:r>
+              <a:rPr lang="en-US" sz="1250" dirty="0">
+                <a:solidFill>
+                  <a:srgbClr val="17364A"/>
+                </a:solidFill>
+                <a:latin typeface="Aptos" pitchFamily="34" charset="0"/>
+                <a:ea typeface="Aptos" pitchFamily="34" charset="-122"/>
+                <a:cs typeface="Aptos" pitchFamily="34" charset="-120"/>
+              </a:rPr>
+              <a:t>The playbook connection helps turn training into agency work, not just individual knowledge.</a:t>
+            </a:r>
+            <a:endParaRPr lang="en-US" sz="1250" dirty="0"/>
           </a:p>
         </p:txBody>
       </p:sp>
@@ -6446,7 +11614,32 @@
       </p:sp>
       <p:sp>
         <p:nvSpPr>
-          <p:cNvPr id="3" name="Text 1"/>
+          <p:cNvPr id="3" name="Shape 1"/>
+          <p:cNvSpPr/>
+          <p:nvPr/>
+        </p:nvSpPr>
+        <p:spPr>
+          <a:xfrm>
+            <a:off x="0" y="164592"/>
+            <a:ext cx="146304" cy="6693408"/>
+          </a:xfrm>
+          <a:prstGeom prst="rect">
+            <a:avLst/>
+          </a:prstGeom>
+          <a:solidFill>
+            <a:srgbClr val="2F8A28"/>
+          </a:solidFill>
+          <a:ln w="12700">
+            <a:solidFill>
+              <a:srgbClr val="2F8A28"/>
+            </a:solidFill>
+            <a:prstDash val="solid"/>
+          </a:ln>
+        </p:spPr>
+      </p:sp>
+      <p:sp>
+        <p:nvSpPr>
+          <p:cNvPr id="4" name="Text 2"/>
           <p:cNvSpPr/>
           <p:nvPr/>
         </p:nvSpPr>
@@ -6485,7 +11678,7 @@
       </p:sp>
       <p:sp>
         <p:nvSpPr>
-          <p:cNvPr id="4" name="Text 2"/>
+          <p:cNvPr id="5" name="Text 3"/>
           <p:cNvSpPr/>
           <p:nvPr/>
         </p:nvSpPr>
@@ -6524,7 +11717,7 @@
       </p:sp>
       <p:sp>
         <p:nvSpPr>
-          <p:cNvPr id="5" name="Text 3"/>
+          <p:cNvPr id="6" name="Text 4"/>
           <p:cNvSpPr/>
           <p:nvPr/>
         </p:nvSpPr>
@@ -6563,7 +11756,7 @@
       </p:sp>
       <p:sp>
         <p:nvSpPr>
-          <p:cNvPr id="6" name="Text 4"/>
+          <p:cNvPr id="7" name="Text 5"/>
           <p:cNvSpPr/>
           <p:nvPr/>
         </p:nvSpPr>
@@ -6596,7 +11789,7 @@
                 <a:ea typeface="Aptos Display" pitchFamily="34" charset="-122"/>
                 <a:cs typeface="Aptos Display" pitchFamily="34" charset="-120"/>
               </a:rPr>
-              <a:t>Module Overview</a:t>
+              <a:t>Related toolkit resources</a:t>
             </a:r>
             <a:endParaRPr lang="en-US" sz="2700" dirty="0"/>
           </a:p>
@@ -6604,32 +11797,192 @@
       </p:sp>
       <p:sp>
         <p:nvSpPr>
-          <p:cNvPr id="7" name="Text 5"/>
-          <p:cNvSpPr/>
-          <p:nvPr/>
-        </p:nvSpPr>
-        <p:spPr>
-          <a:xfrm>
-            <a:off x="822960" y="1325880"/>
-            <a:ext cx="10378440" cy="4800600"/>
-          </a:xfrm>
-          <a:prstGeom prst="rect">
-            <a:avLst/>
-          </a:prstGeom>
-          <a:noFill/>
-          <a:ln/>
-        </p:spPr>
-        <p:txBody>
-          <a:bodyPr wrap="square" lIns="1016" tIns="1016" rIns="1016" bIns="1016" rtlCol="0" anchor="t">
+          <p:cNvPr id="8" name="Text 6"/>
+          <p:cNvSpPr/>
+          <p:nvPr/>
+        </p:nvSpPr>
+        <p:spPr>
+          <a:xfrm>
+            <a:off x="868680" y="1417320"/>
+            <a:ext cx="6903720" cy="4480560"/>
+          </a:xfrm>
+          <a:prstGeom prst="rect">
+            <a:avLst/>
+          </a:prstGeom>
+          <a:noFill/>
+          <a:ln/>
+        </p:spPr>
+        <p:txBody>
+          <a:bodyPr wrap="square" lIns="635" tIns="635" rIns="635" bIns="635" rtlCol="0" anchor="t">
             <a:normAutofit/>
           </a:bodyPr>
           <a:lstStyle/>
           <a:p>
+            <a:r>
+              <a:rPr lang="en-US" sz="1460" dirty="0">
+                <a:solidFill>
+                  <a:srgbClr val="17364A"/>
+                </a:solidFill>
+                <a:latin typeface="Aptos" pitchFamily="34" charset="0"/>
+                <a:ea typeface="Aptos" pitchFamily="34" charset="-122"/>
+                <a:cs typeface="Aptos" pitchFamily="34" charset="-120"/>
+              </a:rPr>
+              <a:t>Tool 16: Incident Response Checklist (Checklist) - Use Incident Response Checklist to translate this lesson into a documented public.</a:t>
+            </a:r>
+            <a:endParaRPr lang="en-US" sz="1460" dirty="0"/>
+          </a:p>
+          <a:p>
+            <a:r>
+              <a:rPr lang="en-US" sz="1460" dirty="0">
+                <a:solidFill>
+                  <a:srgbClr val="17364A"/>
+                </a:solidFill>
+                <a:latin typeface="Aptos" pitchFamily="34" charset="0"/>
+                <a:ea typeface="Aptos" pitchFamily="34" charset="-122"/>
+                <a:cs typeface="Aptos" pitchFamily="34" charset="-120"/>
+              </a:rPr>
+              <a:t>Tool 17: Compliance Audit Checklist (Checklist) - Use Compliance Audit Checklist to translate this lesson into a documented public.</a:t>
+            </a:r>
+            <a:endParaRPr lang="en-US" sz="1460" dirty="0"/>
+          </a:p>
+          <a:p>
+            <a:r>
+              <a:rPr lang="en-US" sz="1460" dirty="0">
+                <a:solidFill>
+                  <a:srgbClr val="17364A"/>
+                </a:solidFill>
+                <a:latin typeface="Aptos" pitchFamily="34" charset="0"/>
+                <a:ea typeface="Aptos" pitchFamily="34" charset="-122"/>
+                <a:cs typeface="Aptos" pitchFamily="34" charset="-120"/>
+              </a:rPr>
+              <a:t>Tool 18: Policy Update &amp; Version Control Log (Log) - Use this tool to complete or strengthen the practical exercise for the module.</a:t>
+            </a:r>
+            <a:endParaRPr lang="en-US" sz="1460" dirty="0"/>
+          </a:p>
+          <a:p>
+            <a:r>
+              <a:rPr lang="en-US" sz="1460" dirty="0">
+                <a:solidFill>
+                  <a:srgbClr val="17364A"/>
+                </a:solidFill>
+                <a:latin typeface="Aptos" pitchFamily="34" charset="0"/>
+                <a:ea typeface="Aptos" pitchFamily="34" charset="-122"/>
+                <a:cs typeface="Aptos" pitchFamily="34" charset="-120"/>
+              </a:rPr>
+              <a:t>Tool 19: Plain-Language AI Public Notice Template (Template) - Use Plain-Language AI Public Notice Template to translate this lesson.</a:t>
+            </a:r>
+            <a:endParaRPr lang="en-US" sz="1460" dirty="0"/>
+          </a:p>
+          <a:p>
+            <a:r>
+              <a:rPr lang="en-US" sz="1460" dirty="0">
+                <a:solidFill>
+                  <a:srgbClr val="17364A"/>
+                </a:solidFill>
+                <a:latin typeface="Aptos" pitchFamily="34" charset="0"/>
+                <a:ea typeface="Aptos" pitchFamily="34" charset="-122"/>
+                <a:cs typeface="Aptos" pitchFamily="34" charset="-120"/>
+              </a:rPr>
+              <a:t>Tool 44: Performance Monitoring Dashboard (Dashboard) - Use this tool to complete or strengthen the practical exercise for the module.</a:t>
+            </a:r>
+            <a:endParaRPr lang="en-US" sz="1460" dirty="0"/>
+          </a:p>
+        </p:txBody>
+      </p:sp>
+      <p:sp>
+        <p:nvSpPr>
+          <p:cNvPr id="9" name="Shape 7"/>
+          <p:cNvSpPr/>
+          <p:nvPr/>
+        </p:nvSpPr>
+        <p:spPr>
+          <a:xfrm>
+            <a:off x="8046720" y="1417320"/>
+            <a:ext cx="3063240" cy="2103120"/>
+          </a:xfrm>
+          <a:prstGeom prst="roundRect">
+            <a:avLst>
+              <a:gd name="adj" fmla="val 5217"/>
+            </a:avLst>
+          </a:prstGeom>
+          <a:solidFill>
+            <a:srgbClr val="EAF6F8"/>
+          </a:solidFill>
+          <a:ln w="12700">
+            <a:solidFill>
+              <a:srgbClr val="B9D7E6"/>
+            </a:solidFill>
+            <a:prstDash val="solid"/>
+          </a:ln>
+        </p:spPr>
+      </p:sp>
+      <p:sp>
+        <p:nvSpPr>
+          <p:cNvPr id="10" name="Text 8"/>
+          <p:cNvSpPr/>
+          <p:nvPr/>
+        </p:nvSpPr>
+        <p:spPr>
+          <a:xfrm>
+            <a:off x="8211312" y="1563624"/>
+            <a:ext cx="2734056" cy="201168"/>
+          </a:xfrm>
+          <a:prstGeom prst="rect">
+            <a:avLst/>
+          </a:prstGeom>
+          <a:noFill/>
+          <a:ln/>
+        </p:spPr>
+        <p:txBody>
+          <a:bodyPr wrap="square" lIns="0" tIns="0" rIns="0" bIns="0" rtlCol="0" anchor="ctr"/>
+          <a:lstStyle/>
+          <a:p>
             <a:pPr indent="0" marL="0">
               <a:buNone/>
             </a:pPr>
             <a:r>
-              <a:rPr lang="en-US" sz="1420" dirty="0">
+              <a:rPr lang="en-US" sz="950" b="1" dirty="0">
+                <a:solidFill>
+                  <a:srgbClr val="0068B7"/>
+                </a:solidFill>
+                <a:latin typeface="Aptos" pitchFamily="34" charset="0"/>
+                <a:ea typeface="Aptos" pitchFamily="34" charset="-122"/>
+                <a:cs typeface="Aptos" pitchFamily="34" charset="-120"/>
+              </a:rPr>
+              <a:t>Use the tools</a:t>
+            </a:r>
+            <a:endParaRPr lang="en-US" sz="950" dirty="0"/>
+          </a:p>
+        </p:txBody>
+      </p:sp>
+      <p:sp>
+        <p:nvSpPr>
+          <p:cNvPr id="11" name="Text 9"/>
+          <p:cNvSpPr/>
+          <p:nvPr/>
+        </p:nvSpPr>
+        <p:spPr>
+          <a:xfrm>
+            <a:off x="8211312" y="1856232"/>
+            <a:ext cx="2734056" cy="1536192"/>
+          </a:xfrm>
+          <a:prstGeom prst="rect">
+            <a:avLst/>
+          </a:prstGeom>
+          <a:noFill/>
+          <a:ln/>
+        </p:spPr>
+        <p:txBody>
+          <a:bodyPr wrap="square" lIns="0" tIns="0" rIns="0" bIns="0" rtlCol="0" anchor="t">
+            <a:normAutofit/>
+          </a:bodyPr>
+          <a:lstStyle/>
+          <a:p>
+            <a:pPr indent="0" marL="0">
+              <a:buNone/>
+            </a:pPr>
+            <a:r>
+              <a:rPr lang="en-US" sz="1250" dirty="0">
                 <a:solidFill>
                   <a:srgbClr val="17364A"/>
                 </a:solidFill>
@@ -6637,9 +11990,116 @@
                 <a:ea typeface="Aptos" pitchFamily="34" charset="-122"/>
                 <a:cs typeface="Aptos" pitchFamily="34" charset="-120"/>
               </a:rPr>
-              <a:t>Data pipelines are the operational pathways that move public health data from source systems into analytic, reporting, and workflow environments. AI tools depend on these pathways even when users do not see them. A model that classifies cases, summarizes laboratory reports, or predicts service demand can only work responsibly if the data feeding the model are timely, complete, transformed correctly, and monitored. This module helps learners understand the pipeline steps that shape AI outputs and the safeguards needed when pipeline failures could affect public health action.</a:t>
-            </a:r>
-            <a:endParaRPr lang="en-US" sz="1420" dirty="0"/>
+              <a:t>Use linked tools when your department needs a structured worksheet, template, checklist, review process, or documentation artifact.</a:t>
+            </a:r>
+            <a:endParaRPr lang="en-US" sz="1250" dirty="0"/>
+          </a:p>
+        </p:txBody>
+      </p:sp>
+      <p:sp>
+        <p:nvSpPr>
+          <p:cNvPr id="12" name="Shape 10"/>
+          <p:cNvSpPr/>
+          <p:nvPr/>
+        </p:nvSpPr>
+        <p:spPr>
+          <a:xfrm>
+            <a:off x="8046720" y="3794760"/>
+            <a:ext cx="3063240" cy="1508760"/>
+          </a:xfrm>
+          <a:prstGeom prst="roundRect">
+            <a:avLst>
+              <a:gd name="adj" fmla="val 7273"/>
+            </a:avLst>
+          </a:prstGeom>
+          <a:solidFill>
+            <a:srgbClr val="EEF8ED"/>
+          </a:solidFill>
+          <a:ln w="12700">
+            <a:solidFill>
+              <a:srgbClr val="B9D7E6"/>
+            </a:solidFill>
+            <a:prstDash val="solid"/>
+          </a:ln>
+        </p:spPr>
+      </p:sp>
+      <p:sp>
+        <p:nvSpPr>
+          <p:cNvPr id="13" name="Text 11"/>
+          <p:cNvSpPr/>
+          <p:nvPr/>
+        </p:nvSpPr>
+        <p:spPr>
+          <a:xfrm>
+            <a:off x="8211312" y="3941064"/>
+            <a:ext cx="2734056" cy="201168"/>
+          </a:xfrm>
+          <a:prstGeom prst="rect">
+            <a:avLst/>
+          </a:prstGeom>
+          <a:noFill/>
+          <a:ln/>
+        </p:spPr>
+        <p:txBody>
+          <a:bodyPr wrap="square" lIns="0" tIns="0" rIns="0" bIns="0" rtlCol="0" anchor="ctr"/>
+          <a:lstStyle/>
+          <a:p>
+            <a:pPr indent="0" marL="0">
+              <a:buNone/>
+            </a:pPr>
+            <a:r>
+              <a:rPr lang="en-US" sz="950" b="1" dirty="0">
+                <a:solidFill>
+                  <a:srgbClr val="0068B7"/>
+                </a:solidFill>
+                <a:latin typeface="Aptos" pitchFamily="34" charset="0"/>
+                <a:ea typeface="Aptos" pitchFamily="34" charset="-122"/>
+                <a:cs typeface="Aptos" pitchFamily="34" charset="-120"/>
+              </a:rPr>
+              <a:t>Avoid duplication</a:t>
+            </a:r>
+            <a:endParaRPr lang="en-US" sz="950" dirty="0"/>
+          </a:p>
+        </p:txBody>
+      </p:sp>
+      <p:sp>
+        <p:nvSpPr>
+          <p:cNvPr id="14" name="Text 12"/>
+          <p:cNvSpPr/>
+          <p:nvPr/>
+        </p:nvSpPr>
+        <p:spPr>
+          <a:xfrm>
+            <a:off x="8211312" y="4233672"/>
+            <a:ext cx="2734056" cy="941832"/>
+          </a:xfrm>
+          <a:prstGeom prst="rect">
+            <a:avLst/>
+          </a:prstGeom>
+          <a:noFill/>
+          <a:ln/>
+        </p:spPr>
+        <p:txBody>
+          <a:bodyPr wrap="square" lIns="0" tIns="0" rIns="0" bIns="0" rtlCol="0" anchor="t">
+            <a:normAutofit/>
+          </a:bodyPr>
+          <a:lstStyle/>
+          <a:p>
+            <a:pPr indent="0" marL="0">
+              <a:buNone/>
+            </a:pPr>
+            <a:r>
+              <a:rPr lang="en-US" sz="1250" dirty="0">
+                <a:solidFill>
+                  <a:srgbClr val="17364A"/>
+                </a:solidFill>
+                <a:latin typeface="Aptos" pitchFamily="34" charset="0"/>
+                <a:ea typeface="Aptos" pitchFamily="34" charset="-122"/>
+                <a:cs typeface="Aptos" pitchFamily="34" charset="-120"/>
+              </a:rPr>
+              <a:t>If your department already has a strong equivalent tool, adapt or use the existing process instead of recreating it.</a:t>
+            </a:r>
+            <a:endParaRPr lang="en-US" sz="1250" dirty="0"/>
           </a:p>
         </p:txBody>
       </p:sp>
@@ -6702,7 +12162,32 @@
       </p:sp>
       <p:sp>
         <p:nvSpPr>
-          <p:cNvPr id="3" name="Text 1"/>
+          <p:cNvPr id="3" name="Shape 1"/>
+          <p:cNvSpPr/>
+          <p:nvPr/>
+        </p:nvSpPr>
+        <p:spPr>
+          <a:xfrm>
+            <a:off x="0" y="164592"/>
+            <a:ext cx="146304" cy="6693408"/>
+          </a:xfrm>
+          <a:prstGeom prst="rect">
+            <a:avLst/>
+          </a:prstGeom>
+          <a:solidFill>
+            <a:srgbClr val="2F8A28"/>
+          </a:solidFill>
+          <a:ln w="12700">
+            <a:solidFill>
+              <a:srgbClr val="2F8A28"/>
+            </a:solidFill>
+            <a:prstDash val="solid"/>
+          </a:ln>
+        </p:spPr>
+      </p:sp>
+      <p:sp>
+        <p:nvSpPr>
+          <p:cNvPr id="4" name="Text 2"/>
           <p:cNvSpPr/>
           <p:nvPr/>
         </p:nvSpPr>
@@ -6741,7 +12226,7 @@
       </p:sp>
       <p:sp>
         <p:nvSpPr>
-          <p:cNvPr id="4" name="Text 2"/>
+          <p:cNvPr id="5" name="Text 3"/>
           <p:cNvSpPr/>
           <p:nvPr/>
         </p:nvSpPr>
@@ -6780,7 +12265,7 @@
       </p:sp>
       <p:sp>
         <p:nvSpPr>
-          <p:cNvPr id="5" name="Text 3"/>
+          <p:cNvPr id="6" name="Text 4"/>
           <p:cNvSpPr/>
           <p:nvPr/>
         </p:nvSpPr>
@@ -6819,13 +12304,77 @@
       </p:sp>
       <p:sp>
         <p:nvSpPr>
-          <p:cNvPr id="6" name="Text 4"/>
+          <p:cNvPr id="7" name="Shape 5"/>
           <p:cNvSpPr/>
           <p:nvPr/>
         </p:nvSpPr>
         <p:spPr>
           <a:xfrm>
             <a:off x="640080" y="658368"/>
+            <a:ext cx="420624" cy="420624"/>
+          </a:xfrm>
+          <a:prstGeom prst="ellipse">
+            <a:avLst/>
+          </a:prstGeom>
+          <a:solidFill>
+            <a:srgbClr val="0068B7"/>
+          </a:solidFill>
+          <a:ln w="12700">
+            <a:solidFill>
+              <a:srgbClr val="0068B7"/>
+            </a:solidFill>
+            <a:prstDash val="solid"/>
+          </a:ln>
+        </p:spPr>
+      </p:sp>
+      <p:sp>
+        <p:nvSpPr>
+          <p:cNvPr id="8" name="Text 6"/>
+          <p:cNvSpPr/>
+          <p:nvPr/>
+        </p:nvSpPr>
+        <p:spPr>
+          <a:xfrm>
+            <a:off x="640080" y="731520"/>
+            <a:ext cx="420624" cy="164592"/>
+          </a:xfrm>
+          <a:prstGeom prst="rect">
+            <a:avLst/>
+          </a:prstGeom>
+          <a:noFill/>
+          <a:ln/>
+        </p:spPr>
+        <p:txBody>
+          <a:bodyPr wrap="square" lIns="0" tIns="0" rIns="0" bIns="0" rtlCol="0" anchor="ctr"/>
+          <a:lstStyle/>
+          <a:p>
+            <a:pPr algn="ctr" indent="0" marL="0">
+              <a:buNone/>
+            </a:pPr>
+            <a:r>
+              <a:rPr lang="en-US" sz="1100" b="1" dirty="0">
+                <a:solidFill>
+                  <a:srgbClr val="FFFFFF"/>
+                </a:solidFill>
+                <a:latin typeface="Aptos" pitchFamily="34" charset="0"/>
+                <a:ea typeface="Aptos" pitchFamily="34" charset="-122"/>
+                <a:cs typeface="Aptos" pitchFamily="34" charset="-120"/>
+              </a:rPr>
+              <a:t>1</a:t>
+            </a:r>
+            <a:endParaRPr lang="en-US" sz="1100" dirty="0"/>
+          </a:p>
+        </p:txBody>
+      </p:sp>
+      <p:sp>
+        <p:nvSpPr>
+          <p:cNvPr id="9" name="Text 7"/>
+          <p:cNvSpPr/>
+          <p:nvPr/>
+        </p:nvSpPr>
+        <p:spPr>
+          <a:xfrm>
+            <a:off x="640080" y="621792"/>
             <a:ext cx="10881360" cy="566928"/>
           </a:xfrm>
           <a:prstGeom prst="rect">
@@ -6852,7 +12401,7 @@
                 <a:ea typeface="Aptos Display" pitchFamily="34" charset="-122"/>
                 <a:cs typeface="Aptos Display" pitchFamily="34" charset="-120"/>
               </a:rPr>
-              <a:t>Why This Topic Matters for Public Health AI</a:t>
+              <a:t>Learning Objectives</a:t>
             </a:r>
             <a:endParaRPr lang="en-US" sz="2700" dirty="0"/>
           </a:p>
@@ -6860,32 +12409,178 @@
       </p:sp>
       <p:sp>
         <p:nvSpPr>
-          <p:cNvPr id="7" name="Text 5"/>
-          <p:cNvSpPr/>
-          <p:nvPr/>
-        </p:nvSpPr>
-        <p:spPr>
-          <a:xfrm>
-            <a:off x="822960" y="1325880"/>
-            <a:ext cx="10378440" cy="4800600"/>
-          </a:xfrm>
-          <a:prstGeom prst="rect">
-            <a:avLst/>
-          </a:prstGeom>
-          <a:noFill/>
-          <a:ln/>
-        </p:spPr>
-        <p:txBody>
-          <a:bodyPr wrap="square" lIns="1016" tIns="1016" rIns="1016" bIns="1016" rtlCol="0" anchor="t">
+          <p:cNvPr id="10" name="Text 8"/>
+          <p:cNvSpPr/>
+          <p:nvPr/>
+        </p:nvSpPr>
+        <p:spPr>
+          <a:xfrm>
+            <a:off x="868680" y="1417320"/>
+            <a:ext cx="6675120" cy="4434840"/>
+          </a:xfrm>
+          <a:prstGeom prst="rect">
+            <a:avLst/>
+          </a:prstGeom>
+          <a:noFill/>
+          <a:ln/>
+        </p:spPr>
+        <p:txBody>
+          <a:bodyPr wrap="square" lIns="635" tIns="635" rIns="635" bIns="635" rtlCol="0" anchor="t">
             <a:normAutofit/>
           </a:bodyPr>
           <a:lstStyle/>
           <a:p>
+            <a:r>
+              <a:rPr lang="en-US" sz="1700" dirty="0">
+                <a:solidFill>
+                  <a:srgbClr val="17364A"/>
+                </a:solidFill>
+                <a:latin typeface="Aptos" pitchFamily="34" charset="0"/>
+                <a:ea typeface="Aptos" pitchFamily="34" charset="-122"/>
+                <a:cs typeface="Aptos" pitchFamily="34" charset="-120"/>
+              </a:rPr>
+              <a:t>Describe the major steps in public health data pipelines, including ingestion, validation, transformation, storage, access,.</a:t>
+            </a:r>
+            <a:endParaRPr lang="en-US" sz="1700" dirty="0"/>
+          </a:p>
+          <a:p>
+            <a:r>
+              <a:rPr lang="en-US" sz="1700" dirty="0">
+                <a:solidFill>
+                  <a:srgbClr val="17364A"/>
+                </a:solidFill>
+                <a:latin typeface="Aptos" pitchFamily="34" charset="0"/>
+                <a:ea typeface="Aptos" pitchFamily="34" charset="-122"/>
+                <a:cs typeface="Aptos" pitchFamily="34" charset="-120"/>
+              </a:rPr>
+              <a:t>Distinguish between batch, real-time, and event-driven data flows.</a:t>
+            </a:r>
+            <a:endParaRPr lang="en-US" sz="1700" dirty="0"/>
+          </a:p>
+          <a:p>
+            <a:r>
+              <a:rPr lang="en-US" sz="1700" dirty="0">
+                <a:solidFill>
+                  <a:srgbClr val="17364A"/>
+                </a:solidFill>
+                <a:latin typeface="Aptos" pitchFamily="34" charset="0"/>
+                <a:ea typeface="Aptos" pitchFamily="34" charset="-122"/>
+                <a:cs typeface="Aptos" pitchFamily="34" charset="-120"/>
+              </a:rPr>
+              <a:t>Explain how pipeline failures can affect AI outputs and operational decisions.</a:t>
+            </a:r>
+            <a:endParaRPr lang="en-US" sz="1700" dirty="0"/>
+          </a:p>
+          <a:p>
+            <a:r>
+              <a:rPr lang="en-US" sz="1700" dirty="0">
+                <a:solidFill>
+                  <a:srgbClr val="17364A"/>
+                </a:solidFill>
+                <a:latin typeface="Aptos" pitchFamily="34" charset="0"/>
+                <a:ea typeface="Aptos" pitchFamily="34" charset="-122"/>
+                <a:cs typeface="Aptos" pitchFamily="34" charset="-120"/>
+              </a:rPr>
+              <a:t>Identify metadata, lineage, version control, and audit needs for AI-supported workflows.</a:t>
+            </a:r>
+            <a:endParaRPr lang="en-US" sz="1700" dirty="0"/>
+          </a:p>
+        </p:txBody>
+      </p:sp>
+      <p:sp>
+        <p:nvSpPr>
+          <p:cNvPr id="11" name="Shape 9"/>
+          <p:cNvSpPr/>
+          <p:nvPr/>
+        </p:nvSpPr>
+        <p:spPr>
+          <a:xfrm>
+            <a:off x="7909560" y="1417320"/>
+            <a:ext cx="3154680" cy="1828800"/>
+          </a:xfrm>
+          <a:prstGeom prst="roundRect">
+            <a:avLst>
+              <a:gd name="adj" fmla="val 6000"/>
+            </a:avLst>
+          </a:prstGeom>
+          <a:solidFill>
+            <a:srgbClr val="EEF8ED"/>
+          </a:solidFill>
+          <a:ln w="12700">
+            <a:solidFill>
+              <a:srgbClr val="B9D7E6"/>
+            </a:solidFill>
+            <a:prstDash val="solid"/>
+          </a:ln>
+        </p:spPr>
+      </p:sp>
+      <p:sp>
+        <p:nvSpPr>
+          <p:cNvPr id="12" name="Text 10"/>
+          <p:cNvSpPr/>
+          <p:nvPr/>
+        </p:nvSpPr>
+        <p:spPr>
+          <a:xfrm>
+            <a:off x="8074152" y="1563624"/>
+            <a:ext cx="2825496" cy="201168"/>
+          </a:xfrm>
+          <a:prstGeom prst="rect">
+            <a:avLst/>
+          </a:prstGeom>
+          <a:noFill/>
+          <a:ln/>
+        </p:spPr>
+        <p:txBody>
+          <a:bodyPr wrap="square" lIns="0" tIns="0" rIns="0" bIns="0" rtlCol="0" anchor="ctr"/>
+          <a:lstStyle/>
+          <a:p>
             <a:pPr indent="0" marL="0">
               <a:buNone/>
             </a:pPr>
             <a:r>
-              <a:rPr lang="en-US" sz="1420" dirty="0">
+              <a:rPr lang="en-US" sz="950" b="1" dirty="0">
+                <a:solidFill>
+                  <a:srgbClr val="0068B7"/>
+                </a:solidFill>
+                <a:latin typeface="Aptos" pitchFamily="34" charset="0"/>
+                <a:ea typeface="Aptos" pitchFamily="34" charset="-122"/>
+                <a:cs typeface="Aptos" pitchFamily="34" charset="-120"/>
+              </a:rPr>
+              <a:t>Key idea</a:t>
+            </a:r>
+            <a:endParaRPr lang="en-US" sz="950" dirty="0"/>
+          </a:p>
+        </p:txBody>
+      </p:sp>
+      <p:sp>
+        <p:nvSpPr>
+          <p:cNvPr id="13" name="Text 11"/>
+          <p:cNvSpPr/>
+          <p:nvPr/>
+        </p:nvSpPr>
+        <p:spPr>
+          <a:xfrm>
+            <a:off x="8074152" y="1856232"/>
+            <a:ext cx="2825496" cy="1261872"/>
+          </a:xfrm>
+          <a:prstGeom prst="rect">
+            <a:avLst/>
+          </a:prstGeom>
+          <a:noFill/>
+          <a:ln/>
+        </p:spPr>
+        <p:txBody>
+          <a:bodyPr wrap="square" lIns="0" tIns="0" rIns="0" bIns="0" rtlCol="0" anchor="t">
+            <a:normAutofit/>
+          </a:bodyPr>
+          <a:lstStyle/>
+          <a:p>
+            <a:pPr indent="0" marL="0">
+              <a:buNone/>
+            </a:pPr>
+            <a:r>
+              <a:rPr lang="en-US" sz="1250" dirty="0">
                 <a:solidFill>
                   <a:srgbClr val="17364A"/>
                 </a:solidFill>
@@ -6893,9 +12588,116 @@
                 <a:ea typeface="Aptos" pitchFamily="34" charset="-122"/>
                 <a:cs typeface="Aptos" pitchFamily="34" charset="-120"/>
               </a:rPr>
-              <a:t>Data pipeline readiness matters because AI systems can amplify routine data management problems. A delayed file, changed field name, failed interface, missing date, duplicate record, or outdated transformation rule may not be obvious to an end user. The AI tool may continue generating fluent summaries or confident classifications even after the data feed has become unreliable. Public health agencies need pipeline visibility before they rely on AI for operational workflows. Visibility means knowing where data originate, how often they update, what transformations occur, what validation checks run, and who is alerted when something fails. A pipeline should not be treated as a hidden technical detail. It is part of the safety infrastructure for AI. Pipeline review also supports public accountability. When an AI output affects case prioritization, outreach, resource allocation, or public messaging, the agency may need to explain which data were used and whether those data were current. A well-documented pipeline makes that explanation possible.</a:t>
-            </a:r>
-            <a:endParaRPr lang="en-US" sz="1420" dirty="0"/>
+              <a:t>Describe the major steps in public health data pipelines, including ingestion, validation, transformation, storage, access,.</a:t>
+            </a:r>
+            <a:endParaRPr lang="en-US" sz="1250" dirty="0"/>
+          </a:p>
+        </p:txBody>
+      </p:sp>
+      <p:sp>
+        <p:nvSpPr>
+          <p:cNvPr id="14" name="Shape 12"/>
+          <p:cNvSpPr/>
+          <p:nvPr/>
+        </p:nvSpPr>
+        <p:spPr>
+          <a:xfrm>
+            <a:off x="7909560" y="3520440"/>
+            <a:ext cx="3154680" cy="1737360"/>
+          </a:xfrm>
+          <a:prstGeom prst="roundRect">
+            <a:avLst>
+              <a:gd name="adj" fmla="val 6316"/>
+            </a:avLst>
+          </a:prstGeom>
+          <a:solidFill>
+            <a:srgbClr val="EAF6F8"/>
+          </a:solidFill>
+          <a:ln w="12700">
+            <a:solidFill>
+              <a:srgbClr val="B9D7E6"/>
+            </a:solidFill>
+            <a:prstDash val="solid"/>
+          </a:ln>
+        </p:spPr>
+      </p:sp>
+      <p:sp>
+        <p:nvSpPr>
+          <p:cNvPr id="15" name="Text 13"/>
+          <p:cNvSpPr/>
+          <p:nvPr/>
+        </p:nvSpPr>
+        <p:spPr>
+          <a:xfrm>
+            <a:off x="8074152" y="3666744"/>
+            <a:ext cx="2825496" cy="201168"/>
+          </a:xfrm>
+          <a:prstGeom prst="rect">
+            <a:avLst/>
+          </a:prstGeom>
+          <a:noFill/>
+          <a:ln/>
+        </p:spPr>
+        <p:txBody>
+          <a:bodyPr wrap="square" lIns="0" tIns="0" rIns="0" bIns="0" rtlCol="0" anchor="ctr"/>
+          <a:lstStyle/>
+          <a:p>
+            <a:pPr indent="0" marL="0">
+              <a:buNone/>
+            </a:pPr>
+            <a:r>
+              <a:rPr lang="en-US" sz="950" b="1" dirty="0">
+                <a:solidFill>
+                  <a:srgbClr val="0068B7"/>
+                </a:solidFill>
+                <a:latin typeface="Aptos" pitchFamily="34" charset="0"/>
+                <a:ea typeface="Aptos" pitchFamily="34" charset="-122"/>
+                <a:cs typeface="Aptos" pitchFamily="34" charset="-120"/>
+              </a:rPr>
+              <a:t>Use this for</a:t>
+            </a:r>
+            <a:endParaRPr lang="en-US" sz="950" dirty="0"/>
+          </a:p>
+        </p:txBody>
+      </p:sp>
+      <p:sp>
+        <p:nvSpPr>
+          <p:cNvPr id="16" name="Text 14"/>
+          <p:cNvSpPr/>
+          <p:nvPr/>
+        </p:nvSpPr>
+        <p:spPr>
+          <a:xfrm>
+            <a:off x="8074152" y="3959352"/>
+            <a:ext cx="2825496" cy="1170432"/>
+          </a:xfrm>
+          <a:prstGeom prst="rect">
+            <a:avLst/>
+          </a:prstGeom>
+          <a:noFill/>
+          <a:ln/>
+        </p:spPr>
+        <p:txBody>
+          <a:bodyPr wrap="square" lIns="0" tIns="0" rIns="0" bIns="0" rtlCol="0" anchor="t">
+            <a:normAutofit/>
+          </a:bodyPr>
+          <a:lstStyle/>
+          <a:p>
+            <a:pPr indent="0" marL="0">
+              <a:buNone/>
+            </a:pPr>
+            <a:r>
+              <a:rPr lang="en-US" sz="1250" dirty="0">
+                <a:solidFill>
+                  <a:srgbClr val="17364A"/>
+                </a:solidFill>
+                <a:latin typeface="Aptos" pitchFamily="34" charset="0"/>
+                <a:ea typeface="Aptos" pitchFamily="34" charset="-122"/>
+                <a:cs typeface="Aptos" pitchFamily="34" charset="-120"/>
+              </a:rPr>
+              <a:t>Connect the concept to public health decisions, safeguards, documentation, or implementation work.</a:t>
+            </a:r>
+            <a:endParaRPr lang="en-US" sz="1250" dirty="0"/>
           </a:p>
         </p:txBody>
       </p:sp>
@@ -6958,7 +12760,32 @@
       </p:sp>
       <p:sp>
         <p:nvSpPr>
-          <p:cNvPr id="3" name="Text 1"/>
+          <p:cNvPr id="3" name="Shape 1"/>
+          <p:cNvSpPr/>
+          <p:nvPr/>
+        </p:nvSpPr>
+        <p:spPr>
+          <a:xfrm>
+            <a:off x="0" y="164592"/>
+            <a:ext cx="146304" cy="6693408"/>
+          </a:xfrm>
+          <a:prstGeom prst="rect">
+            <a:avLst/>
+          </a:prstGeom>
+          <a:solidFill>
+            <a:srgbClr val="2F8A28"/>
+          </a:solidFill>
+          <a:ln w="12700">
+            <a:solidFill>
+              <a:srgbClr val="2F8A28"/>
+            </a:solidFill>
+            <a:prstDash val="solid"/>
+          </a:ln>
+        </p:spPr>
+      </p:sp>
+      <p:sp>
+        <p:nvSpPr>
+          <p:cNvPr id="4" name="Text 2"/>
           <p:cNvSpPr/>
           <p:nvPr/>
         </p:nvSpPr>
@@ -6997,7 +12824,7 @@
       </p:sp>
       <p:sp>
         <p:nvSpPr>
-          <p:cNvPr id="4" name="Text 2"/>
+          <p:cNvPr id="5" name="Text 3"/>
           <p:cNvSpPr/>
           <p:nvPr/>
         </p:nvSpPr>
@@ -7036,7 +12863,7 @@
       </p:sp>
       <p:sp>
         <p:nvSpPr>
-          <p:cNvPr id="5" name="Text 3"/>
+          <p:cNvPr id="6" name="Text 4"/>
           <p:cNvSpPr/>
           <p:nvPr/>
         </p:nvSpPr>
@@ -7075,13 +12902,77 @@
       </p:sp>
       <p:sp>
         <p:nvSpPr>
-          <p:cNvPr id="6" name="Text 4"/>
+          <p:cNvPr id="7" name="Shape 5"/>
           <p:cNvSpPr/>
           <p:nvPr/>
         </p:nvSpPr>
         <p:spPr>
           <a:xfrm>
             <a:off x="640080" y="658368"/>
+            <a:ext cx="420624" cy="420624"/>
+          </a:xfrm>
+          <a:prstGeom prst="ellipse">
+            <a:avLst/>
+          </a:prstGeom>
+          <a:solidFill>
+            <a:srgbClr val="0068B7"/>
+          </a:solidFill>
+          <a:ln w="12700">
+            <a:solidFill>
+              <a:srgbClr val="0068B7"/>
+            </a:solidFill>
+            <a:prstDash val="solid"/>
+          </a:ln>
+        </p:spPr>
+      </p:sp>
+      <p:sp>
+        <p:nvSpPr>
+          <p:cNvPr id="8" name="Text 6"/>
+          <p:cNvSpPr/>
+          <p:nvPr/>
+        </p:nvSpPr>
+        <p:spPr>
+          <a:xfrm>
+            <a:off x="640080" y="731520"/>
+            <a:ext cx="420624" cy="164592"/>
+          </a:xfrm>
+          <a:prstGeom prst="rect">
+            <a:avLst/>
+          </a:prstGeom>
+          <a:noFill/>
+          <a:ln/>
+        </p:spPr>
+        <p:txBody>
+          <a:bodyPr wrap="square" lIns="0" tIns="0" rIns="0" bIns="0" rtlCol="0" anchor="ctr"/>
+          <a:lstStyle/>
+          <a:p>
+            <a:pPr algn="ctr" indent="0" marL="0">
+              <a:buNone/>
+            </a:pPr>
+            <a:r>
+              <a:rPr lang="en-US" sz="1100" b="1" dirty="0">
+                <a:solidFill>
+                  <a:srgbClr val="FFFFFF"/>
+                </a:solidFill>
+                <a:latin typeface="Aptos" pitchFamily="34" charset="0"/>
+                <a:ea typeface="Aptos" pitchFamily="34" charset="-122"/>
+                <a:cs typeface="Aptos" pitchFamily="34" charset="-120"/>
+              </a:rPr>
+              <a:t>2</a:t>
+            </a:r>
+            <a:endParaRPr lang="en-US" sz="1100" dirty="0"/>
+          </a:p>
+        </p:txBody>
+      </p:sp>
+      <p:sp>
+        <p:nvSpPr>
+          <p:cNvPr id="9" name="Text 7"/>
+          <p:cNvSpPr/>
+          <p:nvPr/>
+        </p:nvSpPr>
+        <p:spPr>
+          <a:xfrm>
+            <a:off x="640080" y="621792"/>
             <a:ext cx="10881360" cy="566928"/>
           </a:xfrm>
           <a:prstGeom prst="rect">
@@ -7108,7 +12999,7 @@
                 <a:ea typeface="Aptos Display" pitchFamily="34" charset="-122"/>
                 <a:cs typeface="Aptos Display" pitchFamily="34" charset="-120"/>
               </a:rPr>
-              <a:t>Core Concepts</a:t>
+              <a:t>Module Overview</a:t>
             </a:r>
             <a:endParaRPr lang="en-US" sz="2700" dirty="0"/>
           </a:p>
@@ -7116,32 +13007,178 @@
       </p:sp>
       <p:sp>
         <p:nvSpPr>
-          <p:cNvPr id="7" name="Text 5"/>
-          <p:cNvSpPr/>
-          <p:nvPr/>
-        </p:nvSpPr>
-        <p:spPr>
-          <a:xfrm>
-            <a:off x="822960" y="1325880"/>
-            <a:ext cx="10378440" cy="4800600"/>
-          </a:xfrm>
-          <a:prstGeom prst="rect">
-            <a:avLst/>
-          </a:prstGeom>
-          <a:noFill/>
-          <a:ln/>
-        </p:spPr>
-        <p:txBody>
-          <a:bodyPr wrap="square" lIns="1016" tIns="1016" rIns="1016" bIns="1016" rtlCol="0" anchor="t">
+          <p:cNvPr id="10" name="Text 8"/>
+          <p:cNvSpPr/>
+          <p:nvPr/>
+        </p:nvSpPr>
+        <p:spPr>
+          <a:xfrm>
+            <a:off x="868680" y="1417320"/>
+            <a:ext cx="6675120" cy="4434840"/>
+          </a:xfrm>
+          <a:prstGeom prst="rect">
+            <a:avLst/>
+          </a:prstGeom>
+          <a:noFill/>
+          <a:ln/>
+        </p:spPr>
+        <p:txBody>
+          <a:bodyPr wrap="square" lIns="635" tIns="635" rIns="635" bIns="635" rtlCol="0" anchor="t">
             <a:normAutofit/>
           </a:bodyPr>
           <a:lstStyle/>
           <a:p>
+            <a:r>
+              <a:rPr lang="en-US" sz="1700" dirty="0">
+                <a:solidFill>
+                  <a:srgbClr val="17364A"/>
+                </a:solidFill>
+                <a:latin typeface="Aptos" pitchFamily="34" charset="0"/>
+                <a:ea typeface="Aptos" pitchFamily="34" charset="-122"/>
+                <a:cs typeface="Aptos" pitchFamily="34" charset="-120"/>
+              </a:rPr>
+              <a:t>Data pipelines are the operational pathways that move public health data from source systems into analytic, reporting, and.</a:t>
+            </a:r>
+            <a:endParaRPr lang="en-US" sz="1700" dirty="0"/>
+          </a:p>
+          <a:p>
+            <a:r>
+              <a:rPr lang="en-US" sz="1700" dirty="0">
+                <a:solidFill>
+                  <a:srgbClr val="17364A"/>
+                </a:solidFill>
+                <a:latin typeface="Aptos" pitchFamily="34" charset="0"/>
+                <a:ea typeface="Aptos" pitchFamily="34" charset="-122"/>
+                <a:cs typeface="Aptos" pitchFamily="34" charset="-120"/>
+              </a:rPr>
+              <a:t>AI tools depend on these pathways even when users do not see them.</a:t>
+            </a:r>
+            <a:endParaRPr lang="en-US" sz="1700" dirty="0"/>
+          </a:p>
+          <a:p>
+            <a:r>
+              <a:rPr lang="en-US" sz="1700" dirty="0">
+                <a:solidFill>
+                  <a:srgbClr val="17364A"/>
+                </a:solidFill>
+                <a:latin typeface="Aptos" pitchFamily="34" charset="0"/>
+                <a:ea typeface="Aptos" pitchFamily="34" charset="-122"/>
+                <a:cs typeface="Aptos" pitchFamily="34" charset="-120"/>
+              </a:rPr>
+              <a:t>A model that classifies cases, summarizes laboratory reports, or predicts service demand can only work responsibly if the.</a:t>
+            </a:r>
+            <a:endParaRPr lang="en-US" sz="1700" dirty="0"/>
+          </a:p>
+          <a:p>
+            <a:r>
+              <a:rPr lang="en-US" sz="1700" dirty="0">
+                <a:solidFill>
+                  <a:srgbClr val="17364A"/>
+                </a:solidFill>
+                <a:latin typeface="Aptos" pitchFamily="34" charset="0"/>
+                <a:ea typeface="Aptos" pitchFamily="34" charset="-122"/>
+                <a:cs typeface="Aptos" pitchFamily="34" charset="-120"/>
+              </a:rPr>
+              <a:t>This module helps learners understand the pipeline steps that shape AI outputs and the safeguards needed when pipeline.</a:t>
+            </a:r>
+            <a:endParaRPr lang="en-US" sz="1700" dirty="0"/>
+          </a:p>
+        </p:txBody>
+      </p:sp>
+      <p:sp>
+        <p:nvSpPr>
+          <p:cNvPr id="11" name="Shape 9"/>
+          <p:cNvSpPr/>
+          <p:nvPr/>
+        </p:nvSpPr>
+        <p:spPr>
+          <a:xfrm>
+            <a:off x="7909560" y="1417320"/>
+            <a:ext cx="3154680" cy="1828800"/>
+          </a:xfrm>
+          <a:prstGeom prst="roundRect">
+            <a:avLst>
+              <a:gd name="adj" fmla="val 6000"/>
+            </a:avLst>
+          </a:prstGeom>
+          <a:solidFill>
+            <a:srgbClr val="EEF8ED"/>
+          </a:solidFill>
+          <a:ln w="12700">
+            <a:solidFill>
+              <a:srgbClr val="B9D7E6"/>
+            </a:solidFill>
+            <a:prstDash val="solid"/>
+          </a:ln>
+        </p:spPr>
+      </p:sp>
+      <p:sp>
+        <p:nvSpPr>
+          <p:cNvPr id="12" name="Text 10"/>
+          <p:cNvSpPr/>
+          <p:nvPr/>
+        </p:nvSpPr>
+        <p:spPr>
+          <a:xfrm>
+            <a:off x="8074152" y="1563624"/>
+            <a:ext cx="2825496" cy="201168"/>
+          </a:xfrm>
+          <a:prstGeom prst="rect">
+            <a:avLst/>
+          </a:prstGeom>
+          <a:noFill/>
+          <a:ln/>
+        </p:spPr>
+        <p:txBody>
+          <a:bodyPr wrap="square" lIns="0" tIns="0" rIns="0" bIns="0" rtlCol="0" anchor="ctr"/>
+          <a:lstStyle/>
+          <a:p>
             <a:pPr indent="0" marL="0">
               <a:buNone/>
             </a:pPr>
             <a:r>
-              <a:rPr lang="en-US" sz="1420" dirty="0">
+              <a:rPr lang="en-US" sz="950" b="1" dirty="0">
+                <a:solidFill>
+                  <a:srgbClr val="0068B7"/>
+                </a:solidFill>
+                <a:latin typeface="Aptos" pitchFamily="34" charset="0"/>
+                <a:ea typeface="Aptos" pitchFamily="34" charset="-122"/>
+                <a:cs typeface="Aptos" pitchFamily="34" charset="-120"/>
+              </a:rPr>
+              <a:t>Key idea</a:t>
+            </a:r>
+            <a:endParaRPr lang="en-US" sz="950" dirty="0"/>
+          </a:p>
+        </p:txBody>
+      </p:sp>
+      <p:sp>
+        <p:nvSpPr>
+          <p:cNvPr id="13" name="Text 11"/>
+          <p:cNvSpPr/>
+          <p:nvPr/>
+        </p:nvSpPr>
+        <p:spPr>
+          <a:xfrm>
+            <a:off x="8074152" y="1856232"/>
+            <a:ext cx="2825496" cy="1261872"/>
+          </a:xfrm>
+          <a:prstGeom prst="rect">
+            <a:avLst/>
+          </a:prstGeom>
+          <a:noFill/>
+          <a:ln/>
+        </p:spPr>
+        <p:txBody>
+          <a:bodyPr wrap="square" lIns="0" tIns="0" rIns="0" bIns="0" rtlCol="0" anchor="t">
+            <a:normAutofit/>
+          </a:bodyPr>
+          <a:lstStyle/>
+          <a:p>
+            <a:pPr indent="0" marL="0">
+              <a:buNone/>
+            </a:pPr>
+            <a:r>
+              <a:rPr lang="en-US" sz="1250" dirty="0">
                 <a:solidFill>
                   <a:srgbClr val="17364A"/>
                 </a:solidFill>
@@ -7149,9 +13186,116 @@
                 <a:ea typeface="Aptos" pitchFamily="34" charset="-122"/>
                 <a:cs typeface="Aptos" pitchFamily="34" charset="-120"/>
               </a:rPr>
-              <a:t>Data pipeline. A data pipeline is a set of technical and operational steps that moves data from a source to a destination where the data can be used. In public health, pipelines may include laboratory interfaces, EHR feeds, IIS submissions, syndromic surveillance feeds, vital records extracts, HIE connections, and program datasets. Each step creates an opportunity to improve or degrade data quality. ETL and ELT. ETL stands for extract, transform, load, while ELT stands for extract, load, transform. ETL transforms data before they enter the target system, while ELT loads data first and transforms them later. The distinction matters for AI because staff need to know where data were changed and which version was used by the AI tool. Pipeline monitoring. Pipeline monitoring is the routine process of checking whether data feeds, transformations, and outputs are working as intended. Monitoring may include file receipt, schema validation, required-field checks, timeliness checks, duplicate review, error queues, and volume trends. Monitoring should be tied to escalation when failures affect AI use.</a:t>
-            </a:r>
-            <a:endParaRPr lang="en-US" sz="1420" dirty="0"/>
+              <a:t>Data pipelines are the operational pathways that move public health data from source systems into analytic, reporting, and.</a:t>
+            </a:r>
+            <a:endParaRPr lang="en-US" sz="1250" dirty="0"/>
+          </a:p>
+        </p:txBody>
+      </p:sp>
+      <p:sp>
+        <p:nvSpPr>
+          <p:cNvPr id="14" name="Shape 12"/>
+          <p:cNvSpPr/>
+          <p:nvPr/>
+        </p:nvSpPr>
+        <p:spPr>
+          <a:xfrm>
+            <a:off x="7909560" y="3520440"/>
+            <a:ext cx="3154680" cy="1737360"/>
+          </a:xfrm>
+          <a:prstGeom prst="roundRect">
+            <a:avLst>
+              <a:gd name="adj" fmla="val 6316"/>
+            </a:avLst>
+          </a:prstGeom>
+          <a:solidFill>
+            <a:srgbClr val="EAF6F8"/>
+          </a:solidFill>
+          <a:ln w="12700">
+            <a:solidFill>
+              <a:srgbClr val="B9D7E6"/>
+            </a:solidFill>
+            <a:prstDash val="solid"/>
+          </a:ln>
+        </p:spPr>
+      </p:sp>
+      <p:sp>
+        <p:nvSpPr>
+          <p:cNvPr id="15" name="Text 13"/>
+          <p:cNvSpPr/>
+          <p:nvPr/>
+        </p:nvSpPr>
+        <p:spPr>
+          <a:xfrm>
+            <a:off x="8074152" y="3666744"/>
+            <a:ext cx="2825496" cy="201168"/>
+          </a:xfrm>
+          <a:prstGeom prst="rect">
+            <a:avLst/>
+          </a:prstGeom>
+          <a:noFill/>
+          <a:ln/>
+        </p:spPr>
+        <p:txBody>
+          <a:bodyPr wrap="square" lIns="0" tIns="0" rIns="0" bIns="0" rtlCol="0" anchor="ctr"/>
+          <a:lstStyle/>
+          <a:p>
+            <a:pPr indent="0" marL="0">
+              <a:buNone/>
+            </a:pPr>
+            <a:r>
+              <a:rPr lang="en-US" sz="950" b="1" dirty="0">
+                <a:solidFill>
+                  <a:srgbClr val="0068B7"/>
+                </a:solidFill>
+                <a:latin typeface="Aptos" pitchFamily="34" charset="0"/>
+                <a:ea typeface="Aptos" pitchFamily="34" charset="-122"/>
+                <a:cs typeface="Aptos" pitchFamily="34" charset="-120"/>
+              </a:rPr>
+              <a:t>Use this for</a:t>
+            </a:r>
+            <a:endParaRPr lang="en-US" sz="950" dirty="0"/>
+          </a:p>
+        </p:txBody>
+      </p:sp>
+      <p:sp>
+        <p:nvSpPr>
+          <p:cNvPr id="16" name="Text 14"/>
+          <p:cNvSpPr/>
+          <p:nvPr/>
+        </p:nvSpPr>
+        <p:spPr>
+          <a:xfrm>
+            <a:off x="8074152" y="3959352"/>
+            <a:ext cx="2825496" cy="1170432"/>
+          </a:xfrm>
+          <a:prstGeom prst="rect">
+            <a:avLst/>
+          </a:prstGeom>
+          <a:noFill/>
+          <a:ln/>
+        </p:spPr>
+        <p:txBody>
+          <a:bodyPr wrap="square" lIns="0" tIns="0" rIns="0" bIns="0" rtlCol="0" anchor="t">
+            <a:normAutofit/>
+          </a:bodyPr>
+          <a:lstStyle/>
+          <a:p>
+            <a:pPr indent="0" marL="0">
+              <a:buNone/>
+            </a:pPr>
+            <a:r>
+              <a:rPr lang="en-US" sz="1250" dirty="0">
+                <a:solidFill>
+                  <a:srgbClr val="17364A"/>
+                </a:solidFill>
+                <a:latin typeface="Aptos" pitchFamily="34" charset="0"/>
+                <a:ea typeface="Aptos" pitchFamily="34" charset="-122"/>
+                <a:cs typeface="Aptos" pitchFamily="34" charset="-120"/>
+              </a:rPr>
+              <a:t>Connect the concept to public health decisions, safeguards, documentation, or implementation work.</a:t>
+            </a:r>
+            <a:endParaRPr lang="en-US" sz="1250" dirty="0"/>
           </a:p>
         </p:txBody>
       </p:sp>
@@ -7214,7 +13358,32 @@
       </p:sp>
       <p:sp>
         <p:nvSpPr>
-          <p:cNvPr id="3" name="Text 1"/>
+          <p:cNvPr id="3" name="Shape 1"/>
+          <p:cNvSpPr/>
+          <p:nvPr/>
+        </p:nvSpPr>
+        <p:spPr>
+          <a:xfrm>
+            <a:off x="0" y="164592"/>
+            <a:ext cx="146304" cy="6693408"/>
+          </a:xfrm>
+          <a:prstGeom prst="rect">
+            <a:avLst/>
+          </a:prstGeom>
+          <a:solidFill>
+            <a:srgbClr val="2F8A28"/>
+          </a:solidFill>
+          <a:ln w="12700">
+            <a:solidFill>
+              <a:srgbClr val="2F8A28"/>
+            </a:solidFill>
+            <a:prstDash val="solid"/>
+          </a:ln>
+        </p:spPr>
+      </p:sp>
+      <p:sp>
+        <p:nvSpPr>
+          <p:cNvPr id="4" name="Text 2"/>
           <p:cNvSpPr/>
           <p:nvPr/>
         </p:nvSpPr>
@@ -7253,7 +13422,7 @@
       </p:sp>
       <p:sp>
         <p:nvSpPr>
-          <p:cNvPr id="4" name="Text 2"/>
+          <p:cNvPr id="5" name="Text 3"/>
           <p:cNvSpPr/>
           <p:nvPr/>
         </p:nvSpPr>
@@ -7292,7 +13461,7 @@
       </p:sp>
       <p:sp>
         <p:nvSpPr>
-          <p:cNvPr id="5" name="Text 3"/>
+          <p:cNvPr id="6" name="Text 4"/>
           <p:cNvSpPr/>
           <p:nvPr/>
         </p:nvSpPr>
@@ -7331,13 +13500,77 @@
       </p:sp>
       <p:sp>
         <p:nvSpPr>
-          <p:cNvPr id="6" name="Text 4"/>
+          <p:cNvPr id="7" name="Shape 5"/>
           <p:cNvSpPr/>
           <p:nvPr/>
         </p:nvSpPr>
         <p:spPr>
           <a:xfrm>
             <a:off x="640080" y="658368"/>
+            <a:ext cx="420624" cy="420624"/>
+          </a:xfrm>
+          <a:prstGeom prst="ellipse">
+            <a:avLst/>
+          </a:prstGeom>
+          <a:solidFill>
+            <a:srgbClr val="0068B7"/>
+          </a:solidFill>
+          <a:ln w="12700">
+            <a:solidFill>
+              <a:srgbClr val="0068B7"/>
+            </a:solidFill>
+            <a:prstDash val="solid"/>
+          </a:ln>
+        </p:spPr>
+      </p:sp>
+      <p:sp>
+        <p:nvSpPr>
+          <p:cNvPr id="8" name="Text 6"/>
+          <p:cNvSpPr/>
+          <p:nvPr/>
+        </p:nvSpPr>
+        <p:spPr>
+          <a:xfrm>
+            <a:off x="640080" y="731520"/>
+            <a:ext cx="420624" cy="164592"/>
+          </a:xfrm>
+          <a:prstGeom prst="rect">
+            <a:avLst/>
+          </a:prstGeom>
+          <a:noFill/>
+          <a:ln/>
+        </p:spPr>
+        <p:txBody>
+          <a:bodyPr wrap="square" lIns="0" tIns="0" rIns="0" bIns="0" rtlCol="0" anchor="ctr"/>
+          <a:lstStyle/>
+          <a:p>
+            <a:pPr algn="ctr" indent="0" marL="0">
+              <a:buNone/>
+            </a:pPr>
+            <a:r>
+              <a:rPr lang="en-US" sz="1100" b="1" dirty="0">
+                <a:solidFill>
+                  <a:srgbClr val="FFFFFF"/>
+                </a:solidFill>
+                <a:latin typeface="Aptos" pitchFamily="34" charset="0"/>
+                <a:ea typeface="Aptos" pitchFamily="34" charset="-122"/>
+                <a:cs typeface="Aptos" pitchFamily="34" charset="-120"/>
+              </a:rPr>
+              <a:t>3</a:t>
+            </a:r>
+            <a:endParaRPr lang="en-US" sz="1100" dirty="0"/>
+          </a:p>
+        </p:txBody>
+      </p:sp>
+      <p:sp>
+        <p:nvSpPr>
+          <p:cNvPr id="9" name="Text 7"/>
+          <p:cNvSpPr/>
+          <p:nvPr/>
+        </p:nvSpPr>
+        <p:spPr>
+          <a:xfrm>
+            <a:off x="640080" y="621792"/>
             <a:ext cx="10881360" cy="566928"/>
           </a:xfrm>
           <a:prstGeom prst="rect">
@@ -7364,7 +13597,7 @@
                 <a:ea typeface="Aptos Display" pitchFamily="34" charset="-122"/>
                 <a:cs typeface="Aptos Display" pitchFamily="34" charset="-120"/>
               </a:rPr>
-              <a:t>Core Concepts Continued</a:t>
+              <a:t>Why This Topic Matters for Public Health AI</a:t>
             </a:r>
             <a:endParaRPr lang="en-US" sz="2700" dirty="0"/>
           </a:p>
@@ -7372,32 +13605,178 @@
       </p:sp>
       <p:sp>
         <p:nvSpPr>
-          <p:cNvPr id="7" name="Text 5"/>
-          <p:cNvSpPr/>
-          <p:nvPr/>
-        </p:nvSpPr>
-        <p:spPr>
-          <a:xfrm>
-            <a:off x="822960" y="1325880"/>
-            <a:ext cx="10378440" cy="4800600"/>
-          </a:xfrm>
-          <a:prstGeom prst="rect">
-            <a:avLst/>
-          </a:prstGeom>
-          <a:noFill/>
-          <a:ln/>
-        </p:spPr>
-        <p:txBody>
-          <a:bodyPr wrap="square" lIns="1016" tIns="1016" rIns="1016" bIns="1016" rtlCol="0" anchor="t">
+          <p:cNvPr id="10" name="Text 8"/>
+          <p:cNvSpPr/>
+          <p:nvPr/>
+        </p:nvSpPr>
+        <p:spPr>
+          <a:xfrm>
+            <a:off x="868680" y="1417320"/>
+            <a:ext cx="6675120" cy="4434840"/>
+          </a:xfrm>
+          <a:prstGeom prst="rect">
+            <a:avLst/>
+          </a:prstGeom>
+          <a:noFill/>
+          <a:ln/>
+        </p:spPr>
+        <p:txBody>
+          <a:bodyPr wrap="square" lIns="635" tIns="635" rIns="635" bIns="635" rtlCol="0" anchor="t">
             <a:normAutofit/>
           </a:bodyPr>
           <a:lstStyle/>
           <a:p>
+            <a:r>
+              <a:rPr lang="en-US" sz="1700" dirty="0">
+                <a:solidFill>
+                  <a:srgbClr val="17364A"/>
+                </a:solidFill>
+                <a:latin typeface="Aptos" pitchFamily="34" charset="0"/>
+                <a:ea typeface="Aptos" pitchFamily="34" charset="-122"/>
+                <a:cs typeface="Aptos" pitchFamily="34" charset="-120"/>
+              </a:rPr>
+              <a:t>Data pipeline readiness matters because AI systems can amplify routine data management problems.</a:t>
+            </a:r>
+            <a:endParaRPr lang="en-US" sz="1700" dirty="0"/>
+          </a:p>
+          <a:p>
+            <a:r>
+              <a:rPr lang="en-US" sz="1700" dirty="0">
+                <a:solidFill>
+                  <a:srgbClr val="17364A"/>
+                </a:solidFill>
+                <a:latin typeface="Aptos" pitchFamily="34" charset="0"/>
+                <a:ea typeface="Aptos" pitchFamily="34" charset="-122"/>
+                <a:cs typeface="Aptos" pitchFamily="34" charset="-120"/>
+              </a:rPr>
+              <a:t>A delayed file, changed field name, failed interface, missing date, duplicate record, or outdated transformation rule may.</a:t>
+            </a:r>
+            <a:endParaRPr lang="en-US" sz="1700" dirty="0"/>
+          </a:p>
+          <a:p>
+            <a:r>
+              <a:rPr lang="en-US" sz="1700" dirty="0">
+                <a:solidFill>
+                  <a:srgbClr val="17364A"/>
+                </a:solidFill>
+                <a:latin typeface="Aptos" pitchFamily="34" charset="0"/>
+                <a:ea typeface="Aptos" pitchFamily="34" charset="-122"/>
+                <a:cs typeface="Aptos" pitchFamily="34" charset="-120"/>
+              </a:rPr>
+              <a:t>The AI tool may continue generating fluent summaries or confident classifications even after the data feed has become.</a:t>
+            </a:r>
+            <a:endParaRPr lang="en-US" sz="1700" dirty="0"/>
+          </a:p>
+          <a:p>
+            <a:r>
+              <a:rPr lang="en-US" sz="1700" dirty="0">
+                <a:solidFill>
+                  <a:srgbClr val="17364A"/>
+                </a:solidFill>
+                <a:latin typeface="Aptos" pitchFamily="34" charset="0"/>
+                <a:ea typeface="Aptos" pitchFamily="34" charset="-122"/>
+                <a:cs typeface="Aptos" pitchFamily="34" charset="-120"/>
+              </a:rPr>
+              <a:t>Public health agencies need pipeline visibility before they rely on AI for operational workflows.</a:t>
+            </a:r>
+            <a:endParaRPr lang="en-US" sz="1700" dirty="0"/>
+          </a:p>
+        </p:txBody>
+      </p:sp>
+      <p:sp>
+        <p:nvSpPr>
+          <p:cNvPr id="11" name="Shape 9"/>
+          <p:cNvSpPr/>
+          <p:nvPr/>
+        </p:nvSpPr>
+        <p:spPr>
+          <a:xfrm>
+            <a:off x="7909560" y="1417320"/>
+            <a:ext cx="3154680" cy="1828800"/>
+          </a:xfrm>
+          <a:prstGeom prst="roundRect">
+            <a:avLst>
+              <a:gd name="adj" fmla="val 6000"/>
+            </a:avLst>
+          </a:prstGeom>
+          <a:solidFill>
+            <a:srgbClr val="EEF8ED"/>
+          </a:solidFill>
+          <a:ln w="12700">
+            <a:solidFill>
+              <a:srgbClr val="B9D7E6"/>
+            </a:solidFill>
+            <a:prstDash val="solid"/>
+          </a:ln>
+        </p:spPr>
+      </p:sp>
+      <p:sp>
+        <p:nvSpPr>
+          <p:cNvPr id="12" name="Text 10"/>
+          <p:cNvSpPr/>
+          <p:nvPr/>
+        </p:nvSpPr>
+        <p:spPr>
+          <a:xfrm>
+            <a:off x="8074152" y="1563624"/>
+            <a:ext cx="2825496" cy="201168"/>
+          </a:xfrm>
+          <a:prstGeom prst="rect">
+            <a:avLst/>
+          </a:prstGeom>
+          <a:noFill/>
+          <a:ln/>
+        </p:spPr>
+        <p:txBody>
+          <a:bodyPr wrap="square" lIns="0" tIns="0" rIns="0" bIns="0" rtlCol="0" anchor="ctr"/>
+          <a:lstStyle/>
+          <a:p>
             <a:pPr indent="0" marL="0">
               <a:buNone/>
             </a:pPr>
             <a:r>
-              <a:rPr lang="en-US" sz="1420" dirty="0">
+              <a:rPr lang="en-US" sz="950" b="1" dirty="0">
+                <a:solidFill>
+                  <a:srgbClr val="0068B7"/>
+                </a:solidFill>
+                <a:latin typeface="Aptos" pitchFamily="34" charset="0"/>
+                <a:ea typeface="Aptos" pitchFamily="34" charset="-122"/>
+                <a:cs typeface="Aptos" pitchFamily="34" charset="-120"/>
+              </a:rPr>
+              <a:t>Key idea</a:t>
+            </a:r>
+            <a:endParaRPr lang="en-US" sz="950" dirty="0"/>
+          </a:p>
+        </p:txBody>
+      </p:sp>
+      <p:sp>
+        <p:nvSpPr>
+          <p:cNvPr id="13" name="Text 11"/>
+          <p:cNvSpPr/>
+          <p:nvPr/>
+        </p:nvSpPr>
+        <p:spPr>
+          <a:xfrm>
+            <a:off x="8074152" y="1856232"/>
+            <a:ext cx="2825496" cy="1261872"/>
+          </a:xfrm>
+          <a:prstGeom prst="rect">
+            <a:avLst/>
+          </a:prstGeom>
+          <a:noFill/>
+          <a:ln/>
+        </p:spPr>
+        <p:txBody>
+          <a:bodyPr wrap="square" lIns="0" tIns="0" rIns="0" bIns="0" rtlCol="0" anchor="t">
+            <a:normAutofit/>
+          </a:bodyPr>
+          <a:lstStyle/>
+          <a:p>
+            <a:pPr indent="0" marL="0">
+              <a:buNone/>
+            </a:pPr>
+            <a:r>
+              <a:rPr lang="en-US" sz="1250" dirty="0">
                 <a:solidFill>
                   <a:srgbClr val="17364A"/>
                 </a:solidFill>
@@ -7405,9 +13784,116 @@
                 <a:ea typeface="Aptos" pitchFamily="34" charset="-122"/>
                 <a:cs typeface="Aptos" pitchFamily="34" charset="-120"/>
               </a:rPr>
-              <a:t>Data lineage. Data lineage shows where data came from, what happened to them, and where they were used. Lineage supports validation, troubleshooting, incident response, and public records review. In AI workflows, lineage helps staff trace a questionable output back to its source data and transformation history.</a:t>
-            </a:r>
-            <a:endParaRPr lang="en-US" sz="1420" dirty="0"/>
+              <a:t>Data pipeline readiness matters because AI systems can amplify routine data management problems.</a:t>
+            </a:r>
+            <a:endParaRPr lang="en-US" sz="1250" dirty="0"/>
+          </a:p>
+        </p:txBody>
+      </p:sp>
+      <p:sp>
+        <p:nvSpPr>
+          <p:cNvPr id="14" name="Shape 12"/>
+          <p:cNvSpPr/>
+          <p:nvPr/>
+        </p:nvSpPr>
+        <p:spPr>
+          <a:xfrm>
+            <a:off x="7909560" y="3520440"/>
+            <a:ext cx="3154680" cy="1737360"/>
+          </a:xfrm>
+          <a:prstGeom prst="roundRect">
+            <a:avLst>
+              <a:gd name="adj" fmla="val 6316"/>
+            </a:avLst>
+          </a:prstGeom>
+          <a:solidFill>
+            <a:srgbClr val="EAF6F8"/>
+          </a:solidFill>
+          <a:ln w="12700">
+            <a:solidFill>
+              <a:srgbClr val="B9D7E6"/>
+            </a:solidFill>
+            <a:prstDash val="solid"/>
+          </a:ln>
+        </p:spPr>
+      </p:sp>
+      <p:sp>
+        <p:nvSpPr>
+          <p:cNvPr id="15" name="Text 13"/>
+          <p:cNvSpPr/>
+          <p:nvPr/>
+        </p:nvSpPr>
+        <p:spPr>
+          <a:xfrm>
+            <a:off x="8074152" y="3666744"/>
+            <a:ext cx="2825496" cy="201168"/>
+          </a:xfrm>
+          <a:prstGeom prst="rect">
+            <a:avLst/>
+          </a:prstGeom>
+          <a:noFill/>
+          <a:ln/>
+        </p:spPr>
+        <p:txBody>
+          <a:bodyPr wrap="square" lIns="0" tIns="0" rIns="0" bIns="0" rtlCol="0" anchor="ctr"/>
+          <a:lstStyle/>
+          <a:p>
+            <a:pPr indent="0" marL="0">
+              <a:buNone/>
+            </a:pPr>
+            <a:r>
+              <a:rPr lang="en-US" sz="950" b="1" dirty="0">
+                <a:solidFill>
+                  <a:srgbClr val="0068B7"/>
+                </a:solidFill>
+                <a:latin typeface="Aptos" pitchFamily="34" charset="0"/>
+                <a:ea typeface="Aptos" pitchFamily="34" charset="-122"/>
+                <a:cs typeface="Aptos" pitchFamily="34" charset="-120"/>
+              </a:rPr>
+              <a:t>Use this for</a:t>
+            </a:r>
+            <a:endParaRPr lang="en-US" sz="950" dirty="0"/>
+          </a:p>
+        </p:txBody>
+      </p:sp>
+      <p:sp>
+        <p:nvSpPr>
+          <p:cNvPr id="16" name="Text 14"/>
+          <p:cNvSpPr/>
+          <p:nvPr/>
+        </p:nvSpPr>
+        <p:spPr>
+          <a:xfrm>
+            <a:off x="8074152" y="3959352"/>
+            <a:ext cx="2825496" cy="1170432"/>
+          </a:xfrm>
+          <a:prstGeom prst="rect">
+            <a:avLst/>
+          </a:prstGeom>
+          <a:noFill/>
+          <a:ln/>
+        </p:spPr>
+        <p:txBody>
+          <a:bodyPr wrap="square" lIns="0" tIns="0" rIns="0" bIns="0" rtlCol="0" anchor="t">
+            <a:normAutofit/>
+          </a:bodyPr>
+          <a:lstStyle/>
+          <a:p>
+            <a:pPr indent="0" marL="0">
+              <a:buNone/>
+            </a:pPr>
+            <a:r>
+              <a:rPr lang="en-US" sz="1250" dirty="0">
+                <a:solidFill>
+                  <a:srgbClr val="17364A"/>
+                </a:solidFill>
+                <a:latin typeface="Aptos" pitchFamily="34" charset="0"/>
+                <a:ea typeface="Aptos" pitchFamily="34" charset="-122"/>
+                <a:cs typeface="Aptos" pitchFamily="34" charset="-120"/>
+              </a:rPr>
+              <a:t>Connect the concept to public health decisions, safeguards, documentation, or implementation work.</a:t>
+            </a:r>
+            <a:endParaRPr lang="en-US" sz="1250" dirty="0"/>
           </a:p>
         </p:txBody>
       </p:sp>
@@ -7470,7 +13956,32 @@
       </p:sp>
       <p:sp>
         <p:nvSpPr>
-          <p:cNvPr id="3" name="Text 1"/>
+          <p:cNvPr id="3" name="Shape 1"/>
+          <p:cNvSpPr/>
+          <p:nvPr/>
+        </p:nvSpPr>
+        <p:spPr>
+          <a:xfrm>
+            <a:off x="0" y="164592"/>
+            <a:ext cx="146304" cy="6693408"/>
+          </a:xfrm>
+          <a:prstGeom prst="rect">
+            <a:avLst/>
+          </a:prstGeom>
+          <a:solidFill>
+            <a:srgbClr val="2F8A28"/>
+          </a:solidFill>
+          <a:ln w="12700">
+            <a:solidFill>
+              <a:srgbClr val="2F8A28"/>
+            </a:solidFill>
+            <a:prstDash val="solid"/>
+          </a:ln>
+        </p:spPr>
+      </p:sp>
+      <p:sp>
+        <p:nvSpPr>
+          <p:cNvPr id="4" name="Text 2"/>
           <p:cNvSpPr/>
           <p:nvPr/>
         </p:nvSpPr>
@@ -7509,7 +14020,7 @@
       </p:sp>
       <p:sp>
         <p:nvSpPr>
-          <p:cNvPr id="4" name="Text 2"/>
+          <p:cNvPr id="5" name="Text 3"/>
           <p:cNvSpPr/>
           <p:nvPr/>
         </p:nvSpPr>
@@ -7548,7 +14059,7 @@
       </p:sp>
       <p:sp>
         <p:nvSpPr>
-          <p:cNvPr id="5" name="Text 3"/>
+          <p:cNvPr id="6" name="Text 4"/>
           <p:cNvSpPr/>
           <p:nvPr/>
         </p:nvSpPr>
@@ -7587,13 +14098,77 @@
       </p:sp>
       <p:sp>
         <p:nvSpPr>
-          <p:cNvPr id="6" name="Text 4"/>
+          <p:cNvPr id="7" name="Shape 5"/>
           <p:cNvSpPr/>
           <p:nvPr/>
         </p:nvSpPr>
         <p:spPr>
           <a:xfrm>
             <a:off x="640080" y="658368"/>
+            <a:ext cx="420624" cy="420624"/>
+          </a:xfrm>
+          <a:prstGeom prst="ellipse">
+            <a:avLst/>
+          </a:prstGeom>
+          <a:solidFill>
+            <a:srgbClr val="0068B7"/>
+          </a:solidFill>
+          <a:ln w="12700">
+            <a:solidFill>
+              <a:srgbClr val="0068B7"/>
+            </a:solidFill>
+            <a:prstDash val="solid"/>
+          </a:ln>
+        </p:spPr>
+      </p:sp>
+      <p:sp>
+        <p:nvSpPr>
+          <p:cNvPr id="8" name="Text 6"/>
+          <p:cNvSpPr/>
+          <p:nvPr/>
+        </p:nvSpPr>
+        <p:spPr>
+          <a:xfrm>
+            <a:off x="640080" y="731520"/>
+            <a:ext cx="420624" cy="164592"/>
+          </a:xfrm>
+          <a:prstGeom prst="rect">
+            <a:avLst/>
+          </a:prstGeom>
+          <a:noFill/>
+          <a:ln/>
+        </p:spPr>
+        <p:txBody>
+          <a:bodyPr wrap="square" lIns="0" tIns="0" rIns="0" bIns="0" rtlCol="0" anchor="ctr"/>
+          <a:lstStyle/>
+          <a:p>
+            <a:pPr algn="ctr" indent="0" marL="0">
+              <a:buNone/>
+            </a:pPr>
+            <a:r>
+              <a:rPr lang="en-US" sz="1100" b="1" dirty="0">
+                <a:solidFill>
+                  <a:srgbClr val="FFFFFF"/>
+                </a:solidFill>
+                <a:latin typeface="Aptos" pitchFamily="34" charset="0"/>
+                <a:ea typeface="Aptos" pitchFamily="34" charset="-122"/>
+                <a:cs typeface="Aptos" pitchFamily="34" charset="-120"/>
+              </a:rPr>
+              <a:t>4</a:t>
+            </a:r>
+            <a:endParaRPr lang="en-US" sz="1100" dirty="0"/>
+          </a:p>
+        </p:txBody>
+      </p:sp>
+      <p:sp>
+        <p:nvSpPr>
+          <p:cNvPr id="9" name="Text 7"/>
+          <p:cNvSpPr/>
+          <p:nvPr/>
+        </p:nvSpPr>
+        <p:spPr>
+          <a:xfrm>
+            <a:off x="640080" y="621792"/>
             <a:ext cx="10881360" cy="566928"/>
           </a:xfrm>
           <a:prstGeom prst="rect">
@@ -7620,7 +14195,7 @@
                 <a:ea typeface="Aptos Display" pitchFamily="34" charset="-122"/>
                 <a:cs typeface="Aptos Display" pitchFamily="34" charset="-120"/>
               </a:rPr>
-              <a:t>Public Health Example</a:t>
+              <a:t>Core Concepts</a:t>
             </a:r>
             <a:endParaRPr lang="en-US" sz="2700" dirty="0"/>
           </a:p>
@@ -7628,32 +14203,178 @@
       </p:sp>
       <p:sp>
         <p:nvSpPr>
-          <p:cNvPr id="7" name="Text 5"/>
-          <p:cNvSpPr/>
-          <p:nvPr/>
-        </p:nvSpPr>
-        <p:spPr>
-          <a:xfrm>
-            <a:off x="822960" y="1325880"/>
-            <a:ext cx="10378440" cy="4800600"/>
-          </a:xfrm>
-          <a:prstGeom prst="rect">
-            <a:avLst/>
-          </a:prstGeom>
-          <a:noFill/>
-          <a:ln/>
-        </p:spPr>
-        <p:txBody>
-          <a:bodyPr wrap="square" lIns="1016" tIns="1016" rIns="1016" bIns="1016" rtlCol="0" anchor="t">
+          <p:cNvPr id="10" name="Text 8"/>
+          <p:cNvSpPr/>
+          <p:nvPr/>
+        </p:nvSpPr>
+        <p:spPr>
+          <a:xfrm>
+            <a:off x="868680" y="1417320"/>
+            <a:ext cx="6675120" cy="4434840"/>
+          </a:xfrm>
+          <a:prstGeom prst="rect">
+            <a:avLst/>
+          </a:prstGeom>
+          <a:noFill/>
+          <a:ln/>
+        </p:spPr>
+        <p:txBody>
+          <a:bodyPr wrap="square" lIns="635" tIns="635" rIns="635" bIns="635" rtlCol="0" anchor="t">
             <a:normAutofit/>
           </a:bodyPr>
           <a:lstStyle/>
           <a:p>
+            <a:r>
+              <a:rPr lang="en-US" sz="1700" dirty="0">
+                <a:solidFill>
+                  <a:srgbClr val="17364A"/>
+                </a:solidFill>
+                <a:latin typeface="Aptos" pitchFamily="34" charset="0"/>
+                <a:ea typeface="Aptos" pitchFamily="34" charset="-122"/>
+                <a:cs typeface="Aptos" pitchFamily="34" charset="-120"/>
+              </a:rPr>
+              <a:t>Data pipeline.</a:t>
+            </a:r>
+            <a:endParaRPr lang="en-US" sz="1700" dirty="0"/>
+          </a:p>
+          <a:p>
+            <a:r>
+              <a:rPr lang="en-US" sz="1700" dirty="0">
+                <a:solidFill>
+                  <a:srgbClr val="17364A"/>
+                </a:solidFill>
+                <a:latin typeface="Aptos" pitchFamily="34" charset="0"/>
+                <a:ea typeface="Aptos" pitchFamily="34" charset="-122"/>
+                <a:cs typeface="Aptos" pitchFamily="34" charset="-120"/>
+              </a:rPr>
+              <a:t>A data pipeline is a set of technical and operational steps that moves data from a source to a destination where the data.</a:t>
+            </a:r>
+            <a:endParaRPr lang="en-US" sz="1700" dirty="0"/>
+          </a:p>
+          <a:p>
+            <a:r>
+              <a:rPr lang="en-US" sz="1700" dirty="0">
+                <a:solidFill>
+                  <a:srgbClr val="17364A"/>
+                </a:solidFill>
+                <a:latin typeface="Aptos" pitchFamily="34" charset="0"/>
+                <a:ea typeface="Aptos" pitchFamily="34" charset="-122"/>
+                <a:cs typeface="Aptos" pitchFamily="34" charset="-120"/>
+              </a:rPr>
+              <a:t>In public health, pipelines may include laboratory interfaces, EHR feeds, IIS submissions, syndromic surveillance feeds,.</a:t>
+            </a:r>
+            <a:endParaRPr lang="en-US" sz="1700" dirty="0"/>
+          </a:p>
+          <a:p>
+            <a:r>
+              <a:rPr lang="en-US" sz="1700" dirty="0">
+                <a:solidFill>
+                  <a:srgbClr val="17364A"/>
+                </a:solidFill>
+                <a:latin typeface="Aptos" pitchFamily="34" charset="0"/>
+                <a:ea typeface="Aptos" pitchFamily="34" charset="-122"/>
+                <a:cs typeface="Aptos" pitchFamily="34" charset="-120"/>
+              </a:rPr>
+              <a:t>Each step creates an opportunity to improve or degrade data quality.</a:t>
+            </a:r>
+            <a:endParaRPr lang="en-US" sz="1700" dirty="0"/>
+          </a:p>
+        </p:txBody>
+      </p:sp>
+      <p:sp>
+        <p:nvSpPr>
+          <p:cNvPr id="11" name="Shape 9"/>
+          <p:cNvSpPr/>
+          <p:nvPr/>
+        </p:nvSpPr>
+        <p:spPr>
+          <a:xfrm>
+            <a:off x="7909560" y="1417320"/>
+            <a:ext cx="3154680" cy="1828800"/>
+          </a:xfrm>
+          <a:prstGeom prst="roundRect">
+            <a:avLst>
+              <a:gd name="adj" fmla="val 6000"/>
+            </a:avLst>
+          </a:prstGeom>
+          <a:solidFill>
+            <a:srgbClr val="EEF8ED"/>
+          </a:solidFill>
+          <a:ln w="12700">
+            <a:solidFill>
+              <a:srgbClr val="B9D7E6"/>
+            </a:solidFill>
+            <a:prstDash val="solid"/>
+          </a:ln>
+        </p:spPr>
+      </p:sp>
+      <p:sp>
+        <p:nvSpPr>
+          <p:cNvPr id="12" name="Text 10"/>
+          <p:cNvSpPr/>
+          <p:nvPr/>
+        </p:nvSpPr>
+        <p:spPr>
+          <a:xfrm>
+            <a:off x="8074152" y="1563624"/>
+            <a:ext cx="2825496" cy="201168"/>
+          </a:xfrm>
+          <a:prstGeom prst="rect">
+            <a:avLst/>
+          </a:prstGeom>
+          <a:noFill/>
+          <a:ln/>
+        </p:spPr>
+        <p:txBody>
+          <a:bodyPr wrap="square" lIns="0" tIns="0" rIns="0" bIns="0" rtlCol="0" anchor="ctr"/>
+          <a:lstStyle/>
+          <a:p>
             <a:pPr indent="0" marL="0">
               <a:buNone/>
             </a:pPr>
             <a:r>
-              <a:rPr lang="en-US" sz="1420" dirty="0">
+              <a:rPr lang="en-US" sz="950" b="1" dirty="0">
+                <a:solidFill>
+                  <a:srgbClr val="0068B7"/>
+                </a:solidFill>
+                <a:latin typeface="Aptos" pitchFamily="34" charset="0"/>
+                <a:ea typeface="Aptos" pitchFamily="34" charset="-122"/>
+                <a:cs typeface="Aptos" pitchFamily="34" charset="-120"/>
+              </a:rPr>
+              <a:t>Key idea</a:t>
+            </a:r>
+            <a:endParaRPr lang="en-US" sz="950" dirty="0"/>
+          </a:p>
+        </p:txBody>
+      </p:sp>
+      <p:sp>
+        <p:nvSpPr>
+          <p:cNvPr id="13" name="Text 11"/>
+          <p:cNvSpPr/>
+          <p:nvPr/>
+        </p:nvSpPr>
+        <p:spPr>
+          <a:xfrm>
+            <a:off x="8074152" y="1856232"/>
+            <a:ext cx="2825496" cy="1261872"/>
+          </a:xfrm>
+          <a:prstGeom prst="rect">
+            <a:avLst/>
+          </a:prstGeom>
+          <a:noFill/>
+          <a:ln/>
+        </p:spPr>
+        <p:txBody>
+          <a:bodyPr wrap="square" lIns="0" tIns="0" rIns="0" bIns="0" rtlCol="0" anchor="t">
+            <a:normAutofit/>
+          </a:bodyPr>
+          <a:lstStyle/>
+          <a:p>
+            <a:pPr indent="0" marL="0">
+              <a:buNone/>
+            </a:pPr>
+            <a:r>
+              <a:rPr lang="en-US" sz="1250" dirty="0">
                 <a:solidFill>
                   <a:srgbClr val="17364A"/>
                 </a:solidFill>
@@ -7661,9 +14382,116 @@
                 <a:ea typeface="Aptos" pitchFamily="34" charset="-122"/>
                 <a:cs typeface="Aptos" pitchFamily="34" charset="-120"/>
               </a:rPr>
-              <a:t>A syndromic surveillance team may use AI to identify unusual emergency department visit patterns. The model depends on timely data feeds from hospitals, correct parsing of chief complaint text, reliable facility identifiers, and consistent geographic information. If one large hospital feed stops or a field changes after an EHR upgrade, the AI tool may miss a signal or generate a false alert. Pipeline monitoring is therefore part of outbreak detection readiness. A second example is an AI tool that drafts summaries of lab-based cases. The tool may rely on an ELR feed, a terminology mapping table, a deduplication process, and a case management interface. If any of those steps fail, the summary may omit a result, duplicate a patient, or misrepresent reportability. The pipeline must be reviewed before the AI output can be trusted.</a:t>
-            </a:r>
-            <a:endParaRPr lang="en-US" sz="1420" dirty="0"/>
+              <a:t>Data pipeline.</a:t>
+            </a:r>
+            <a:endParaRPr lang="en-US" sz="1250" dirty="0"/>
+          </a:p>
+        </p:txBody>
+      </p:sp>
+      <p:sp>
+        <p:nvSpPr>
+          <p:cNvPr id="14" name="Shape 12"/>
+          <p:cNvSpPr/>
+          <p:nvPr/>
+        </p:nvSpPr>
+        <p:spPr>
+          <a:xfrm>
+            <a:off x="7909560" y="3520440"/>
+            <a:ext cx="3154680" cy="1737360"/>
+          </a:xfrm>
+          <a:prstGeom prst="roundRect">
+            <a:avLst>
+              <a:gd name="adj" fmla="val 6316"/>
+            </a:avLst>
+          </a:prstGeom>
+          <a:solidFill>
+            <a:srgbClr val="EAF6F8"/>
+          </a:solidFill>
+          <a:ln w="12700">
+            <a:solidFill>
+              <a:srgbClr val="B9D7E6"/>
+            </a:solidFill>
+            <a:prstDash val="solid"/>
+          </a:ln>
+        </p:spPr>
+      </p:sp>
+      <p:sp>
+        <p:nvSpPr>
+          <p:cNvPr id="15" name="Text 13"/>
+          <p:cNvSpPr/>
+          <p:nvPr/>
+        </p:nvSpPr>
+        <p:spPr>
+          <a:xfrm>
+            <a:off x="8074152" y="3666744"/>
+            <a:ext cx="2825496" cy="201168"/>
+          </a:xfrm>
+          <a:prstGeom prst="rect">
+            <a:avLst/>
+          </a:prstGeom>
+          <a:noFill/>
+          <a:ln/>
+        </p:spPr>
+        <p:txBody>
+          <a:bodyPr wrap="square" lIns="0" tIns="0" rIns="0" bIns="0" rtlCol="0" anchor="ctr"/>
+          <a:lstStyle/>
+          <a:p>
+            <a:pPr indent="0" marL="0">
+              <a:buNone/>
+            </a:pPr>
+            <a:r>
+              <a:rPr lang="en-US" sz="950" b="1" dirty="0">
+                <a:solidFill>
+                  <a:srgbClr val="0068B7"/>
+                </a:solidFill>
+                <a:latin typeface="Aptos" pitchFamily="34" charset="0"/>
+                <a:ea typeface="Aptos" pitchFamily="34" charset="-122"/>
+                <a:cs typeface="Aptos" pitchFamily="34" charset="-120"/>
+              </a:rPr>
+              <a:t>Use this for</a:t>
+            </a:r>
+            <a:endParaRPr lang="en-US" sz="950" dirty="0"/>
+          </a:p>
+        </p:txBody>
+      </p:sp>
+      <p:sp>
+        <p:nvSpPr>
+          <p:cNvPr id="16" name="Text 14"/>
+          <p:cNvSpPr/>
+          <p:nvPr/>
+        </p:nvSpPr>
+        <p:spPr>
+          <a:xfrm>
+            <a:off x="8074152" y="3959352"/>
+            <a:ext cx="2825496" cy="1170432"/>
+          </a:xfrm>
+          <a:prstGeom prst="rect">
+            <a:avLst/>
+          </a:prstGeom>
+          <a:noFill/>
+          <a:ln/>
+        </p:spPr>
+        <p:txBody>
+          <a:bodyPr wrap="square" lIns="0" tIns="0" rIns="0" bIns="0" rtlCol="0" anchor="t">
+            <a:normAutofit/>
+          </a:bodyPr>
+          <a:lstStyle/>
+          <a:p>
+            <a:pPr indent="0" marL="0">
+              <a:buNone/>
+            </a:pPr>
+            <a:r>
+              <a:rPr lang="en-US" sz="1250" dirty="0">
+                <a:solidFill>
+                  <a:srgbClr val="17364A"/>
+                </a:solidFill>
+                <a:latin typeface="Aptos" pitchFamily="34" charset="0"/>
+                <a:ea typeface="Aptos" pitchFamily="34" charset="-122"/>
+                <a:cs typeface="Aptos" pitchFamily="34" charset="-120"/>
+              </a:rPr>
+              <a:t>Connect the concept to public health decisions, safeguards, documentation, or implementation work.</a:t>
+            </a:r>
+            <a:endParaRPr lang="en-US" sz="1250" dirty="0"/>
           </a:p>
         </p:txBody>
       </p:sp>
@@ -7726,7 +14554,32 @@
       </p:sp>
       <p:sp>
         <p:nvSpPr>
-          <p:cNvPr id="3" name="Text 1"/>
+          <p:cNvPr id="3" name="Shape 1"/>
+          <p:cNvSpPr/>
+          <p:nvPr/>
+        </p:nvSpPr>
+        <p:spPr>
+          <a:xfrm>
+            <a:off x="0" y="164592"/>
+            <a:ext cx="146304" cy="6693408"/>
+          </a:xfrm>
+          <a:prstGeom prst="rect">
+            <a:avLst/>
+          </a:prstGeom>
+          <a:solidFill>
+            <a:srgbClr val="2F8A28"/>
+          </a:solidFill>
+          <a:ln w="12700">
+            <a:solidFill>
+              <a:srgbClr val="2F8A28"/>
+            </a:solidFill>
+            <a:prstDash val="solid"/>
+          </a:ln>
+        </p:spPr>
+      </p:sp>
+      <p:sp>
+        <p:nvSpPr>
+          <p:cNvPr id="4" name="Text 2"/>
           <p:cNvSpPr/>
           <p:nvPr/>
         </p:nvSpPr>
@@ -7765,7 +14618,7 @@
       </p:sp>
       <p:sp>
         <p:nvSpPr>
-          <p:cNvPr id="4" name="Text 2"/>
+          <p:cNvPr id="5" name="Text 3"/>
           <p:cNvSpPr/>
           <p:nvPr/>
         </p:nvSpPr>
@@ -7804,7 +14657,7 @@
       </p:sp>
       <p:sp>
         <p:nvSpPr>
-          <p:cNvPr id="5" name="Text 3"/>
+          <p:cNvPr id="6" name="Text 4"/>
           <p:cNvSpPr/>
           <p:nvPr/>
         </p:nvSpPr>
@@ -7843,7 +14696,7 @@
       </p:sp>
       <p:sp>
         <p:nvSpPr>
-          <p:cNvPr id="6" name="Text 4"/>
+          <p:cNvPr id="7" name="Text 5"/>
           <p:cNvSpPr/>
           <p:nvPr/>
         </p:nvSpPr>
@@ -7876,7 +14729,7 @@
                 <a:ea typeface="Aptos Display" pitchFamily="34" charset="-122"/>
                 <a:cs typeface="Aptos Display" pitchFamily="34" charset="-120"/>
               </a:rPr>
-              <a:t>Technical Deep Dive</a:t>
+              <a:t>Core Concepts Continued</a:t>
             </a:r>
             <a:endParaRPr lang="en-US" sz="2700" dirty="0"/>
           </a:p>
@@ -7884,32 +14737,178 @@
       </p:sp>
       <p:sp>
         <p:nvSpPr>
-          <p:cNvPr id="7" name="Text 5"/>
-          <p:cNvSpPr/>
-          <p:nvPr/>
-        </p:nvSpPr>
-        <p:spPr>
-          <a:xfrm>
-            <a:off x="822960" y="1325880"/>
-            <a:ext cx="10378440" cy="4800600"/>
-          </a:xfrm>
-          <a:prstGeom prst="rect">
-            <a:avLst/>
-          </a:prstGeom>
-          <a:noFill/>
-          <a:ln/>
-        </p:spPr>
-        <p:txBody>
-          <a:bodyPr wrap="square" lIns="1016" tIns="1016" rIns="1016" bIns="1016" rtlCol="0" anchor="t">
+          <p:cNvPr id="8" name="Text 6"/>
+          <p:cNvSpPr/>
+          <p:nvPr/>
+        </p:nvSpPr>
+        <p:spPr>
+          <a:xfrm>
+            <a:off x="868680" y="1417320"/>
+            <a:ext cx="6675120" cy="4434840"/>
+          </a:xfrm>
+          <a:prstGeom prst="rect">
+            <a:avLst/>
+          </a:prstGeom>
+          <a:noFill/>
+          <a:ln/>
+        </p:spPr>
+        <p:txBody>
+          <a:bodyPr wrap="square" lIns="635" tIns="635" rIns="635" bIns="635" rtlCol="0" anchor="t">
             <a:normAutofit/>
           </a:bodyPr>
           <a:lstStyle/>
           <a:p>
+            <a:r>
+              <a:rPr lang="en-US" sz="1700" dirty="0">
+                <a:solidFill>
+                  <a:srgbClr val="17364A"/>
+                </a:solidFill>
+                <a:latin typeface="Aptos" pitchFamily="34" charset="0"/>
+                <a:ea typeface="Aptos" pitchFamily="34" charset="-122"/>
+                <a:cs typeface="Aptos" pitchFamily="34" charset="-120"/>
+              </a:rPr>
+              <a:t>Data lineage.</a:t>
+            </a:r>
+            <a:endParaRPr lang="en-US" sz="1700" dirty="0"/>
+          </a:p>
+          <a:p>
+            <a:r>
+              <a:rPr lang="en-US" sz="1700" dirty="0">
+                <a:solidFill>
+                  <a:srgbClr val="17364A"/>
+                </a:solidFill>
+                <a:latin typeface="Aptos" pitchFamily="34" charset="0"/>
+                <a:ea typeface="Aptos" pitchFamily="34" charset="-122"/>
+                <a:cs typeface="Aptos" pitchFamily="34" charset="-120"/>
+              </a:rPr>
+              <a:t>Data lineage shows where data came from, what happened to them, and where they were used.</a:t>
+            </a:r>
+            <a:endParaRPr lang="en-US" sz="1700" dirty="0"/>
+          </a:p>
+          <a:p>
+            <a:r>
+              <a:rPr lang="en-US" sz="1700" dirty="0">
+                <a:solidFill>
+                  <a:srgbClr val="17364A"/>
+                </a:solidFill>
+                <a:latin typeface="Aptos" pitchFamily="34" charset="0"/>
+                <a:ea typeface="Aptos" pitchFamily="34" charset="-122"/>
+                <a:cs typeface="Aptos" pitchFamily="34" charset="-120"/>
+              </a:rPr>
+              <a:t>Lineage supports validation, troubleshooting, incident response, and public records review.</a:t>
+            </a:r>
+            <a:endParaRPr lang="en-US" sz="1700" dirty="0"/>
+          </a:p>
+          <a:p>
+            <a:r>
+              <a:rPr lang="en-US" sz="1700" dirty="0">
+                <a:solidFill>
+                  <a:srgbClr val="17364A"/>
+                </a:solidFill>
+                <a:latin typeface="Aptos" pitchFamily="34" charset="0"/>
+                <a:ea typeface="Aptos" pitchFamily="34" charset="-122"/>
+                <a:cs typeface="Aptos" pitchFamily="34" charset="-120"/>
+              </a:rPr>
+              <a:t>In AI workflows, lineage helps staff trace a questionable output back to its source data and transformation history.</a:t>
+            </a:r>
+            <a:endParaRPr lang="en-US" sz="1700" dirty="0"/>
+          </a:p>
+        </p:txBody>
+      </p:sp>
+      <p:sp>
+        <p:nvSpPr>
+          <p:cNvPr id="9" name="Shape 7"/>
+          <p:cNvSpPr/>
+          <p:nvPr/>
+        </p:nvSpPr>
+        <p:spPr>
+          <a:xfrm>
+            <a:off x="7909560" y="1417320"/>
+            <a:ext cx="3154680" cy="1828800"/>
+          </a:xfrm>
+          <a:prstGeom prst="roundRect">
+            <a:avLst>
+              <a:gd name="adj" fmla="val 6000"/>
+            </a:avLst>
+          </a:prstGeom>
+          <a:solidFill>
+            <a:srgbClr val="EEF8ED"/>
+          </a:solidFill>
+          <a:ln w="12700">
+            <a:solidFill>
+              <a:srgbClr val="B9D7E6"/>
+            </a:solidFill>
+            <a:prstDash val="solid"/>
+          </a:ln>
+        </p:spPr>
+      </p:sp>
+      <p:sp>
+        <p:nvSpPr>
+          <p:cNvPr id="10" name="Text 8"/>
+          <p:cNvSpPr/>
+          <p:nvPr/>
+        </p:nvSpPr>
+        <p:spPr>
+          <a:xfrm>
+            <a:off x="8074152" y="1563624"/>
+            <a:ext cx="2825496" cy="201168"/>
+          </a:xfrm>
+          <a:prstGeom prst="rect">
+            <a:avLst/>
+          </a:prstGeom>
+          <a:noFill/>
+          <a:ln/>
+        </p:spPr>
+        <p:txBody>
+          <a:bodyPr wrap="square" lIns="0" tIns="0" rIns="0" bIns="0" rtlCol="0" anchor="ctr"/>
+          <a:lstStyle/>
+          <a:p>
             <a:pPr indent="0" marL="0">
               <a:buNone/>
             </a:pPr>
             <a:r>
-              <a:rPr lang="en-US" sz="1420" dirty="0">
+              <a:rPr lang="en-US" sz="950" b="1" dirty="0">
+                <a:solidFill>
+                  <a:srgbClr val="0068B7"/>
+                </a:solidFill>
+                <a:latin typeface="Aptos" pitchFamily="34" charset="0"/>
+                <a:ea typeface="Aptos" pitchFamily="34" charset="-122"/>
+                <a:cs typeface="Aptos" pitchFamily="34" charset="-120"/>
+              </a:rPr>
+              <a:t>Key idea</a:t>
+            </a:r>
+            <a:endParaRPr lang="en-US" sz="950" dirty="0"/>
+          </a:p>
+        </p:txBody>
+      </p:sp>
+      <p:sp>
+        <p:nvSpPr>
+          <p:cNvPr id="11" name="Text 9"/>
+          <p:cNvSpPr/>
+          <p:nvPr/>
+        </p:nvSpPr>
+        <p:spPr>
+          <a:xfrm>
+            <a:off x="8074152" y="1856232"/>
+            <a:ext cx="2825496" cy="1261872"/>
+          </a:xfrm>
+          <a:prstGeom prst="rect">
+            <a:avLst/>
+          </a:prstGeom>
+          <a:noFill/>
+          <a:ln/>
+        </p:spPr>
+        <p:txBody>
+          <a:bodyPr wrap="square" lIns="0" tIns="0" rIns="0" bIns="0" rtlCol="0" anchor="t">
+            <a:normAutofit/>
+          </a:bodyPr>
+          <a:lstStyle/>
+          <a:p>
+            <a:pPr indent="0" marL="0">
+              <a:buNone/>
+            </a:pPr>
+            <a:r>
+              <a:rPr lang="en-US" sz="1250" dirty="0">
                 <a:solidFill>
                   <a:srgbClr val="17364A"/>
                 </a:solidFill>
@@ -7917,9 +14916,116 @@
                 <a:ea typeface="Aptos" pitchFamily="34" charset="-122"/>
                 <a:cs typeface="Aptos" pitchFamily="34" charset="-120"/>
               </a:rPr>
-              <a:t>Pipeline design begins with the source and ends with the user-facing decision or output. In between, data may be received, staged, validated, transformed, standardized, linked, loaded, indexed, analyzed, and displayed. Each step should have an owner, a purpose, a quality check, and a documented failure process. Batch pipelines move data on a schedule, such as nightly files or weekly extracts. Real-time pipelines move data as events occur, such as laboratory reports or eCR messages. Event-driven pipelines trigger actions when a defined event occurs, such as creating a review task when a high-priority result arrives. AI workflows may use any of these models, but the monitoring and risk profile differ for each. Metadata and version control are essential for AI-supported pipelines. Staff need to know which data dictionary, code mapping, model version, prompt template, transformation rule, and document collection were used at a specific time. This is especially important when an agency investigates an incident or compares AI performance before and after a system change.</a:t>
-            </a:r>
-            <a:endParaRPr lang="en-US" sz="1420" dirty="0"/>
+              <a:t>Data lineage.</a:t>
+            </a:r>
+            <a:endParaRPr lang="en-US" sz="1250" dirty="0"/>
+          </a:p>
+        </p:txBody>
+      </p:sp>
+      <p:sp>
+        <p:nvSpPr>
+          <p:cNvPr id="12" name="Shape 10"/>
+          <p:cNvSpPr/>
+          <p:nvPr/>
+        </p:nvSpPr>
+        <p:spPr>
+          <a:xfrm>
+            <a:off x="7909560" y="3520440"/>
+            <a:ext cx="3154680" cy="1737360"/>
+          </a:xfrm>
+          <a:prstGeom prst="roundRect">
+            <a:avLst>
+              <a:gd name="adj" fmla="val 6316"/>
+            </a:avLst>
+          </a:prstGeom>
+          <a:solidFill>
+            <a:srgbClr val="EAF6F8"/>
+          </a:solidFill>
+          <a:ln w="12700">
+            <a:solidFill>
+              <a:srgbClr val="B9D7E6"/>
+            </a:solidFill>
+            <a:prstDash val="solid"/>
+          </a:ln>
+        </p:spPr>
+      </p:sp>
+      <p:sp>
+        <p:nvSpPr>
+          <p:cNvPr id="13" name="Text 11"/>
+          <p:cNvSpPr/>
+          <p:nvPr/>
+        </p:nvSpPr>
+        <p:spPr>
+          <a:xfrm>
+            <a:off x="8074152" y="3666744"/>
+            <a:ext cx="2825496" cy="201168"/>
+          </a:xfrm>
+          <a:prstGeom prst="rect">
+            <a:avLst/>
+          </a:prstGeom>
+          <a:noFill/>
+          <a:ln/>
+        </p:spPr>
+        <p:txBody>
+          <a:bodyPr wrap="square" lIns="0" tIns="0" rIns="0" bIns="0" rtlCol="0" anchor="ctr"/>
+          <a:lstStyle/>
+          <a:p>
+            <a:pPr indent="0" marL="0">
+              <a:buNone/>
+            </a:pPr>
+            <a:r>
+              <a:rPr lang="en-US" sz="950" b="1" dirty="0">
+                <a:solidFill>
+                  <a:srgbClr val="0068B7"/>
+                </a:solidFill>
+                <a:latin typeface="Aptos" pitchFamily="34" charset="0"/>
+                <a:ea typeface="Aptos" pitchFamily="34" charset="-122"/>
+                <a:cs typeface="Aptos" pitchFamily="34" charset="-120"/>
+              </a:rPr>
+              <a:t>Use this for</a:t>
+            </a:r>
+            <a:endParaRPr lang="en-US" sz="950" dirty="0"/>
+          </a:p>
+        </p:txBody>
+      </p:sp>
+      <p:sp>
+        <p:nvSpPr>
+          <p:cNvPr id="14" name="Text 12"/>
+          <p:cNvSpPr/>
+          <p:nvPr/>
+        </p:nvSpPr>
+        <p:spPr>
+          <a:xfrm>
+            <a:off x="8074152" y="3959352"/>
+            <a:ext cx="2825496" cy="1170432"/>
+          </a:xfrm>
+          <a:prstGeom prst="rect">
+            <a:avLst/>
+          </a:prstGeom>
+          <a:noFill/>
+          <a:ln/>
+        </p:spPr>
+        <p:txBody>
+          <a:bodyPr wrap="square" lIns="0" tIns="0" rIns="0" bIns="0" rtlCol="0" anchor="t">
+            <a:normAutofit/>
+          </a:bodyPr>
+          <a:lstStyle/>
+          <a:p>
+            <a:pPr indent="0" marL="0">
+              <a:buNone/>
+            </a:pPr>
+            <a:r>
+              <a:rPr lang="en-US" sz="1250" dirty="0">
+                <a:solidFill>
+                  <a:srgbClr val="17364A"/>
+                </a:solidFill>
+                <a:latin typeface="Aptos" pitchFamily="34" charset="0"/>
+                <a:ea typeface="Aptos" pitchFamily="34" charset="-122"/>
+                <a:cs typeface="Aptos" pitchFamily="34" charset="-120"/>
+              </a:rPr>
+              <a:t>Connect the concept to public health decisions, safeguards, documentation, or implementation work.</a:t>
+            </a:r>
+            <a:endParaRPr lang="en-US" sz="1250" dirty="0"/>
           </a:p>
         </p:txBody>
       </p:sp>

--- a/downloads/presentations/modules/lesson-14-data-pipelines-for-public-health-ai.pptx
+++ b/downloads/presentations/modules/lesson-14-data-pipelines-for-public-health-ai.pptx
@@ -2997,6 +2997,45 @@
           </a:p>
         </p:txBody>
       </p:sp>
+      <p:sp>
+        <p:nvSpPr>
+          <p:cNvPr id="8" name="Text 5"/>
+          <p:cNvSpPr/>
+          <p:nvPr/>
+        </p:nvSpPr>
+        <p:spPr>
+          <a:xfrm>
+            <a:off x="11137392" y="6510528"/>
+            <a:ext cx="411480" cy="201168"/>
+          </a:xfrm>
+          <a:prstGeom prst="rect">
+            <a:avLst/>
+          </a:prstGeom>
+          <a:noFill/>
+          <a:ln/>
+        </p:spPr>
+        <p:txBody>
+          <a:bodyPr wrap="square" lIns="0" tIns="0" rIns="0" bIns="0" rtlCol="0" anchor="ctr"/>
+          <a:lstStyle/>
+          <a:p>
+            <a:pPr algn="r" indent="0" marL="0">
+              <a:buNone/>
+            </a:pPr>
+            <a:r>
+              <a:rPr lang="en-US" sz="900" dirty="0">
+                <a:solidFill>
+                  <a:srgbClr val="5F7181"/>
+                </a:solidFill>
+                <a:latin typeface="Aptos" pitchFamily="34" charset="0"/>
+                <a:ea typeface="Aptos" pitchFamily="34" charset="-122"/>
+                <a:cs typeface="Aptos" pitchFamily="34" charset="-120"/>
+              </a:rPr>
+              <a:t>1</a:t>
+            </a:r>
+            <a:endParaRPr lang="en-US" sz="900" dirty="0"/>
+          </a:p>
+        </p:txBody>
+      </p:sp>
     </p:spTree>
   </p:cSld>
   <p:clrMapOvr>
@@ -3190,7 +3229,7 @@
                 <a:ea typeface="Aptos" pitchFamily="34" charset="-122"/>
                 <a:cs typeface="Aptos" pitchFamily="34" charset="-120"/>
               </a:rPr>
-              <a:t>© Paula Soper</a:t>
+              <a:t>Â© Paula Soper</a:t>
             </a:r>
             <a:endParaRPr lang="en-US" sz="800" dirty="0"/>
           </a:p>
@@ -3198,7 +3237,46 @@
       </p:sp>
       <p:sp>
         <p:nvSpPr>
-          <p:cNvPr id="7" name="Shape 5"/>
+          <p:cNvPr id="7" name="Text 5"/>
+          <p:cNvSpPr/>
+          <p:nvPr/>
+        </p:nvSpPr>
+        <p:spPr>
+          <a:xfrm>
+            <a:off x="11137392" y="6510528"/>
+            <a:ext cx="411480" cy="201168"/>
+          </a:xfrm>
+          <a:prstGeom prst="rect">
+            <a:avLst/>
+          </a:prstGeom>
+          <a:noFill/>
+          <a:ln/>
+        </p:spPr>
+        <p:txBody>
+          <a:bodyPr wrap="square" lIns="0" tIns="0" rIns="0" bIns="0" rtlCol="0" anchor="ctr"/>
+          <a:lstStyle/>
+          <a:p>
+            <a:pPr algn="r" indent="0" marL="0">
+              <a:buNone/>
+            </a:pPr>
+            <a:r>
+              <a:rPr lang="en-US" sz="900" dirty="0">
+                <a:solidFill>
+                  <a:srgbClr val="5F7181"/>
+                </a:solidFill>
+                <a:latin typeface="Aptos" pitchFamily="34" charset="0"/>
+                <a:ea typeface="Aptos" pitchFamily="34" charset="-122"/>
+                <a:cs typeface="Aptos" pitchFamily="34" charset="-120"/>
+              </a:rPr>
+              <a:t>10</a:t>
+            </a:r>
+            <a:endParaRPr lang="en-US" sz="900" dirty="0"/>
+          </a:p>
+        </p:txBody>
+      </p:sp>
+      <p:sp>
+        <p:nvSpPr>
+          <p:cNvPr id="8" name="Shape 6"/>
           <p:cNvSpPr/>
           <p:nvPr/>
         </p:nvSpPr>
@@ -3223,7 +3301,7 @@
       </p:sp>
       <p:sp>
         <p:nvSpPr>
-          <p:cNvPr id="8" name="Text 6"/>
+          <p:cNvPr id="9" name="Text 7"/>
           <p:cNvSpPr/>
           <p:nvPr/>
         </p:nvSpPr>
@@ -3262,14 +3340,14 @@
       </p:sp>
       <p:sp>
         <p:nvSpPr>
-          <p:cNvPr id="9" name="Text 7"/>
+          <p:cNvPr id="10" name="Text 8"/>
           <p:cNvSpPr/>
           <p:nvPr/>
         </p:nvSpPr>
         <p:spPr>
           <a:xfrm>
             <a:off x="640080" y="621792"/>
-            <a:ext cx="10881360" cy="566928"/>
+            <a:ext cx="10881360" cy="713232"/>
           </a:xfrm>
           <a:prstGeom prst="rect">
             <a:avLst/>
@@ -3287,7 +3365,7 @@
               <a:buNone/>
             </a:pPr>
             <a:r>
-              <a:rPr lang="en-US" sz="2700" b="1" dirty="0">
+              <a:rPr lang="en-US" sz="3400" b="1" dirty="0">
                 <a:solidFill>
                   <a:srgbClr val="003A63"/>
                 </a:solidFill>
@@ -3297,20 +3375,20 @@
               </a:rPr>
               <a:t>Public Health Example</a:t>
             </a:r>
-            <a:endParaRPr lang="en-US" sz="2700" dirty="0"/>
-          </a:p>
-        </p:txBody>
-      </p:sp>
-      <p:sp>
-        <p:nvSpPr>
-          <p:cNvPr id="10" name="Text 8"/>
-          <p:cNvSpPr/>
-          <p:nvPr/>
-        </p:nvSpPr>
-        <p:spPr>
-          <a:xfrm>
-            <a:off x="868680" y="1417320"/>
-            <a:ext cx="6675120" cy="4434840"/>
+            <a:endParaRPr lang="en-US" sz="3400" dirty="0"/>
+          </a:p>
+        </p:txBody>
+      </p:sp>
+      <p:sp>
+        <p:nvSpPr>
+          <p:cNvPr id="11" name="Text 9"/>
+          <p:cNvSpPr/>
+          <p:nvPr/>
+        </p:nvSpPr>
+        <p:spPr>
+          <a:xfrm>
+            <a:off x="868680" y="1508760"/>
+            <a:ext cx="6537960" cy="4160520"/>
           </a:xfrm>
           <a:prstGeom prst="rect">
             <a:avLst/>
@@ -3325,7 +3403,7 @@
           <a:lstStyle/>
           <a:p>
             <a:r>
-              <a:rPr lang="en-US" sz="1700" dirty="0">
+              <a:rPr lang="en-US" sz="2100" dirty="0">
                 <a:solidFill>
                   <a:srgbClr val="17364A"/>
                 </a:solidFill>
@@ -3335,11 +3413,11 @@
               </a:rPr>
               <a:t>A syndromic surveillance team may use AI to identify unusual emergency department visit patterns.</a:t>
             </a:r>
-            <a:endParaRPr lang="en-US" sz="1700" dirty="0"/>
-          </a:p>
-          <a:p>
-            <a:r>
-              <a:rPr lang="en-US" sz="1700" dirty="0">
+            <a:endParaRPr lang="en-US" sz="2100" dirty="0"/>
+          </a:p>
+          <a:p>
+            <a:r>
+              <a:rPr lang="en-US" sz="2100" dirty="0">
                 <a:solidFill>
                   <a:srgbClr val="17364A"/>
                 </a:solidFill>
@@ -3347,13 +3425,13 @@
                 <a:ea typeface="Aptos" pitchFamily="34" charset="-122"/>
                 <a:cs typeface="Aptos" pitchFamily="34" charset="-120"/>
               </a:rPr>
-              <a:t>The model depends on timely data feeds from hospitals, correct parsing of chief complaint text, reliable facility.</a:t>
-            </a:r>
-            <a:endParaRPr lang="en-US" sz="1700" dirty="0"/>
-          </a:p>
-          <a:p>
-            <a:r>
-              <a:rPr lang="en-US" sz="1700" dirty="0">
+              <a:t>The model depends on timely data feeds from hospitals, correct parsing of chief complaint text,.</a:t>
+            </a:r>
+            <a:endParaRPr lang="en-US" sz="2100" dirty="0"/>
+          </a:p>
+          <a:p>
+            <a:r>
+              <a:rPr lang="en-US" sz="2100" dirty="0">
                 <a:solidFill>
                   <a:srgbClr val="17364A"/>
                 </a:solidFill>
@@ -3361,29 +3439,15 @@
                 <a:ea typeface="Aptos" pitchFamily="34" charset="-122"/>
                 <a:cs typeface="Aptos" pitchFamily="34" charset="-120"/>
               </a:rPr>
-              <a:t>If one large hospital feed stops or a field changes after an EHR upgrade, the AI tool may miss a signal or generate a false.</a:t>
-            </a:r>
-            <a:endParaRPr lang="en-US" sz="1700" dirty="0"/>
-          </a:p>
-          <a:p>
-            <a:r>
-              <a:rPr lang="en-US" sz="1700" dirty="0">
-                <a:solidFill>
-                  <a:srgbClr val="17364A"/>
-                </a:solidFill>
-                <a:latin typeface="Aptos" pitchFamily="34" charset="0"/>
-                <a:ea typeface="Aptos" pitchFamily="34" charset="-122"/>
-                <a:cs typeface="Aptos" pitchFamily="34" charset="-120"/>
-              </a:rPr>
-              <a:t>Pipeline monitoring is therefore part of outbreak detection readiness.</a:t>
-            </a:r>
-            <a:endParaRPr lang="en-US" sz="1700" dirty="0"/>
-          </a:p>
-        </p:txBody>
-      </p:sp>
-      <p:sp>
-        <p:nvSpPr>
-          <p:cNvPr id="11" name="Shape 9"/>
+              <a:t>If one large hospital feed stops or a field changes after an EHR upgrade, the AI tool may miss a signal.</a:t>
+            </a:r>
+            <a:endParaRPr lang="en-US" sz="2100" dirty="0"/>
+          </a:p>
+        </p:txBody>
+      </p:sp>
+      <p:sp>
+        <p:nvSpPr>
+          <p:cNvPr id="12" name="Shape 10"/>
           <p:cNvSpPr/>
           <p:nvPr/>
         </p:nvSpPr>
@@ -3410,14 +3474,14 @@
       </p:sp>
       <p:sp>
         <p:nvSpPr>
-          <p:cNvPr id="12" name="Text 10"/>
+          <p:cNvPr id="13" name="Text 11"/>
           <p:cNvSpPr/>
           <p:nvPr/>
         </p:nvSpPr>
         <p:spPr>
           <a:xfrm>
             <a:off x="8074152" y="1563624"/>
-            <a:ext cx="2825496" cy="201168"/>
+            <a:ext cx="2825496" cy="256032"/>
           </a:xfrm>
           <a:prstGeom prst="rect">
             <a:avLst/>
@@ -3433,7 +3497,7 @@
               <a:buNone/>
             </a:pPr>
             <a:r>
-              <a:rPr lang="en-US" sz="950" b="1" dirty="0">
+              <a:rPr lang="en-US" sz="1300" b="1" dirty="0">
                 <a:solidFill>
                   <a:srgbClr val="0068B7"/>
                 </a:solidFill>
@@ -3443,20 +3507,20 @@
               </a:rPr>
               <a:t>Key idea</a:t>
             </a:r>
-            <a:endParaRPr lang="en-US" sz="950" dirty="0"/>
-          </a:p>
-        </p:txBody>
-      </p:sp>
-      <p:sp>
-        <p:nvSpPr>
-          <p:cNvPr id="13" name="Text 11"/>
-          <p:cNvSpPr/>
-          <p:nvPr/>
-        </p:nvSpPr>
-        <p:spPr>
-          <a:xfrm>
-            <a:off x="8074152" y="1856232"/>
-            <a:ext cx="2825496" cy="1261872"/>
+            <a:endParaRPr lang="en-US" sz="1300" dirty="0"/>
+          </a:p>
+        </p:txBody>
+      </p:sp>
+      <p:sp>
+        <p:nvSpPr>
+          <p:cNvPr id="14" name="Text 12"/>
+          <p:cNvSpPr/>
+          <p:nvPr/>
+        </p:nvSpPr>
+        <p:spPr>
+          <a:xfrm>
+            <a:off x="8074152" y="1920240"/>
+            <a:ext cx="2825496" cy="1188720"/>
           </a:xfrm>
           <a:prstGeom prst="rect">
             <a:avLst/>
@@ -3474,7 +3538,7 @@
               <a:buNone/>
             </a:pPr>
             <a:r>
-              <a:rPr lang="en-US" sz="1250" dirty="0">
+              <a:rPr lang="en-US" sz="1550" dirty="0">
                 <a:solidFill>
                   <a:srgbClr val="17364A"/>
                 </a:solidFill>
@@ -3484,13 +3548,13 @@
               </a:rPr>
               <a:t>A syndromic surveillance team may use AI to identify unusual emergency department visit patterns.</a:t>
             </a:r>
-            <a:endParaRPr lang="en-US" sz="1250" dirty="0"/>
-          </a:p>
-        </p:txBody>
-      </p:sp>
-      <p:sp>
-        <p:nvSpPr>
-          <p:cNvPr id="14" name="Shape 12"/>
+            <a:endParaRPr lang="en-US" sz="1550" dirty="0"/>
+          </a:p>
+        </p:txBody>
+      </p:sp>
+      <p:sp>
+        <p:nvSpPr>
+          <p:cNvPr id="15" name="Shape 13"/>
           <p:cNvSpPr/>
           <p:nvPr/>
         </p:nvSpPr>
@@ -3517,14 +3581,14 @@
       </p:sp>
       <p:sp>
         <p:nvSpPr>
-          <p:cNvPr id="15" name="Text 13"/>
+          <p:cNvPr id="16" name="Text 14"/>
           <p:cNvSpPr/>
           <p:nvPr/>
         </p:nvSpPr>
         <p:spPr>
           <a:xfrm>
             <a:off x="8074152" y="3666744"/>
-            <a:ext cx="2825496" cy="201168"/>
+            <a:ext cx="2825496" cy="256032"/>
           </a:xfrm>
           <a:prstGeom prst="rect">
             <a:avLst/>
@@ -3540,7 +3604,7 @@
               <a:buNone/>
             </a:pPr>
             <a:r>
-              <a:rPr lang="en-US" sz="950" b="1" dirty="0">
+              <a:rPr lang="en-US" sz="1300" b="1" dirty="0">
                 <a:solidFill>
                   <a:srgbClr val="0068B7"/>
                 </a:solidFill>
@@ -3550,20 +3614,20 @@
               </a:rPr>
               <a:t>Use this for</a:t>
             </a:r>
-            <a:endParaRPr lang="en-US" sz="950" dirty="0"/>
-          </a:p>
-        </p:txBody>
-      </p:sp>
-      <p:sp>
-        <p:nvSpPr>
-          <p:cNvPr id="16" name="Text 14"/>
-          <p:cNvSpPr/>
-          <p:nvPr/>
-        </p:nvSpPr>
-        <p:spPr>
-          <a:xfrm>
-            <a:off x="8074152" y="3959352"/>
-            <a:ext cx="2825496" cy="1170432"/>
+            <a:endParaRPr lang="en-US" sz="1300" dirty="0"/>
+          </a:p>
+        </p:txBody>
+      </p:sp>
+      <p:sp>
+        <p:nvSpPr>
+          <p:cNvPr id="17" name="Text 15"/>
+          <p:cNvSpPr/>
+          <p:nvPr/>
+        </p:nvSpPr>
+        <p:spPr>
+          <a:xfrm>
+            <a:off x="8074152" y="4023360"/>
+            <a:ext cx="2825496" cy="1097280"/>
           </a:xfrm>
           <a:prstGeom prst="rect">
             <a:avLst/>
@@ -3581,7 +3645,7 @@
               <a:buNone/>
             </a:pPr>
             <a:r>
-              <a:rPr lang="en-US" sz="1250" dirty="0">
+              <a:rPr lang="en-US" sz="1550" dirty="0">
                 <a:solidFill>
                   <a:srgbClr val="17364A"/>
                 </a:solidFill>
@@ -3591,7 +3655,7 @@
               </a:rPr>
               <a:t>Connect the concept to public health decisions, safeguards, documentation, or implementation work.</a:t>
             </a:r>
-            <a:endParaRPr lang="en-US" sz="1250" dirty="0"/>
+            <a:endParaRPr lang="en-US" sz="1550" dirty="0"/>
           </a:p>
         </p:txBody>
       </p:sp>
@@ -3788,7 +3852,7 @@
                 <a:ea typeface="Aptos" pitchFamily="34" charset="-122"/>
                 <a:cs typeface="Aptos" pitchFamily="34" charset="-120"/>
               </a:rPr>
-              <a:t>© Paula Soper</a:t>
+              <a:t>Â© Paula Soper</a:t>
             </a:r>
             <a:endParaRPr lang="en-US" sz="800" dirty="0"/>
           </a:p>
@@ -3796,7 +3860,46 @@
       </p:sp>
       <p:sp>
         <p:nvSpPr>
-          <p:cNvPr id="7" name="Shape 5"/>
+          <p:cNvPr id="7" name="Text 5"/>
+          <p:cNvSpPr/>
+          <p:nvPr/>
+        </p:nvSpPr>
+        <p:spPr>
+          <a:xfrm>
+            <a:off x="11137392" y="6510528"/>
+            <a:ext cx="411480" cy="201168"/>
+          </a:xfrm>
+          <a:prstGeom prst="rect">
+            <a:avLst/>
+          </a:prstGeom>
+          <a:noFill/>
+          <a:ln/>
+        </p:spPr>
+        <p:txBody>
+          <a:bodyPr wrap="square" lIns="0" tIns="0" rIns="0" bIns="0" rtlCol="0" anchor="ctr"/>
+          <a:lstStyle/>
+          <a:p>
+            <a:pPr algn="r" indent="0" marL="0">
+              <a:buNone/>
+            </a:pPr>
+            <a:r>
+              <a:rPr lang="en-US" sz="900" dirty="0">
+                <a:solidFill>
+                  <a:srgbClr val="5F7181"/>
+                </a:solidFill>
+                <a:latin typeface="Aptos" pitchFamily="34" charset="0"/>
+                <a:ea typeface="Aptos" pitchFamily="34" charset="-122"/>
+                <a:cs typeface="Aptos" pitchFamily="34" charset="-120"/>
+              </a:rPr>
+              <a:t>11</a:t>
+            </a:r>
+            <a:endParaRPr lang="en-US" sz="900" dirty="0"/>
+          </a:p>
+        </p:txBody>
+      </p:sp>
+      <p:sp>
+        <p:nvSpPr>
+          <p:cNvPr id="8" name="Shape 6"/>
           <p:cNvSpPr/>
           <p:nvPr/>
         </p:nvSpPr>
@@ -3821,7 +3924,7 @@
       </p:sp>
       <p:sp>
         <p:nvSpPr>
-          <p:cNvPr id="8" name="Text 6"/>
+          <p:cNvPr id="9" name="Text 7"/>
           <p:cNvSpPr/>
           <p:nvPr/>
         </p:nvSpPr>
@@ -3860,14 +3963,14 @@
       </p:sp>
       <p:sp>
         <p:nvSpPr>
-          <p:cNvPr id="9" name="Text 7"/>
+          <p:cNvPr id="10" name="Text 8"/>
           <p:cNvSpPr/>
           <p:nvPr/>
         </p:nvSpPr>
         <p:spPr>
           <a:xfrm>
             <a:off x="640080" y="621792"/>
-            <a:ext cx="10881360" cy="566928"/>
+            <a:ext cx="10881360" cy="713232"/>
           </a:xfrm>
           <a:prstGeom prst="rect">
             <a:avLst/>
@@ -3885,7 +3988,7 @@
               <a:buNone/>
             </a:pPr>
             <a:r>
-              <a:rPr lang="en-US" sz="2700" b="1" dirty="0">
+              <a:rPr lang="en-US" sz="3400" b="1" dirty="0">
                 <a:solidFill>
                   <a:srgbClr val="003A63"/>
                 </a:solidFill>
@@ -3895,20 +3998,20 @@
               </a:rPr>
               <a:t>Technical Deep Dive</a:t>
             </a:r>
-            <a:endParaRPr lang="en-US" sz="2700" dirty="0"/>
-          </a:p>
-        </p:txBody>
-      </p:sp>
-      <p:sp>
-        <p:nvSpPr>
-          <p:cNvPr id="10" name="Text 8"/>
-          <p:cNvSpPr/>
-          <p:nvPr/>
-        </p:nvSpPr>
-        <p:spPr>
-          <a:xfrm>
-            <a:off x="868680" y="1417320"/>
-            <a:ext cx="6675120" cy="4434840"/>
+            <a:endParaRPr lang="en-US" sz="3400" dirty="0"/>
+          </a:p>
+        </p:txBody>
+      </p:sp>
+      <p:sp>
+        <p:nvSpPr>
+          <p:cNvPr id="11" name="Text 9"/>
+          <p:cNvSpPr/>
+          <p:nvPr/>
+        </p:nvSpPr>
+        <p:spPr>
+          <a:xfrm>
+            <a:off x="868680" y="1508760"/>
+            <a:ext cx="6537960" cy="4160520"/>
           </a:xfrm>
           <a:prstGeom prst="rect">
             <a:avLst/>
@@ -3923,7 +4026,7 @@
           <a:lstStyle/>
           <a:p>
             <a:r>
-              <a:rPr lang="en-US" sz="1700" dirty="0">
+              <a:rPr lang="en-US" sz="2100" dirty="0">
                 <a:solidFill>
                   <a:srgbClr val="17364A"/>
                 </a:solidFill>
@@ -3933,11 +4036,11 @@
               </a:rPr>
               <a:t>Pipeline design begins with the source and ends with the user-facing decision or output.</a:t>
             </a:r>
-            <a:endParaRPr lang="en-US" sz="1700" dirty="0"/>
-          </a:p>
-          <a:p>
-            <a:r>
-              <a:rPr lang="en-US" sz="1700" dirty="0">
+            <a:endParaRPr lang="en-US" sz="2100" dirty="0"/>
+          </a:p>
+          <a:p>
+            <a:r>
+              <a:rPr lang="en-US" sz="2100" dirty="0">
                 <a:solidFill>
                   <a:srgbClr val="17364A"/>
                 </a:solidFill>
@@ -3945,13 +4048,13 @@
                 <a:ea typeface="Aptos" pitchFamily="34" charset="-122"/>
                 <a:cs typeface="Aptos" pitchFamily="34" charset="-120"/>
               </a:rPr>
-              <a:t>In between, data may be received, staged, validated, transformed, standardized, linked, loaded, indexed, analyzed, and.</a:t>
-            </a:r>
-            <a:endParaRPr lang="en-US" sz="1700" dirty="0"/>
-          </a:p>
-          <a:p>
-            <a:r>
-              <a:rPr lang="en-US" sz="1700" dirty="0">
+              <a:t>In between, data may be received, staged, validated, transformed, standardized, linked, loaded,.</a:t>
+            </a:r>
+            <a:endParaRPr lang="en-US" sz="2100" dirty="0"/>
+          </a:p>
+          <a:p>
+            <a:r>
+              <a:rPr lang="en-US" sz="2100" dirty="0">
                 <a:solidFill>
                   <a:srgbClr val="17364A"/>
                 </a:solidFill>
@@ -3961,27 +4064,13 @@
               </a:rPr>
               <a:t>Each step should have an owner, a purpose, a quality check, and a documented failure process.</a:t>
             </a:r>
-            <a:endParaRPr lang="en-US" sz="1700" dirty="0"/>
-          </a:p>
-          <a:p>
-            <a:r>
-              <a:rPr lang="en-US" sz="1700" dirty="0">
-                <a:solidFill>
-                  <a:srgbClr val="17364A"/>
-                </a:solidFill>
-                <a:latin typeface="Aptos" pitchFamily="34" charset="0"/>
-                <a:ea typeface="Aptos" pitchFamily="34" charset="-122"/>
-                <a:cs typeface="Aptos" pitchFamily="34" charset="-120"/>
-              </a:rPr>
-              <a:t>Batch pipelines move data on a schedule, such as nightly files or weekly extracts.</a:t>
-            </a:r>
-            <a:endParaRPr lang="en-US" sz="1700" dirty="0"/>
-          </a:p>
-        </p:txBody>
-      </p:sp>
-      <p:sp>
-        <p:nvSpPr>
-          <p:cNvPr id="11" name="Shape 9"/>
+            <a:endParaRPr lang="en-US" sz="2100" dirty="0"/>
+          </a:p>
+        </p:txBody>
+      </p:sp>
+      <p:sp>
+        <p:nvSpPr>
+          <p:cNvPr id="12" name="Shape 10"/>
           <p:cNvSpPr/>
           <p:nvPr/>
         </p:nvSpPr>
@@ -4008,14 +4097,14 @@
       </p:sp>
       <p:sp>
         <p:nvSpPr>
-          <p:cNvPr id="12" name="Text 10"/>
+          <p:cNvPr id="13" name="Text 11"/>
           <p:cNvSpPr/>
           <p:nvPr/>
         </p:nvSpPr>
         <p:spPr>
           <a:xfrm>
             <a:off x="8074152" y="1563624"/>
-            <a:ext cx="2825496" cy="201168"/>
+            <a:ext cx="2825496" cy="256032"/>
           </a:xfrm>
           <a:prstGeom prst="rect">
             <a:avLst/>
@@ -4031,7 +4120,7 @@
               <a:buNone/>
             </a:pPr>
             <a:r>
-              <a:rPr lang="en-US" sz="950" b="1" dirty="0">
+              <a:rPr lang="en-US" sz="1300" b="1" dirty="0">
                 <a:solidFill>
                   <a:srgbClr val="0068B7"/>
                 </a:solidFill>
@@ -4041,20 +4130,20 @@
               </a:rPr>
               <a:t>Key idea</a:t>
             </a:r>
-            <a:endParaRPr lang="en-US" sz="950" dirty="0"/>
-          </a:p>
-        </p:txBody>
-      </p:sp>
-      <p:sp>
-        <p:nvSpPr>
-          <p:cNvPr id="13" name="Text 11"/>
-          <p:cNvSpPr/>
-          <p:nvPr/>
-        </p:nvSpPr>
-        <p:spPr>
-          <a:xfrm>
-            <a:off x="8074152" y="1856232"/>
-            <a:ext cx="2825496" cy="1261872"/>
+            <a:endParaRPr lang="en-US" sz="1300" dirty="0"/>
+          </a:p>
+        </p:txBody>
+      </p:sp>
+      <p:sp>
+        <p:nvSpPr>
+          <p:cNvPr id="14" name="Text 12"/>
+          <p:cNvSpPr/>
+          <p:nvPr/>
+        </p:nvSpPr>
+        <p:spPr>
+          <a:xfrm>
+            <a:off x="8074152" y="1920240"/>
+            <a:ext cx="2825496" cy="1188720"/>
           </a:xfrm>
           <a:prstGeom prst="rect">
             <a:avLst/>
@@ -4072,7 +4161,7 @@
               <a:buNone/>
             </a:pPr>
             <a:r>
-              <a:rPr lang="en-US" sz="1250" dirty="0">
+              <a:rPr lang="en-US" sz="1550" dirty="0">
                 <a:solidFill>
                   <a:srgbClr val="17364A"/>
                 </a:solidFill>
@@ -4082,13 +4171,13 @@
               </a:rPr>
               <a:t>Pipeline design begins with the source and ends with the user-facing decision or output.</a:t>
             </a:r>
-            <a:endParaRPr lang="en-US" sz="1250" dirty="0"/>
-          </a:p>
-        </p:txBody>
-      </p:sp>
-      <p:sp>
-        <p:nvSpPr>
-          <p:cNvPr id="14" name="Shape 12"/>
+            <a:endParaRPr lang="en-US" sz="1550" dirty="0"/>
+          </a:p>
+        </p:txBody>
+      </p:sp>
+      <p:sp>
+        <p:nvSpPr>
+          <p:cNvPr id="15" name="Shape 13"/>
           <p:cNvSpPr/>
           <p:nvPr/>
         </p:nvSpPr>
@@ -4115,14 +4204,14 @@
       </p:sp>
       <p:sp>
         <p:nvSpPr>
-          <p:cNvPr id="15" name="Text 13"/>
+          <p:cNvPr id="16" name="Text 14"/>
           <p:cNvSpPr/>
           <p:nvPr/>
         </p:nvSpPr>
         <p:spPr>
           <a:xfrm>
             <a:off x="8074152" y="3666744"/>
-            <a:ext cx="2825496" cy="201168"/>
+            <a:ext cx="2825496" cy="256032"/>
           </a:xfrm>
           <a:prstGeom prst="rect">
             <a:avLst/>
@@ -4138,7 +4227,7 @@
               <a:buNone/>
             </a:pPr>
             <a:r>
-              <a:rPr lang="en-US" sz="950" b="1" dirty="0">
+              <a:rPr lang="en-US" sz="1300" b="1" dirty="0">
                 <a:solidFill>
                   <a:srgbClr val="0068B7"/>
                 </a:solidFill>
@@ -4148,20 +4237,20 @@
               </a:rPr>
               <a:t>Use this for</a:t>
             </a:r>
-            <a:endParaRPr lang="en-US" sz="950" dirty="0"/>
-          </a:p>
-        </p:txBody>
-      </p:sp>
-      <p:sp>
-        <p:nvSpPr>
-          <p:cNvPr id="16" name="Text 14"/>
-          <p:cNvSpPr/>
-          <p:nvPr/>
-        </p:nvSpPr>
-        <p:spPr>
-          <a:xfrm>
-            <a:off x="8074152" y="3959352"/>
-            <a:ext cx="2825496" cy="1170432"/>
+            <a:endParaRPr lang="en-US" sz="1300" dirty="0"/>
+          </a:p>
+        </p:txBody>
+      </p:sp>
+      <p:sp>
+        <p:nvSpPr>
+          <p:cNvPr id="17" name="Text 15"/>
+          <p:cNvSpPr/>
+          <p:nvPr/>
+        </p:nvSpPr>
+        <p:spPr>
+          <a:xfrm>
+            <a:off x="8074152" y="4023360"/>
+            <a:ext cx="2825496" cy="1097280"/>
           </a:xfrm>
           <a:prstGeom prst="rect">
             <a:avLst/>
@@ -4179,7 +4268,7 @@
               <a:buNone/>
             </a:pPr>
             <a:r>
-              <a:rPr lang="en-US" sz="1250" dirty="0">
+              <a:rPr lang="en-US" sz="1550" dirty="0">
                 <a:solidFill>
                   <a:srgbClr val="17364A"/>
                 </a:solidFill>
@@ -4189,7 +4278,7 @@
               </a:rPr>
               <a:t>Connect the concept to public health decisions, safeguards, documentation, or implementation work.</a:t>
             </a:r>
-            <a:endParaRPr lang="en-US" sz="1250" dirty="0"/>
+            <a:endParaRPr lang="en-US" sz="1550" dirty="0"/>
           </a:p>
         </p:txBody>
       </p:sp>
@@ -4386,7 +4475,7 @@
                 <a:ea typeface="Aptos" pitchFamily="34" charset="-122"/>
                 <a:cs typeface="Aptos" pitchFamily="34" charset="-120"/>
               </a:rPr>
-              <a:t>© Paula Soper</a:t>
+              <a:t>Â© Paula Soper</a:t>
             </a:r>
             <a:endParaRPr lang="en-US" sz="800" dirty="0"/>
           </a:p>
@@ -4394,7 +4483,46 @@
       </p:sp>
       <p:sp>
         <p:nvSpPr>
-          <p:cNvPr id="7" name="Shape 5"/>
+          <p:cNvPr id="7" name="Text 5"/>
+          <p:cNvSpPr/>
+          <p:nvPr/>
+        </p:nvSpPr>
+        <p:spPr>
+          <a:xfrm>
+            <a:off x="11137392" y="6510528"/>
+            <a:ext cx="411480" cy="201168"/>
+          </a:xfrm>
+          <a:prstGeom prst="rect">
+            <a:avLst/>
+          </a:prstGeom>
+          <a:noFill/>
+          <a:ln/>
+        </p:spPr>
+        <p:txBody>
+          <a:bodyPr wrap="square" lIns="0" tIns="0" rIns="0" bIns="0" rtlCol="0" anchor="ctr"/>
+          <a:lstStyle/>
+          <a:p>
+            <a:pPr algn="r" indent="0" marL="0">
+              <a:buNone/>
+            </a:pPr>
+            <a:r>
+              <a:rPr lang="en-US" sz="900" dirty="0">
+                <a:solidFill>
+                  <a:srgbClr val="5F7181"/>
+                </a:solidFill>
+                <a:latin typeface="Aptos" pitchFamily="34" charset="0"/>
+                <a:ea typeface="Aptos" pitchFamily="34" charset="-122"/>
+                <a:cs typeface="Aptos" pitchFamily="34" charset="-120"/>
+              </a:rPr>
+              <a:t>12</a:t>
+            </a:r>
+            <a:endParaRPr lang="en-US" sz="900" dirty="0"/>
+          </a:p>
+        </p:txBody>
+      </p:sp>
+      <p:sp>
+        <p:nvSpPr>
+          <p:cNvPr id="8" name="Shape 6"/>
           <p:cNvSpPr/>
           <p:nvPr/>
         </p:nvSpPr>
@@ -4419,7 +4547,7 @@
       </p:sp>
       <p:sp>
         <p:nvSpPr>
-          <p:cNvPr id="8" name="Text 6"/>
+          <p:cNvPr id="9" name="Text 7"/>
           <p:cNvSpPr/>
           <p:nvPr/>
         </p:nvSpPr>
@@ -4458,14 +4586,14 @@
       </p:sp>
       <p:sp>
         <p:nvSpPr>
-          <p:cNvPr id="9" name="Text 7"/>
+          <p:cNvPr id="10" name="Text 8"/>
           <p:cNvSpPr/>
           <p:nvPr/>
         </p:nvSpPr>
         <p:spPr>
           <a:xfrm>
             <a:off x="640080" y="621792"/>
-            <a:ext cx="10881360" cy="566928"/>
+            <a:ext cx="10881360" cy="713232"/>
           </a:xfrm>
           <a:prstGeom prst="rect">
             <a:avLst/>
@@ -4483,7 +4611,7 @@
               <a:buNone/>
             </a:pPr>
             <a:r>
-              <a:rPr lang="en-US" sz="2700" b="1" dirty="0">
+              <a:rPr lang="en-US" sz="3400" b="1" dirty="0">
                 <a:solidFill>
                   <a:srgbClr val="003A63"/>
                 </a:solidFill>
@@ -4493,20 +4621,20 @@
               </a:rPr>
               <a:t>Risks, Failure Modes, and Guardrails</a:t>
             </a:r>
-            <a:endParaRPr lang="en-US" sz="2700" dirty="0"/>
-          </a:p>
-        </p:txBody>
-      </p:sp>
-      <p:sp>
-        <p:nvSpPr>
-          <p:cNvPr id="10" name="Text 8"/>
-          <p:cNvSpPr/>
-          <p:nvPr/>
-        </p:nvSpPr>
-        <p:spPr>
-          <a:xfrm>
-            <a:off x="868680" y="1417320"/>
-            <a:ext cx="6675120" cy="4434840"/>
+            <a:endParaRPr lang="en-US" sz="3400" dirty="0"/>
+          </a:p>
+        </p:txBody>
+      </p:sp>
+      <p:sp>
+        <p:nvSpPr>
+          <p:cNvPr id="11" name="Text 9"/>
+          <p:cNvSpPr/>
+          <p:nvPr/>
+        </p:nvSpPr>
+        <p:spPr>
+          <a:xfrm>
+            <a:off x="868680" y="1508760"/>
+            <a:ext cx="6537960" cy="4160520"/>
           </a:xfrm>
           <a:prstGeom prst="rect">
             <a:avLst/>
@@ -4521,7 +4649,7 @@
           <a:lstStyle/>
           <a:p>
             <a:r>
-              <a:rPr lang="en-US" sz="1700" dirty="0">
+              <a:rPr lang="en-US" sz="2100" dirty="0">
                 <a:solidFill>
                   <a:srgbClr val="17364A"/>
                 </a:solidFill>
@@ -4531,11 +4659,11 @@
               </a:rPr>
               <a:t>Silent feed failure.</a:t>
             </a:r>
-            <a:endParaRPr lang="en-US" sz="1700" dirty="0"/>
-          </a:p>
-          <a:p>
-            <a:r>
-              <a:rPr lang="en-US" sz="1700" dirty="0">
+            <a:endParaRPr lang="en-US" sz="2100" dirty="0"/>
+          </a:p>
+          <a:p>
+            <a:r>
+              <a:rPr lang="en-US" sz="2100" dirty="0">
                 <a:solidFill>
                   <a:srgbClr val="17364A"/>
                 </a:solidFill>
@@ -4545,11 +4673,11 @@
               </a:rPr>
               <a:t>A data feed can stop or change without visible failure in the AI interface.</a:t>
             </a:r>
-            <a:endParaRPr lang="en-US" sz="1700" dirty="0"/>
-          </a:p>
-          <a:p>
-            <a:r>
-              <a:rPr lang="en-US" sz="1700" dirty="0">
+            <a:endParaRPr lang="en-US" sz="2100" dirty="0"/>
+          </a:p>
+          <a:p>
+            <a:r>
+              <a:rPr lang="en-US" sz="2100" dirty="0">
                 <a:solidFill>
                   <a:srgbClr val="17364A"/>
                 </a:solidFill>
@@ -4557,29 +4685,15 @@
                 <a:ea typeface="Aptos" pitchFamily="34" charset="-122"/>
                 <a:cs typeface="Aptos" pitchFamily="34" charset="-120"/>
               </a:rPr>
-              <a:t>Guardrails include automated feed monitoring, expected volume thresholds, error queues, and notification procedures.</a:t>
-            </a:r>
-            <a:endParaRPr lang="en-US" sz="1700" dirty="0"/>
-          </a:p>
-          <a:p>
-            <a:r>
-              <a:rPr lang="en-US" sz="1700" dirty="0">
-                <a:solidFill>
-                  <a:srgbClr val="17364A"/>
-                </a:solidFill>
-                <a:latin typeface="Aptos" pitchFamily="34" charset="0"/>
-                <a:ea typeface="Aptos" pitchFamily="34" charset="-122"/>
-                <a:cs typeface="Aptos" pitchFamily="34" charset="-120"/>
-              </a:rPr>
-              <a:t>Schema and terminology changes.</a:t>
-            </a:r>
-            <a:endParaRPr lang="en-US" sz="1700" dirty="0"/>
-          </a:p>
-        </p:txBody>
-      </p:sp>
-      <p:sp>
-        <p:nvSpPr>
-          <p:cNvPr id="11" name="Shape 9"/>
+              <a:t>Guardrails include automated feed monitoring, expected volume thresholds, error queues, and.</a:t>
+            </a:r>
+            <a:endParaRPr lang="en-US" sz="2100" dirty="0"/>
+          </a:p>
+        </p:txBody>
+      </p:sp>
+      <p:sp>
+        <p:nvSpPr>
+          <p:cNvPr id="12" name="Shape 10"/>
           <p:cNvSpPr/>
           <p:nvPr/>
         </p:nvSpPr>
@@ -4606,14 +4720,14 @@
       </p:sp>
       <p:sp>
         <p:nvSpPr>
-          <p:cNvPr id="12" name="Text 10"/>
+          <p:cNvPr id="13" name="Text 11"/>
           <p:cNvSpPr/>
           <p:nvPr/>
         </p:nvSpPr>
         <p:spPr>
           <a:xfrm>
             <a:off x="8074152" y="1563624"/>
-            <a:ext cx="2825496" cy="201168"/>
+            <a:ext cx="2825496" cy="256032"/>
           </a:xfrm>
           <a:prstGeom prst="rect">
             <a:avLst/>
@@ -4629,7 +4743,7 @@
               <a:buNone/>
             </a:pPr>
             <a:r>
-              <a:rPr lang="en-US" sz="950" b="1" dirty="0">
+              <a:rPr lang="en-US" sz="1300" b="1" dirty="0">
                 <a:solidFill>
                   <a:srgbClr val="0068B7"/>
                 </a:solidFill>
@@ -4639,20 +4753,20 @@
               </a:rPr>
               <a:t>Key idea</a:t>
             </a:r>
-            <a:endParaRPr lang="en-US" sz="950" dirty="0"/>
-          </a:p>
-        </p:txBody>
-      </p:sp>
-      <p:sp>
-        <p:nvSpPr>
-          <p:cNvPr id="13" name="Text 11"/>
-          <p:cNvSpPr/>
-          <p:nvPr/>
-        </p:nvSpPr>
-        <p:spPr>
-          <a:xfrm>
-            <a:off x="8074152" y="1856232"/>
-            <a:ext cx="2825496" cy="1261872"/>
+            <a:endParaRPr lang="en-US" sz="1300" dirty="0"/>
+          </a:p>
+        </p:txBody>
+      </p:sp>
+      <p:sp>
+        <p:nvSpPr>
+          <p:cNvPr id="14" name="Text 12"/>
+          <p:cNvSpPr/>
+          <p:nvPr/>
+        </p:nvSpPr>
+        <p:spPr>
+          <a:xfrm>
+            <a:off x="8074152" y="1920240"/>
+            <a:ext cx="2825496" cy="1188720"/>
           </a:xfrm>
           <a:prstGeom prst="rect">
             <a:avLst/>
@@ -4670,7 +4784,7 @@
               <a:buNone/>
             </a:pPr>
             <a:r>
-              <a:rPr lang="en-US" sz="1250" dirty="0">
+              <a:rPr lang="en-US" sz="1550" dirty="0">
                 <a:solidFill>
                   <a:srgbClr val="17364A"/>
                 </a:solidFill>
@@ -4680,13 +4794,13 @@
               </a:rPr>
               <a:t>Silent feed failure.</a:t>
             </a:r>
-            <a:endParaRPr lang="en-US" sz="1250" dirty="0"/>
-          </a:p>
-        </p:txBody>
-      </p:sp>
-      <p:sp>
-        <p:nvSpPr>
-          <p:cNvPr id="14" name="Shape 12"/>
+            <a:endParaRPr lang="en-US" sz="1550" dirty="0"/>
+          </a:p>
+        </p:txBody>
+      </p:sp>
+      <p:sp>
+        <p:nvSpPr>
+          <p:cNvPr id="15" name="Shape 13"/>
           <p:cNvSpPr/>
           <p:nvPr/>
         </p:nvSpPr>
@@ -4713,14 +4827,14 @@
       </p:sp>
       <p:sp>
         <p:nvSpPr>
-          <p:cNvPr id="15" name="Text 13"/>
+          <p:cNvPr id="16" name="Text 14"/>
           <p:cNvSpPr/>
           <p:nvPr/>
         </p:nvSpPr>
         <p:spPr>
           <a:xfrm>
             <a:off x="8074152" y="3666744"/>
-            <a:ext cx="2825496" cy="201168"/>
+            <a:ext cx="2825496" cy="256032"/>
           </a:xfrm>
           <a:prstGeom prst="rect">
             <a:avLst/>
@@ -4736,7 +4850,7 @@
               <a:buNone/>
             </a:pPr>
             <a:r>
-              <a:rPr lang="en-US" sz="950" b="1" dirty="0">
+              <a:rPr lang="en-US" sz="1300" b="1" dirty="0">
                 <a:solidFill>
                   <a:srgbClr val="0068B7"/>
                 </a:solidFill>
@@ -4746,20 +4860,20 @@
               </a:rPr>
               <a:t>Use this for</a:t>
             </a:r>
-            <a:endParaRPr lang="en-US" sz="950" dirty="0"/>
-          </a:p>
-        </p:txBody>
-      </p:sp>
-      <p:sp>
-        <p:nvSpPr>
-          <p:cNvPr id="16" name="Text 14"/>
-          <p:cNvSpPr/>
-          <p:nvPr/>
-        </p:nvSpPr>
-        <p:spPr>
-          <a:xfrm>
-            <a:off x="8074152" y="3959352"/>
-            <a:ext cx="2825496" cy="1170432"/>
+            <a:endParaRPr lang="en-US" sz="1300" dirty="0"/>
+          </a:p>
+        </p:txBody>
+      </p:sp>
+      <p:sp>
+        <p:nvSpPr>
+          <p:cNvPr id="17" name="Text 15"/>
+          <p:cNvSpPr/>
+          <p:nvPr/>
+        </p:nvSpPr>
+        <p:spPr>
+          <a:xfrm>
+            <a:off x="8074152" y="4023360"/>
+            <a:ext cx="2825496" cy="1097280"/>
           </a:xfrm>
           <a:prstGeom prst="rect">
             <a:avLst/>
@@ -4777,7 +4891,7 @@
               <a:buNone/>
             </a:pPr>
             <a:r>
-              <a:rPr lang="en-US" sz="1250" dirty="0">
+              <a:rPr lang="en-US" sz="1550" dirty="0">
                 <a:solidFill>
                   <a:srgbClr val="17364A"/>
                 </a:solidFill>
@@ -4787,7 +4901,7 @@
               </a:rPr>
               <a:t>Connect the concept to public health decisions, safeguards, documentation, or implementation work.</a:t>
             </a:r>
-            <a:endParaRPr lang="en-US" sz="1250" dirty="0"/>
+            <a:endParaRPr lang="en-US" sz="1550" dirty="0"/>
           </a:p>
         </p:txBody>
       </p:sp>
@@ -4984,7 +5098,7 @@
                 <a:ea typeface="Aptos" pitchFamily="34" charset="-122"/>
                 <a:cs typeface="Aptos" pitchFamily="34" charset="-120"/>
               </a:rPr>
-              <a:t>© Paula Soper</a:t>
+              <a:t>Â© Paula Soper</a:t>
             </a:r>
             <a:endParaRPr lang="en-US" sz="800" dirty="0"/>
           </a:p>
@@ -4998,8 +5112,47 @@
         </p:nvSpPr>
         <p:spPr>
           <a:xfrm>
+            <a:off x="11137392" y="6510528"/>
+            <a:ext cx="411480" cy="201168"/>
+          </a:xfrm>
+          <a:prstGeom prst="rect">
+            <a:avLst/>
+          </a:prstGeom>
+          <a:noFill/>
+          <a:ln/>
+        </p:spPr>
+        <p:txBody>
+          <a:bodyPr wrap="square" lIns="0" tIns="0" rIns="0" bIns="0" rtlCol="0" anchor="ctr"/>
+          <a:lstStyle/>
+          <a:p>
+            <a:pPr algn="r" indent="0" marL="0">
+              <a:buNone/>
+            </a:pPr>
+            <a:r>
+              <a:rPr lang="en-US" sz="900" dirty="0">
+                <a:solidFill>
+                  <a:srgbClr val="5F7181"/>
+                </a:solidFill>
+                <a:latin typeface="Aptos" pitchFamily="34" charset="0"/>
+                <a:ea typeface="Aptos" pitchFamily="34" charset="-122"/>
+                <a:cs typeface="Aptos" pitchFamily="34" charset="-120"/>
+              </a:rPr>
+              <a:t>13</a:t>
+            </a:r>
+            <a:endParaRPr lang="en-US" sz="900" dirty="0"/>
+          </a:p>
+        </p:txBody>
+      </p:sp>
+      <p:sp>
+        <p:nvSpPr>
+          <p:cNvPr id="8" name="Text 6"/>
+          <p:cNvSpPr/>
+          <p:nvPr/>
+        </p:nvSpPr>
+        <p:spPr>
+          <a:xfrm>
             <a:off x="640080" y="658368"/>
-            <a:ext cx="10881360" cy="566928"/>
+            <a:ext cx="10881360" cy="713232"/>
           </a:xfrm>
           <a:prstGeom prst="rect">
             <a:avLst/>
@@ -5017,7 +5170,7 @@
               <a:buNone/>
             </a:pPr>
             <a:r>
-              <a:rPr lang="en-US" sz="2700" b="1" dirty="0">
+              <a:rPr lang="en-US" sz="3400" b="1" dirty="0">
                 <a:solidFill>
                   <a:srgbClr val="003A63"/>
                 </a:solidFill>
@@ -5027,20 +5180,20 @@
               </a:rPr>
               <a:t>Risks, Failure Modes, and Guardrails Continued</a:t>
             </a:r>
-            <a:endParaRPr lang="en-US" sz="2700" dirty="0"/>
-          </a:p>
-        </p:txBody>
-      </p:sp>
-      <p:sp>
-        <p:nvSpPr>
-          <p:cNvPr id="8" name="Text 6"/>
-          <p:cNvSpPr/>
-          <p:nvPr/>
-        </p:nvSpPr>
-        <p:spPr>
-          <a:xfrm>
-            <a:off x="868680" y="1417320"/>
-            <a:ext cx="6675120" cy="4434840"/>
+            <a:endParaRPr lang="en-US" sz="3400" dirty="0"/>
+          </a:p>
+        </p:txBody>
+      </p:sp>
+      <p:sp>
+        <p:nvSpPr>
+          <p:cNvPr id="9" name="Text 7"/>
+          <p:cNvSpPr/>
+          <p:nvPr/>
+        </p:nvSpPr>
+        <p:spPr>
+          <a:xfrm>
+            <a:off x="868680" y="1508760"/>
+            <a:ext cx="6537960" cy="4160520"/>
           </a:xfrm>
           <a:prstGeom prst="rect">
             <a:avLst/>
@@ -5055,7 +5208,7 @@
           <a:lstStyle/>
           <a:p>
             <a:r>
-              <a:rPr lang="en-US" sz="1700" dirty="0">
+              <a:rPr lang="en-US" sz="2100" dirty="0">
                 <a:solidFill>
                   <a:srgbClr val="17364A"/>
                 </a:solidFill>
@@ -5065,11 +5218,11 @@
               </a:rPr>
               <a:t>Weak lineage.</a:t>
             </a:r>
-            <a:endParaRPr lang="en-US" sz="1700" dirty="0"/>
-          </a:p>
-          <a:p>
-            <a:r>
-              <a:rPr lang="en-US" sz="1700" dirty="0">
+            <a:endParaRPr lang="en-US" sz="2100" dirty="0"/>
+          </a:p>
+          <a:p>
+            <a:r>
+              <a:rPr lang="en-US" sz="2100" dirty="0">
                 <a:solidFill>
                   <a:srgbClr val="17364A"/>
                 </a:solidFill>
@@ -5079,11 +5232,11 @@
               </a:rPr>
               <a:t>If transformations are not documented, staff may not be able to explain or correct AI errors.</a:t>
             </a:r>
-            <a:endParaRPr lang="en-US" sz="1700" dirty="0"/>
-          </a:p>
-          <a:p>
-            <a:r>
-              <a:rPr lang="en-US" sz="1700" dirty="0">
+            <a:endParaRPr lang="en-US" sz="2100" dirty="0"/>
+          </a:p>
+          <a:p>
+            <a:r>
+              <a:rPr lang="en-US" sz="2100" dirty="0">
                 <a:solidFill>
                   <a:srgbClr val="17364A"/>
                 </a:solidFill>
@@ -5093,13 +5246,13 @@
               </a:rPr>
               <a:t>Guardrails include lineage documentation, version control, and audit trails.</a:t>
             </a:r>
-            <a:endParaRPr lang="en-US" sz="1700" dirty="0"/>
-          </a:p>
-        </p:txBody>
-      </p:sp>
-      <p:sp>
-        <p:nvSpPr>
-          <p:cNvPr id="9" name="Shape 7"/>
+            <a:endParaRPr lang="en-US" sz="2100" dirty="0"/>
+          </a:p>
+        </p:txBody>
+      </p:sp>
+      <p:sp>
+        <p:nvSpPr>
+          <p:cNvPr id="10" name="Shape 8"/>
           <p:cNvSpPr/>
           <p:nvPr/>
         </p:nvSpPr>
@@ -5126,14 +5279,14 @@
       </p:sp>
       <p:sp>
         <p:nvSpPr>
-          <p:cNvPr id="10" name="Text 8"/>
+          <p:cNvPr id="11" name="Text 9"/>
           <p:cNvSpPr/>
           <p:nvPr/>
         </p:nvSpPr>
         <p:spPr>
           <a:xfrm>
             <a:off x="8074152" y="1563624"/>
-            <a:ext cx="2825496" cy="201168"/>
+            <a:ext cx="2825496" cy="256032"/>
           </a:xfrm>
           <a:prstGeom prst="rect">
             <a:avLst/>
@@ -5149,7 +5302,7 @@
               <a:buNone/>
             </a:pPr>
             <a:r>
-              <a:rPr lang="en-US" sz="950" b="1" dirty="0">
+              <a:rPr lang="en-US" sz="1300" b="1" dirty="0">
                 <a:solidFill>
                   <a:srgbClr val="0068B7"/>
                 </a:solidFill>
@@ -5159,20 +5312,20 @@
               </a:rPr>
               <a:t>Key idea</a:t>
             </a:r>
-            <a:endParaRPr lang="en-US" sz="950" dirty="0"/>
-          </a:p>
-        </p:txBody>
-      </p:sp>
-      <p:sp>
-        <p:nvSpPr>
-          <p:cNvPr id="11" name="Text 9"/>
-          <p:cNvSpPr/>
-          <p:nvPr/>
-        </p:nvSpPr>
-        <p:spPr>
-          <a:xfrm>
-            <a:off x="8074152" y="1856232"/>
-            <a:ext cx="2825496" cy="1261872"/>
+            <a:endParaRPr lang="en-US" sz="1300" dirty="0"/>
+          </a:p>
+        </p:txBody>
+      </p:sp>
+      <p:sp>
+        <p:nvSpPr>
+          <p:cNvPr id="12" name="Text 10"/>
+          <p:cNvSpPr/>
+          <p:nvPr/>
+        </p:nvSpPr>
+        <p:spPr>
+          <a:xfrm>
+            <a:off x="8074152" y="1920240"/>
+            <a:ext cx="2825496" cy="1188720"/>
           </a:xfrm>
           <a:prstGeom prst="rect">
             <a:avLst/>
@@ -5190,7 +5343,7 @@
               <a:buNone/>
             </a:pPr>
             <a:r>
-              <a:rPr lang="en-US" sz="1250" dirty="0">
+              <a:rPr lang="en-US" sz="1550" dirty="0">
                 <a:solidFill>
                   <a:srgbClr val="17364A"/>
                 </a:solidFill>
@@ -5200,13 +5353,13 @@
               </a:rPr>
               <a:t>Weak lineage.</a:t>
             </a:r>
-            <a:endParaRPr lang="en-US" sz="1250" dirty="0"/>
-          </a:p>
-        </p:txBody>
-      </p:sp>
-      <p:sp>
-        <p:nvSpPr>
-          <p:cNvPr id="12" name="Shape 10"/>
+            <a:endParaRPr lang="en-US" sz="1550" dirty="0"/>
+          </a:p>
+        </p:txBody>
+      </p:sp>
+      <p:sp>
+        <p:nvSpPr>
+          <p:cNvPr id="13" name="Shape 11"/>
           <p:cNvSpPr/>
           <p:nvPr/>
         </p:nvSpPr>
@@ -5233,14 +5386,14 @@
       </p:sp>
       <p:sp>
         <p:nvSpPr>
-          <p:cNvPr id="13" name="Text 11"/>
+          <p:cNvPr id="14" name="Text 12"/>
           <p:cNvSpPr/>
           <p:nvPr/>
         </p:nvSpPr>
         <p:spPr>
           <a:xfrm>
             <a:off x="8074152" y="3666744"/>
-            <a:ext cx="2825496" cy="201168"/>
+            <a:ext cx="2825496" cy="256032"/>
           </a:xfrm>
           <a:prstGeom prst="rect">
             <a:avLst/>
@@ -5256,7 +5409,7 @@
               <a:buNone/>
             </a:pPr>
             <a:r>
-              <a:rPr lang="en-US" sz="950" b="1" dirty="0">
+              <a:rPr lang="en-US" sz="1300" b="1" dirty="0">
                 <a:solidFill>
                   <a:srgbClr val="0068B7"/>
                 </a:solidFill>
@@ -5266,20 +5419,20 @@
               </a:rPr>
               <a:t>Use this for</a:t>
             </a:r>
-            <a:endParaRPr lang="en-US" sz="950" dirty="0"/>
-          </a:p>
-        </p:txBody>
-      </p:sp>
-      <p:sp>
-        <p:nvSpPr>
-          <p:cNvPr id="14" name="Text 12"/>
-          <p:cNvSpPr/>
-          <p:nvPr/>
-        </p:nvSpPr>
-        <p:spPr>
-          <a:xfrm>
-            <a:off x="8074152" y="3959352"/>
-            <a:ext cx="2825496" cy="1170432"/>
+            <a:endParaRPr lang="en-US" sz="1300" dirty="0"/>
+          </a:p>
+        </p:txBody>
+      </p:sp>
+      <p:sp>
+        <p:nvSpPr>
+          <p:cNvPr id="15" name="Text 13"/>
+          <p:cNvSpPr/>
+          <p:nvPr/>
+        </p:nvSpPr>
+        <p:spPr>
+          <a:xfrm>
+            <a:off x="8074152" y="4023360"/>
+            <a:ext cx="2825496" cy="1097280"/>
           </a:xfrm>
           <a:prstGeom prst="rect">
             <a:avLst/>
@@ -5297,7 +5450,7 @@
               <a:buNone/>
             </a:pPr>
             <a:r>
-              <a:rPr lang="en-US" sz="1250" dirty="0">
+              <a:rPr lang="en-US" sz="1550" dirty="0">
                 <a:solidFill>
                   <a:srgbClr val="17364A"/>
                 </a:solidFill>
@@ -5307,7 +5460,7 @@
               </a:rPr>
               <a:t>Connect the concept to public health decisions, safeguards, documentation, or implementation work.</a:t>
             </a:r>
-            <a:endParaRPr lang="en-US" sz="1250" dirty="0"/>
+            <a:endParaRPr lang="en-US" sz="1550" dirty="0"/>
           </a:p>
         </p:txBody>
       </p:sp>
@@ -5504,7 +5657,7 @@
                 <a:ea typeface="Aptos" pitchFamily="34" charset="-122"/>
                 <a:cs typeface="Aptos" pitchFamily="34" charset="-120"/>
               </a:rPr>
-              <a:t>© Paula Soper</a:t>
+              <a:t>Â© Paula Soper</a:t>
             </a:r>
             <a:endParaRPr lang="en-US" sz="800" dirty="0"/>
           </a:p>
@@ -5512,7 +5665,46 @@
       </p:sp>
       <p:sp>
         <p:nvSpPr>
-          <p:cNvPr id="7" name="Shape 5"/>
+          <p:cNvPr id="7" name="Text 5"/>
+          <p:cNvSpPr/>
+          <p:nvPr/>
+        </p:nvSpPr>
+        <p:spPr>
+          <a:xfrm>
+            <a:off x="11137392" y="6510528"/>
+            <a:ext cx="411480" cy="201168"/>
+          </a:xfrm>
+          <a:prstGeom prst="rect">
+            <a:avLst/>
+          </a:prstGeom>
+          <a:noFill/>
+          <a:ln/>
+        </p:spPr>
+        <p:txBody>
+          <a:bodyPr wrap="square" lIns="0" tIns="0" rIns="0" bIns="0" rtlCol="0" anchor="ctr"/>
+          <a:lstStyle/>
+          <a:p>
+            <a:pPr algn="r" indent="0" marL="0">
+              <a:buNone/>
+            </a:pPr>
+            <a:r>
+              <a:rPr lang="en-US" sz="900" dirty="0">
+                <a:solidFill>
+                  <a:srgbClr val="5F7181"/>
+                </a:solidFill>
+                <a:latin typeface="Aptos" pitchFamily="34" charset="0"/>
+                <a:ea typeface="Aptos" pitchFamily="34" charset="-122"/>
+                <a:cs typeface="Aptos" pitchFamily="34" charset="-120"/>
+              </a:rPr>
+              <a:t>14</a:t>
+            </a:r>
+            <a:endParaRPr lang="en-US" sz="900" dirty="0"/>
+          </a:p>
+        </p:txBody>
+      </p:sp>
+      <p:sp>
+        <p:nvSpPr>
+          <p:cNvPr id="8" name="Shape 6"/>
           <p:cNvSpPr/>
           <p:nvPr/>
         </p:nvSpPr>
@@ -5537,7 +5729,7 @@
       </p:sp>
       <p:sp>
         <p:nvSpPr>
-          <p:cNvPr id="8" name="Text 6"/>
+          <p:cNvPr id="9" name="Text 7"/>
           <p:cNvSpPr/>
           <p:nvPr/>
         </p:nvSpPr>
@@ -5576,14 +5768,14 @@
       </p:sp>
       <p:sp>
         <p:nvSpPr>
-          <p:cNvPr id="9" name="Text 7"/>
+          <p:cNvPr id="10" name="Text 8"/>
           <p:cNvSpPr/>
           <p:nvPr/>
         </p:nvSpPr>
         <p:spPr>
           <a:xfrm>
             <a:off x="640080" y="621792"/>
-            <a:ext cx="10881360" cy="566928"/>
+            <a:ext cx="10881360" cy="713232"/>
           </a:xfrm>
           <a:prstGeom prst="rect">
             <a:avLst/>
@@ -5601,7 +5793,7 @@
               <a:buNone/>
             </a:pPr>
             <a:r>
-              <a:rPr lang="en-US" sz="2700" b="1" dirty="0">
+              <a:rPr lang="en-US" sz="3400" b="1" dirty="0">
                 <a:solidFill>
                   <a:srgbClr val="003A63"/>
                 </a:solidFill>
@@ -5611,20 +5803,20 @@
               </a:rPr>
               <a:t>Application to AI-Supported Workflows</a:t>
             </a:r>
-            <a:endParaRPr lang="en-US" sz="2700" dirty="0"/>
-          </a:p>
-        </p:txBody>
-      </p:sp>
-      <p:sp>
-        <p:nvSpPr>
-          <p:cNvPr id="10" name="Text 8"/>
-          <p:cNvSpPr/>
-          <p:nvPr/>
-        </p:nvSpPr>
-        <p:spPr>
-          <a:xfrm>
-            <a:off x="868680" y="1417320"/>
-            <a:ext cx="6675120" cy="4434840"/>
+            <a:endParaRPr lang="en-US" sz="3400" dirty="0"/>
+          </a:p>
+        </p:txBody>
+      </p:sp>
+      <p:sp>
+        <p:nvSpPr>
+          <p:cNvPr id="11" name="Text 9"/>
+          <p:cNvSpPr/>
+          <p:nvPr/>
+        </p:nvSpPr>
+        <p:spPr>
+          <a:xfrm>
+            <a:off x="868680" y="1508760"/>
+            <a:ext cx="6537960" cy="4160520"/>
           </a:xfrm>
           <a:prstGeom prst="rect">
             <a:avLst/>
@@ -5639,7 +5831,7 @@
           <a:lstStyle/>
           <a:p>
             <a:r>
-              <a:rPr lang="en-US" sz="1700" dirty="0">
+              <a:rPr lang="en-US" sz="2100" dirty="0">
                 <a:solidFill>
                   <a:srgbClr val="17364A"/>
                 </a:solidFill>
@@ -5647,13 +5839,13 @@
                 <a:ea typeface="Aptos" pitchFamily="34" charset="-122"/>
                 <a:cs typeface="Aptos" pitchFamily="34" charset="-120"/>
               </a:rPr>
-              <a:t>Generative AI may use pipeline outputs to summarize records, but the summary should indicate source freshness and preserve.</a:t>
-            </a:r>
-            <a:endParaRPr lang="en-US" sz="1700" dirty="0"/>
-          </a:p>
-          <a:p>
-            <a:r>
-              <a:rPr lang="en-US" sz="1700" dirty="0">
+              <a:t>Generative AI may use pipeline outputs to summarize records, but the summary should indicate source.</a:t>
+            </a:r>
+            <a:endParaRPr lang="en-US" sz="2100" dirty="0"/>
+          </a:p>
+          <a:p>
+            <a:r>
+              <a:rPr lang="en-US" sz="2100" dirty="0">
                 <a:solidFill>
                   <a:srgbClr val="17364A"/>
                 </a:solidFill>
@@ -5661,13 +5853,13 @@
                 <a:ea typeface="Aptos" pitchFamily="34" charset="-122"/>
                 <a:cs typeface="Aptos" pitchFamily="34" charset="-120"/>
               </a:rPr>
-              <a:t>Predictive models may rely on engineered features created by a pipeline, so the feature pipeline must be monitored for.</a:t>
-            </a:r>
-            <a:endParaRPr lang="en-US" sz="1700" dirty="0"/>
-          </a:p>
-          <a:p>
-            <a:r>
-              <a:rPr lang="en-US" sz="1700" dirty="0">
+              <a:t>Predictive models may rely on engineered features created by a pipeline, so the feature pipeline must.</a:t>
+            </a:r>
+            <a:endParaRPr lang="en-US" sz="2100" dirty="0"/>
+          </a:p>
+          <a:p>
+            <a:r>
+              <a:rPr lang="en-US" sz="2100" dirty="0">
                 <a:solidFill>
                   <a:srgbClr val="17364A"/>
                 </a:solidFill>
@@ -5675,29 +5867,15 @@
                 <a:ea typeface="Aptos" pitchFamily="34" charset="-122"/>
                 <a:cs typeface="Aptos" pitchFamily="34" charset="-120"/>
               </a:rPr>
-              <a:t>RAG systems depend on document ingestion pipelines, which must track document source, version, permissions, and refresh.</a:t>
-            </a:r>
-            <a:endParaRPr lang="en-US" sz="1700" dirty="0"/>
-          </a:p>
-          <a:p>
-            <a:r>
-              <a:rPr lang="en-US" sz="1700" dirty="0">
-                <a:solidFill>
-                  <a:srgbClr val="17364A"/>
-                </a:solidFill>
-                <a:latin typeface="Aptos" pitchFamily="34" charset="0"/>
-                <a:ea typeface="Aptos" pitchFamily="34" charset="-122"/>
-                <a:cs typeface="Aptos" pitchFamily="34" charset="-120"/>
-              </a:rPr>
-              <a:t>Agentic workflows may depend on event-driven pipelines, making failure handling and approval points especially important.</a:t>
-            </a:r>
-            <a:endParaRPr lang="en-US" sz="1700" dirty="0"/>
-          </a:p>
-        </p:txBody>
-      </p:sp>
-      <p:sp>
-        <p:nvSpPr>
-          <p:cNvPr id="11" name="Shape 9"/>
+              <a:t>RAG systems depend on document ingestion pipelines, which must track document source, version,.</a:t>
+            </a:r>
+            <a:endParaRPr lang="en-US" sz="2100" dirty="0"/>
+          </a:p>
+        </p:txBody>
+      </p:sp>
+      <p:sp>
+        <p:nvSpPr>
+          <p:cNvPr id="12" name="Shape 10"/>
           <p:cNvSpPr/>
           <p:nvPr/>
         </p:nvSpPr>
@@ -5724,14 +5902,14 @@
       </p:sp>
       <p:sp>
         <p:nvSpPr>
-          <p:cNvPr id="12" name="Text 10"/>
+          <p:cNvPr id="13" name="Text 11"/>
           <p:cNvSpPr/>
           <p:nvPr/>
         </p:nvSpPr>
         <p:spPr>
           <a:xfrm>
             <a:off x="8074152" y="1563624"/>
-            <a:ext cx="2825496" cy="201168"/>
+            <a:ext cx="2825496" cy="256032"/>
           </a:xfrm>
           <a:prstGeom prst="rect">
             <a:avLst/>
@@ -5747,7 +5925,7 @@
               <a:buNone/>
             </a:pPr>
             <a:r>
-              <a:rPr lang="en-US" sz="950" b="1" dirty="0">
+              <a:rPr lang="en-US" sz="1300" b="1" dirty="0">
                 <a:solidFill>
                   <a:srgbClr val="0068B7"/>
                 </a:solidFill>
@@ -5757,20 +5935,20 @@
               </a:rPr>
               <a:t>Key idea</a:t>
             </a:r>
-            <a:endParaRPr lang="en-US" sz="950" dirty="0"/>
-          </a:p>
-        </p:txBody>
-      </p:sp>
-      <p:sp>
-        <p:nvSpPr>
-          <p:cNvPr id="13" name="Text 11"/>
-          <p:cNvSpPr/>
-          <p:nvPr/>
-        </p:nvSpPr>
-        <p:spPr>
-          <a:xfrm>
-            <a:off x="8074152" y="1856232"/>
-            <a:ext cx="2825496" cy="1261872"/>
+            <a:endParaRPr lang="en-US" sz="1300" dirty="0"/>
+          </a:p>
+        </p:txBody>
+      </p:sp>
+      <p:sp>
+        <p:nvSpPr>
+          <p:cNvPr id="14" name="Text 12"/>
+          <p:cNvSpPr/>
+          <p:nvPr/>
+        </p:nvSpPr>
+        <p:spPr>
+          <a:xfrm>
+            <a:off x="8074152" y="1920240"/>
+            <a:ext cx="2825496" cy="1188720"/>
           </a:xfrm>
           <a:prstGeom prst="rect">
             <a:avLst/>
@@ -5788,7 +5966,7 @@
               <a:buNone/>
             </a:pPr>
             <a:r>
-              <a:rPr lang="en-US" sz="1250" dirty="0">
+              <a:rPr lang="en-US" sz="1550" dirty="0">
                 <a:solidFill>
                   <a:srgbClr val="17364A"/>
                 </a:solidFill>
@@ -5796,15 +5974,15 @@
                 <a:ea typeface="Aptos" pitchFamily="34" charset="-122"/>
                 <a:cs typeface="Aptos" pitchFamily="34" charset="-120"/>
               </a:rPr>
-              <a:t>Generative AI may use pipeline outputs to summarize records, but the summary should indicate source freshness and preserve.</a:t>
-            </a:r>
-            <a:endParaRPr lang="en-US" sz="1250" dirty="0"/>
-          </a:p>
-        </p:txBody>
-      </p:sp>
-      <p:sp>
-        <p:nvSpPr>
-          <p:cNvPr id="14" name="Shape 12"/>
+              <a:t>Generative AI may use pipeline outputs to summarize records, but the summary should indicate source.</a:t>
+            </a:r>
+            <a:endParaRPr lang="en-US" sz="1550" dirty="0"/>
+          </a:p>
+        </p:txBody>
+      </p:sp>
+      <p:sp>
+        <p:nvSpPr>
+          <p:cNvPr id="15" name="Shape 13"/>
           <p:cNvSpPr/>
           <p:nvPr/>
         </p:nvSpPr>
@@ -5831,14 +6009,14 @@
       </p:sp>
       <p:sp>
         <p:nvSpPr>
-          <p:cNvPr id="15" name="Text 13"/>
+          <p:cNvPr id="16" name="Text 14"/>
           <p:cNvSpPr/>
           <p:nvPr/>
         </p:nvSpPr>
         <p:spPr>
           <a:xfrm>
             <a:off x="8074152" y="3666744"/>
-            <a:ext cx="2825496" cy="201168"/>
+            <a:ext cx="2825496" cy="256032"/>
           </a:xfrm>
           <a:prstGeom prst="rect">
             <a:avLst/>
@@ -5854,7 +6032,7 @@
               <a:buNone/>
             </a:pPr>
             <a:r>
-              <a:rPr lang="en-US" sz="950" b="1" dirty="0">
+              <a:rPr lang="en-US" sz="1300" b="1" dirty="0">
                 <a:solidFill>
                   <a:srgbClr val="0068B7"/>
                 </a:solidFill>
@@ -5864,20 +6042,20 @@
               </a:rPr>
               <a:t>Use this for</a:t>
             </a:r>
-            <a:endParaRPr lang="en-US" sz="950" dirty="0"/>
-          </a:p>
-        </p:txBody>
-      </p:sp>
-      <p:sp>
-        <p:nvSpPr>
-          <p:cNvPr id="16" name="Text 14"/>
-          <p:cNvSpPr/>
-          <p:nvPr/>
-        </p:nvSpPr>
-        <p:spPr>
-          <a:xfrm>
-            <a:off x="8074152" y="3959352"/>
-            <a:ext cx="2825496" cy="1170432"/>
+            <a:endParaRPr lang="en-US" sz="1300" dirty="0"/>
+          </a:p>
+        </p:txBody>
+      </p:sp>
+      <p:sp>
+        <p:nvSpPr>
+          <p:cNvPr id="17" name="Text 15"/>
+          <p:cNvSpPr/>
+          <p:nvPr/>
+        </p:nvSpPr>
+        <p:spPr>
+          <a:xfrm>
+            <a:off x="8074152" y="4023360"/>
+            <a:ext cx="2825496" cy="1097280"/>
           </a:xfrm>
           <a:prstGeom prst="rect">
             <a:avLst/>
@@ -5895,7 +6073,7 @@
               <a:buNone/>
             </a:pPr>
             <a:r>
-              <a:rPr lang="en-US" sz="1250" dirty="0">
+              <a:rPr lang="en-US" sz="1550" dirty="0">
                 <a:solidFill>
                   <a:srgbClr val="17364A"/>
                 </a:solidFill>
@@ -5905,7 +6083,7 @@
               </a:rPr>
               <a:t>Connect the concept to public health decisions, safeguards, documentation, or implementation work.</a:t>
             </a:r>
-            <a:endParaRPr lang="en-US" sz="1250" dirty="0"/>
+            <a:endParaRPr lang="en-US" sz="1550" dirty="0"/>
           </a:p>
         </p:txBody>
       </p:sp>
@@ -6102,7 +6280,7 @@
                 <a:ea typeface="Aptos" pitchFamily="34" charset="-122"/>
                 <a:cs typeface="Aptos" pitchFamily="34" charset="-120"/>
               </a:rPr>
-              <a:t>© Paula Soper</a:t>
+              <a:t>Â© Paula Soper</a:t>
             </a:r>
             <a:endParaRPr lang="en-US" sz="800" dirty="0"/>
           </a:p>
@@ -6110,7 +6288,46 @@
       </p:sp>
       <p:sp>
         <p:nvSpPr>
-          <p:cNvPr id="7" name="Shape 5"/>
+          <p:cNvPr id="7" name="Text 5"/>
+          <p:cNvSpPr/>
+          <p:nvPr/>
+        </p:nvSpPr>
+        <p:spPr>
+          <a:xfrm>
+            <a:off x="11137392" y="6510528"/>
+            <a:ext cx="411480" cy="201168"/>
+          </a:xfrm>
+          <a:prstGeom prst="rect">
+            <a:avLst/>
+          </a:prstGeom>
+          <a:noFill/>
+          <a:ln/>
+        </p:spPr>
+        <p:txBody>
+          <a:bodyPr wrap="square" lIns="0" tIns="0" rIns="0" bIns="0" rtlCol="0" anchor="ctr"/>
+          <a:lstStyle/>
+          <a:p>
+            <a:pPr algn="r" indent="0" marL="0">
+              <a:buNone/>
+            </a:pPr>
+            <a:r>
+              <a:rPr lang="en-US" sz="900" dirty="0">
+                <a:solidFill>
+                  <a:srgbClr val="5F7181"/>
+                </a:solidFill>
+                <a:latin typeface="Aptos" pitchFamily="34" charset="0"/>
+                <a:ea typeface="Aptos" pitchFamily="34" charset="-122"/>
+                <a:cs typeface="Aptos" pitchFamily="34" charset="-120"/>
+              </a:rPr>
+              <a:t>15</a:t>
+            </a:r>
+            <a:endParaRPr lang="en-US" sz="900" dirty="0"/>
+          </a:p>
+        </p:txBody>
+      </p:sp>
+      <p:sp>
+        <p:nvSpPr>
+          <p:cNvPr id="8" name="Shape 6"/>
           <p:cNvSpPr/>
           <p:nvPr/>
         </p:nvSpPr>
@@ -6135,7 +6352,7 @@
       </p:sp>
       <p:sp>
         <p:nvSpPr>
-          <p:cNvPr id="8" name="Text 6"/>
+          <p:cNvPr id="9" name="Text 7"/>
           <p:cNvSpPr/>
           <p:nvPr/>
         </p:nvSpPr>
@@ -6174,14 +6391,14 @@
       </p:sp>
       <p:sp>
         <p:nvSpPr>
-          <p:cNvPr id="9" name="Text 7"/>
+          <p:cNvPr id="10" name="Text 8"/>
           <p:cNvSpPr/>
           <p:nvPr/>
         </p:nvSpPr>
         <p:spPr>
           <a:xfrm>
             <a:off x="640080" y="621792"/>
-            <a:ext cx="10881360" cy="566928"/>
+            <a:ext cx="10881360" cy="713232"/>
           </a:xfrm>
           <a:prstGeom prst="rect">
             <a:avLst/>
@@ -6199,7 +6416,7 @@
               <a:buNone/>
             </a:pPr>
             <a:r>
-              <a:rPr lang="en-US" sz="2700" b="1" dirty="0">
+              <a:rPr lang="en-US" sz="3400" b="1" dirty="0">
                 <a:solidFill>
                   <a:srgbClr val="003A63"/>
                 </a:solidFill>
@@ -6209,20 +6426,20 @@
               </a:rPr>
               <a:t>Reflection Questions</a:t>
             </a:r>
-            <a:endParaRPr lang="en-US" sz="2700" dirty="0"/>
-          </a:p>
-        </p:txBody>
-      </p:sp>
-      <p:sp>
-        <p:nvSpPr>
-          <p:cNvPr id="10" name="Text 8"/>
-          <p:cNvSpPr/>
-          <p:nvPr/>
-        </p:nvSpPr>
-        <p:spPr>
-          <a:xfrm>
-            <a:off x="868680" y="1417320"/>
-            <a:ext cx="6675120" cy="4434840"/>
+            <a:endParaRPr lang="en-US" sz="3400" dirty="0"/>
+          </a:p>
+        </p:txBody>
+      </p:sp>
+      <p:sp>
+        <p:nvSpPr>
+          <p:cNvPr id="11" name="Text 9"/>
+          <p:cNvSpPr/>
+          <p:nvPr/>
+        </p:nvSpPr>
+        <p:spPr>
+          <a:xfrm>
+            <a:off x="868680" y="1508760"/>
+            <a:ext cx="6537960" cy="4160520"/>
           </a:xfrm>
           <a:prstGeom prst="rect">
             <a:avLst/>
@@ -6237,7 +6454,7 @@
           <a:lstStyle/>
           <a:p>
             <a:r>
-              <a:rPr lang="en-US" sz="1700" dirty="0">
+              <a:rPr lang="en-US" sz="2100" dirty="0">
                 <a:solidFill>
                   <a:srgbClr val="17364A"/>
                 </a:solidFill>
@@ -6247,11 +6464,11 @@
               </a:rPr>
               <a:t>Which public health data feeds are most important to daily decisions in your program?</a:t>
             </a:r>
-            <a:endParaRPr lang="en-US" sz="1700" dirty="0"/>
-          </a:p>
-          <a:p>
-            <a:r>
-              <a:rPr lang="en-US" sz="1700" dirty="0">
+            <a:endParaRPr lang="en-US" sz="2100" dirty="0"/>
+          </a:p>
+          <a:p>
+            <a:r>
+              <a:rPr lang="en-US" sz="2100" dirty="0">
                 <a:solidFill>
                   <a:srgbClr val="17364A"/>
                 </a:solidFill>
@@ -6261,11 +6478,11 @@
               </a:rPr>
               <a:t>Which pipelines are automatically monitored, and which depend on manual review?</a:t>
             </a:r>
-            <a:endParaRPr lang="en-US" sz="1700" dirty="0"/>
-          </a:p>
-          <a:p>
-            <a:r>
-              <a:rPr lang="en-US" sz="1700" dirty="0">
+            <a:endParaRPr lang="en-US" sz="2100" dirty="0"/>
+          </a:p>
+          <a:p>
+            <a:r>
+              <a:rPr lang="en-US" sz="2100" dirty="0">
                 <a:solidFill>
                   <a:srgbClr val="17364A"/>
                 </a:solidFill>
@@ -6275,13 +6492,13 @@
               </a:rPr>
               <a:t>What failures would materially affect an AI output?</a:t>
             </a:r>
-            <a:endParaRPr lang="en-US" sz="1700" dirty="0"/>
-          </a:p>
-        </p:txBody>
-      </p:sp>
-      <p:sp>
-        <p:nvSpPr>
-          <p:cNvPr id="11" name="Shape 9"/>
+            <a:endParaRPr lang="en-US" sz="2100" dirty="0"/>
+          </a:p>
+        </p:txBody>
+      </p:sp>
+      <p:sp>
+        <p:nvSpPr>
+          <p:cNvPr id="12" name="Shape 10"/>
           <p:cNvSpPr/>
           <p:nvPr/>
         </p:nvSpPr>
@@ -6308,14 +6525,14 @@
       </p:sp>
       <p:sp>
         <p:nvSpPr>
-          <p:cNvPr id="12" name="Text 10"/>
+          <p:cNvPr id="13" name="Text 11"/>
           <p:cNvSpPr/>
           <p:nvPr/>
         </p:nvSpPr>
         <p:spPr>
           <a:xfrm>
             <a:off x="8074152" y="1563624"/>
-            <a:ext cx="2825496" cy="201168"/>
+            <a:ext cx="2825496" cy="256032"/>
           </a:xfrm>
           <a:prstGeom prst="rect">
             <a:avLst/>
@@ -6331,7 +6548,7 @@
               <a:buNone/>
             </a:pPr>
             <a:r>
-              <a:rPr lang="en-US" sz="950" b="1" dirty="0">
+              <a:rPr lang="en-US" sz="1300" b="1" dirty="0">
                 <a:solidFill>
                   <a:srgbClr val="0068B7"/>
                 </a:solidFill>
@@ -6341,20 +6558,20 @@
               </a:rPr>
               <a:t>Key idea</a:t>
             </a:r>
-            <a:endParaRPr lang="en-US" sz="950" dirty="0"/>
-          </a:p>
-        </p:txBody>
-      </p:sp>
-      <p:sp>
-        <p:nvSpPr>
-          <p:cNvPr id="13" name="Text 11"/>
-          <p:cNvSpPr/>
-          <p:nvPr/>
-        </p:nvSpPr>
-        <p:spPr>
-          <a:xfrm>
-            <a:off x="8074152" y="1856232"/>
-            <a:ext cx="2825496" cy="1261872"/>
+            <a:endParaRPr lang="en-US" sz="1300" dirty="0"/>
+          </a:p>
+        </p:txBody>
+      </p:sp>
+      <p:sp>
+        <p:nvSpPr>
+          <p:cNvPr id="14" name="Text 12"/>
+          <p:cNvSpPr/>
+          <p:nvPr/>
+        </p:nvSpPr>
+        <p:spPr>
+          <a:xfrm>
+            <a:off x="8074152" y="1920240"/>
+            <a:ext cx="2825496" cy="1188720"/>
           </a:xfrm>
           <a:prstGeom prst="rect">
             <a:avLst/>
@@ -6372,7 +6589,7 @@
               <a:buNone/>
             </a:pPr>
             <a:r>
-              <a:rPr lang="en-US" sz="1250" dirty="0">
+              <a:rPr lang="en-US" sz="1550" dirty="0">
                 <a:solidFill>
                   <a:srgbClr val="17364A"/>
                 </a:solidFill>
@@ -6382,13 +6599,13 @@
               </a:rPr>
               <a:t>Which public health data feeds are most important to daily decisions in your program?</a:t>
             </a:r>
-            <a:endParaRPr lang="en-US" sz="1250" dirty="0"/>
-          </a:p>
-        </p:txBody>
-      </p:sp>
-      <p:sp>
-        <p:nvSpPr>
-          <p:cNvPr id="14" name="Shape 12"/>
+            <a:endParaRPr lang="en-US" sz="1550" dirty="0"/>
+          </a:p>
+        </p:txBody>
+      </p:sp>
+      <p:sp>
+        <p:nvSpPr>
+          <p:cNvPr id="15" name="Shape 13"/>
           <p:cNvSpPr/>
           <p:nvPr/>
         </p:nvSpPr>
@@ -6415,14 +6632,14 @@
       </p:sp>
       <p:sp>
         <p:nvSpPr>
-          <p:cNvPr id="15" name="Text 13"/>
+          <p:cNvPr id="16" name="Text 14"/>
           <p:cNvSpPr/>
           <p:nvPr/>
         </p:nvSpPr>
         <p:spPr>
           <a:xfrm>
             <a:off x="8074152" y="3666744"/>
-            <a:ext cx="2825496" cy="201168"/>
+            <a:ext cx="2825496" cy="256032"/>
           </a:xfrm>
           <a:prstGeom prst="rect">
             <a:avLst/>
@@ -6438,7 +6655,7 @@
               <a:buNone/>
             </a:pPr>
             <a:r>
-              <a:rPr lang="en-US" sz="950" b="1" dirty="0">
+              <a:rPr lang="en-US" sz="1300" b="1" dirty="0">
                 <a:solidFill>
                   <a:srgbClr val="0068B7"/>
                 </a:solidFill>
@@ -6448,20 +6665,20 @@
               </a:rPr>
               <a:t>Use this for</a:t>
             </a:r>
-            <a:endParaRPr lang="en-US" sz="950" dirty="0"/>
-          </a:p>
-        </p:txBody>
-      </p:sp>
-      <p:sp>
-        <p:nvSpPr>
-          <p:cNvPr id="16" name="Text 14"/>
-          <p:cNvSpPr/>
-          <p:nvPr/>
-        </p:nvSpPr>
-        <p:spPr>
-          <a:xfrm>
-            <a:off x="8074152" y="3959352"/>
-            <a:ext cx="2825496" cy="1170432"/>
+            <a:endParaRPr lang="en-US" sz="1300" dirty="0"/>
+          </a:p>
+        </p:txBody>
+      </p:sp>
+      <p:sp>
+        <p:nvSpPr>
+          <p:cNvPr id="17" name="Text 15"/>
+          <p:cNvSpPr/>
+          <p:nvPr/>
+        </p:nvSpPr>
+        <p:spPr>
+          <a:xfrm>
+            <a:off x="8074152" y="4023360"/>
+            <a:ext cx="2825496" cy="1097280"/>
           </a:xfrm>
           <a:prstGeom prst="rect">
             <a:avLst/>
@@ -6479,7 +6696,7 @@
               <a:buNone/>
             </a:pPr>
             <a:r>
-              <a:rPr lang="en-US" sz="1250" dirty="0">
+              <a:rPr lang="en-US" sz="1550" dirty="0">
                 <a:solidFill>
                   <a:srgbClr val="17364A"/>
                 </a:solidFill>
@@ -6489,7 +6706,7 @@
               </a:rPr>
               <a:t>Connect the concept to public health decisions, safeguards, documentation, or implementation work.</a:t>
             </a:r>
-            <a:endParaRPr lang="en-US" sz="1250" dirty="0"/>
+            <a:endParaRPr lang="en-US" sz="1550" dirty="0"/>
           </a:p>
         </p:txBody>
       </p:sp>
@@ -6686,7 +6903,7 @@
                 <a:ea typeface="Aptos" pitchFamily="34" charset="-122"/>
                 <a:cs typeface="Aptos" pitchFamily="34" charset="-120"/>
               </a:rPr>
-              <a:t>© Paula Soper</a:t>
+              <a:t>Â© Paula Soper</a:t>
             </a:r>
             <a:endParaRPr lang="en-US" sz="800" dirty="0"/>
           </a:p>
@@ -6700,8 +6917,47 @@
         </p:nvSpPr>
         <p:spPr>
           <a:xfrm>
+            <a:off x="11137392" y="6510528"/>
+            <a:ext cx="411480" cy="201168"/>
+          </a:xfrm>
+          <a:prstGeom prst="rect">
+            <a:avLst/>
+          </a:prstGeom>
+          <a:noFill/>
+          <a:ln/>
+        </p:spPr>
+        <p:txBody>
+          <a:bodyPr wrap="square" lIns="0" tIns="0" rIns="0" bIns="0" rtlCol="0" anchor="ctr"/>
+          <a:lstStyle/>
+          <a:p>
+            <a:pPr algn="r" indent="0" marL="0">
+              <a:buNone/>
+            </a:pPr>
+            <a:r>
+              <a:rPr lang="en-US" sz="900" dirty="0">
+                <a:solidFill>
+                  <a:srgbClr val="5F7181"/>
+                </a:solidFill>
+                <a:latin typeface="Aptos" pitchFamily="34" charset="0"/>
+                <a:ea typeface="Aptos" pitchFamily="34" charset="-122"/>
+                <a:cs typeface="Aptos" pitchFamily="34" charset="-120"/>
+              </a:rPr>
+              <a:t>16</a:t>
+            </a:r>
+            <a:endParaRPr lang="en-US" sz="900" dirty="0"/>
+          </a:p>
+        </p:txBody>
+      </p:sp>
+      <p:sp>
+        <p:nvSpPr>
+          <p:cNvPr id="8" name="Text 6"/>
+          <p:cNvSpPr/>
+          <p:nvPr/>
+        </p:nvSpPr>
+        <p:spPr>
+          <a:xfrm>
             <a:off x="640080" y="658368"/>
-            <a:ext cx="10881360" cy="566928"/>
+            <a:ext cx="10881360" cy="713232"/>
           </a:xfrm>
           <a:prstGeom prst="rect">
             <a:avLst/>
@@ -6719,7 +6975,7 @@
               <a:buNone/>
             </a:pPr>
             <a:r>
-              <a:rPr lang="en-US" sz="2700" b="1" dirty="0">
+              <a:rPr lang="en-US" sz="3400" b="1" dirty="0">
                 <a:solidFill>
                   <a:srgbClr val="003A63"/>
                 </a:solidFill>
@@ -6729,20 +6985,20 @@
               </a:rPr>
               <a:t>Reflection Questions Continued</a:t>
             </a:r>
-            <a:endParaRPr lang="en-US" sz="2700" dirty="0"/>
-          </a:p>
-        </p:txBody>
-      </p:sp>
-      <p:sp>
-        <p:nvSpPr>
-          <p:cNvPr id="8" name="Text 6"/>
-          <p:cNvSpPr/>
-          <p:nvPr/>
-        </p:nvSpPr>
-        <p:spPr>
-          <a:xfrm>
-            <a:off x="868680" y="1417320"/>
-            <a:ext cx="6675120" cy="4434840"/>
+            <a:endParaRPr lang="en-US" sz="3400" dirty="0"/>
+          </a:p>
+        </p:txBody>
+      </p:sp>
+      <p:sp>
+        <p:nvSpPr>
+          <p:cNvPr id="9" name="Text 7"/>
+          <p:cNvSpPr/>
+          <p:nvPr/>
+        </p:nvSpPr>
+        <p:spPr>
+          <a:xfrm>
+            <a:off x="868680" y="1508760"/>
+            <a:ext cx="6537960" cy="4160520"/>
           </a:xfrm>
           <a:prstGeom prst="rect">
             <a:avLst/>
@@ -6757,7 +7013,7 @@
           <a:lstStyle/>
           <a:p>
             <a:r>
-              <a:rPr lang="en-US" sz="1700" dirty="0">
+              <a:rPr lang="en-US" sz="2100" dirty="0">
                 <a:solidFill>
                   <a:srgbClr val="17364A"/>
                 </a:solidFill>
@@ -6767,11 +7023,11 @@
               </a:rPr>
               <a:t>How would staff know if an AI output was based on stale or incomplete data?</a:t>
             </a:r>
-            <a:endParaRPr lang="en-US" sz="1700" dirty="0"/>
-          </a:p>
-          <a:p>
-            <a:r>
-              <a:rPr lang="en-US" sz="1700" dirty="0">
+            <a:endParaRPr lang="en-US" sz="2100" dirty="0"/>
+          </a:p>
+          <a:p>
+            <a:r>
+              <a:rPr lang="en-US" sz="2100" dirty="0">
                 <a:solidFill>
                   <a:srgbClr val="17364A"/>
                 </a:solidFill>
@@ -6781,13 +7037,13 @@
               </a:rPr>
               <a:t>Who has authority to pause AI use when a pipeline fails?</a:t>
             </a:r>
-            <a:endParaRPr lang="en-US" sz="1700" dirty="0"/>
-          </a:p>
-        </p:txBody>
-      </p:sp>
-      <p:sp>
-        <p:nvSpPr>
-          <p:cNvPr id="9" name="Shape 7"/>
+            <a:endParaRPr lang="en-US" sz="2100" dirty="0"/>
+          </a:p>
+        </p:txBody>
+      </p:sp>
+      <p:sp>
+        <p:nvSpPr>
+          <p:cNvPr id="10" name="Shape 8"/>
           <p:cNvSpPr/>
           <p:nvPr/>
         </p:nvSpPr>
@@ -6814,14 +7070,14 @@
       </p:sp>
       <p:sp>
         <p:nvSpPr>
-          <p:cNvPr id="10" name="Text 8"/>
+          <p:cNvPr id="11" name="Text 9"/>
           <p:cNvSpPr/>
           <p:nvPr/>
         </p:nvSpPr>
         <p:spPr>
           <a:xfrm>
             <a:off x="8074152" y="1563624"/>
-            <a:ext cx="2825496" cy="201168"/>
+            <a:ext cx="2825496" cy="256032"/>
           </a:xfrm>
           <a:prstGeom prst="rect">
             <a:avLst/>
@@ -6837,7 +7093,7 @@
               <a:buNone/>
             </a:pPr>
             <a:r>
-              <a:rPr lang="en-US" sz="950" b="1" dirty="0">
+              <a:rPr lang="en-US" sz="1300" b="1" dirty="0">
                 <a:solidFill>
                   <a:srgbClr val="0068B7"/>
                 </a:solidFill>
@@ -6847,20 +7103,20 @@
               </a:rPr>
               <a:t>Key idea</a:t>
             </a:r>
-            <a:endParaRPr lang="en-US" sz="950" dirty="0"/>
-          </a:p>
-        </p:txBody>
-      </p:sp>
-      <p:sp>
-        <p:nvSpPr>
-          <p:cNvPr id="11" name="Text 9"/>
-          <p:cNvSpPr/>
-          <p:nvPr/>
-        </p:nvSpPr>
-        <p:spPr>
-          <a:xfrm>
-            <a:off x="8074152" y="1856232"/>
-            <a:ext cx="2825496" cy="1261872"/>
+            <a:endParaRPr lang="en-US" sz="1300" dirty="0"/>
+          </a:p>
+        </p:txBody>
+      </p:sp>
+      <p:sp>
+        <p:nvSpPr>
+          <p:cNvPr id="12" name="Text 10"/>
+          <p:cNvSpPr/>
+          <p:nvPr/>
+        </p:nvSpPr>
+        <p:spPr>
+          <a:xfrm>
+            <a:off x="8074152" y="1920240"/>
+            <a:ext cx="2825496" cy="1188720"/>
           </a:xfrm>
           <a:prstGeom prst="rect">
             <a:avLst/>
@@ -6878,7 +7134,7 @@
               <a:buNone/>
             </a:pPr>
             <a:r>
-              <a:rPr lang="en-US" sz="1250" dirty="0">
+              <a:rPr lang="en-US" sz="1550" dirty="0">
                 <a:solidFill>
                   <a:srgbClr val="17364A"/>
                 </a:solidFill>
@@ -6888,13 +7144,13 @@
               </a:rPr>
               <a:t>How would staff know if an AI output was based on stale or incomplete data?</a:t>
             </a:r>
-            <a:endParaRPr lang="en-US" sz="1250" dirty="0"/>
-          </a:p>
-        </p:txBody>
-      </p:sp>
-      <p:sp>
-        <p:nvSpPr>
-          <p:cNvPr id="12" name="Shape 10"/>
+            <a:endParaRPr lang="en-US" sz="1550" dirty="0"/>
+          </a:p>
+        </p:txBody>
+      </p:sp>
+      <p:sp>
+        <p:nvSpPr>
+          <p:cNvPr id="13" name="Shape 11"/>
           <p:cNvSpPr/>
           <p:nvPr/>
         </p:nvSpPr>
@@ -6921,14 +7177,14 @@
       </p:sp>
       <p:sp>
         <p:nvSpPr>
-          <p:cNvPr id="13" name="Text 11"/>
+          <p:cNvPr id="14" name="Text 12"/>
           <p:cNvSpPr/>
           <p:nvPr/>
         </p:nvSpPr>
         <p:spPr>
           <a:xfrm>
             <a:off x="8074152" y="3666744"/>
-            <a:ext cx="2825496" cy="201168"/>
+            <a:ext cx="2825496" cy="256032"/>
           </a:xfrm>
           <a:prstGeom prst="rect">
             <a:avLst/>
@@ -6944,7 +7200,7 @@
               <a:buNone/>
             </a:pPr>
             <a:r>
-              <a:rPr lang="en-US" sz="950" b="1" dirty="0">
+              <a:rPr lang="en-US" sz="1300" b="1" dirty="0">
                 <a:solidFill>
                   <a:srgbClr val="0068B7"/>
                 </a:solidFill>
@@ -6954,20 +7210,20 @@
               </a:rPr>
               <a:t>Use this for</a:t>
             </a:r>
-            <a:endParaRPr lang="en-US" sz="950" dirty="0"/>
-          </a:p>
-        </p:txBody>
-      </p:sp>
-      <p:sp>
-        <p:nvSpPr>
-          <p:cNvPr id="14" name="Text 12"/>
-          <p:cNvSpPr/>
-          <p:nvPr/>
-        </p:nvSpPr>
-        <p:spPr>
-          <a:xfrm>
-            <a:off x="8074152" y="3959352"/>
-            <a:ext cx="2825496" cy="1170432"/>
+            <a:endParaRPr lang="en-US" sz="1300" dirty="0"/>
+          </a:p>
+        </p:txBody>
+      </p:sp>
+      <p:sp>
+        <p:nvSpPr>
+          <p:cNvPr id="15" name="Text 13"/>
+          <p:cNvSpPr/>
+          <p:nvPr/>
+        </p:nvSpPr>
+        <p:spPr>
+          <a:xfrm>
+            <a:off x="8074152" y="4023360"/>
+            <a:ext cx="2825496" cy="1097280"/>
           </a:xfrm>
           <a:prstGeom prst="rect">
             <a:avLst/>
@@ -6985,7 +7241,7 @@
               <a:buNone/>
             </a:pPr>
             <a:r>
-              <a:rPr lang="en-US" sz="1250" dirty="0">
+              <a:rPr lang="en-US" sz="1550" dirty="0">
                 <a:solidFill>
                   <a:srgbClr val="17364A"/>
                 </a:solidFill>
@@ -6995,7 +7251,7 @@
               </a:rPr>
               <a:t>Connect the concept to public health decisions, safeguards, documentation, or implementation work.</a:t>
             </a:r>
-            <a:endParaRPr lang="en-US" sz="1250" dirty="0"/>
+            <a:endParaRPr lang="en-US" sz="1550" dirty="0"/>
           </a:p>
         </p:txBody>
       </p:sp>
@@ -7192,7 +7448,7 @@
                 <a:ea typeface="Aptos" pitchFamily="34" charset="-122"/>
                 <a:cs typeface="Aptos" pitchFamily="34" charset="-120"/>
               </a:rPr>
-              <a:t>© Paula Soper</a:t>
+              <a:t>Â© Paula Soper</a:t>
             </a:r>
             <a:endParaRPr lang="en-US" sz="800" dirty="0"/>
           </a:p>
@@ -7200,7 +7456,46 @@
       </p:sp>
       <p:sp>
         <p:nvSpPr>
-          <p:cNvPr id="7" name="Shape 5"/>
+          <p:cNvPr id="7" name="Text 5"/>
+          <p:cNvSpPr/>
+          <p:nvPr/>
+        </p:nvSpPr>
+        <p:spPr>
+          <a:xfrm>
+            <a:off x="11137392" y="6510528"/>
+            <a:ext cx="411480" cy="201168"/>
+          </a:xfrm>
+          <a:prstGeom prst="rect">
+            <a:avLst/>
+          </a:prstGeom>
+          <a:noFill/>
+          <a:ln/>
+        </p:spPr>
+        <p:txBody>
+          <a:bodyPr wrap="square" lIns="0" tIns="0" rIns="0" bIns="0" rtlCol="0" anchor="ctr"/>
+          <a:lstStyle/>
+          <a:p>
+            <a:pPr algn="r" indent="0" marL="0">
+              <a:buNone/>
+            </a:pPr>
+            <a:r>
+              <a:rPr lang="en-US" sz="900" dirty="0">
+                <a:solidFill>
+                  <a:srgbClr val="5F7181"/>
+                </a:solidFill>
+                <a:latin typeface="Aptos" pitchFamily="34" charset="0"/>
+                <a:ea typeface="Aptos" pitchFamily="34" charset="-122"/>
+                <a:cs typeface="Aptos" pitchFamily="34" charset="-120"/>
+              </a:rPr>
+              <a:t>17</a:t>
+            </a:r>
+            <a:endParaRPr lang="en-US" sz="900" dirty="0"/>
+          </a:p>
+        </p:txBody>
+      </p:sp>
+      <p:sp>
+        <p:nvSpPr>
+          <p:cNvPr id="8" name="Shape 6"/>
           <p:cNvSpPr/>
           <p:nvPr/>
         </p:nvSpPr>
@@ -7225,7 +7520,7 @@
       </p:sp>
       <p:sp>
         <p:nvSpPr>
-          <p:cNvPr id="8" name="Text 6"/>
+          <p:cNvPr id="9" name="Text 7"/>
           <p:cNvSpPr/>
           <p:nvPr/>
         </p:nvSpPr>
@@ -7264,14 +7559,14 @@
       </p:sp>
       <p:sp>
         <p:nvSpPr>
-          <p:cNvPr id="9" name="Text 7"/>
+          <p:cNvPr id="10" name="Text 8"/>
           <p:cNvSpPr/>
           <p:nvPr/>
         </p:nvSpPr>
         <p:spPr>
           <a:xfrm>
             <a:off x="640080" y="621792"/>
-            <a:ext cx="10881360" cy="566928"/>
+            <a:ext cx="10881360" cy="713232"/>
           </a:xfrm>
           <a:prstGeom prst="rect">
             <a:avLst/>
@@ -7289,7 +7584,7 @@
               <a:buNone/>
             </a:pPr>
             <a:r>
-              <a:rPr lang="en-US" sz="2700" b="1" dirty="0">
+              <a:rPr lang="en-US" sz="3400" b="1" dirty="0">
                 <a:solidFill>
                   <a:srgbClr val="003A63"/>
                 </a:solidFill>
@@ -7299,20 +7594,20 @@
               </a:rPr>
               <a:t>Practical Exercise</a:t>
             </a:r>
-            <a:endParaRPr lang="en-US" sz="2700" dirty="0"/>
-          </a:p>
-        </p:txBody>
-      </p:sp>
-      <p:sp>
-        <p:nvSpPr>
-          <p:cNvPr id="10" name="Text 8"/>
-          <p:cNvSpPr/>
-          <p:nvPr/>
-        </p:nvSpPr>
-        <p:spPr>
-          <a:xfrm>
-            <a:off x="868680" y="1417320"/>
-            <a:ext cx="6675120" cy="4434840"/>
+            <a:endParaRPr lang="en-US" sz="3400" dirty="0"/>
+          </a:p>
+        </p:txBody>
+      </p:sp>
+      <p:sp>
+        <p:nvSpPr>
+          <p:cNvPr id="11" name="Text 9"/>
+          <p:cNvSpPr/>
+          <p:nvPr/>
+        </p:nvSpPr>
+        <p:spPr>
+          <a:xfrm>
+            <a:off x="868680" y="1508760"/>
+            <a:ext cx="6537960" cy="4160520"/>
           </a:xfrm>
           <a:prstGeom prst="rect">
             <a:avLst/>
@@ -7327,7 +7622,7 @@
           <a:lstStyle/>
           <a:p>
             <a:r>
-              <a:rPr lang="en-US" sz="1700" dirty="0">
+              <a:rPr lang="en-US" sz="2100" dirty="0">
                 <a:solidFill>
                   <a:srgbClr val="17364A"/>
                 </a:solidFill>
@@ -7337,11 +7632,11 @@
               </a:rPr>
               <a:t>Create a data pipeline readiness checklist for one AI-supported workflow.</a:t>
             </a:r>
-            <a:endParaRPr lang="en-US" sz="1700" dirty="0"/>
-          </a:p>
-          <a:p>
-            <a:r>
-              <a:rPr lang="en-US" sz="1700" dirty="0">
+            <a:endParaRPr lang="en-US" sz="2100" dirty="0"/>
+          </a:p>
+          <a:p>
+            <a:r>
+              <a:rPr lang="en-US" sz="2100" dirty="0">
                 <a:solidFill>
                   <a:srgbClr val="17364A"/>
                 </a:solidFill>
@@ -7349,13 +7644,13 @@
                 <a:ea typeface="Aptos" pitchFamily="34" charset="-122"/>
                 <a:cs typeface="Aptos" pitchFamily="34" charset="-120"/>
               </a:rPr>
-              <a:t>Identify the data source, update frequency, required fields, validation checks, transformations, lineage documentation,.</a:t>
-            </a:r>
-            <a:endParaRPr lang="en-US" sz="1700" dirty="0"/>
-          </a:p>
-          <a:p>
-            <a:r>
-              <a:rPr lang="en-US" sz="1700" dirty="0">
+              <a:t>Identify the data source, update frequency, required fields, validation checks, transformations,.</a:t>
+            </a:r>
+            <a:endParaRPr lang="en-US" sz="2100" dirty="0"/>
+          </a:p>
+          <a:p>
+            <a:r>
+              <a:rPr lang="en-US" sz="2100" dirty="0">
                 <a:solidFill>
                   <a:srgbClr val="17364A"/>
                 </a:solidFill>
@@ -7363,15 +7658,15 @@
                 <a:ea typeface="Aptos" pitchFamily="34" charset="-122"/>
                 <a:cs typeface="Aptos" pitchFamily="34" charset="-120"/>
               </a:rPr>
-              <a:t>Document at least three pipeline failure scenarios and describe how each should be detected, escalated, and communicated to.</a:t>
-            </a:r>
-            <a:endParaRPr lang="en-US" sz="1700" dirty="0"/>
-          </a:p>
-        </p:txBody>
-      </p:sp>
-      <p:sp>
-        <p:nvSpPr>
-          <p:cNvPr id="11" name="Shape 9"/>
+              <a:t>Document at least three pipeline failure scenarios and describe how each should be detected, escalated,.</a:t>
+            </a:r>
+            <a:endParaRPr lang="en-US" sz="2100" dirty="0"/>
+          </a:p>
+        </p:txBody>
+      </p:sp>
+      <p:sp>
+        <p:nvSpPr>
+          <p:cNvPr id="12" name="Shape 10"/>
           <p:cNvSpPr/>
           <p:nvPr/>
         </p:nvSpPr>
@@ -7398,14 +7693,14 @@
       </p:sp>
       <p:sp>
         <p:nvSpPr>
-          <p:cNvPr id="12" name="Text 10"/>
+          <p:cNvPr id="13" name="Text 11"/>
           <p:cNvSpPr/>
           <p:nvPr/>
         </p:nvSpPr>
         <p:spPr>
           <a:xfrm>
             <a:off x="8074152" y="1563624"/>
-            <a:ext cx="2825496" cy="201168"/>
+            <a:ext cx="2825496" cy="256032"/>
           </a:xfrm>
           <a:prstGeom prst="rect">
             <a:avLst/>
@@ -7421,7 +7716,7 @@
               <a:buNone/>
             </a:pPr>
             <a:r>
-              <a:rPr lang="en-US" sz="950" b="1" dirty="0">
+              <a:rPr lang="en-US" sz="1300" b="1" dirty="0">
                 <a:solidFill>
                   <a:srgbClr val="0068B7"/>
                 </a:solidFill>
@@ -7431,20 +7726,20 @@
               </a:rPr>
               <a:t>Key idea</a:t>
             </a:r>
-            <a:endParaRPr lang="en-US" sz="950" dirty="0"/>
-          </a:p>
-        </p:txBody>
-      </p:sp>
-      <p:sp>
-        <p:nvSpPr>
-          <p:cNvPr id="13" name="Text 11"/>
-          <p:cNvSpPr/>
-          <p:nvPr/>
-        </p:nvSpPr>
-        <p:spPr>
-          <a:xfrm>
-            <a:off x="8074152" y="1856232"/>
-            <a:ext cx="2825496" cy="1261872"/>
+            <a:endParaRPr lang="en-US" sz="1300" dirty="0"/>
+          </a:p>
+        </p:txBody>
+      </p:sp>
+      <p:sp>
+        <p:nvSpPr>
+          <p:cNvPr id="14" name="Text 12"/>
+          <p:cNvSpPr/>
+          <p:nvPr/>
+        </p:nvSpPr>
+        <p:spPr>
+          <a:xfrm>
+            <a:off x="8074152" y="1920240"/>
+            <a:ext cx="2825496" cy="1188720"/>
           </a:xfrm>
           <a:prstGeom prst="rect">
             <a:avLst/>
@@ -7462,7 +7757,7 @@
               <a:buNone/>
             </a:pPr>
             <a:r>
-              <a:rPr lang="en-US" sz="1250" dirty="0">
+              <a:rPr lang="en-US" sz="1550" dirty="0">
                 <a:solidFill>
                   <a:srgbClr val="17364A"/>
                 </a:solidFill>
@@ -7472,13 +7767,13 @@
               </a:rPr>
               <a:t>Create a data pipeline readiness checklist for one AI-supported workflow.</a:t>
             </a:r>
-            <a:endParaRPr lang="en-US" sz="1250" dirty="0"/>
-          </a:p>
-        </p:txBody>
-      </p:sp>
-      <p:sp>
-        <p:nvSpPr>
-          <p:cNvPr id="14" name="Shape 12"/>
+            <a:endParaRPr lang="en-US" sz="1550" dirty="0"/>
+          </a:p>
+        </p:txBody>
+      </p:sp>
+      <p:sp>
+        <p:nvSpPr>
+          <p:cNvPr id="15" name="Shape 13"/>
           <p:cNvSpPr/>
           <p:nvPr/>
         </p:nvSpPr>
@@ -7505,14 +7800,14 @@
       </p:sp>
       <p:sp>
         <p:nvSpPr>
-          <p:cNvPr id="15" name="Text 13"/>
+          <p:cNvPr id="16" name="Text 14"/>
           <p:cNvSpPr/>
           <p:nvPr/>
         </p:nvSpPr>
         <p:spPr>
           <a:xfrm>
             <a:off x="8074152" y="3666744"/>
-            <a:ext cx="2825496" cy="201168"/>
+            <a:ext cx="2825496" cy="256032"/>
           </a:xfrm>
           <a:prstGeom prst="rect">
             <a:avLst/>
@@ -7528,7 +7823,7 @@
               <a:buNone/>
             </a:pPr>
             <a:r>
-              <a:rPr lang="en-US" sz="950" b="1" dirty="0">
+              <a:rPr lang="en-US" sz="1300" b="1" dirty="0">
                 <a:solidFill>
                   <a:srgbClr val="0068B7"/>
                 </a:solidFill>
@@ -7538,20 +7833,20 @@
               </a:rPr>
               <a:t>Use this for</a:t>
             </a:r>
-            <a:endParaRPr lang="en-US" sz="950" dirty="0"/>
-          </a:p>
-        </p:txBody>
-      </p:sp>
-      <p:sp>
-        <p:nvSpPr>
-          <p:cNvPr id="16" name="Text 14"/>
-          <p:cNvSpPr/>
-          <p:nvPr/>
-        </p:nvSpPr>
-        <p:spPr>
-          <a:xfrm>
-            <a:off x="8074152" y="3959352"/>
-            <a:ext cx="2825496" cy="1170432"/>
+            <a:endParaRPr lang="en-US" sz="1300" dirty="0"/>
+          </a:p>
+        </p:txBody>
+      </p:sp>
+      <p:sp>
+        <p:nvSpPr>
+          <p:cNvPr id="17" name="Text 15"/>
+          <p:cNvSpPr/>
+          <p:nvPr/>
+        </p:nvSpPr>
+        <p:spPr>
+          <a:xfrm>
+            <a:off x="8074152" y="4023360"/>
+            <a:ext cx="2825496" cy="1097280"/>
           </a:xfrm>
           <a:prstGeom prst="rect">
             <a:avLst/>
@@ -7569,7 +7864,7 @@
               <a:buNone/>
             </a:pPr>
             <a:r>
-              <a:rPr lang="en-US" sz="1250" dirty="0">
+              <a:rPr lang="en-US" sz="1550" dirty="0">
                 <a:solidFill>
                   <a:srgbClr val="17364A"/>
                 </a:solidFill>
@@ -7579,7 +7874,7 @@
               </a:rPr>
               <a:t>Connect the concept to public health decisions, safeguards, documentation, or implementation work.</a:t>
             </a:r>
-            <a:endParaRPr lang="en-US" sz="1250" dirty="0"/>
+            <a:endParaRPr lang="en-US" sz="1550" dirty="0"/>
           </a:p>
         </p:txBody>
       </p:sp>
@@ -7776,7 +8071,7 @@
                 <a:ea typeface="Aptos" pitchFamily="34" charset="-122"/>
                 <a:cs typeface="Aptos" pitchFamily="34" charset="-120"/>
               </a:rPr>
-              <a:t>© Paula Soper</a:t>
+              <a:t>Â© Paula Soper</a:t>
             </a:r>
             <a:endParaRPr lang="en-US" sz="800" dirty="0"/>
           </a:p>
@@ -7784,7 +8079,46 @@
       </p:sp>
       <p:sp>
         <p:nvSpPr>
-          <p:cNvPr id="7" name="Shape 5"/>
+          <p:cNvPr id="7" name="Text 5"/>
+          <p:cNvSpPr/>
+          <p:nvPr/>
+        </p:nvSpPr>
+        <p:spPr>
+          <a:xfrm>
+            <a:off x="11137392" y="6510528"/>
+            <a:ext cx="411480" cy="201168"/>
+          </a:xfrm>
+          <a:prstGeom prst="rect">
+            <a:avLst/>
+          </a:prstGeom>
+          <a:noFill/>
+          <a:ln/>
+        </p:spPr>
+        <p:txBody>
+          <a:bodyPr wrap="square" lIns="0" tIns="0" rIns="0" bIns="0" rtlCol="0" anchor="ctr"/>
+          <a:lstStyle/>
+          <a:p>
+            <a:pPr algn="r" indent="0" marL="0">
+              <a:buNone/>
+            </a:pPr>
+            <a:r>
+              <a:rPr lang="en-US" sz="900" dirty="0">
+                <a:solidFill>
+                  <a:srgbClr val="5F7181"/>
+                </a:solidFill>
+                <a:latin typeface="Aptos" pitchFamily="34" charset="0"/>
+                <a:ea typeface="Aptos" pitchFamily="34" charset="-122"/>
+                <a:cs typeface="Aptos" pitchFamily="34" charset="-120"/>
+              </a:rPr>
+              <a:t>18</a:t>
+            </a:r>
+            <a:endParaRPr lang="en-US" sz="900" dirty="0"/>
+          </a:p>
+        </p:txBody>
+      </p:sp>
+      <p:sp>
+        <p:nvSpPr>
+          <p:cNvPr id="8" name="Shape 6"/>
           <p:cNvSpPr/>
           <p:nvPr/>
         </p:nvSpPr>
@@ -7809,7 +8143,7 @@
       </p:sp>
       <p:sp>
         <p:nvSpPr>
-          <p:cNvPr id="8" name="Text 6"/>
+          <p:cNvPr id="9" name="Text 7"/>
           <p:cNvSpPr/>
           <p:nvPr/>
         </p:nvSpPr>
@@ -7848,14 +8182,14 @@
       </p:sp>
       <p:sp>
         <p:nvSpPr>
-          <p:cNvPr id="9" name="Text 7"/>
+          <p:cNvPr id="10" name="Text 8"/>
           <p:cNvSpPr/>
           <p:nvPr/>
         </p:nvSpPr>
         <p:spPr>
           <a:xfrm>
             <a:off x="640080" y="621792"/>
-            <a:ext cx="10881360" cy="566928"/>
+            <a:ext cx="10881360" cy="713232"/>
           </a:xfrm>
           <a:prstGeom prst="rect">
             <a:avLst/>
@@ -7873,7 +8207,7 @@
               <a:buNone/>
             </a:pPr>
             <a:r>
-              <a:rPr lang="en-US" sz="2700" b="1" dirty="0">
+              <a:rPr lang="en-US" sz="3400" b="1" dirty="0">
                 <a:solidFill>
                   <a:srgbClr val="003A63"/>
                 </a:solidFill>
@@ -7883,20 +8217,20 @@
               </a:rPr>
               <a:t>Expected Artifact or Evidence</a:t>
             </a:r>
-            <a:endParaRPr lang="en-US" sz="2700" dirty="0"/>
-          </a:p>
-        </p:txBody>
-      </p:sp>
-      <p:sp>
-        <p:nvSpPr>
-          <p:cNvPr id="10" name="Text 8"/>
-          <p:cNvSpPr/>
-          <p:nvPr/>
-        </p:nvSpPr>
-        <p:spPr>
-          <a:xfrm>
-            <a:off x="868680" y="1417320"/>
-            <a:ext cx="6675120" cy="4434840"/>
+            <a:endParaRPr lang="en-US" sz="3400" dirty="0"/>
+          </a:p>
+        </p:txBody>
+      </p:sp>
+      <p:sp>
+        <p:nvSpPr>
+          <p:cNvPr id="11" name="Text 9"/>
+          <p:cNvSpPr/>
+          <p:nvPr/>
+        </p:nvSpPr>
+        <p:spPr>
+          <a:xfrm>
+            <a:off x="868680" y="1508760"/>
+            <a:ext cx="6537960" cy="4160520"/>
           </a:xfrm>
           <a:prstGeom prst="rect">
             <a:avLst/>
@@ -7911,7 +8245,7 @@
           <a:lstStyle/>
           <a:p>
             <a:r>
-              <a:rPr lang="en-US" sz="1700" dirty="0">
+              <a:rPr lang="en-US" sz="2100" dirty="0">
                 <a:solidFill>
                   <a:srgbClr val="17364A"/>
                 </a:solidFill>
@@ -7921,11 +8255,11 @@
               </a:rPr>
               <a:t>Data pipeline map</a:t>
             </a:r>
-            <a:endParaRPr lang="en-US" sz="1700" dirty="0"/>
-          </a:p>
-          <a:p>
-            <a:r>
-              <a:rPr lang="en-US" sz="1700" dirty="0">
+            <a:endParaRPr lang="en-US" sz="2100" dirty="0"/>
+          </a:p>
+          <a:p>
+            <a:r>
+              <a:rPr lang="en-US" sz="2100" dirty="0">
                 <a:solidFill>
                   <a:srgbClr val="17364A"/>
                 </a:solidFill>
@@ -7935,11 +8269,11 @@
               </a:rPr>
               <a:t>Pipeline readiness checklist</a:t>
             </a:r>
-            <a:endParaRPr lang="en-US" sz="1700" dirty="0"/>
-          </a:p>
-          <a:p>
-            <a:r>
-              <a:rPr lang="en-US" sz="1700" dirty="0">
+            <a:endParaRPr lang="en-US" sz="2100" dirty="0"/>
+          </a:p>
+          <a:p>
+            <a:r>
+              <a:rPr lang="en-US" sz="2100" dirty="0">
                 <a:solidFill>
                   <a:srgbClr val="17364A"/>
                 </a:solidFill>
@@ -7949,13 +8283,13 @@
               </a:rPr>
               <a:t>Failure and escalation plan</a:t>
             </a:r>
-            <a:endParaRPr lang="en-US" sz="1700" dirty="0"/>
-          </a:p>
-        </p:txBody>
-      </p:sp>
-      <p:sp>
-        <p:nvSpPr>
-          <p:cNvPr id="11" name="Shape 9"/>
+            <a:endParaRPr lang="en-US" sz="2100" dirty="0"/>
+          </a:p>
+        </p:txBody>
+      </p:sp>
+      <p:sp>
+        <p:nvSpPr>
+          <p:cNvPr id="12" name="Shape 10"/>
           <p:cNvSpPr/>
           <p:nvPr/>
         </p:nvSpPr>
@@ -7982,14 +8316,14 @@
       </p:sp>
       <p:sp>
         <p:nvSpPr>
-          <p:cNvPr id="12" name="Text 10"/>
+          <p:cNvPr id="13" name="Text 11"/>
           <p:cNvSpPr/>
           <p:nvPr/>
         </p:nvSpPr>
         <p:spPr>
           <a:xfrm>
             <a:off x="8074152" y="1563624"/>
-            <a:ext cx="2825496" cy="201168"/>
+            <a:ext cx="2825496" cy="256032"/>
           </a:xfrm>
           <a:prstGeom prst="rect">
             <a:avLst/>
@@ -8005,7 +8339,7 @@
               <a:buNone/>
             </a:pPr>
             <a:r>
-              <a:rPr lang="en-US" sz="950" b="1" dirty="0">
+              <a:rPr lang="en-US" sz="1300" b="1" dirty="0">
                 <a:solidFill>
                   <a:srgbClr val="0068B7"/>
                 </a:solidFill>
@@ -8015,20 +8349,20 @@
               </a:rPr>
               <a:t>Key idea</a:t>
             </a:r>
-            <a:endParaRPr lang="en-US" sz="950" dirty="0"/>
-          </a:p>
-        </p:txBody>
-      </p:sp>
-      <p:sp>
-        <p:nvSpPr>
-          <p:cNvPr id="13" name="Text 11"/>
-          <p:cNvSpPr/>
-          <p:nvPr/>
-        </p:nvSpPr>
-        <p:spPr>
-          <a:xfrm>
-            <a:off x="8074152" y="1856232"/>
-            <a:ext cx="2825496" cy="1261872"/>
+            <a:endParaRPr lang="en-US" sz="1300" dirty="0"/>
+          </a:p>
+        </p:txBody>
+      </p:sp>
+      <p:sp>
+        <p:nvSpPr>
+          <p:cNvPr id="14" name="Text 12"/>
+          <p:cNvSpPr/>
+          <p:nvPr/>
+        </p:nvSpPr>
+        <p:spPr>
+          <a:xfrm>
+            <a:off x="8074152" y="1920240"/>
+            <a:ext cx="2825496" cy="1188720"/>
           </a:xfrm>
           <a:prstGeom prst="rect">
             <a:avLst/>
@@ -8046,7 +8380,7 @@
               <a:buNone/>
             </a:pPr>
             <a:r>
-              <a:rPr lang="en-US" sz="1250" dirty="0">
+              <a:rPr lang="en-US" sz="1550" dirty="0">
                 <a:solidFill>
                   <a:srgbClr val="17364A"/>
                 </a:solidFill>
@@ -8056,13 +8390,13 @@
               </a:rPr>
               <a:t>Data pipeline map</a:t>
             </a:r>
-            <a:endParaRPr lang="en-US" sz="1250" dirty="0"/>
-          </a:p>
-        </p:txBody>
-      </p:sp>
-      <p:sp>
-        <p:nvSpPr>
-          <p:cNvPr id="14" name="Shape 12"/>
+            <a:endParaRPr lang="en-US" sz="1550" dirty="0"/>
+          </a:p>
+        </p:txBody>
+      </p:sp>
+      <p:sp>
+        <p:nvSpPr>
+          <p:cNvPr id="15" name="Shape 13"/>
           <p:cNvSpPr/>
           <p:nvPr/>
         </p:nvSpPr>
@@ -8089,14 +8423,14 @@
       </p:sp>
       <p:sp>
         <p:nvSpPr>
-          <p:cNvPr id="15" name="Text 13"/>
+          <p:cNvPr id="16" name="Text 14"/>
           <p:cNvSpPr/>
           <p:nvPr/>
         </p:nvSpPr>
         <p:spPr>
           <a:xfrm>
             <a:off x="8074152" y="3666744"/>
-            <a:ext cx="2825496" cy="201168"/>
+            <a:ext cx="2825496" cy="256032"/>
           </a:xfrm>
           <a:prstGeom prst="rect">
             <a:avLst/>
@@ -8112,7 +8446,7 @@
               <a:buNone/>
             </a:pPr>
             <a:r>
-              <a:rPr lang="en-US" sz="950" b="1" dirty="0">
+              <a:rPr lang="en-US" sz="1300" b="1" dirty="0">
                 <a:solidFill>
                   <a:srgbClr val="0068B7"/>
                 </a:solidFill>
@@ -8122,20 +8456,20 @@
               </a:rPr>
               <a:t>Use this for</a:t>
             </a:r>
-            <a:endParaRPr lang="en-US" sz="950" dirty="0"/>
-          </a:p>
-        </p:txBody>
-      </p:sp>
-      <p:sp>
-        <p:nvSpPr>
-          <p:cNvPr id="16" name="Text 14"/>
-          <p:cNvSpPr/>
-          <p:nvPr/>
-        </p:nvSpPr>
-        <p:spPr>
-          <a:xfrm>
-            <a:off x="8074152" y="3959352"/>
-            <a:ext cx="2825496" cy="1170432"/>
+            <a:endParaRPr lang="en-US" sz="1300" dirty="0"/>
+          </a:p>
+        </p:txBody>
+      </p:sp>
+      <p:sp>
+        <p:nvSpPr>
+          <p:cNvPr id="17" name="Text 15"/>
+          <p:cNvSpPr/>
+          <p:nvPr/>
+        </p:nvSpPr>
+        <p:spPr>
+          <a:xfrm>
+            <a:off x="8074152" y="4023360"/>
+            <a:ext cx="2825496" cy="1097280"/>
           </a:xfrm>
           <a:prstGeom prst="rect">
             <a:avLst/>
@@ -8153,7 +8487,7 @@
               <a:buNone/>
             </a:pPr>
             <a:r>
-              <a:rPr lang="en-US" sz="1250" dirty="0">
+              <a:rPr lang="en-US" sz="1550" dirty="0">
                 <a:solidFill>
                   <a:srgbClr val="17364A"/>
                 </a:solidFill>
@@ -8163,7 +8497,7 @@
               </a:rPr>
               <a:t>Connect the concept to public health decisions, safeguards, documentation, or implementation work.</a:t>
             </a:r>
-            <a:endParaRPr lang="en-US" sz="1250" dirty="0"/>
+            <a:endParaRPr lang="en-US" sz="1550" dirty="0"/>
           </a:p>
         </p:txBody>
       </p:sp>
@@ -8360,7 +8694,7 @@
                 <a:ea typeface="Aptos" pitchFamily="34" charset="-122"/>
                 <a:cs typeface="Aptos" pitchFamily="34" charset="-120"/>
               </a:rPr>
-              <a:t>© Paula Soper</a:t>
+              <a:t>Â© Paula Soper</a:t>
             </a:r>
             <a:endParaRPr lang="en-US" sz="800" dirty="0"/>
           </a:p>
@@ -8374,8 +8708,47 @@
         </p:nvSpPr>
         <p:spPr>
           <a:xfrm>
+            <a:off x="11137392" y="6510528"/>
+            <a:ext cx="411480" cy="201168"/>
+          </a:xfrm>
+          <a:prstGeom prst="rect">
+            <a:avLst/>
+          </a:prstGeom>
+          <a:noFill/>
+          <a:ln/>
+        </p:spPr>
+        <p:txBody>
+          <a:bodyPr wrap="square" lIns="0" tIns="0" rIns="0" bIns="0" rtlCol="0" anchor="ctr"/>
+          <a:lstStyle/>
+          <a:p>
+            <a:pPr algn="r" indent="0" marL="0">
+              <a:buNone/>
+            </a:pPr>
+            <a:r>
+              <a:rPr lang="en-US" sz="900" dirty="0">
+                <a:solidFill>
+                  <a:srgbClr val="5F7181"/>
+                </a:solidFill>
+                <a:latin typeface="Aptos" pitchFamily="34" charset="0"/>
+                <a:ea typeface="Aptos" pitchFamily="34" charset="-122"/>
+                <a:cs typeface="Aptos" pitchFamily="34" charset="-120"/>
+              </a:rPr>
+              <a:t>19</a:t>
+            </a:r>
+            <a:endParaRPr lang="en-US" sz="900" dirty="0"/>
+          </a:p>
+        </p:txBody>
+      </p:sp>
+      <p:sp>
+        <p:nvSpPr>
+          <p:cNvPr id="8" name="Text 6"/>
+          <p:cNvSpPr/>
+          <p:nvPr/>
+        </p:nvSpPr>
+        <p:spPr>
+          <a:xfrm>
             <a:off x="640080" y="658368"/>
-            <a:ext cx="10881360" cy="566928"/>
+            <a:ext cx="10881360" cy="713232"/>
           </a:xfrm>
           <a:prstGeom prst="rect">
             <a:avLst/>
@@ -8393,7 +8766,7 @@
               <a:buNone/>
             </a:pPr>
             <a:r>
-              <a:rPr lang="en-US" sz="2700" b="1" dirty="0">
+              <a:rPr lang="en-US" sz="3400" b="1" dirty="0">
                 <a:solidFill>
                   <a:srgbClr val="003A63"/>
                 </a:solidFill>
@@ -8403,20 +8776,20 @@
               </a:rPr>
               <a:t>Expected Artifact or Evidence Continued</a:t>
             </a:r>
-            <a:endParaRPr lang="en-US" sz="2700" dirty="0"/>
-          </a:p>
-        </p:txBody>
-      </p:sp>
-      <p:sp>
-        <p:nvSpPr>
-          <p:cNvPr id="8" name="Text 6"/>
-          <p:cNvSpPr/>
-          <p:nvPr/>
-        </p:nvSpPr>
-        <p:spPr>
-          <a:xfrm>
-            <a:off x="868680" y="1417320"/>
-            <a:ext cx="6675120" cy="4434840"/>
+            <a:endParaRPr lang="en-US" sz="3400" dirty="0"/>
+          </a:p>
+        </p:txBody>
+      </p:sp>
+      <p:sp>
+        <p:nvSpPr>
+          <p:cNvPr id="9" name="Text 7"/>
+          <p:cNvSpPr/>
+          <p:nvPr/>
+        </p:nvSpPr>
+        <p:spPr>
+          <a:xfrm>
+            <a:off x="868680" y="1508760"/>
+            <a:ext cx="6537960" cy="4160520"/>
           </a:xfrm>
           <a:prstGeom prst="rect">
             <a:avLst/>
@@ -8431,7 +8804,7 @@
           <a:lstStyle/>
           <a:p>
             <a:r>
-              <a:rPr lang="en-US" sz="1700" dirty="0">
+              <a:rPr lang="en-US" sz="2100" dirty="0">
                 <a:solidFill>
                   <a:srgbClr val="17364A"/>
                 </a:solidFill>
@@ -8441,13 +8814,13 @@
               </a:rPr>
               <a:t>Known data limitations statement</a:t>
             </a:r>
-            <a:endParaRPr lang="en-US" sz="1700" dirty="0"/>
-          </a:p>
-        </p:txBody>
-      </p:sp>
-      <p:sp>
-        <p:nvSpPr>
-          <p:cNvPr id="9" name="Shape 7"/>
+            <a:endParaRPr lang="en-US" sz="2100" dirty="0"/>
+          </a:p>
+        </p:txBody>
+      </p:sp>
+      <p:sp>
+        <p:nvSpPr>
+          <p:cNvPr id="10" name="Shape 8"/>
           <p:cNvSpPr/>
           <p:nvPr/>
         </p:nvSpPr>
@@ -8474,14 +8847,14 @@
       </p:sp>
       <p:sp>
         <p:nvSpPr>
-          <p:cNvPr id="10" name="Text 8"/>
+          <p:cNvPr id="11" name="Text 9"/>
           <p:cNvSpPr/>
           <p:nvPr/>
         </p:nvSpPr>
         <p:spPr>
           <a:xfrm>
             <a:off x="8074152" y="1563624"/>
-            <a:ext cx="2825496" cy="201168"/>
+            <a:ext cx="2825496" cy="256032"/>
           </a:xfrm>
           <a:prstGeom prst="rect">
             <a:avLst/>
@@ -8497,7 +8870,7 @@
               <a:buNone/>
             </a:pPr>
             <a:r>
-              <a:rPr lang="en-US" sz="950" b="1" dirty="0">
+              <a:rPr lang="en-US" sz="1300" b="1" dirty="0">
                 <a:solidFill>
                   <a:srgbClr val="0068B7"/>
                 </a:solidFill>
@@ -8507,20 +8880,20 @@
               </a:rPr>
               <a:t>Key idea</a:t>
             </a:r>
-            <a:endParaRPr lang="en-US" sz="950" dirty="0"/>
-          </a:p>
-        </p:txBody>
-      </p:sp>
-      <p:sp>
-        <p:nvSpPr>
-          <p:cNvPr id="11" name="Text 9"/>
-          <p:cNvSpPr/>
-          <p:nvPr/>
-        </p:nvSpPr>
-        <p:spPr>
-          <a:xfrm>
-            <a:off x="8074152" y="1856232"/>
-            <a:ext cx="2825496" cy="1261872"/>
+            <a:endParaRPr lang="en-US" sz="1300" dirty="0"/>
+          </a:p>
+        </p:txBody>
+      </p:sp>
+      <p:sp>
+        <p:nvSpPr>
+          <p:cNvPr id="12" name="Text 10"/>
+          <p:cNvSpPr/>
+          <p:nvPr/>
+        </p:nvSpPr>
+        <p:spPr>
+          <a:xfrm>
+            <a:off x="8074152" y="1920240"/>
+            <a:ext cx="2825496" cy="1188720"/>
           </a:xfrm>
           <a:prstGeom prst="rect">
             <a:avLst/>
@@ -8538,7 +8911,7 @@
               <a:buNone/>
             </a:pPr>
             <a:r>
-              <a:rPr lang="en-US" sz="1250" dirty="0">
+              <a:rPr lang="en-US" sz="1550" dirty="0">
                 <a:solidFill>
                   <a:srgbClr val="17364A"/>
                 </a:solidFill>
@@ -8548,13 +8921,13 @@
               </a:rPr>
               <a:t>Known data limitations statement</a:t>
             </a:r>
-            <a:endParaRPr lang="en-US" sz="1250" dirty="0"/>
-          </a:p>
-        </p:txBody>
-      </p:sp>
-      <p:sp>
-        <p:nvSpPr>
-          <p:cNvPr id="12" name="Shape 10"/>
+            <a:endParaRPr lang="en-US" sz="1550" dirty="0"/>
+          </a:p>
+        </p:txBody>
+      </p:sp>
+      <p:sp>
+        <p:nvSpPr>
+          <p:cNvPr id="13" name="Shape 11"/>
           <p:cNvSpPr/>
           <p:nvPr/>
         </p:nvSpPr>
@@ -8581,14 +8954,14 @@
       </p:sp>
       <p:sp>
         <p:nvSpPr>
-          <p:cNvPr id="13" name="Text 11"/>
+          <p:cNvPr id="14" name="Text 12"/>
           <p:cNvSpPr/>
           <p:nvPr/>
         </p:nvSpPr>
         <p:spPr>
           <a:xfrm>
             <a:off x="8074152" y="3666744"/>
-            <a:ext cx="2825496" cy="201168"/>
+            <a:ext cx="2825496" cy="256032"/>
           </a:xfrm>
           <a:prstGeom prst="rect">
             <a:avLst/>
@@ -8604,7 +8977,7 @@
               <a:buNone/>
             </a:pPr>
             <a:r>
-              <a:rPr lang="en-US" sz="950" b="1" dirty="0">
+              <a:rPr lang="en-US" sz="1300" b="1" dirty="0">
                 <a:solidFill>
                   <a:srgbClr val="0068B7"/>
                 </a:solidFill>
@@ -8614,20 +8987,20 @@
               </a:rPr>
               <a:t>Use this for</a:t>
             </a:r>
-            <a:endParaRPr lang="en-US" sz="950" dirty="0"/>
-          </a:p>
-        </p:txBody>
-      </p:sp>
-      <p:sp>
-        <p:nvSpPr>
-          <p:cNvPr id="14" name="Text 12"/>
-          <p:cNvSpPr/>
-          <p:nvPr/>
-        </p:nvSpPr>
-        <p:spPr>
-          <a:xfrm>
-            <a:off x="8074152" y="3959352"/>
-            <a:ext cx="2825496" cy="1170432"/>
+            <a:endParaRPr lang="en-US" sz="1300" dirty="0"/>
+          </a:p>
+        </p:txBody>
+      </p:sp>
+      <p:sp>
+        <p:nvSpPr>
+          <p:cNvPr id="15" name="Text 13"/>
+          <p:cNvSpPr/>
+          <p:nvPr/>
+        </p:nvSpPr>
+        <p:spPr>
+          <a:xfrm>
+            <a:off x="8074152" y="4023360"/>
+            <a:ext cx="2825496" cy="1097280"/>
           </a:xfrm>
           <a:prstGeom prst="rect">
             <a:avLst/>
@@ -8645,7 +9018,7 @@
               <a:buNone/>
             </a:pPr>
             <a:r>
-              <a:rPr lang="en-US" sz="1250" dirty="0">
+              <a:rPr lang="en-US" sz="1550" dirty="0">
                 <a:solidFill>
                   <a:srgbClr val="17364A"/>
                 </a:solidFill>
@@ -8655,7 +9028,7 @@
               </a:rPr>
               <a:t>Connect the concept to public health decisions, safeguards, documentation, or implementation work.</a:t>
             </a:r>
-            <a:endParaRPr lang="en-US" sz="1250" dirty="0"/>
+            <a:endParaRPr lang="en-US" sz="1550" dirty="0"/>
           </a:p>
         </p:txBody>
       </p:sp>
@@ -8852,7 +9225,7 @@
                 <a:ea typeface="Aptos" pitchFamily="34" charset="-122"/>
                 <a:cs typeface="Aptos" pitchFamily="34" charset="-120"/>
               </a:rPr>
-              <a:t>© Paula Soper</a:t>
+              <a:t>Â© Paula Soper</a:t>
             </a:r>
             <a:endParaRPr lang="en-US" sz="800" dirty="0"/>
           </a:p>
@@ -8866,8 +9239,47 @@
         </p:nvSpPr>
         <p:spPr>
           <a:xfrm>
+            <a:off x="11137392" y="6510528"/>
+            <a:ext cx="411480" cy="201168"/>
+          </a:xfrm>
+          <a:prstGeom prst="rect">
+            <a:avLst/>
+          </a:prstGeom>
+          <a:noFill/>
+          <a:ln/>
+        </p:spPr>
+        <p:txBody>
+          <a:bodyPr wrap="square" lIns="0" tIns="0" rIns="0" bIns="0" rtlCol="0" anchor="ctr"/>
+          <a:lstStyle/>
+          <a:p>
+            <a:pPr algn="r" indent="0" marL="0">
+              <a:buNone/>
+            </a:pPr>
+            <a:r>
+              <a:rPr lang="en-US" sz="900" dirty="0">
+                <a:solidFill>
+                  <a:srgbClr val="5F7181"/>
+                </a:solidFill>
+                <a:latin typeface="Aptos" pitchFamily="34" charset="0"/>
+                <a:ea typeface="Aptos" pitchFamily="34" charset="-122"/>
+                <a:cs typeface="Aptos" pitchFamily="34" charset="-120"/>
+              </a:rPr>
+              <a:t>2</a:t>
+            </a:r>
+            <a:endParaRPr lang="en-US" sz="900" dirty="0"/>
+          </a:p>
+        </p:txBody>
+      </p:sp>
+      <p:sp>
+        <p:nvSpPr>
+          <p:cNvPr id="8" name="Text 6"/>
+          <p:cNvSpPr/>
+          <p:nvPr/>
+        </p:nvSpPr>
+        <p:spPr>
+          <a:xfrm>
             <a:off x="640080" y="658368"/>
-            <a:ext cx="10881360" cy="566928"/>
+            <a:ext cx="10881360" cy="713232"/>
           </a:xfrm>
           <a:prstGeom prst="rect">
             <a:avLst/>
@@ -8885,7 +9297,7 @@
               <a:buNone/>
             </a:pPr>
             <a:r>
-              <a:rPr lang="en-US" sz="2700" b="1" dirty="0">
+              <a:rPr lang="en-US" sz="3400" b="1" dirty="0">
                 <a:solidFill>
                   <a:srgbClr val="003A63"/>
                 </a:solidFill>
@@ -8895,20 +9307,20 @@
               </a:rPr>
               <a:t>What this module helps you do</a:t>
             </a:r>
-            <a:endParaRPr lang="en-US" sz="2700" dirty="0"/>
-          </a:p>
-        </p:txBody>
-      </p:sp>
-      <p:sp>
-        <p:nvSpPr>
-          <p:cNvPr id="8" name="Text 6"/>
-          <p:cNvSpPr/>
-          <p:nvPr/>
-        </p:nvSpPr>
-        <p:spPr>
-          <a:xfrm>
-            <a:off x="868680" y="1417320"/>
-            <a:ext cx="6675120" cy="3291840"/>
+            <a:endParaRPr lang="en-US" sz="3400" dirty="0"/>
+          </a:p>
+        </p:txBody>
+      </p:sp>
+      <p:sp>
+        <p:nvSpPr>
+          <p:cNvPr id="9" name="Text 7"/>
+          <p:cNvSpPr/>
+          <p:nvPr/>
+        </p:nvSpPr>
+        <p:spPr>
+          <a:xfrm>
+            <a:off x="868680" y="1508760"/>
+            <a:ext cx="6446520" cy="2926080"/>
           </a:xfrm>
           <a:prstGeom prst="rect">
             <a:avLst/>
@@ -8923,7 +9335,7 @@
           <a:lstStyle/>
           <a:p>
             <a:r>
-              <a:rPr lang="en-US" sz="1700" dirty="0">
+              <a:rPr lang="en-US" sz="2100" dirty="0">
                 <a:solidFill>
                   <a:srgbClr val="17364A"/>
                 </a:solidFill>
@@ -8931,13 +9343,13 @@
                 <a:ea typeface="Aptos" pitchFamily="34" charset="-122"/>
                 <a:cs typeface="Aptos" pitchFamily="34" charset="-120"/>
               </a:rPr>
-              <a:t>Data pipelines are the operational pathways that move public health data from source systems into analytic, reporting, and workflow environments.</a:t>
-            </a:r>
-            <a:endParaRPr lang="en-US" sz="1700" dirty="0"/>
-          </a:p>
-          <a:p>
-            <a:r>
-              <a:rPr lang="en-US" sz="1700" dirty="0">
+              <a:t>Data pipelines are the operational pathways that move public health data from source systems into analytic,.</a:t>
+            </a:r>
+            <a:endParaRPr lang="en-US" sz="2100" dirty="0"/>
+          </a:p>
+          <a:p>
+            <a:r>
+              <a:rPr lang="en-US" sz="2100" dirty="0">
                 <a:solidFill>
                   <a:srgbClr val="17364A"/>
                 </a:solidFill>
@@ -8947,11 +9359,11 @@
               </a:rPr>
               <a:t>AI tools depend on these pathways even when users do not see them.</a:t>
             </a:r>
-            <a:endParaRPr lang="en-US" sz="1700" dirty="0"/>
-          </a:p>
-          <a:p>
-            <a:r>
-              <a:rPr lang="en-US" sz="1700" dirty="0">
+            <a:endParaRPr lang="en-US" sz="2100" dirty="0"/>
+          </a:p>
+          <a:p>
+            <a:r>
+              <a:rPr lang="en-US" sz="2100" dirty="0">
                 <a:solidFill>
                   <a:srgbClr val="17364A"/>
                 </a:solidFill>
@@ -8959,29 +9371,15 @@
                 <a:ea typeface="Aptos" pitchFamily="34" charset="-122"/>
                 <a:cs typeface="Aptos" pitchFamily="34" charset="-120"/>
               </a:rPr>
-              <a:t>A model that classifies cases, summarizes laboratory reports, or predicts service demand can only work responsibly if the data feeding the model are.</a:t>
-            </a:r>
-            <a:endParaRPr lang="en-US" sz="1700" dirty="0"/>
-          </a:p>
-          <a:p>
-            <a:r>
-              <a:rPr lang="en-US" sz="1700" dirty="0">
-                <a:solidFill>
-                  <a:srgbClr val="17364A"/>
-                </a:solidFill>
-                <a:latin typeface="Aptos" pitchFamily="34" charset="0"/>
-                <a:ea typeface="Aptos" pitchFamily="34" charset="-122"/>
-                <a:cs typeface="Aptos" pitchFamily="34" charset="-120"/>
-              </a:rPr>
-              <a:t>This module helps learners understand the pipeline steps that shape AI outputs and the safeguards needed when pipeline failures could affect public.</a:t>
-            </a:r>
-            <a:endParaRPr lang="en-US" sz="1700" dirty="0"/>
-          </a:p>
-        </p:txBody>
-      </p:sp>
-      <p:sp>
-        <p:nvSpPr>
-          <p:cNvPr id="9" name="Shape 7"/>
+              <a:t>A model that classifies cases, summarizes laboratory reports, or predicts service demand can only work.</a:t>
+            </a:r>
+            <a:endParaRPr lang="en-US" sz="2100" dirty="0"/>
+          </a:p>
+        </p:txBody>
+      </p:sp>
+      <p:sp>
+        <p:nvSpPr>
+          <p:cNvPr id="10" name="Shape 8"/>
           <p:cNvSpPr/>
           <p:nvPr/>
         </p:nvSpPr>
@@ -9008,14 +9406,14 @@
       </p:sp>
       <p:sp>
         <p:nvSpPr>
-          <p:cNvPr id="10" name="Text 8"/>
+          <p:cNvPr id="11" name="Text 9"/>
           <p:cNvSpPr/>
           <p:nvPr/>
         </p:nvSpPr>
         <p:spPr>
           <a:xfrm>
             <a:off x="8074152" y="1563624"/>
-            <a:ext cx="2825496" cy="201168"/>
+            <a:ext cx="2825496" cy="256032"/>
           </a:xfrm>
           <a:prstGeom prst="rect">
             <a:avLst/>
@@ -9031,7 +9429,7 @@
               <a:buNone/>
             </a:pPr>
             <a:r>
-              <a:rPr lang="en-US" sz="950" b="1" dirty="0">
+              <a:rPr lang="en-US" sz="1300" b="1" dirty="0">
                 <a:solidFill>
                   <a:srgbClr val="0068B7"/>
                 </a:solidFill>
@@ -9041,20 +9439,20 @@
               </a:rPr>
               <a:t>Module details</a:t>
             </a:r>
-            <a:endParaRPr lang="en-US" sz="950" dirty="0"/>
-          </a:p>
-        </p:txBody>
-      </p:sp>
-      <p:sp>
-        <p:nvSpPr>
-          <p:cNvPr id="11" name="Text 9"/>
-          <p:cNvSpPr/>
-          <p:nvPr/>
-        </p:nvSpPr>
-        <p:spPr>
-          <a:xfrm>
-            <a:off x="8074152" y="1856232"/>
-            <a:ext cx="2825496" cy="1353312"/>
+            <a:endParaRPr lang="en-US" sz="1300" dirty="0"/>
+          </a:p>
+        </p:txBody>
+      </p:sp>
+      <p:sp>
+        <p:nvSpPr>
+          <p:cNvPr id="12" name="Text 10"/>
+          <p:cNvSpPr/>
+          <p:nvPr/>
+        </p:nvSpPr>
+        <p:spPr>
+          <a:xfrm>
+            <a:off x="8074152" y="1920240"/>
+            <a:ext cx="2825496" cy="1280160"/>
           </a:xfrm>
           <a:prstGeom prst="rect">
             <a:avLst/>
@@ -9072,7 +9470,7 @@
               <a:buNone/>
             </a:pPr>
             <a:r>
-              <a:rPr lang="en-US" sz="1250" dirty="0">
+              <a:rPr lang="en-US" sz="1550" dirty="0">
                 <a:solidFill>
                   <a:srgbClr val="17364A"/>
                 </a:solidFill>
@@ -9082,14 +9480,14 @@
               </a:rPr>
               <a:t>Level: applied/foundational</a:t>
             </a:r>
-            <a:endParaRPr lang="en-US" sz="1250" dirty="0"/>
+            <a:endParaRPr lang="en-US" sz="1550" dirty="0"/>
           </a:p>
           <a:p>
             <a:pPr indent="0" marL="0">
               <a:buNone/>
             </a:pPr>
             <a:r>
-              <a:rPr lang="en-US" sz="1250" dirty="0">
+              <a:rPr lang="en-US" sz="1550" dirty="0">
                 <a:solidFill>
                   <a:srgbClr val="17364A"/>
                 </a:solidFill>
@@ -9099,14 +9497,14 @@
               </a:rPr>
               <a:t>Primary track: Technical Architecture Track</a:t>
             </a:r>
-            <a:endParaRPr lang="en-US" sz="1250" dirty="0"/>
+            <a:endParaRPr lang="en-US" sz="1550" dirty="0"/>
           </a:p>
           <a:p>
             <a:pPr indent="0" marL="0">
               <a:buNone/>
             </a:pPr>
             <a:r>
-              <a:rPr lang="en-US" sz="1250" dirty="0">
+              <a:rPr lang="en-US" sz="1550" dirty="0">
                 <a:solidFill>
                   <a:srgbClr val="17364A"/>
                 </a:solidFill>
@@ -9116,32 +9514,32 @@
               </a:rPr>
               <a:t>Appears in tracks: technical-architecture</a:t>
             </a:r>
-            <a:endParaRPr lang="en-US" sz="1250" dirty="0"/>
-          </a:p>
-        </p:txBody>
-      </p:sp>
-      <p:sp>
-        <p:nvSpPr>
-          <p:cNvPr id="12" name="Shape 10"/>
-          <p:cNvSpPr/>
-          <p:nvPr/>
-        </p:nvSpPr>
-        <p:spPr>
-          <a:xfrm>
-            <a:off x="7909560" y="3611880"/>
-            <a:ext cx="3154680" cy="1783080"/>
+            <a:endParaRPr lang="en-US" sz="1550" dirty="0"/>
+          </a:p>
+        </p:txBody>
+      </p:sp>
+      <p:sp>
+        <p:nvSpPr>
+          <p:cNvPr id="13" name="Shape 11"/>
+          <p:cNvSpPr/>
+          <p:nvPr/>
+        </p:nvSpPr>
+        <p:spPr>
+          <a:xfrm>
+            <a:off x="7635240" y="3730752"/>
+            <a:ext cx="1033272" cy="749808"/>
           </a:xfrm>
           <a:prstGeom prst="roundRect">
             <a:avLst>
-              <a:gd name="adj" fmla="val 6154"/>
+              <a:gd name="adj" fmla="val 14634"/>
             </a:avLst>
           </a:prstGeom>
           <a:solidFill>
-            <a:srgbClr val="EEF8ED"/>
+            <a:srgbClr val="0068B7"/>
           </a:solidFill>
           <a:ln w="12700">
             <a:solidFill>
-              <a:srgbClr val="B9D7E6"/>
+              <a:srgbClr val="0068B7"/>
             </a:solidFill>
             <a:prstDash val="solid"/>
           </a:ln>
@@ -9149,81 +9547,256 @@
       </p:sp>
       <p:sp>
         <p:nvSpPr>
-          <p:cNvPr id="13" name="Text 11"/>
-          <p:cNvSpPr/>
-          <p:nvPr/>
-        </p:nvSpPr>
-        <p:spPr>
-          <a:xfrm>
-            <a:off x="8074152" y="3758184"/>
-            <a:ext cx="2825496" cy="201168"/>
-          </a:xfrm>
-          <a:prstGeom prst="rect">
-            <a:avLst/>
-          </a:prstGeom>
-          <a:noFill/>
-          <a:ln/>
-        </p:spPr>
-        <p:txBody>
-          <a:bodyPr wrap="square" lIns="0" tIns="0" rIns="0" bIns="0" rtlCol="0" anchor="ctr"/>
-          <a:lstStyle/>
-          <a:p>
-            <a:pPr indent="0" marL="0">
-              <a:buNone/>
-            </a:pPr>
-            <a:r>
-              <a:rPr lang="en-US" sz="950" b="1" dirty="0">
-                <a:solidFill>
-                  <a:srgbClr val="0068B7"/>
-                </a:solidFill>
-                <a:latin typeface="Aptos" pitchFamily="34" charset="0"/>
-                <a:ea typeface="Aptos" pitchFamily="34" charset="-122"/>
-                <a:cs typeface="Aptos" pitchFamily="34" charset="-120"/>
-              </a:rPr>
-              <a:t>Learning approach</a:t>
-            </a:r>
-            <a:endParaRPr lang="en-US" sz="950" dirty="0"/>
-          </a:p>
-        </p:txBody>
-      </p:sp>
-      <p:sp>
-        <p:nvSpPr>
           <p:cNvPr id="14" name="Text 12"/>
           <p:cNvSpPr/>
           <p:nvPr/>
         </p:nvSpPr>
         <p:spPr>
           <a:xfrm>
-            <a:off x="8074152" y="4050792"/>
-            <a:ext cx="2825496" cy="1216152"/>
-          </a:xfrm>
-          <a:prstGeom prst="rect">
-            <a:avLst/>
-          </a:prstGeom>
-          <a:noFill/>
-          <a:ln/>
-        </p:spPr>
-        <p:txBody>
-          <a:bodyPr wrap="square" lIns="0" tIns="0" rIns="0" bIns="0" rtlCol="0" anchor="t">
+            <a:off x="7708392" y="3922776"/>
+            <a:ext cx="886968" cy="310896"/>
+          </a:xfrm>
+          <a:prstGeom prst="rect">
+            <a:avLst/>
+          </a:prstGeom>
+          <a:noFill/>
+          <a:ln/>
+        </p:spPr>
+        <p:txBody>
+          <a:bodyPr wrap="square" lIns="0" tIns="0" rIns="0" bIns="0" rtlCol="0" anchor="ctr">
             <a:normAutofit/>
           </a:bodyPr>
           <a:lstStyle/>
           <a:p>
-            <a:pPr indent="0" marL="0">
-              <a:buNone/>
-            </a:pPr>
-            <a:r>
-              <a:rPr lang="en-US" sz="1250" dirty="0">
-                <a:solidFill>
-                  <a:srgbClr val="17364A"/>
-                </a:solidFill>
-                <a:latin typeface="Aptos" pitchFamily="34" charset="0"/>
-                <a:ea typeface="Aptos" pitchFamily="34" charset="-122"/>
-                <a:cs typeface="Aptos" pitchFamily="34" charset="-120"/>
-              </a:rPr>
-              <a:t>Review the core ideas, complete the practical exercise, check your understanding, and use the related plays and tools to apply the lesson.</a:t>
-            </a:r>
-            <a:endParaRPr lang="en-US" sz="1250" dirty="0"/>
+            <a:pPr algn="ctr" indent="0" marL="0">
+              <a:buNone/>
+            </a:pPr>
+            <a:r>
+              <a:rPr lang="en-US" sz="1500" b="1" dirty="0">
+                <a:solidFill>
+                  <a:srgbClr val="FFFFFF"/>
+                </a:solidFill>
+                <a:latin typeface="Aptos" pitchFamily="34" charset="0"/>
+                <a:ea typeface="Aptos" pitchFamily="34" charset="-122"/>
+                <a:cs typeface="Aptos" pitchFamily="34" charset="-120"/>
+              </a:rPr>
+              <a:t>Learn</a:t>
+            </a:r>
+            <a:endParaRPr lang="en-US" sz="1500" dirty="0"/>
+          </a:p>
+        </p:txBody>
+      </p:sp>
+      <p:sp>
+        <p:nvSpPr>
+          <p:cNvPr id="15" name="Text 13"/>
+          <p:cNvSpPr/>
+          <p:nvPr/>
+        </p:nvSpPr>
+        <p:spPr>
+          <a:xfrm>
+            <a:off x="8695944" y="3941064"/>
+            <a:ext cx="201168" cy="256032"/>
+          </a:xfrm>
+          <a:prstGeom prst="rect">
+            <a:avLst/>
+          </a:prstGeom>
+          <a:noFill/>
+          <a:ln/>
+        </p:spPr>
+        <p:txBody>
+          <a:bodyPr wrap="square" lIns="0" tIns="0" rIns="0" bIns="0" rtlCol="0" anchor="ctr"/>
+          <a:lstStyle/>
+          <a:p>
+            <a:pPr algn="ctr" indent="0" marL="0">
+              <a:buNone/>
+            </a:pPr>
+            <a:r>
+              <a:rPr lang="en-US" sz="1800" b="1" dirty="0">
+                <a:solidFill>
+                  <a:srgbClr val="0068B7"/>
+                </a:solidFill>
+                <a:latin typeface="Aptos" pitchFamily="34" charset="0"/>
+                <a:ea typeface="Aptos" pitchFamily="34" charset="-122"/>
+                <a:cs typeface="Aptos" pitchFamily="34" charset="-120"/>
+              </a:rPr>
+              <a:t>â†’</a:t>
+            </a:r>
+            <a:endParaRPr lang="en-US" sz="1800" dirty="0"/>
+          </a:p>
+        </p:txBody>
+      </p:sp>
+      <p:sp>
+        <p:nvSpPr>
+          <p:cNvPr id="16" name="Shape 14"/>
+          <p:cNvSpPr/>
+          <p:nvPr/>
+        </p:nvSpPr>
+        <p:spPr>
+          <a:xfrm>
+            <a:off x="8924544" y="3730752"/>
+            <a:ext cx="1033272" cy="749808"/>
+          </a:xfrm>
+          <a:prstGeom prst="roundRect">
+            <a:avLst>
+              <a:gd name="adj" fmla="val 14634"/>
+            </a:avLst>
+          </a:prstGeom>
+          <a:solidFill>
+            <a:srgbClr val="2F8A28"/>
+          </a:solidFill>
+          <a:ln w="12700">
+            <a:solidFill>
+              <a:srgbClr val="2F8A28"/>
+            </a:solidFill>
+            <a:prstDash val="solid"/>
+          </a:ln>
+        </p:spPr>
+      </p:sp>
+      <p:sp>
+        <p:nvSpPr>
+          <p:cNvPr id="17" name="Text 15"/>
+          <p:cNvSpPr/>
+          <p:nvPr/>
+        </p:nvSpPr>
+        <p:spPr>
+          <a:xfrm>
+            <a:off x="8997696" y="3922776"/>
+            <a:ext cx="886968" cy="310896"/>
+          </a:xfrm>
+          <a:prstGeom prst="rect">
+            <a:avLst/>
+          </a:prstGeom>
+          <a:noFill/>
+          <a:ln/>
+        </p:spPr>
+        <p:txBody>
+          <a:bodyPr wrap="square" lIns="0" tIns="0" rIns="0" bIns="0" rtlCol="0" anchor="ctr">
+            <a:normAutofit/>
+          </a:bodyPr>
+          <a:lstStyle/>
+          <a:p>
+            <a:pPr algn="ctr" indent="0" marL="0">
+              <a:buNone/>
+            </a:pPr>
+            <a:r>
+              <a:rPr lang="en-US" sz="1500" b="1" dirty="0">
+                <a:solidFill>
+                  <a:srgbClr val="FFFFFF"/>
+                </a:solidFill>
+                <a:latin typeface="Aptos" pitchFamily="34" charset="0"/>
+                <a:ea typeface="Aptos" pitchFamily="34" charset="-122"/>
+                <a:cs typeface="Aptos" pitchFamily="34" charset="-120"/>
+              </a:rPr>
+              <a:t>Apply</a:t>
+            </a:r>
+            <a:endParaRPr lang="en-US" sz="1500" dirty="0"/>
+          </a:p>
+        </p:txBody>
+      </p:sp>
+      <p:sp>
+        <p:nvSpPr>
+          <p:cNvPr id="18" name="Text 16"/>
+          <p:cNvSpPr/>
+          <p:nvPr/>
+        </p:nvSpPr>
+        <p:spPr>
+          <a:xfrm>
+            <a:off x="9985248" y="3941064"/>
+            <a:ext cx="201168" cy="256032"/>
+          </a:xfrm>
+          <a:prstGeom prst="rect">
+            <a:avLst/>
+          </a:prstGeom>
+          <a:noFill/>
+          <a:ln/>
+        </p:spPr>
+        <p:txBody>
+          <a:bodyPr wrap="square" lIns="0" tIns="0" rIns="0" bIns="0" rtlCol="0" anchor="ctr"/>
+          <a:lstStyle/>
+          <a:p>
+            <a:pPr algn="ctr" indent="0" marL="0">
+              <a:buNone/>
+            </a:pPr>
+            <a:r>
+              <a:rPr lang="en-US" sz="1800" b="1" dirty="0">
+                <a:solidFill>
+                  <a:srgbClr val="0068B7"/>
+                </a:solidFill>
+                <a:latin typeface="Aptos" pitchFamily="34" charset="0"/>
+                <a:ea typeface="Aptos" pitchFamily="34" charset="-122"/>
+                <a:cs typeface="Aptos" pitchFamily="34" charset="-120"/>
+              </a:rPr>
+              <a:t>â†’</a:t>
+            </a:r>
+            <a:endParaRPr lang="en-US" sz="1800" dirty="0"/>
+          </a:p>
+        </p:txBody>
+      </p:sp>
+      <p:sp>
+        <p:nvSpPr>
+          <p:cNvPr id="19" name="Shape 17"/>
+          <p:cNvSpPr/>
+          <p:nvPr/>
+        </p:nvSpPr>
+        <p:spPr>
+          <a:xfrm>
+            <a:off x="10213848" y="3730752"/>
+            <a:ext cx="1033272" cy="749808"/>
+          </a:xfrm>
+          <a:prstGeom prst="roundRect">
+            <a:avLst>
+              <a:gd name="adj" fmla="val 14634"/>
+            </a:avLst>
+          </a:prstGeom>
+          <a:solidFill>
+            <a:srgbClr val="6A4CA3"/>
+          </a:solidFill>
+          <a:ln w="12700">
+            <a:solidFill>
+              <a:srgbClr val="6A4CA3"/>
+            </a:solidFill>
+            <a:prstDash val="solid"/>
+          </a:ln>
+        </p:spPr>
+      </p:sp>
+      <p:sp>
+        <p:nvSpPr>
+          <p:cNvPr id="20" name="Text 18"/>
+          <p:cNvSpPr/>
+          <p:nvPr/>
+        </p:nvSpPr>
+        <p:spPr>
+          <a:xfrm>
+            <a:off x="10287000" y="3922776"/>
+            <a:ext cx="886968" cy="310896"/>
+          </a:xfrm>
+          <a:prstGeom prst="rect">
+            <a:avLst/>
+          </a:prstGeom>
+          <a:noFill/>
+          <a:ln/>
+        </p:spPr>
+        <p:txBody>
+          <a:bodyPr wrap="square" lIns="0" tIns="0" rIns="0" bIns="0" rtlCol="0" anchor="ctr">
+            <a:normAutofit/>
+          </a:bodyPr>
+          <a:lstStyle/>
+          <a:p>
+            <a:pPr algn="ctr" indent="0" marL="0">
+              <a:buNone/>
+            </a:pPr>
+            <a:r>
+              <a:rPr lang="en-US" sz="1500" b="1" dirty="0">
+                <a:solidFill>
+                  <a:srgbClr val="FFFFFF"/>
+                </a:solidFill>
+                <a:latin typeface="Aptos" pitchFamily="34" charset="0"/>
+                <a:ea typeface="Aptos" pitchFamily="34" charset="-122"/>
+                <a:cs typeface="Aptos" pitchFamily="34" charset="-120"/>
+              </a:rPr>
+              <a:t>Document</a:t>
+            </a:r>
+            <a:endParaRPr lang="en-US" sz="1500" dirty="0"/>
           </a:p>
         </p:txBody>
       </p:sp>
@@ -9420,7 +9993,7 @@
                 <a:ea typeface="Aptos" pitchFamily="34" charset="-122"/>
                 <a:cs typeface="Aptos" pitchFamily="34" charset="-120"/>
               </a:rPr>
-              <a:t>© Paula Soper</a:t>
+              <a:t>Â© Paula Soper</a:t>
             </a:r>
             <a:endParaRPr lang="en-US" sz="800" dirty="0"/>
           </a:p>
@@ -9428,7 +10001,46 @@
       </p:sp>
       <p:sp>
         <p:nvSpPr>
-          <p:cNvPr id="7" name="Shape 5"/>
+          <p:cNvPr id="7" name="Text 5"/>
+          <p:cNvSpPr/>
+          <p:nvPr/>
+        </p:nvSpPr>
+        <p:spPr>
+          <a:xfrm>
+            <a:off x="11137392" y="6510528"/>
+            <a:ext cx="411480" cy="201168"/>
+          </a:xfrm>
+          <a:prstGeom prst="rect">
+            <a:avLst/>
+          </a:prstGeom>
+          <a:noFill/>
+          <a:ln/>
+        </p:spPr>
+        <p:txBody>
+          <a:bodyPr wrap="square" lIns="0" tIns="0" rIns="0" bIns="0" rtlCol="0" anchor="ctr"/>
+          <a:lstStyle/>
+          <a:p>
+            <a:pPr algn="r" indent="0" marL="0">
+              <a:buNone/>
+            </a:pPr>
+            <a:r>
+              <a:rPr lang="en-US" sz="900" dirty="0">
+                <a:solidFill>
+                  <a:srgbClr val="5F7181"/>
+                </a:solidFill>
+                <a:latin typeface="Aptos" pitchFamily="34" charset="0"/>
+                <a:ea typeface="Aptos" pitchFamily="34" charset="-122"/>
+                <a:cs typeface="Aptos" pitchFamily="34" charset="-120"/>
+              </a:rPr>
+              <a:t>20</a:t>
+            </a:r>
+            <a:endParaRPr lang="en-US" sz="900" dirty="0"/>
+          </a:p>
+        </p:txBody>
+      </p:sp>
+      <p:sp>
+        <p:nvSpPr>
+          <p:cNvPr id="8" name="Shape 6"/>
           <p:cNvSpPr/>
           <p:nvPr/>
         </p:nvSpPr>
@@ -9453,7 +10065,7 @@
       </p:sp>
       <p:sp>
         <p:nvSpPr>
-          <p:cNvPr id="8" name="Text 6"/>
+          <p:cNvPr id="9" name="Text 7"/>
           <p:cNvSpPr/>
           <p:nvPr/>
         </p:nvSpPr>
@@ -9492,14 +10104,14 @@
       </p:sp>
       <p:sp>
         <p:nvSpPr>
-          <p:cNvPr id="9" name="Text 7"/>
+          <p:cNvPr id="10" name="Text 8"/>
           <p:cNvSpPr/>
           <p:nvPr/>
         </p:nvSpPr>
         <p:spPr>
           <a:xfrm>
             <a:off x="640080" y="621792"/>
-            <a:ext cx="10881360" cy="566928"/>
+            <a:ext cx="10881360" cy="713232"/>
           </a:xfrm>
           <a:prstGeom prst="rect">
             <a:avLst/>
@@ -9517,7 +10129,7 @@
               <a:buNone/>
             </a:pPr>
             <a:r>
-              <a:rPr lang="en-US" sz="2700" b="1" dirty="0">
+              <a:rPr lang="en-US" sz="3400" b="1" dirty="0">
                 <a:solidFill>
                   <a:srgbClr val="003A63"/>
                 </a:solidFill>
@@ -9527,20 +10139,20 @@
               </a:rPr>
               <a:t>Expected Assignment</a:t>
             </a:r>
-            <a:endParaRPr lang="en-US" sz="2700" dirty="0"/>
-          </a:p>
-        </p:txBody>
-      </p:sp>
-      <p:sp>
-        <p:nvSpPr>
-          <p:cNvPr id="10" name="Text 8"/>
-          <p:cNvSpPr/>
-          <p:nvPr/>
-        </p:nvSpPr>
-        <p:spPr>
-          <a:xfrm>
-            <a:off x="868680" y="1417320"/>
-            <a:ext cx="6675120" cy="4434840"/>
+            <a:endParaRPr lang="en-US" sz="3400" dirty="0"/>
+          </a:p>
+        </p:txBody>
+      </p:sp>
+      <p:sp>
+        <p:nvSpPr>
+          <p:cNvPr id="11" name="Text 9"/>
+          <p:cNvSpPr/>
+          <p:nvPr/>
+        </p:nvSpPr>
+        <p:spPr>
+          <a:xfrm>
+            <a:off x="868680" y="1508760"/>
+            <a:ext cx="6537960" cy="4160520"/>
           </a:xfrm>
           <a:prstGeom prst="rect">
             <a:avLst/>
@@ -9555,7 +10167,7 @@
           <a:lstStyle/>
           <a:p>
             <a:r>
-              <a:rPr lang="en-US" sz="1700" dirty="0">
+              <a:rPr lang="en-US" sz="2100" dirty="0">
                 <a:solidFill>
                   <a:srgbClr val="17364A"/>
                 </a:solidFill>
@@ -9565,11 +10177,11 @@
               </a:rPr>
               <a:t>Data pipeline map</a:t>
             </a:r>
-            <a:endParaRPr lang="en-US" sz="1700" dirty="0"/>
-          </a:p>
-          <a:p>
-            <a:r>
-              <a:rPr lang="en-US" sz="1700" dirty="0">
+            <a:endParaRPr lang="en-US" sz="2100" dirty="0"/>
+          </a:p>
+          <a:p>
+            <a:r>
+              <a:rPr lang="en-US" sz="2100" dirty="0">
                 <a:solidFill>
                   <a:srgbClr val="17364A"/>
                 </a:solidFill>
@@ -9579,11 +10191,11 @@
               </a:rPr>
               <a:t>Pipeline readiness checklist</a:t>
             </a:r>
-            <a:endParaRPr lang="en-US" sz="1700" dirty="0"/>
-          </a:p>
-          <a:p>
-            <a:r>
-              <a:rPr lang="en-US" sz="1700" dirty="0">
+            <a:endParaRPr lang="en-US" sz="2100" dirty="0"/>
+          </a:p>
+          <a:p>
+            <a:r>
+              <a:rPr lang="en-US" sz="2100" dirty="0">
                 <a:solidFill>
                   <a:srgbClr val="17364A"/>
                 </a:solidFill>
@@ -9593,27 +10205,13 @@
               </a:rPr>
               <a:t>Failure and escalation plan</a:t>
             </a:r>
-            <a:endParaRPr lang="en-US" sz="1700" dirty="0"/>
-          </a:p>
-          <a:p>
-            <a:r>
-              <a:rPr lang="en-US" sz="1700" dirty="0">
-                <a:solidFill>
-                  <a:srgbClr val="17364A"/>
-                </a:solidFill>
-                <a:latin typeface="Aptos" pitchFamily="34" charset="0"/>
-                <a:ea typeface="Aptos" pitchFamily="34" charset="-122"/>
-                <a:cs typeface="Aptos" pitchFamily="34" charset="-120"/>
-              </a:rPr>
-              <a:t>Known data limitations statement</a:t>
-            </a:r>
-            <a:endParaRPr lang="en-US" sz="1700" dirty="0"/>
-          </a:p>
-        </p:txBody>
-      </p:sp>
-      <p:sp>
-        <p:nvSpPr>
-          <p:cNvPr id="11" name="Shape 9"/>
+            <a:endParaRPr lang="en-US" sz="2100" dirty="0"/>
+          </a:p>
+        </p:txBody>
+      </p:sp>
+      <p:sp>
+        <p:nvSpPr>
+          <p:cNvPr id="12" name="Shape 10"/>
           <p:cNvSpPr/>
           <p:nvPr/>
         </p:nvSpPr>
@@ -9640,14 +10238,14 @@
       </p:sp>
       <p:sp>
         <p:nvSpPr>
-          <p:cNvPr id="12" name="Text 10"/>
+          <p:cNvPr id="13" name="Text 11"/>
           <p:cNvSpPr/>
           <p:nvPr/>
         </p:nvSpPr>
         <p:spPr>
           <a:xfrm>
             <a:off x="8074152" y="1563624"/>
-            <a:ext cx="2825496" cy="201168"/>
+            <a:ext cx="2825496" cy="256032"/>
           </a:xfrm>
           <a:prstGeom prst="rect">
             <a:avLst/>
@@ -9663,7 +10261,7 @@
               <a:buNone/>
             </a:pPr>
             <a:r>
-              <a:rPr lang="en-US" sz="950" b="1" dirty="0">
+              <a:rPr lang="en-US" sz="1300" b="1" dirty="0">
                 <a:solidFill>
                   <a:srgbClr val="0068B7"/>
                 </a:solidFill>
@@ -9673,20 +10271,20 @@
               </a:rPr>
               <a:t>Key idea</a:t>
             </a:r>
-            <a:endParaRPr lang="en-US" sz="950" dirty="0"/>
-          </a:p>
-        </p:txBody>
-      </p:sp>
-      <p:sp>
-        <p:nvSpPr>
-          <p:cNvPr id="13" name="Text 11"/>
-          <p:cNvSpPr/>
-          <p:nvPr/>
-        </p:nvSpPr>
-        <p:spPr>
-          <a:xfrm>
-            <a:off x="8074152" y="1856232"/>
-            <a:ext cx="2825496" cy="1261872"/>
+            <a:endParaRPr lang="en-US" sz="1300" dirty="0"/>
+          </a:p>
+        </p:txBody>
+      </p:sp>
+      <p:sp>
+        <p:nvSpPr>
+          <p:cNvPr id="14" name="Text 12"/>
+          <p:cNvSpPr/>
+          <p:nvPr/>
+        </p:nvSpPr>
+        <p:spPr>
+          <a:xfrm>
+            <a:off x="8074152" y="1920240"/>
+            <a:ext cx="2825496" cy="1188720"/>
           </a:xfrm>
           <a:prstGeom prst="rect">
             <a:avLst/>
@@ -9704,7 +10302,7 @@
               <a:buNone/>
             </a:pPr>
             <a:r>
-              <a:rPr lang="en-US" sz="1250" dirty="0">
+              <a:rPr lang="en-US" sz="1550" dirty="0">
                 <a:solidFill>
                   <a:srgbClr val="17364A"/>
                 </a:solidFill>
@@ -9714,13 +10312,13 @@
               </a:rPr>
               <a:t>Data pipeline map</a:t>
             </a:r>
-            <a:endParaRPr lang="en-US" sz="1250" dirty="0"/>
-          </a:p>
-        </p:txBody>
-      </p:sp>
-      <p:sp>
-        <p:nvSpPr>
-          <p:cNvPr id="14" name="Shape 12"/>
+            <a:endParaRPr lang="en-US" sz="1550" dirty="0"/>
+          </a:p>
+        </p:txBody>
+      </p:sp>
+      <p:sp>
+        <p:nvSpPr>
+          <p:cNvPr id="15" name="Shape 13"/>
           <p:cNvSpPr/>
           <p:nvPr/>
         </p:nvSpPr>
@@ -9747,14 +10345,14 @@
       </p:sp>
       <p:sp>
         <p:nvSpPr>
-          <p:cNvPr id="15" name="Text 13"/>
+          <p:cNvPr id="16" name="Text 14"/>
           <p:cNvSpPr/>
           <p:nvPr/>
         </p:nvSpPr>
         <p:spPr>
           <a:xfrm>
             <a:off x="8074152" y="3666744"/>
-            <a:ext cx="2825496" cy="201168"/>
+            <a:ext cx="2825496" cy="256032"/>
           </a:xfrm>
           <a:prstGeom prst="rect">
             <a:avLst/>
@@ -9770,7 +10368,7 @@
               <a:buNone/>
             </a:pPr>
             <a:r>
-              <a:rPr lang="en-US" sz="950" b="1" dirty="0">
+              <a:rPr lang="en-US" sz="1300" b="1" dirty="0">
                 <a:solidFill>
                   <a:srgbClr val="0068B7"/>
                 </a:solidFill>
@@ -9780,20 +10378,20 @@
               </a:rPr>
               <a:t>Use this for</a:t>
             </a:r>
-            <a:endParaRPr lang="en-US" sz="950" dirty="0"/>
-          </a:p>
-        </p:txBody>
-      </p:sp>
-      <p:sp>
-        <p:nvSpPr>
-          <p:cNvPr id="16" name="Text 14"/>
-          <p:cNvSpPr/>
-          <p:nvPr/>
-        </p:nvSpPr>
-        <p:spPr>
-          <a:xfrm>
-            <a:off x="8074152" y="3959352"/>
-            <a:ext cx="2825496" cy="1170432"/>
+            <a:endParaRPr lang="en-US" sz="1300" dirty="0"/>
+          </a:p>
+        </p:txBody>
+      </p:sp>
+      <p:sp>
+        <p:nvSpPr>
+          <p:cNvPr id="17" name="Text 15"/>
+          <p:cNvSpPr/>
+          <p:nvPr/>
+        </p:nvSpPr>
+        <p:spPr>
+          <a:xfrm>
+            <a:off x="8074152" y="4023360"/>
+            <a:ext cx="2825496" cy="1097280"/>
           </a:xfrm>
           <a:prstGeom prst="rect">
             <a:avLst/>
@@ -9811,7 +10409,7 @@
               <a:buNone/>
             </a:pPr>
             <a:r>
-              <a:rPr lang="en-US" sz="1250" dirty="0">
+              <a:rPr lang="en-US" sz="1550" dirty="0">
                 <a:solidFill>
                   <a:srgbClr val="17364A"/>
                 </a:solidFill>
@@ -9821,7 +10419,7 @@
               </a:rPr>
               <a:t>Connect the concept to public health decisions, safeguards, documentation, or implementation work.</a:t>
             </a:r>
-            <a:endParaRPr lang="en-US" sz="1250" dirty="0"/>
+            <a:endParaRPr lang="en-US" sz="1550" dirty="0"/>
           </a:p>
         </p:txBody>
       </p:sp>
@@ -10018,7 +10616,7 @@
                 <a:ea typeface="Aptos" pitchFamily="34" charset="-122"/>
                 <a:cs typeface="Aptos" pitchFamily="34" charset="-120"/>
               </a:rPr>
-              <a:t>© Paula Soper</a:t>
+              <a:t>Â© Paula Soper</a:t>
             </a:r>
             <a:endParaRPr lang="en-US" sz="800" dirty="0"/>
           </a:p>
@@ -10026,7 +10624,46 @@
       </p:sp>
       <p:sp>
         <p:nvSpPr>
-          <p:cNvPr id="7" name="Shape 5"/>
+          <p:cNvPr id="7" name="Text 5"/>
+          <p:cNvSpPr/>
+          <p:nvPr/>
+        </p:nvSpPr>
+        <p:spPr>
+          <a:xfrm>
+            <a:off x="11137392" y="6510528"/>
+            <a:ext cx="411480" cy="201168"/>
+          </a:xfrm>
+          <a:prstGeom prst="rect">
+            <a:avLst/>
+          </a:prstGeom>
+          <a:noFill/>
+          <a:ln/>
+        </p:spPr>
+        <p:txBody>
+          <a:bodyPr wrap="square" lIns="0" tIns="0" rIns="0" bIns="0" rtlCol="0" anchor="ctr"/>
+          <a:lstStyle/>
+          <a:p>
+            <a:pPr algn="r" indent="0" marL="0">
+              <a:buNone/>
+            </a:pPr>
+            <a:r>
+              <a:rPr lang="en-US" sz="900" dirty="0">
+                <a:solidFill>
+                  <a:srgbClr val="5F7181"/>
+                </a:solidFill>
+                <a:latin typeface="Aptos" pitchFamily="34" charset="0"/>
+                <a:ea typeface="Aptos" pitchFamily="34" charset="-122"/>
+                <a:cs typeface="Aptos" pitchFamily="34" charset="-120"/>
+              </a:rPr>
+              <a:t>21</a:t>
+            </a:r>
+            <a:endParaRPr lang="en-US" sz="900" dirty="0"/>
+          </a:p>
+        </p:txBody>
+      </p:sp>
+      <p:sp>
+        <p:nvSpPr>
+          <p:cNvPr id="8" name="Shape 6"/>
           <p:cNvSpPr/>
           <p:nvPr/>
         </p:nvSpPr>
@@ -10051,7 +10688,7 @@
       </p:sp>
       <p:sp>
         <p:nvSpPr>
-          <p:cNvPr id="8" name="Text 6"/>
+          <p:cNvPr id="9" name="Text 7"/>
           <p:cNvSpPr/>
           <p:nvPr/>
         </p:nvSpPr>
@@ -10090,14 +10727,14 @@
       </p:sp>
       <p:sp>
         <p:nvSpPr>
-          <p:cNvPr id="9" name="Text 7"/>
+          <p:cNvPr id="10" name="Text 8"/>
           <p:cNvSpPr/>
           <p:nvPr/>
         </p:nvSpPr>
         <p:spPr>
           <a:xfrm>
             <a:off x="640080" y="621792"/>
-            <a:ext cx="10881360" cy="566928"/>
+            <a:ext cx="10881360" cy="713232"/>
           </a:xfrm>
           <a:prstGeom prst="rect">
             <a:avLst/>
@@ -10115,7 +10752,7 @@
               <a:buNone/>
             </a:pPr>
             <a:r>
-              <a:rPr lang="en-US" sz="2700" b="1" dirty="0">
+              <a:rPr lang="en-US" sz="3400" b="1" dirty="0">
                 <a:solidFill>
                   <a:srgbClr val="003A63"/>
                 </a:solidFill>
@@ -10125,20 +10762,20 @@
               </a:rPr>
               <a:t>Knowledge Check</a:t>
             </a:r>
-            <a:endParaRPr lang="en-US" sz="2700" dirty="0"/>
-          </a:p>
-        </p:txBody>
-      </p:sp>
-      <p:sp>
-        <p:nvSpPr>
-          <p:cNvPr id="10" name="Text 8"/>
-          <p:cNvSpPr/>
-          <p:nvPr/>
-        </p:nvSpPr>
-        <p:spPr>
-          <a:xfrm>
-            <a:off x="868680" y="1417320"/>
-            <a:ext cx="6675120" cy="4434840"/>
+            <a:endParaRPr lang="en-US" sz="3400" dirty="0"/>
+          </a:p>
+        </p:txBody>
+      </p:sp>
+      <p:sp>
+        <p:nvSpPr>
+          <p:cNvPr id="11" name="Text 9"/>
+          <p:cNvSpPr/>
+          <p:nvPr/>
+        </p:nvSpPr>
+        <p:spPr>
+          <a:xfrm>
+            <a:off x="868680" y="1508760"/>
+            <a:ext cx="6537960" cy="4160520"/>
           </a:xfrm>
           <a:prstGeom prst="rect">
             <a:avLst/>
@@ -10153,7 +10790,7 @@
           <a:lstStyle/>
           <a:p>
             <a:r>
-              <a:rPr lang="en-US" sz="1700" dirty="0">
+              <a:rPr lang="en-US" sz="2100" dirty="0">
                 <a:solidFill>
                   <a:srgbClr val="17364A"/>
                 </a:solidFill>
@@ -10163,11 +10800,11 @@
               </a:rPr>
               <a:t>1. What is the strongest reason to document data lineage for an AI-supported workflow?</a:t>
             </a:r>
-            <a:endParaRPr lang="en-US" sz="1700" dirty="0"/>
-          </a:p>
-          <a:p>
-            <a:r>
-              <a:rPr lang="en-US" sz="1700" dirty="0">
+            <a:endParaRPr lang="en-US" sz="2100" dirty="0"/>
+          </a:p>
+          <a:p>
+            <a:r>
+              <a:rPr lang="en-US" sz="2100" dirty="0">
                 <a:solidFill>
                   <a:srgbClr val="17364A"/>
                 </a:solidFill>
@@ -10177,11 +10814,11 @@
               </a:rPr>
               <a:t>2. Which pipeline type is most likely to trigger a workflow immediately after a defined event?</a:t>
             </a:r>
-            <a:endParaRPr lang="en-US" sz="1700" dirty="0"/>
-          </a:p>
-          <a:p>
-            <a:r>
-              <a:rPr lang="en-US" sz="1700" dirty="0">
+            <a:endParaRPr lang="en-US" sz="2100" dirty="0"/>
+          </a:p>
+          <a:p>
+            <a:r>
+              <a:rPr lang="en-US" sz="2100" dirty="0">
                 <a:solidFill>
                   <a:srgbClr val="17364A"/>
                 </a:solidFill>
@@ -10191,27 +10828,13 @@
               </a:rPr>
               <a:t>3. What is a practical guardrail for silent feed failure?</a:t>
             </a:r>
-            <a:endParaRPr lang="en-US" sz="1700" dirty="0"/>
-          </a:p>
-          <a:p>
-            <a:r>
-              <a:rPr lang="en-US" sz="1700" dirty="0">
-                <a:solidFill>
-                  <a:srgbClr val="17364A"/>
-                </a:solidFill>
-                <a:latin typeface="Aptos" pitchFamily="34" charset="0"/>
-                <a:ea typeface="Aptos" pitchFamily="34" charset="-122"/>
-                <a:cs typeface="Aptos" pitchFamily="34" charset="-120"/>
-              </a:rPr>
-              <a:t>4. Why should source freshness be visible to users?</a:t>
-            </a:r>
-            <a:endParaRPr lang="en-US" sz="1700" dirty="0"/>
-          </a:p>
-        </p:txBody>
-      </p:sp>
-      <p:sp>
-        <p:nvSpPr>
-          <p:cNvPr id="11" name="Shape 9"/>
+            <a:endParaRPr lang="en-US" sz="2100" dirty="0"/>
+          </a:p>
+        </p:txBody>
+      </p:sp>
+      <p:sp>
+        <p:nvSpPr>
+          <p:cNvPr id="12" name="Shape 10"/>
           <p:cNvSpPr/>
           <p:nvPr/>
         </p:nvSpPr>
@@ -10238,14 +10861,14 @@
       </p:sp>
       <p:sp>
         <p:nvSpPr>
-          <p:cNvPr id="12" name="Text 10"/>
+          <p:cNvPr id="13" name="Text 11"/>
           <p:cNvSpPr/>
           <p:nvPr/>
         </p:nvSpPr>
         <p:spPr>
           <a:xfrm>
             <a:off x="8074152" y="1563624"/>
-            <a:ext cx="2825496" cy="201168"/>
+            <a:ext cx="2825496" cy="256032"/>
           </a:xfrm>
           <a:prstGeom prst="rect">
             <a:avLst/>
@@ -10261,7 +10884,7 @@
               <a:buNone/>
             </a:pPr>
             <a:r>
-              <a:rPr lang="en-US" sz="950" b="1" dirty="0">
+              <a:rPr lang="en-US" sz="1300" b="1" dirty="0">
                 <a:solidFill>
                   <a:srgbClr val="0068B7"/>
                 </a:solidFill>
@@ -10271,20 +10894,20 @@
               </a:rPr>
               <a:t>Key idea</a:t>
             </a:r>
-            <a:endParaRPr lang="en-US" sz="950" dirty="0"/>
-          </a:p>
-        </p:txBody>
-      </p:sp>
-      <p:sp>
-        <p:nvSpPr>
-          <p:cNvPr id="13" name="Text 11"/>
-          <p:cNvSpPr/>
-          <p:nvPr/>
-        </p:nvSpPr>
-        <p:spPr>
-          <a:xfrm>
-            <a:off x="8074152" y="1856232"/>
-            <a:ext cx="2825496" cy="1261872"/>
+            <a:endParaRPr lang="en-US" sz="1300" dirty="0"/>
+          </a:p>
+        </p:txBody>
+      </p:sp>
+      <p:sp>
+        <p:nvSpPr>
+          <p:cNvPr id="14" name="Text 12"/>
+          <p:cNvSpPr/>
+          <p:nvPr/>
+        </p:nvSpPr>
+        <p:spPr>
+          <a:xfrm>
+            <a:off x="8074152" y="1920240"/>
+            <a:ext cx="2825496" cy="1188720"/>
           </a:xfrm>
           <a:prstGeom prst="rect">
             <a:avLst/>
@@ -10302,7 +10925,7 @@
               <a:buNone/>
             </a:pPr>
             <a:r>
-              <a:rPr lang="en-US" sz="1250" dirty="0">
+              <a:rPr lang="en-US" sz="1550" dirty="0">
                 <a:solidFill>
                   <a:srgbClr val="17364A"/>
                 </a:solidFill>
@@ -10312,13 +10935,13 @@
               </a:rPr>
               <a:t>1. What is the strongest reason to document data lineage for an AI-supported workflow?</a:t>
             </a:r>
-            <a:endParaRPr lang="en-US" sz="1250" dirty="0"/>
-          </a:p>
-        </p:txBody>
-      </p:sp>
-      <p:sp>
-        <p:nvSpPr>
-          <p:cNvPr id="14" name="Shape 12"/>
+            <a:endParaRPr lang="en-US" sz="1550" dirty="0"/>
+          </a:p>
+        </p:txBody>
+      </p:sp>
+      <p:sp>
+        <p:nvSpPr>
+          <p:cNvPr id="15" name="Shape 13"/>
           <p:cNvSpPr/>
           <p:nvPr/>
         </p:nvSpPr>
@@ -10345,14 +10968,14 @@
       </p:sp>
       <p:sp>
         <p:nvSpPr>
-          <p:cNvPr id="15" name="Text 13"/>
+          <p:cNvPr id="16" name="Text 14"/>
           <p:cNvSpPr/>
           <p:nvPr/>
         </p:nvSpPr>
         <p:spPr>
           <a:xfrm>
             <a:off x="8074152" y="3666744"/>
-            <a:ext cx="2825496" cy="201168"/>
+            <a:ext cx="2825496" cy="256032"/>
           </a:xfrm>
           <a:prstGeom prst="rect">
             <a:avLst/>
@@ -10368,7 +10991,7 @@
               <a:buNone/>
             </a:pPr>
             <a:r>
-              <a:rPr lang="en-US" sz="950" b="1" dirty="0">
+              <a:rPr lang="en-US" sz="1300" b="1" dirty="0">
                 <a:solidFill>
                   <a:srgbClr val="0068B7"/>
                 </a:solidFill>
@@ -10378,20 +11001,20 @@
               </a:rPr>
               <a:t>Use this for</a:t>
             </a:r>
-            <a:endParaRPr lang="en-US" sz="950" dirty="0"/>
-          </a:p>
-        </p:txBody>
-      </p:sp>
-      <p:sp>
-        <p:nvSpPr>
-          <p:cNvPr id="16" name="Text 14"/>
-          <p:cNvSpPr/>
-          <p:nvPr/>
-        </p:nvSpPr>
-        <p:spPr>
-          <a:xfrm>
-            <a:off x="8074152" y="3959352"/>
-            <a:ext cx="2825496" cy="1170432"/>
+            <a:endParaRPr lang="en-US" sz="1300" dirty="0"/>
+          </a:p>
+        </p:txBody>
+      </p:sp>
+      <p:sp>
+        <p:nvSpPr>
+          <p:cNvPr id="17" name="Text 15"/>
+          <p:cNvSpPr/>
+          <p:nvPr/>
+        </p:nvSpPr>
+        <p:spPr>
+          <a:xfrm>
+            <a:off x="8074152" y="4023360"/>
+            <a:ext cx="2825496" cy="1097280"/>
           </a:xfrm>
           <a:prstGeom prst="rect">
             <a:avLst/>
@@ -10409,7 +11032,7 @@
               <a:buNone/>
             </a:pPr>
             <a:r>
-              <a:rPr lang="en-US" sz="1250" dirty="0">
+              <a:rPr lang="en-US" sz="1550" dirty="0">
                 <a:solidFill>
                   <a:srgbClr val="17364A"/>
                 </a:solidFill>
@@ -10419,7 +11042,7 @@
               </a:rPr>
               <a:t>Connect the concept to public health decisions, safeguards, documentation, or implementation work.</a:t>
             </a:r>
-            <a:endParaRPr lang="en-US" sz="1250" dirty="0"/>
+            <a:endParaRPr lang="en-US" sz="1550" dirty="0"/>
           </a:p>
         </p:txBody>
       </p:sp>
@@ -10616,7 +11239,7 @@
                 <a:ea typeface="Aptos" pitchFamily="34" charset="-122"/>
                 <a:cs typeface="Aptos" pitchFamily="34" charset="-120"/>
               </a:rPr>
-              <a:t>© Paula Soper</a:t>
+              <a:t>Â© Paula Soper</a:t>
             </a:r>
             <a:endParaRPr lang="en-US" sz="800" dirty="0"/>
           </a:p>
@@ -10624,7 +11247,46 @@
       </p:sp>
       <p:sp>
         <p:nvSpPr>
-          <p:cNvPr id="7" name="Shape 5"/>
+          <p:cNvPr id="7" name="Text 5"/>
+          <p:cNvSpPr/>
+          <p:nvPr/>
+        </p:nvSpPr>
+        <p:spPr>
+          <a:xfrm>
+            <a:off x="11137392" y="6510528"/>
+            <a:ext cx="411480" cy="201168"/>
+          </a:xfrm>
+          <a:prstGeom prst="rect">
+            <a:avLst/>
+          </a:prstGeom>
+          <a:noFill/>
+          <a:ln/>
+        </p:spPr>
+        <p:txBody>
+          <a:bodyPr wrap="square" lIns="0" tIns="0" rIns="0" bIns="0" rtlCol="0" anchor="ctr"/>
+          <a:lstStyle/>
+          <a:p>
+            <a:pPr algn="r" indent="0" marL="0">
+              <a:buNone/>
+            </a:pPr>
+            <a:r>
+              <a:rPr lang="en-US" sz="900" dirty="0">
+                <a:solidFill>
+                  <a:srgbClr val="5F7181"/>
+                </a:solidFill>
+                <a:latin typeface="Aptos" pitchFamily="34" charset="0"/>
+                <a:ea typeface="Aptos" pitchFamily="34" charset="-122"/>
+                <a:cs typeface="Aptos" pitchFamily="34" charset="-120"/>
+              </a:rPr>
+              <a:t>22</a:t>
+            </a:r>
+            <a:endParaRPr lang="en-US" sz="900" dirty="0"/>
+          </a:p>
+        </p:txBody>
+      </p:sp>
+      <p:sp>
+        <p:nvSpPr>
+          <p:cNvPr id="8" name="Shape 6"/>
           <p:cNvSpPr/>
           <p:nvPr/>
         </p:nvSpPr>
@@ -10649,7 +11311,7 @@
       </p:sp>
       <p:sp>
         <p:nvSpPr>
-          <p:cNvPr id="8" name="Text 6"/>
+          <p:cNvPr id="9" name="Text 7"/>
           <p:cNvSpPr/>
           <p:nvPr/>
         </p:nvSpPr>
@@ -10688,14 +11350,14 @@
       </p:sp>
       <p:sp>
         <p:nvSpPr>
-          <p:cNvPr id="9" name="Text 7"/>
+          <p:cNvPr id="10" name="Text 8"/>
           <p:cNvSpPr/>
           <p:nvPr/>
         </p:nvSpPr>
         <p:spPr>
           <a:xfrm>
             <a:off x="640080" y="621792"/>
-            <a:ext cx="10881360" cy="566928"/>
+            <a:ext cx="10881360" cy="713232"/>
           </a:xfrm>
           <a:prstGeom prst="rect">
             <a:avLst/>
@@ -10713,7 +11375,7 @@
               <a:buNone/>
             </a:pPr>
             <a:r>
-              <a:rPr lang="en-US" sz="2700" b="1" dirty="0">
+              <a:rPr lang="en-US" sz="3400" b="1" dirty="0">
                 <a:solidFill>
                   <a:srgbClr val="003A63"/>
                 </a:solidFill>
@@ -10723,20 +11385,20 @@
               </a:rPr>
               <a:t>References and Resources</a:t>
             </a:r>
-            <a:endParaRPr lang="en-US" sz="2700" dirty="0"/>
-          </a:p>
-        </p:txBody>
-      </p:sp>
-      <p:sp>
-        <p:nvSpPr>
-          <p:cNvPr id="10" name="Text 8"/>
-          <p:cNvSpPr/>
-          <p:nvPr/>
-        </p:nvSpPr>
-        <p:spPr>
-          <a:xfrm>
-            <a:off x="868680" y="1417320"/>
-            <a:ext cx="6675120" cy="4434840"/>
+            <a:endParaRPr lang="en-US" sz="3400" dirty="0"/>
+          </a:p>
+        </p:txBody>
+      </p:sp>
+      <p:sp>
+        <p:nvSpPr>
+          <p:cNvPr id="11" name="Text 9"/>
+          <p:cNvSpPr/>
+          <p:nvPr/>
+        </p:nvSpPr>
+        <p:spPr>
+          <a:xfrm>
+            <a:off x="868680" y="1508760"/>
+            <a:ext cx="6537960" cy="4160520"/>
           </a:xfrm>
           <a:prstGeom prst="rect">
             <a:avLst/>
@@ -10751,7 +11413,7 @@
           <a:lstStyle/>
           <a:p>
             <a:r>
-              <a:rPr lang="en-US" sz="1700" dirty="0">
+              <a:rPr lang="en-US" sz="2100" dirty="0">
                 <a:solidFill>
                   <a:srgbClr val="17364A"/>
                 </a:solidFill>
@@ -10761,11 +11423,11 @@
               </a:rPr>
               <a:t>CDC Data Modernization Initiative materials: https://www.cdc.gov/data-modernization/php/index.html</a:t>
             </a:r>
-            <a:endParaRPr lang="en-US" sz="1700" dirty="0"/>
-          </a:p>
-          <a:p>
-            <a:r>
-              <a:rPr lang="en-US" sz="1700" dirty="0">
+            <a:endParaRPr lang="en-US" sz="2100" dirty="0"/>
+          </a:p>
+          <a:p>
+            <a:r>
+              <a:rPr lang="en-US" sz="2100" dirty="0">
                 <a:solidFill>
                   <a:srgbClr val="17364A"/>
                 </a:solidFill>
@@ -10775,11 +11437,11 @@
               </a:rPr>
               <a:t>CDC Public Health Data Strategy: https://www.cdc.gov/public-health-data-strategy/php/about/index.html</a:t>
             </a:r>
-            <a:endParaRPr lang="en-US" sz="1700" dirty="0"/>
-          </a:p>
-          <a:p>
-            <a:r>
-              <a:rPr lang="en-US" sz="1700" dirty="0">
+            <a:endParaRPr lang="en-US" sz="2100" dirty="0"/>
+          </a:p>
+          <a:p>
+            <a:r>
+              <a:rPr lang="en-US" sz="2100" dirty="0">
                 <a:solidFill>
                   <a:srgbClr val="17364A"/>
                 </a:solidFill>
@@ -10789,27 +11451,13 @@
               </a:rPr>
               <a:t>NIST AI Risk Management Framework: https://www.nist.gov/itl/ai-risk-management-framework</a:t>
             </a:r>
-            <a:endParaRPr lang="en-US" sz="1700" dirty="0"/>
-          </a:p>
-          <a:p>
-            <a:r>
-              <a:rPr lang="en-US" sz="1700" dirty="0">
-                <a:solidFill>
-                  <a:srgbClr val="17364A"/>
-                </a:solidFill>
-                <a:latin typeface="Aptos" pitchFamily="34" charset="0"/>
-                <a:ea typeface="Aptos" pitchFamily="34" charset="-122"/>
-                <a:cs typeface="Aptos" pitchFamily="34" charset="-120"/>
-              </a:rPr>
-              <a:t>Agency data governance and system monitoring documentation</a:t>
-            </a:r>
-            <a:endParaRPr lang="en-US" sz="1700" dirty="0"/>
-          </a:p>
-        </p:txBody>
-      </p:sp>
-      <p:sp>
-        <p:nvSpPr>
-          <p:cNvPr id="11" name="Shape 9"/>
+            <a:endParaRPr lang="en-US" sz="2100" dirty="0"/>
+          </a:p>
+        </p:txBody>
+      </p:sp>
+      <p:sp>
+        <p:nvSpPr>
+          <p:cNvPr id="12" name="Shape 10"/>
           <p:cNvSpPr/>
           <p:nvPr/>
         </p:nvSpPr>
@@ -10836,14 +11484,14 @@
       </p:sp>
       <p:sp>
         <p:nvSpPr>
-          <p:cNvPr id="12" name="Text 10"/>
+          <p:cNvPr id="13" name="Text 11"/>
           <p:cNvSpPr/>
           <p:nvPr/>
         </p:nvSpPr>
         <p:spPr>
           <a:xfrm>
             <a:off x="8074152" y="1563624"/>
-            <a:ext cx="2825496" cy="201168"/>
+            <a:ext cx="2825496" cy="256032"/>
           </a:xfrm>
           <a:prstGeom prst="rect">
             <a:avLst/>
@@ -10859,7 +11507,7 @@
               <a:buNone/>
             </a:pPr>
             <a:r>
-              <a:rPr lang="en-US" sz="950" b="1" dirty="0">
+              <a:rPr lang="en-US" sz="1300" b="1" dirty="0">
                 <a:solidFill>
                   <a:srgbClr val="0068B7"/>
                 </a:solidFill>
@@ -10869,20 +11517,20 @@
               </a:rPr>
               <a:t>Key idea</a:t>
             </a:r>
-            <a:endParaRPr lang="en-US" sz="950" dirty="0"/>
-          </a:p>
-        </p:txBody>
-      </p:sp>
-      <p:sp>
-        <p:nvSpPr>
-          <p:cNvPr id="13" name="Text 11"/>
-          <p:cNvSpPr/>
-          <p:nvPr/>
-        </p:nvSpPr>
-        <p:spPr>
-          <a:xfrm>
-            <a:off x="8074152" y="1856232"/>
-            <a:ext cx="2825496" cy="1261872"/>
+            <a:endParaRPr lang="en-US" sz="1300" dirty="0"/>
+          </a:p>
+        </p:txBody>
+      </p:sp>
+      <p:sp>
+        <p:nvSpPr>
+          <p:cNvPr id="14" name="Text 12"/>
+          <p:cNvSpPr/>
+          <p:nvPr/>
+        </p:nvSpPr>
+        <p:spPr>
+          <a:xfrm>
+            <a:off x="8074152" y="1920240"/>
+            <a:ext cx="2825496" cy="1188720"/>
           </a:xfrm>
           <a:prstGeom prst="rect">
             <a:avLst/>
@@ -10900,7 +11548,7 @@
               <a:buNone/>
             </a:pPr>
             <a:r>
-              <a:rPr lang="en-US" sz="1250" dirty="0">
+              <a:rPr lang="en-US" sz="1550" dirty="0">
                 <a:solidFill>
                   <a:srgbClr val="17364A"/>
                 </a:solidFill>
@@ -10910,13 +11558,13 @@
               </a:rPr>
               <a:t>CDC Data Modernization Initiative materials: https://www.cdc.gov/data-modernization/php/index.html</a:t>
             </a:r>
-            <a:endParaRPr lang="en-US" sz="1250" dirty="0"/>
-          </a:p>
-        </p:txBody>
-      </p:sp>
-      <p:sp>
-        <p:nvSpPr>
-          <p:cNvPr id="14" name="Shape 12"/>
+            <a:endParaRPr lang="en-US" sz="1550" dirty="0"/>
+          </a:p>
+        </p:txBody>
+      </p:sp>
+      <p:sp>
+        <p:nvSpPr>
+          <p:cNvPr id="15" name="Shape 13"/>
           <p:cNvSpPr/>
           <p:nvPr/>
         </p:nvSpPr>
@@ -10943,14 +11591,14 @@
       </p:sp>
       <p:sp>
         <p:nvSpPr>
-          <p:cNvPr id="15" name="Text 13"/>
+          <p:cNvPr id="16" name="Text 14"/>
           <p:cNvSpPr/>
           <p:nvPr/>
         </p:nvSpPr>
         <p:spPr>
           <a:xfrm>
             <a:off x="8074152" y="3666744"/>
-            <a:ext cx="2825496" cy="201168"/>
+            <a:ext cx="2825496" cy="256032"/>
           </a:xfrm>
           <a:prstGeom prst="rect">
             <a:avLst/>
@@ -10966,7 +11614,7 @@
               <a:buNone/>
             </a:pPr>
             <a:r>
-              <a:rPr lang="en-US" sz="950" b="1" dirty="0">
+              <a:rPr lang="en-US" sz="1300" b="1" dirty="0">
                 <a:solidFill>
                   <a:srgbClr val="0068B7"/>
                 </a:solidFill>
@@ -10976,20 +11624,20 @@
               </a:rPr>
               <a:t>Use this for</a:t>
             </a:r>
-            <a:endParaRPr lang="en-US" sz="950" dirty="0"/>
-          </a:p>
-        </p:txBody>
-      </p:sp>
-      <p:sp>
-        <p:nvSpPr>
-          <p:cNvPr id="16" name="Text 14"/>
-          <p:cNvSpPr/>
-          <p:nvPr/>
-        </p:nvSpPr>
-        <p:spPr>
-          <a:xfrm>
-            <a:off x="8074152" y="3959352"/>
-            <a:ext cx="2825496" cy="1170432"/>
+            <a:endParaRPr lang="en-US" sz="1300" dirty="0"/>
+          </a:p>
+        </p:txBody>
+      </p:sp>
+      <p:sp>
+        <p:nvSpPr>
+          <p:cNvPr id="17" name="Text 15"/>
+          <p:cNvSpPr/>
+          <p:nvPr/>
+        </p:nvSpPr>
+        <p:spPr>
+          <a:xfrm>
+            <a:off x="8074152" y="4023360"/>
+            <a:ext cx="2825496" cy="1097280"/>
           </a:xfrm>
           <a:prstGeom prst="rect">
             <a:avLst/>
@@ -11007,7 +11655,7 @@
               <a:buNone/>
             </a:pPr>
             <a:r>
-              <a:rPr lang="en-US" sz="1250" dirty="0">
+              <a:rPr lang="en-US" sz="1550" dirty="0">
                 <a:solidFill>
                   <a:srgbClr val="17364A"/>
                 </a:solidFill>
@@ -11017,7 +11665,7 @@
               </a:rPr>
               <a:t>Connect the concept to public health decisions, safeguards, documentation, or implementation work.</a:t>
             </a:r>
-            <a:endParaRPr lang="en-US" sz="1250" dirty="0"/>
+            <a:endParaRPr lang="en-US" sz="1550" dirty="0"/>
           </a:p>
         </p:txBody>
       </p:sp>
@@ -11214,7 +11862,7 @@
                 <a:ea typeface="Aptos" pitchFamily="34" charset="-122"/>
                 <a:cs typeface="Aptos" pitchFamily="34" charset="-120"/>
               </a:rPr>
-              <a:t>© Paula Soper</a:t>
+              <a:t>Â© Paula Soper</a:t>
             </a:r>
             <a:endParaRPr lang="en-US" sz="800" dirty="0"/>
           </a:p>
@@ -11228,8 +11876,47 @@
         </p:nvSpPr>
         <p:spPr>
           <a:xfrm>
+            <a:off x="11137392" y="6510528"/>
+            <a:ext cx="411480" cy="201168"/>
+          </a:xfrm>
+          <a:prstGeom prst="rect">
+            <a:avLst/>
+          </a:prstGeom>
+          <a:noFill/>
+          <a:ln/>
+        </p:spPr>
+        <p:txBody>
+          <a:bodyPr wrap="square" lIns="0" tIns="0" rIns="0" bIns="0" rtlCol="0" anchor="ctr"/>
+          <a:lstStyle/>
+          <a:p>
+            <a:pPr algn="r" indent="0" marL="0">
+              <a:buNone/>
+            </a:pPr>
+            <a:r>
+              <a:rPr lang="en-US" sz="900" dirty="0">
+                <a:solidFill>
+                  <a:srgbClr val="5F7181"/>
+                </a:solidFill>
+                <a:latin typeface="Aptos" pitchFamily="34" charset="0"/>
+                <a:ea typeface="Aptos" pitchFamily="34" charset="-122"/>
+                <a:cs typeface="Aptos" pitchFamily="34" charset="-120"/>
+              </a:rPr>
+              <a:t>3</a:t>
+            </a:r>
+            <a:endParaRPr lang="en-US" sz="900" dirty="0"/>
+          </a:p>
+        </p:txBody>
+      </p:sp>
+      <p:sp>
+        <p:nvSpPr>
+          <p:cNvPr id="8" name="Text 6"/>
+          <p:cNvSpPr/>
+          <p:nvPr/>
+        </p:nvSpPr>
+        <p:spPr>
+          <a:xfrm>
             <a:off x="640080" y="658368"/>
-            <a:ext cx="10881360" cy="566928"/>
+            <a:ext cx="10881360" cy="713232"/>
           </a:xfrm>
           <a:prstGeom prst="rect">
             <a:avLst/>
@@ -11247,7 +11934,7 @@
               <a:buNone/>
             </a:pPr>
             <a:r>
-              <a:rPr lang="en-US" sz="2700" b="1" dirty="0">
+              <a:rPr lang="en-US" sz="3400" b="1" dirty="0">
                 <a:solidFill>
                   <a:srgbClr val="003A63"/>
                 </a:solidFill>
@@ -11257,20 +11944,20 @@
               </a:rPr>
               <a:t>How this module connects to the playbook</a:t>
             </a:r>
-            <a:endParaRPr lang="en-US" sz="2700" dirty="0"/>
-          </a:p>
-        </p:txBody>
-      </p:sp>
-      <p:sp>
-        <p:nvSpPr>
-          <p:cNvPr id="8" name="Text 6"/>
-          <p:cNvSpPr/>
-          <p:nvPr/>
-        </p:nvSpPr>
-        <p:spPr>
-          <a:xfrm>
-            <a:off x="868680" y="1417320"/>
-            <a:ext cx="6903720" cy="4480560"/>
+            <a:endParaRPr lang="en-US" sz="3400" dirty="0"/>
+          </a:p>
+        </p:txBody>
+      </p:sp>
+      <p:sp>
+        <p:nvSpPr>
+          <p:cNvPr id="9" name="Text 7"/>
+          <p:cNvSpPr/>
+          <p:nvPr/>
+        </p:nvSpPr>
+        <p:spPr>
+          <a:xfrm>
+            <a:off x="868680" y="1508760"/>
+            <a:ext cx="6812280" cy="3977640"/>
           </a:xfrm>
           <a:prstGeom prst="rect">
             <a:avLst/>
@@ -11285,7 +11972,7 @@
           <a:lstStyle/>
           <a:p>
             <a:r>
-              <a:rPr lang="en-US" sz="1540" dirty="0">
+              <a:rPr lang="en-US" sz="1900" dirty="0">
                 <a:solidFill>
                   <a:srgbClr val="17364A"/>
                 </a:solidFill>
@@ -11293,13 +11980,13 @@
                 <a:ea typeface="Aptos" pitchFamily="34" charset="-122"/>
                 <a:cs typeface="Aptos" pitchFamily="34" charset="-120"/>
               </a:rPr>
-              <a:t>Play 12: Execute Governance and Oversight - This lesson informs Play 12 by helping learners connect the lesson topic to execute.</a:t>
-            </a:r>
-            <a:endParaRPr lang="en-US" sz="1540" dirty="0"/>
-          </a:p>
-          <a:p>
-            <a:r>
-              <a:rPr lang="en-US" sz="1540" dirty="0">
+              <a:t>Play 12: Execute Governance and Oversight - This lesson informs Play 12 by helping learners connect the.</a:t>
+            </a:r>
+            <a:endParaRPr lang="en-US" sz="1900" dirty="0"/>
+          </a:p>
+          <a:p>
+            <a:r>
+              <a:rPr lang="en-US" sz="1900" dirty="0">
                 <a:solidFill>
                   <a:srgbClr val="17364A"/>
                 </a:solidFill>
@@ -11307,13 +11994,13 @@
                 <a:ea typeface="Aptos" pitchFamily="34" charset="-122"/>
                 <a:cs typeface="Aptos" pitchFamily="34" charset="-120"/>
               </a:rPr>
-              <a:t>Play 3: Establish AI Governance - This lesson informs Play 3 by helping learners connect the lesson topic to establish ai governance.</a:t>
-            </a:r>
-            <a:endParaRPr lang="en-US" sz="1540" dirty="0"/>
-          </a:p>
-          <a:p>
-            <a:r>
-              <a:rPr lang="en-US" sz="1540" dirty="0">
+              <a:t>Play 3: Establish AI Governance - This lesson informs Play 3 by helping learners connect the lesson topic to.</a:t>
+            </a:r>
+            <a:endParaRPr lang="en-US" sz="1900" dirty="0"/>
+          </a:p>
+          <a:p>
+            <a:r>
+              <a:rPr lang="en-US" sz="1900" dirty="0">
                 <a:solidFill>
                   <a:srgbClr val="17364A"/>
                 </a:solidFill>
@@ -11321,13 +12008,13 @@
                 <a:ea typeface="Aptos" pitchFamily="34" charset="-122"/>
                 <a:cs typeface="Aptos" pitchFamily="34" charset="-120"/>
               </a:rPr>
-              <a:t>Play 13: Monitor and Evaluate AI Systems - This lesson informs Play 13 by helping learners connect the lesson topic to monitor and.</a:t>
-            </a:r>
-            <a:endParaRPr lang="en-US" sz="1540" dirty="0"/>
-          </a:p>
-          <a:p>
-            <a:r>
-              <a:rPr lang="en-US" sz="1540" dirty="0">
+              <a:t>Play 13: Monitor and Evaluate AI Systems - This lesson informs Play 13 by helping learners connect the.</a:t>
+            </a:r>
+            <a:endParaRPr lang="en-US" sz="1900" dirty="0"/>
+          </a:p>
+          <a:p>
+            <a:r>
+              <a:rPr lang="en-US" sz="1900" dirty="0">
                 <a:solidFill>
                   <a:srgbClr val="17364A"/>
                 </a:solidFill>
@@ -11335,15 +12022,15 @@
                 <a:ea typeface="Aptos" pitchFamily="34" charset="-122"/>
                 <a:cs typeface="Aptos" pitchFamily="34" charset="-120"/>
               </a:rPr>
-              <a:t>Play 11: Build and Deploy AI Solutions - This lesson informs Play 11 by helping learners connect the lesson topic to build and deploy.</a:t>
-            </a:r>
-            <a:endParaRPr lang="en-US" sz="1540" dirty="0"/>
-          </a:p>
-        </p:txBody>
-      </p:sp>
-      <p:sp>
-        <p:nvSpPr>
-          <p:cNvPr id="9" name="Shape 7"/>
+              <a:t>Play 11: Build and Deploy AI Solutions - This lesson informs Play 11 by helping learners connect the lesson.</a:t>
+            </a:r>
+            <a:endParaRPr lang="en-US" sz="1900" dirty="0"/>
+          </a:p>
+        </p:txBody>
+      </p:sp>
+      <p:sp>
+        <p:nvSpPr>
+          <p:cNvPr id="10" name="Shape 8"/>
           <p:cNvSpPr/>
           <p:nvPr/>
         </p:nvSpPr>
@@ -11370,14 +12057,14 @@
       </p:sp>
       <p:sp>
         <p:nvSpPr>
-          <p:cNvPr id="10" name="Text 8"/>
+          <p:cNvPr id="11" name="Text 9"/>
           <p:cNvSpPr/>
           <p:nvPr/>
         </p:nvSpPr>
         <p:spPr>
           <a:xfrm>
             <a:off x="8211312" y="1563624"/>
-            <a:ext cx="2734056" cy="201168"/>
+            <a:ext cx="2734056" cy="256032"/>
           </a:xfrm>
           <a:prstGeom prst="rect">
             <a:avLst/>
@@ -11393,7 +12080,7 @@
               <a:buNone/>
             </a:pPr>
             <a:r>
-              <a:rPr lang="en-US" sz="950" b="1" dirty="0">
+              <a:rPr lang="en-US" sz="1300" b="1" dirty="0">
                 <a:solidFill>
                   <a:srgbClr val="0068B7"/>
                 </a:solidFill>
@@ -11403,20 +12090,20 @@
               </a:rPr>
               <a:t>Apply the lesson</a:t>
             </a:r>
-            <a:endParaRPr lang="en-US" sz="950" dirty="0"/>
-          </a:p>
-        </p:txBody>
-      </p:sp>
-      <p:sp>
-        <p:nvSpPr>
-          <p:cNvPr id="11" name="Text 9"/>
-          <p:cNvSpPr/>
-          <p:nvPr/>
-        </p:nvSpPr>
-        <p:spPr>
-          <a:xfrm>
-            <a:off x="8211312" y="1856232"/>
-            <a:ext cx="2734056" cy="1536192"/>
+            <a:endParaRPr lang="en-US" sz="1300" dirty="0"/>
+          </a:p>
+        </p:txBody>
+      </p:sp>
+      <p:sp>
+        <p:nvSpPr>
+          <p:cNvPr id="12" name="Text 10"/>
+          <p:cNvSpPr/>
+          <p:nvPr/>
+        </p:nvSpPr>
+        <p:spPr>
+          <a:xfrm>
+            <a:off x="8211312" y="1920240"/>
+            <a:ext cx="2734056" cy="1463040"/>
           </a:xfrm>
           <a:prstGeom prst="rect">
             <a:avLst/>
@@ -11434,7 +12121,7 @@
               <a:buNone/>
             </a:pPr>
             <a:r>
-              <a:rPr lang="en-US" sz="1250" dirty="0">
+              <a:rPr lang="en-US" sz="1550" dirty="0">
                 <a:solidFill>
                   <a:srgbClr val="17364A"/>
                 </a:solidFill>
@@ -11444,32 +12131,32 @@
               </a:rPr>
               <a:t>Use the related plays to identify decisions, participants, timing, approvals, and documentation needed for responsible implementation.</a:t>
             </a:r>
-            <a:endParaRPr lang="en-US" sz="1250" dirty="0"/>
-          </a:p>
-        </p:txBody>
-      </p:sp>
-      <p:sp>
-        <p:nvSpPr>
-          <p:cNvPr id="12" name="Shape 10"/>
-          <p:cNvSpPr/>
-          <p:nvPr/>
-        </p:nvSpPr>
-        <p:spPr>
-          <a:xfrm>
-            <a:off x="8046720" y="3794760"/>
-            <a:ext cx="3063240" cy="1508760"/>
+            <a:endParaRPr lang="en-US" sz="1550" dirty="0"/>
+          </a:p>
+        </p:txBody>
+      </p:sp>
+      <p:sp>
+        <p:nvSpPr>
+          <p:cNvPr id="13" name="Shape 11"/>
+          <p:cNvSpPr/>
+          <p:nvPr/>
+        </p:nvSpPr>
+        <p:spPr>
+          <a:xfrm>
+            <a:off x="7818120" y="3977640"/>
+            <a:ext cx="972312" cy="749808"/>
           </a:xfrm>
           <a:prstGeom prst="roundRect">
             <a:avLst>
-              <a:gd name="adj" fmla="val 7273"/>
+              <a:gd name="adj" fmla="val 14634"/>
             </a:avLst>
           </a:prstGeom>
           <a:solidFill>
-            <a:srgbClr val="FFF4D9"/>
+            <a:srgbClr val="0068B7"/>
           </a:solidFill>
           <a:ln w="12700">
             <a:solidFill>
-              <a:srgbClr val="B9D7E6"/>
+              <a:srgbClr val="0068B7"/>
             </a:solidFill>
             <a:prstDash val="solid"/>
           </a:ln>
@@ -11477,81 +12164,256 @@
       </p:sp>
       <p:sp>
         <p:nvSpPr>
-          <p:cNvPr id="13" name="Text 11"/>
-          <p:cNvSpPr/>
-          <p:nvPr/>
-        </p:nvSpPr>
-        <p:spPr>
-          <a:xfrm>
-            <a:off x="8211312" y="3941064"/>
-            <a:ext cx="2734056" cy="201168"/>
-          </a:xfrm>
-          <a:prstGeom prst="rect">
-            <a:avLst/>
-          </a:prstGeom>
-          <a:noFill/>
-          <a:ln/>
-        </p:spPr>
-        <p:txBody>
-          <a:bodyPr wrap="square" lIns="0" tIns="0" rIns="0" bIns="0" rtlCol="0" anchor="ctr"/>
-          <a:lstStyle/>
-          <a:p>
-            <a:pPr indent="0" marL="0">
-              <a:buNone/>
-            </a:pPr>
-            <a:r>
-              <a:rPr lang="en-US" sz="950" b="1" dirty="0">
-                <a:solidFill>
-                  <a:srgbClr val="0068B7"/>
-                </a:solidFill>
-                <a:latin typeface="Aptos" pitchFamily="34" charset="0"/>
-                <a:ea typeface="Aptos" pitchFamily="34" charset="-122"/>
-                <a:cs typeface="Aptos" pitchFamily="34" charset="-120"/>
-              </a:rPr>
-              <a:t>Keep in mind</a:t>
-            </a:r>
-            <a:endParaRPr lang="en-US" sz="950" dirty="0"/>
-          </a:p>
-        </p:txBody>
-      </p:sp>
-      <p:sp>
-        <p:nvSpPr>
           <p:cNvPr id="14" name="Text 12"/>
           <p:cNvSpPr/>
           <p:nvPr/>
         </p:nvSpPr>
         <p:spPr>
           <a:xfrm>
-            <a:off x="8211312" y="4233672"/>
-            <a:ext cx="2734056" cy="941832"/>
-          </a:xfrm>
-          <a:prstGeom prst="rect">
-            <a:avLst/>
-          </a:prstGeom>
-          <a:noFill/>
-          <a:ln/>
-        </p:spPr>
-        <p:txBody>
-          <a:bodyPr wrap="square" lIns="0" tIns="0" rIns="0" bIns="0" rtlCol="0" anchor="t">
+            <a:off x="7891272" y="4169664"/>
+            <a:ext cx="826008" cy="310896"/>
+          </a:xfrm>
+          <a:prstGeom prst="rect">
+            <a:avLst/>
+          </a:prstGeom>
+          <a:noFill/>
+          <a:ln/>
+        </p:spPr>
+        <p:txBody>
+          <a:bodyPr wrap="square" lIns="0" tIns="0" rIns="0" bIns="0" rtlCol="0" anchor="ctr">
             <a:normAutofit/>
           </a:bodyPr>
           <a:lstStyle/>
           <a:p>
-            <a:pPr indent="0" marL="0">
-              <a:buNone/>
-            </a:pPr>
-            <a:r>
-              <a:rPr lang="en-US" sz="1250" dirty="0">
-                <a:solidFill>
-                  <a:srgbClr val="17364A"/>
-                </a:solidFill>
-                <a:latin typeface="Aptos" pitchFamily="34" charset="0"/>
-                <a:ea typeface="Aptos" pitchFamily="34" charset="-122"/>
-                <a:cs typeface="Aptos" pitchFamily="34" charset="-120"/>
-              </a:rPr>
-              <a:t>The playbook connection helps turn training into agency work, not just individual knowledge.</a:t>
-            </a:r>
-            <a:endParaRPr lang="en-US" sz="1250" dirty="0"/>
+            <a:pPr algn="ctr" indent="0" marL="0">
+              <a:buNone/>
+            </a:pPr>
+            <a:r>
+              <a:rPr lang="en-US" sz="1500" b="1" dirty="0">
+                <a:solidFill>
+                  <a:srgbClr val="FFFFFF"/>
+                </a:solidFill>
+                <a:latin typeface="Aptos" pitchFamily="34" charset="0"/>
+                <a:ea typeface="Aptos" pitchFamily="34" charset="-122"/>
+                <a:cs typeface="Aptos" pitchFamily="34" charset="-120"/>
+              </a:rPr>
+              <a:t>Lesson</a:t>
+            </a:r>
+            <a:endParaRPr lang="en-US" sz="1500" dirty="0"/>
+          </a:p>
+        </p:txBody>
+      </p:sp>
+      <p:sp>
+        <p:nvSpPr>
+          <p:cNvPr id="15" name="Text 13"/>
+          <p:cNvSpPr/>
+          <p:nvPr/>
+        </p:nvSpPr>
+        <p:spPr>
+          <a:xfrm>
+            <a:off x="8817864" y="4187952"/>
+            <a:ext cx="201168" cy="256032"/>
+          </a:xfrm>
+          <a:prstGeom prst="rect">
+            <a:avLst/>
+          </a:prstGeom>
+          <a:noFill/>
+          <a:ln/>
+        </p:spPr>
+        <p:txBody>
+          <a:bodyPr wrap="square" lIns="0" tIns="0" rIns="0" bIns="0" rtlCol="0" anchor="ctr"/>
+          <a:lstStyle/>
+          <a:p>
+            <a:pPr algn="ctr" indent="0" marL="0">
+              <a:buNone/>
+            </a:pPr>
+            <a:r>
+              <a:rPr lang="en-US" sz="1800" b="1" dirty="0">
+                <a:solidFill>
+                  <a:srgbClr val="0068B7"/>
+                </a:solidFill>
+                <a:latin typeface="Aptos" pitchFamily="34" charset="0"/>
+                <a:ea typeface="Aptos" pitchFamily="34" charset="-122"/>
+                <a:cs typeface="Aptos" pitchFamily="34" charset="-120"/>
+              </a:rPr>
+              <a:t>â†’</a:t>
+            </a:r>
+            <a:endParaRPr lang="en-US" sz="1800" dirty="0"/>
+          </a:p>
+        </p:txBody>
+      </p:sp>
+      <p:sp>
+        <p:nvSpPr>
+          <p:cNvPr id="16" name="Shape 14"/>
+          <p:cNvSpPr/>
+          <p:nvPr/>
+        </p:nvSpPr>
+        <p:spPr>
+          <a:xfrm>
+            <a:off x="9046464" y="3977640"/>
+            <a:ext cx="972312" cy="749808"/>
+          </a:xfrm>
+          <a:prstGeom prst="roundRect">
+            <a:avLst>
+              <a:gd name="adj" fmla="val 14634"/>
+            </a:avLst>
+          </a:prstGeom>
+          <a:solidFill>
+            <a:srgbClr val="2F8A28"/>
+          </a:solidFill>
+          <a:ln w="12700">
+            <a:solidFill>
+              <a:srgbClr val="2F8A28"/>
+            </a:solidFill>
+            <a:prstDash val="solid"/>
+          </a:ln>
+        </p:spPr>
+      </p:sp>
+      <p:sp>
+        <p:nvSpPr>
+          <p:cNvPr id="17" name="Text 15"/>
+          <p:cNvSpPr/>
+          <p:nvPr/>
+        </p:nvSpPr>
+        <p:spPr>
+          <a:xfrm>
+            <a:off x="9119616" y="4169664"/>
+            <a:ext cx="826008" cy="310896"/>
+          </a:xfrm>
+          <a:prstGeom prst="rect">
+            <a:avLst/>
+          </a:prstGeom>
+          <a:noFill/>
+          <a:ln/>
+        </p:spPr>
+        <p:txBody>
+          <a:bodyPr wrap="square" lIns="0" tIns="0" rIns="0" bIns="0" rtlCol="0" anchor="ctr">
+            <a:normAutofit/>
+          </a:bodyPr>
+          <a:lstStyle/>
+          <a:p>
+            <a:pPr algn="ctr" indent="0" marL="0">
+              <a:buNone/>
+            </a:pPr>
+            <a:r>
+              <a:rPr lang="en-US" sz="1500" b="1" dirty="0">
+                <a:solidFill>
+                  <a:srgbClr val="FFFFFF"/>
+                </a:solidFill>
+                <a:latin typeface="Aptos" pitchFamily="34" charset="0"/>
+                <a:ea typeface="Aptos" pitchFamily="34" charset="-122"/>
+                <a:cs typeface="Aptos" pitchFamily="34" charset="-120"/>
+              </a:rPr>
+              <a:t>Plays</a:t>
+            </a:r>
+            <a:endParaRPr lang="en-US" sz="1500" dirty="0"/>
+          </a:p>
+        </p:txBody>
+      </p:sp>
+      <p:sp>
+        <p:nvSpPr>
+          <p:cNvPr id="18" name="Text 16"/>
+          <p:cNvSpPr/>
+          <p:nvPr/>
+        </p:nvSpPr>
+        <p:spPr>
+          <a:xfrm>
+            <a:off x="10046208" y="4187952"/>
+            <a:ext cx="201168" cy="256032"/>
+          </a:xfrm>
+          <a:prstGeom prst="rect">
+            <a:avLst/>
+          </a:prstGeom>
+          <a:noFill/>
+          <a:ln/>
+        </p:spPr>
+        <p:txBody>
+          <a:bodyPr wrap="square" lIns="0" tIns="0" rIns="0" bIns="0" rtlCol="0" anchor="ctr"/>
+          <a:lstStyle/>
+          <a:p>
+            <a:pPr algn="ctr" indent="0" marL="0">
+              <a:buNone/>
+            </a:pPr>
+            <a:r>
+              <a:rPr lang="en-US" sz="1800" b="1" dirty="0">
+                <a:solidFill>
+                  <a:srgbClr val="0068B7"/>
+                </a:solidFill>
+                <a:latin typeface="Aptos" pitchFamily="34" charset="0"/>
+                <a:ea typeface="Aptos" pitchFamily="34" charset="-122"/>
+                <a:cs typeface="Aptos" pitchFamily="34" charset="-120"/>
+              </a:rPr>
+              <a:t>â†’</a:t>
+            </a:r>
+            <a:endParaRPr lang="en-US" sz="1800" dirty="0"/>
+          </a:p>
+        </p:txBody>
+      </p:sp>
+      <p:sp>
+        <p:nvSpPr>
+          <p:cNvPr id="19" name="Shape 17"/>
+          <p:cNvSpPr/>
+          <p:nvPr/>
+        </p:nvSpPr>
+        <p:spPr>
+          <a:xfrm>
+            <a:off x="10274808" y="3977640"/>
+            <a:ext cx="972312" cy="749808"/>
+          </a:xfrm>
+          <a:prstGeom prst="roundRect">
+            <a:avLst>
+              <a:gd name="adj" fmla="val 14634"/>
+            </a:avLst>
+          </a:prstGeom>
+          <a:solidFill>
+            <a:srgbClr val="6A4CA3"/>
+          </a:solidFill>
+          <a:ln w="12700">
+            <a:solidFill>
+              <a:srgbClr val="6A4CA3"/>
+            </a:solidFill>
+            <a:prstDash val="solid"/>
+          </a:ln>
+        </p:spPr>
+      </p:sp>
+      <p:sp>
+        <p:nvSpPr>
+          <p:cNvPr id="20" name="Text 18"/>
+          <p:cNvSpPr/>
+          <p:nvPr/>
+        </p:nvSpPr>
+        <p:spPr>
+          <a:xfrm>
+            <a:off x="10347960" y="4169664"/>
+            <a:ext cx="826008" cy="310896"/>
+          </a:xfrm>
+          <a:prstGeom prst="rect">
+            <a:avLst/>
+          </a:prstGeom>
+          <a:noFill/>
+          <a:ln/>
+        </p:spPr>
+        <p:txBody>
+          <a:bodyPr wrap="square" lIns="0" tIns="0" rIns="0" bIns="0" rtlCol="0" anchor="ctr">
+            <a:normAutofit/>
+          </a:bodyPr>
+          <a:lstStyle/>
+          <a:p>
+            <a:pPr algn="ctr" indent="0" marL="0">
+              <a:buNone/>
+            </a:pPr>
+            <a:r>
+              <a:rPr lang="en-US" sz="1500" b="1" dirty="0">
+                <a:solidFill>
+                  <a:srgbClr val="FFFFFF"/>
+                </a:solidFill>
+                <a:latin typeface="Aptos" pitchFamily="34" charset="0"/>
+                <a:ea typeface="Aptos" pitchFamily="34" charset="-122"/>
+                <a:cs typeface="Aptos" pitchFamily="34" charset="-120"/>
+              </a:rPr>
+              <a:t>Action</a:t>
+            </a:r>
+            <a:endParaRPr lang="en-US" sz="1500" dirty="0"/>
           </a:p>
         </p:txBody>
       </p:sp>
@@ -11748,7 +12610,7 @@
                 <a:ea typeface="Aptos" pitchFamily="34" charset="-122"/>
                 <a:cs typeface="Aptos" pitchFamily="34" charset="-120"/>
               </a:rPr>
-              <a:t>© Paula Soper</a:t>
+              <a:t>Â© Paula Soper</a:t>
             </a:r>
             <a:endParaRPr lang="en-US" sz="800" dirty="0"/>
           </a:p>
@@ -11762,8 +12624,47 @@
         </p:nvSpPr>
         <p:spPr>
           <a:xfrm>
+            <a:off x="11137392" y="6510528"/>
+            <a:ext cx="411480" cy="201168"/>
+          </a:xfrm>
+          <a:prstGeom prst="rect">
+            <a:avLst/>
+          </a:prstGeom>
+          <a:noFill/>
+          <a:ln/>
+        </p:spPr>
+        <p:txBody>
+          <a:bodyPr wrap="square" lIns="0" tIns="0" rIns="0" bIns="0" rtlCol="0" anchor="ctr"/>
+          <a:lstStyle/>
+          <a:p>
+            <a:pPr algn="r" indent="0" marL="0">
+              <a:buNone/>
+            </a:pPr>
+            <a:r>
+              <a:rPr lang="en-US" sz="900" dirty="0">
+                <a:solidFill>
+                  <a:srgbClr val="5F7181"/>
+                </a:solidFill>
+                <a:latin typeface="Aptos" pitchFamily="34" charset="0"/>
+                <a:ea typeface="Aptos" pitchFamily="34" charset="-122"/>
+                <a:cs typeface="Aptos" pitchFamily="34" charset="-120"/>
+              </a:rPr>
+              <a:t>4</a:t>
+            </a:r>
+            <a:endParaRPr lang="en-US" sz="900" dirty="0"/>
+          </a:p>
+        </p:txBody>
+      </p:sp>
+      <p:sp>
+        <p:nvSpPr>
+          <p:cNvPr id="8" name="Text 6"/>
+          <p:cNvSpPr/>
+          <p:nvPr/>
+        </p:nvSpPr>
+        <p:spPr>
+          <a:xfrm>
             <a:off x="640080" y="658368"/>
-            <a:ext cx="10881360" cy="566928"/>
+            <a:ext cx="10881360" cy="713232"/>
           </a:xfrm>
           <a:prstGeom prst="rect">
             <a:avLst/>
@@ -11781,7 +12682,7 @@
               <a:buNone/>
             </a:pPr>
             <a:r>
-              <a:rPr lang="en-US" sz="2700" b="1" dirty="0">
+              <a:rPr lang="en-US" sz="3400" b="1" dirty="0">
                 <a:solidFill>
                   <a:srgbClr val="003A63"/>
                 </a:solidFill>
@@ -11791,20 +12692,20 @@
               </a:rPr>
               <a:t>Related toolkit resources</a:t>
             </a:r>
-            <a:endParaRPr lang="en-US" sz="2700" dirty="0"/>
-          </a:p>
-        </p:txBody>
-      </p:sp>
-      <p:sp>
-        <p:nvSpPr>
-          <p:cNvPr id="8" name="Text 6"/>
-          <p:cNvSpPr/>
-          <p:nvPr/>
-        </p:nvSpPr>
-        <p:spPr>
-          <a:xfrm>
-            <a:off x="868680" y="1417320"/>
-            <a:ext cx="6903720" cy="4480560"/>
+            <a:endParaRPr lang="en-US" sz="3400" dirty="0"/>
+          </a:p>
+        </p:txBody>
+      </p:sp>
+      <p:sp>
+        <p:nvSpPr>
+          <p:cNvPr id="9" name="Text 7"/>
+          <p:cNvSpPr/>
+          <p:nvPr/>
+        </p:nvSpPr>
+        <p:spPr>
+          <a:xfrm>
+            <a:off x="868680" y="1508760"/>
+            <a:ext cx="6812280" cy="3977640"/>
           </a:xfrm>
           <a:prstGeom prst="rect">
             <a:avLst/>
@@ -11819,7 +12720,7 @@
           <a:lstStyle/>
           <a:p>
             <a:r>
-              <a:rPr lang="en-US" sz="1460" dirty="0">
+              <a:rPr lang="en-US" sz="1850" dirty="0">
                 <a:solidFill>
                   <a:srgbClr val="17364A"/>
                 </a:solidFill>
@@ -11827,13 +12728,13 @@
                 <a:ea typeface="Aptos" pitchFamily="34" charset="-122"/>
                 <a:cs typeface="Aptos" pitchFamily="34" charset="-120"/>
               </a:rPr>
-              <a:t>Tool 16: Incident Response Checklist (Checklist) - Use Incident Response Checklist to translate this lesson into a documented public.</a:t>
-            </a:r>
-            <a:endParaRPr lang="en-US" sz="1460" dirty="0"/>
-          </a:p>
-          <a:p>
-            <a:r>
-              <a:rPr lang="en-US" sz="1460" dirty="0">
+              <a:t>Tool 16: Incident Response Checklist (Checklist) - Use Incident Response Checklist to translate this lesson.</a:t>
+            </a:r>
+            <a:endParaRPr lang="en-US" sz="1850" dirty="0"/>
+          </a:p>
+          <a:p>
+            <a:r>
+              <a:rPr lang="en-US" sz="1850" dirty="0">
                 <a:solidFill>
                   <a:srgbClr val="17364A"/>
                 </a:solidFill>
@@ -11841,13 +12742,13 @@
                 <a:ea typeface="Aptos" pitchFamily="34" charset="-122"/>
                 <a:cs typeface="Aptos" pitchFamily="34" charset="-120"/>
               </a:rPr>
-              <a:t>Tool 17: Compliance Audit Checklist (Checklist) - Use Compliance Audit Checklist to translate this lesson into a documented public.</a:t>
-            </a:r>
-            <a:endParaRPr lang="en-US" sz="1460" dirty="0"/>
-          </a:p>
-          <a:p>
-            <a:r>
-              <a:rPr lang="en-US" sz="1460" dirty="0">
+              <a:t>Tool 17: Compliance Audit Checklist (Checklist) - Use Compliance Audit Checklist to translate this lesson.</a:t>
+            </a:r>
+            <a:endParaRPr lang="en-US" sz="1850" dirty="0"/>
+          </a:p>
+          <a:p>
+            <a:r>
+              <a:rPr lang="en-US" sz="1850" dirty="0">
                 <a:solidFill>
                   <a:srgbClr val="17364A"/>
                 </a:solidFill>
@@ -11855,13 +12756,13 @@
                 <a:ea typeface="Aptos" pitchFamily="34" charset="-122"/>
                 <a:cs typeface="Aptos" pitchFamily="34" charset="-120"/>
               </a:rPr>
-              <a:t>Tool 18: Policy Update &amp; Version Control Log (Log) - Use this tool to complete or strengthen the practical exercise for the module.</a:t>
-            </a:r>
-            <a:endParaRPr lang="en-US" sz="1460" dirty="0"/>
-          </a:p>
-          <a:p>
-            <a:r>
-              <a:rPr lang="en-US" sz="1460" dirty="0">
+              <a:t>Tool 18: Policy Update &amp; Version Control Log (Log) - Use this tool to complete or strengthen the practical.</a:t>
+            </a:r>
+            <a:endParaRPr lang="en-US" sz="1850" dirty="0"/>
+          </a:p>
+          <a:p>
+            <a:r>
+              <a:rPr lang="en-US" sz="1850" dirty="0">
                 <a:solidFill>
                   <a:srgbClr val="17364A"/>
                 </a:solidFill>
@@ -11869,29 +12770,15 @@
                 <a:ea typeface="Aptos" pitchFamily="34" charset="-122"/>
                 <a:cs typeface="Aptos" pitchFamily="34" charset="-120"/>
               </a:rPr>
-              <a:t>Tool 19: Plain-Language AI Public Notice Template (Template) - Use Plain-Language AI Public Notice Template to translate this lesson.</a:t>
-            </a:r>
-            <a:endParaRPr lang="en-US" sz="1460" dirty="0"/>
-          </a:p>
-          <a:p>
-            <a:r>
-              <a:rPr lang="en-US" sz="1460" dirty="0">
-                <a:solidFill>
-                  <a:srgbClr val="17364A"/>
-                </a:solidFill>
-                <a:latin typeface="Aptos" pitchFamily="34" charset="0"/>
-                <a:ea typeface="Aptos" pitchFamily="34" charset="-122"/>
-                <a:cs typeface="Aptos" pitchFamily="34" charset="-120"/>
-              </a:rPr>
-              <a:t>Tool 44: Performance Monitoring Dashboard (Dashboard) - Use this tool to complete or strengthen the practical exercise for the module.</a:t>
-            </a:r>
-            <a:endParaRPr lang="en-US" sz="1460" dirty="0"/>
-          </a:p>
-        </p:txBody>
-      </p:sp>
-      <p:sp>
-        <p:nvSpPr>
-          <p:cNvPr id="9" name="Shape 7"/>
+              <a:t>Tool 19: Plain-Language AI Public Notice Template (Template) - Use Plain-Language AI Public Notice Template.</a:t>
+            </a:r>
+            <a:endParaRPr lang="en-US" sz="1850" dirty="0"/>
+          </a:p>
+        </p:txBody>
+      </p:sp>
+      <p:sp>
+        <p:nvSpPr>
+          <p:cNvPr id="10" name="Shape 8"/>
           <p:cNvSpPr/>
           <p:nvPr/>
         </p:nvSpPr>
@@ -11918,14 +12805,14 @@
       </p:sp>
       <p:sp>
         <p:nvSpPr>
-          <p:cNvPr id="10" name="Text 8"/>
+          <p:cNvPr id="11" name="Text 9"/>
           <p:cNvSpPr/>
           <p:nvPr/>
         </p:nvSpPr>
         <p:spPr>
           <a:xfrm>
             <a:off x="8211312" y="1563624"/>
-            <a:ext cx="2734056" cy="201168"/>
+            <a:ext cx="2734056" cy="256032"/>
           </a:xfrm>
           <a:prstGeom prst="rect">
             <a:avLst/>
@@ -11941,7 +12828,7 @@
               <a:buNone/>
             </a:pPr>
             <a:r>
-              <a:rPr lang="en-US" sz="950" b="1" dirty="0">
+              <a:rPr lang="en-US" sz="1300" b="1" dirty="0">
                 <a:solidFill>
                   <a:srgbClr val="0068B7"/>
                 </a:solidFill>
@@ -11951,20 +12838,20 @@
               </a:rPr>
               <a:t>Use the tools</a:t>
             </a:r>
-            <a:endParaRPr lang="en-US" sz="950" dirty="0"/>
-          </a:p>
-        </p:txBody>
-      </p:sp>
-      <p:sp>
-        <p:nvSpPr>
-          <p:cNvPr id="11" name="Text 9"/>
-          <p:cNvSpPr/>
-          <p:nvPr/>
-        </p:nvSpPr>
-        <p:spPr>
-          <a:xfrm>
-            <a:off x="8211312" y="1856232"/>
-            <a:ext cx="2734056" cy="1536192"/>
+            <a:endParaRPr lang="en-US" sz="1300" dirty="0"/>
+          </a:p>
+        </p:txBody>
+      </p:sp>
+      <p:sp>
+        <p:nvSpPr>
+          <p:cNvPr id="12" name="Text 10"/>
+          <p:cNvSpPr/>
+          <p:nvPr/>
+        </p:nvSpPr>
+        <p:spPr>
+          <a:xfrm>
+            <a:off x="8211312" y="1920240"/>
+            <a:ext cx="2734056" cy="1463040"/>
           </a:xfrm>
           <a:prstGeom prst="rect">
             <a:avLst/>
@@ -11982,7 +12869,7 @@
               <a:buNone/>
             </a:pPr>
             <a:r>
-              <a:rPr lang="en-US" sz="1250" dirty="0">
+              <a:rPr lang="en-US" sz="1550" dirty="0">
                 <a:solidFill>
                   <a:srgbClr val="17364A"/>
                 </a:solidFill>
@@ -11992,32 +12879,32 @@
               </a:rPr>
               <a:t>Use linked tools when your department needs a structured worksheet, template, checklist, review process, or documentation artifact.</a:t>
             </a:r>
-            <a:endParaRPr lang="en-US" sz="1250" dirty="0"/>
-          </a:p>
-        </p:txBody>
-      </p:sp>
-      <p:sp>
-        <p:nvSpPr>
-          <p:cNvPr id="12" name="Shape 10"/>
-          <p:cNvSpPr/>
-          <p:nvPr/>
-        </p:nvSpPr>
-        <p:spPr>
-          <a:xfrm>
-            <a:off x="8046720" y="3794760"/>
-            <a:ext cx="3063240" cy="1508760"/>
+            <a:endParaRPr lang="en-US" sz="1550" dirty="0"/>
+          </a:p>
+        </p:txBody>
+      </p:sp>
+      <p:sp>
+        <p:nvSpPr>
+          <p:cNvPr id="13" name="Shape 11"/>
+          <p:cNvSpPr/>
+          <p:nvPr/>
+        </p:nvSpPr>
+        <p:spPr>
+          <a:xfrm>
+            <a:off x="7818120" y="3977640"/>
+            <a:ext cx="972312" cy="749808"/>
           </a:xfrm>
           <a:prstGeom prst="roundRect">
             <a:avLst>
-              <a:gd name="adj" fmla="val 7273"/>
+              <a:gd name="adj" fmla="val 14634"/>
             </a:avLst>
           </a:prstGeom>
           <a:solidFill>
-            <a:srgbClr val="EEF8ED"/>
+            <a:srgbClr val="0068B7"/>
           </a:solidFill>
           <a:ln w="12700">
             <a:solidFill>
-              <a:srgbClr val="B9D7E6"/>
+              <a:srgbClr val="0068B7"/>
             </a:solidFill>
             <a:prstDash val="solid"/>
           </a:ln>
@@ -12025,81 +12912,256 @@
       </p:sp>
       <p:sp>
         <p:nvSpPr>
-          <p:cNvPr id="13" name="Text 11"/>
-          <p:cNvSpPr/>
-          <p:nvPr/>
-        </p:nvSpPr>
-        <p:spPr>
-          <a:xfrm>
-            <a:off x="8211312" y="3941064"/>
-            <a:ext cx="2734056" cy="201168"/>
-          </a:xfrm>
-          <a:prstGeom prst="rect">
-            <a:avLst/>
-          </a:prstGeom>
-          <a:noFill/>
-          <a:ln/>
-        </p:spPr>
-        <p:txBody>
-          <a:bodyPr wrap="square" lIns="0" tIns="0" rIns="0" bIns="0" rtlCol="0" anchor="ctr"/>
-          <a:lstStyle/>
-          <a:p>
-            <a:pPr indent="0" marL="0">
-              <a:buNone/>
-            </a:pPr>
-            <a:r>
-              <a:rPr lang="en-US" sz="950" b="1" dirty="0">
-                <a:solidFill>
-                  <a:srgbClr val="0068B7"/>
-                </a:solidFill>
-                <a:latin typeface="Aptos" pitchFamily="34" charset="0"/>
-                <a:ea typeface="Aptos" pitchFamily="34" charset="-122"/>
-                <a:cs typeface="Aptos" pitchFamily="34" charset="-120"/>
-              </a:rPr>
-              <a:t>Avoid duplication</a:t>
-            </a:r>
-            <a:endParaRPr lang="en-US" sz="950" dirty="0"/>
-          </a:p>
-        </p:txBody>
-      </p:sp>
-      <p:sp>
-        <p:nvSpPr>
           <p:cNvPr id="14" name="Text 12"/>
           <p:cNvSpPr/>
           <p:nvPr/>
         </p:nvSpPr>
         <p:spPr>
           <a:xfrm>
-            <a:off x="8211312" y="4233672"/>
-            <a:ext cx="2734056" cy="941832"/>
-          </a:xfrm>
-          <a:prstGeom prst="rect">
-            <a:avLst/>
-          </a:prstGeom>
-          <a:noFill/>
-          <a:ln/>
-        </p:spPr>
-        <p:txBody>
-          <a:bodyPr wrap="square" lIns="0" tIns="0" rIns="0" bIns="0" rtlCol="0" anchor="t">
+            <a:off x="7891272" y="4169664"/>
+            <a:ext cx="826008" cy="310896"/>
+          </a:xfrm>
+          <a:prstGeom prst="rect">
+            <a:avLst/>
+          </a:prstGeom>
+          <a:noFill/>
+          <a:ln/>
+        </p:spPr>
+        <p:txBody>
+          <a:bodyPr wrap="square" lIns="0" tIns="0" rIns="0" bIns="0" rtlCol="0" anchor="ctr">
             <a:normAutofit/>
           </a:bodyPr>
           <a:lstStyle/>
           <a:p>
-            <a:pPr indent="0" marL="0">
-              <a:buNone/>
-            </a:pPr>
-            <a:r>
-              <a:rPr lang="en-US" sz="1250" dirty="0">
-                <a:solidFill>
-                  <a:srgbClr val="17364A"/>
-                </a:solidFill>
-                <a:latin typeface="Aptos" pitchFamily="34" charset="0"/>
-                <a:ea typeface="Aptos" pitchFamily="34" charset="-122"/>
-                <a:cs typeface="Aptos" pitchFamily="34" charset="-120"/>
-              </a:rPr>
-              <a:t>If your department already has a strong equivalent tool, adapt or use the existing process instead of recreating it.</a:t>
-            </a:r>
-            <a:endParaRPr lang="en-US" sz="1250" dirty="0"/>
+            <a:pPr algn="ctr" indent="0" marL="0">
+              <a:buNone/>
+            </a:pPr>
+            <a:r>
+              <a:rPr lang="en-US" sz="1500" b="1" dirty="0">
+                <a:solidFill>
+                  <a:srgbClr val="FFFFFF"/>
+                </a:solidFill>
+                <a:latin typeface="Aptos" pitchFamily="34" charset="0"/>
+                <a:ea typeface="Aptos" pitchFamily="34" charset="-122"/>
+                <a:cs typeface="Aptos" pitchFamily="34" charset="-120"/>
+              </a:rPr>
+              <a:t>Concept</a:t>
+            </a:r>
+            <a:endParaRPr lang="en-US" sz="1500" dirty="0"/>
+          </a:p>
+        </p:txBody>
+      </p:sp>
+      <p:sp>
+        <p:nvSpPr>
+          <p:cNvPr id="15" name="Text 13"/>
+          <p:cNvSpPr/>
+          <p:nvPr/>
+        </p:nvSpPr>
+        <p:spPr>
+          <a:xfrm>
+            <a:off x="8817864" y="4187952"/>
+            <a:ext cx="201168" cy="256032"/>
+          </a:xfrm>
+          <a:prstGeom prst="rect">
+            <a:avLst/>
+          </a:prstGeom>
+          <a:noFill/>
+          <a:ln/>
+        </p:spPr>
+        <p:txBody>
+          <a:bodyPr wrap="square" lIns="0" tIns="0" rIns="0" bIns="0" rtlCol="0" anchor="ctr"/>
+          <a:lstStyle/>
+          <a:p>
+            <a:pPr algn="ctr" indent="0" marL="0">
+              <a:buNone/>
+            </a:pPr>
+            <a:r>
+              <a:rPr lang="en-US" sz="1800" b="1" dirty="0">
+                <a:solidFill>
+                  <a:srgbClr val="0068B7"/>
+                </a:solidFill>
+                <a:latin typeface="Aptos" pitchFamily="34" charset="0"/>
+                <a:ea typeface="Aptos" pitchFamily="34" charset="-122"/>
+                <a:cs typeface="Aptos" pitchFamily="34" charset="-120"/>
+              </a:rPr>
+              <a:t>â†’</a:t>
+            </a:r>
+            <a:endParaRPr lang="en-US" sz="1800" dirty="0"/>
+          </a:p>
+        </p:txBody>
+      </p:sp>
+      <p:sp>
+        <p:nvSpPr>
+          <p:cNvPr id="16" name="Shape 14"/>
+          <p:cNvSpPr/>
+          <p:nvPr/>
+        </p:nvSpPr>
+        <p:spPr>
+          <a:xfrm>
+            <a:off x="9046464" y="3977640"/>
+            <a:ext cx="972312" cy="749808"/>
+          </a:xfrm>
+          <a:prstGeom prst="roundRect">
+            <a:avLst>
+              <a:gd name="adj" fmla="val 14634"/>
+            </a:avLst>
+          </a:prstGeom>
+          <a:solidFill>
+            <a:srgbClr val="2F8A28"/>
+          </a:solidFill>
+          <a:ln w="12700">
+            <a:solidFill>
+              <a:srgbClr val="2F8A28"/>
+            </a:solidFill>
+            <a:prstDash val="solid"/>
+          </a:ln>
+        </p:spPr>
+      </p:sp>
+      <p:sp>
+        <p:nvSpPr>
+          <p:cNvPr id="17" name="Text 15"/>
+          <p:cNvSpPr/>
+          <p:nvPr/>
+        </p:nvSpPr>
+        <p:spPr>
+          <a:xfrm>
+            <a:off x="9119616" y="4169664"/>
+            <a:ext cx="826008" cy="310896"/>
+          </a:xfrm>
+          <a:prstGeom prst="rect">
+            <a:avLst/>
+          </a:prstGeom>
+          <a:noFill/>
+          <a:ln/>
+        </p:spPr>
+        <p:txBody>
+          <a:bodyPr wrap="square" lIns="0" tIns="0" rIns="0" bIns="0" rtlCol="0" anchor="ctr">
+            <a:normAutofit/>
+          </a:bodyPr>
+          <a:lstStyle/>
+          <a:p>
+            <a:pPr algn="ctr" indent="0" marL="0">
+              <a:buNone/>
+            </a:pPr>
+            <a:r>
+              <a:rPr lang="en-US" sz="1500" b="1" dirty="0">
+                <a:solidFill>
+                  <a:srgbClr val="FFFFFF"/>
+                </a:solidFill>
+                <a:latin typeface="Aptos" pitchFamily="34" charset="0"/>
+                <a:ea typeface="Aptos" pitchFamily="34" charset="-122"/>
+                <a:cs typeface="Aptos" pitchFamily="34" charset="-120"/>
+              </a:rPr>
+              <a:t>Tool</a:t>
+            </a:r>
+            <a:endParaRPr lang="en-US" sz="1500" dirty="0"/>
+          </a:p>
+        </p:txBody>
+      </p:sp>
+      <p:sp>
+        <p:nvSpPr>
+          <p:cNvPr id="18" name="Text 16"/>
+          <p:cNvSpPr/>
+          <p:nvPr/>
+        </p:nvSpPr>
+        <p:spPr>
+          <a:xfrm>
+            <a:off x="10046208" y="4187952"/>
+            <a:ext cx="201168" cy="256032"/>
+          </a:xfrm>
+          <a:prstGeom prst="rect">
+            <a:avLst/>
+          </a:prstGeom>
+          <a:noFill/>
+          <a:ln/>
+        </p:spPr>
+        <p:txBody>
+          <a:bodyPr wrap="square" lIns="0" tIns="0" rIns="0" bIns="0" rtlCol="0" anchor="ctr"/>
+          <a:lstStyle/>
+          <a:p>
+            <a:pPr algn="ctr" indent="0" marL="0">
+              <a:buNone/>
+            </a:pPr>
+            <a:r>
+              <a:rPr lang="en-US" sz="1800" b="1" dirty="0">
+                <a:solidFill>
+                  <a:srgbClr val="0068B7"/>
+                </a:solidFill>
+                <a:latin typeface="Aptos" pitchFamily="34" charset="0"/>
+                <a:ea typeface="Aptos" pitchFamily="34" charset="-122"/>
+                <a:cs typeface="Aptos" pitchFamily="34" charset="-120"/>
+              </a:rPr>
+              <a:t>â†’</a:t>
+            </a:r>
+            <a:endParaRPr lang="en-US" sz="1800" dirty="0"/>
+          </a:p>
+        </p:txBody>
+      </p:sp>
+      <p:sp>
+        <p:nvSpPr>
+          <p:cNvPr id="19" name="Shape 17"/>
+          <p:cNvSpPr/>
+          <p:nvPr/>
+        </p:nvSpPr>
+        <p:spPr>
+          <a:xfrm>
+            <a:off x="10274808" y="3977640"/>
+            <a:ext cx="972312" cy="749808"/>
+          </a:xfrm>
+          <a:prstGeom prst="roundRect">
+            <a:avLst>
+              <a:gd name="adj" fmla="val 14634"/>
+            </a:avLst>
+          </a:prstGeom>
+          <a:solidFill>
+            <a:srgbClr val="D69A2D"/>
+          </a:solidFill>
+          <a:ln w="12700">
+            <a:solidFill>
+              <a:srgbClr val="D69A2D"/>
+            </a:solidFill>
+            <a:prstDash val="solid"/>
+          </a:ln>
+        </p:spPr>
+      </p:sp>
+      <p:sp>
+        <p:nvSpPr>
+          <p:cNvPr id="20" name="Text 18"/>
+          <p:cNvSpPr/>
+          <p:nvPr/>
+        </p:nvSpPr>
+        <p:spPr>
+          <a:xfrm>
+            <a:off x="10347960" y="4169664"/>
+            <a:ext cx="826008" cy="310896"/>
+          </a:xfrm>
+          <a:prstGeom prst="rect">
+            <a:avLst/>
+          </a:prstGeom>
+          <a:noFill/>
+          <a:ln/>
+        </p:spPr>
+        <p:txBody>
+          <a:bodyPr wrap="square" lIns="0" tIns="0" rIns="0" bIns="0" rtlCol="0" anchor="ctr">
+            <a:normAutofit/>
+          </a:bodyPr>
+          <a:lstStyle/>
+          <a:p>
+            <a:pPr algn="ctr" indent="0" marL="0">
+              <a:buNone/>
+            </a:pPr>
+            <a:r>
+              <a:rPr lang="en-US" sz="1500" b="1" dirty="0">
+                <a:solidFill>
+                  <a:srgbClr val="FFFFFF"/>
+                </a:solidFill>
+                <a:latin typeface="Aptos" pitchFamily="34" charset="0"/>
+                <a:ea typeface="Aptos" pitchFamily="34" charset="-122"/>
+                <a:cs typeface="Aptos" pitchFamily="34" charset="-120"/>
+              </a:rPr>
+              <a:t>Artifact</a:t>
+            </a:r>
+            <a:endParaRPr lang="en-US" sz="1500" dirty="0"/>
           </a:p>
         </p:txBody>
       </p:sp>
@@ -12296,7 +13358,7 @@
                 <a:ea typeface="Aptos" pitchFamily="34" charset="-122"/>
                 <a:cs typeface="Aptos" pitchFamily="34" charset="-120"/>
               </a:rPr>
-              <a:t>© Paula Soper</a:t>
+              <a:t>Â© Paula Soper</a:t>
             </a:r>
             <a:endParaRPr lang="en-US" sz="800" dirty="0"/>
           </a:p>
@@ -12304,7 +13366,46 @@
       </p:sp>
       <p:sp>
         <p:nvSpPr>
-          <p:cNvPr id="7" name="Shape 5"/>
+          <p:cNvPr id="7" name="Text 5"/>
+          <p:cNvSpPr/>
+          <p:nvPr/>
+        </p:nvSpPr>
+        <p:spPr>
+          <a:xfrm>
+            <a:off x="11137392" y="6510528"/>
+            <a:ext cx="411480" cy="201168"/>
+          </a:xfrm>
+          <a:prstGeom prst="rect">
+            <a:avLst/>
+          </a:prstGeom>
+          <a:noFill/>
+          <a:ln/>
+        </p:spPr>
+        <p:txBody>
+          <a:bodyPr wrap="square" lIns="0" tIns="0" rIns="0" bIns="0" rtlCol="0" anchor="ctr"/>
+          <a:lstStyle/>
+          <a:p>
+            <a:pPr algn="r" indent="0" marL="0">
+              <a:buNone/>
+            </a:pPr>
+            <a:r>
+              <a:rPr lang="en-US" sz="900" dirty="0">
+                <a:solidFill>
+                  <a:srgbClr val="5F7181"/>
+                </a:solidFill>
+                <a:latin typeface="Aptos" pitchFamily="34" charset="0"/>
+                <a:ea typeface="Aptos" pitchFamily="34" charset="-122"/>
+                <a:cs typeface="Aptos" pitchFamily="34" charset="-120"/>
+              </a:rPr>
+              <a:t>5</a:t>
+            </a:r>
+            <a:endParaRPr lang="en-US" sz="900" dirty="0"/>
+          </a:p>
+        </p:txBody>
+      </p:sp>
+      <p:sp>
+        <p:nvSpPr>
+          <p:cNvPr id="8" name="Shape 6"/>
           <p:cNvSpPr/>
           <p:nvPr/>
         </p:nvSpPr>
@@ -12329,7 +13430,7 @@
       </p:sp>
       <p:sp>
         <p:nvSpPr>
-          <p:cNvPr id="8" name="Text 6"/>
+          <p:cNvPr id="9" name="Text 7"/>
           <p:cNvSpPr/>
           <p:nvPr/>
         </p:nvSpPr>
@@ -12368,14 +13469,14 @@
       </p:sp>
       <p:sp>
         <p:nvSpPr>
-          <p:cNvPr id="9" name="Text 7"/>
+          <p:cNvPr id="10" name="Text 8"/>
           <p:cNvSpPr/>
           <p:nvPr/>
         </p:nvSpPr>
         <p:spPr>
           <a:xfrm>
             <a:off x="640080" y="621792"/>
-            <a:ext cx="10881360" cy="566928"/>
+            <a:ext cx="10881360" cy="713232"/>
           </a:xfrm>
           <a:prstGeom prst="rect">
             <a:avLst/>
@@ -12393,7 +13494,7 @@
               <a:buNone/>
             </a:pPr>
             <a:r>
-              <a:rPr lang="en-US" sz="2700" b="1" dirty="0">
+              <a:rPr lang="en-US" sz="3400" b="1" dirty="0">
                 <a:solidFill>
                   <a:srgbClr val="003A63"/>
                 </a:solidFill>
@@ -12403,20 +13504,20 @@
               </a:rPr>
               <a:t>Learning Objectives</a:t>
             </a:r>
-            <a:endParaRPr lang="en-US" sz="2700" dirty="0"/>
-          </a:p>
-        </p:txBody>
-      </p:sp>
-      <p:sp>
-        <p:nvSpPr>
-          <p:cNvPr id="10" name="Text 8"/>
-          <p:cNvSpPr/>
-          <p:nvPr/>
-        </p:nvSpPr>
-        <p:spPr>
-          <a:xfrm>
-            <a:off x="868680" y="1417320"/>
-            <a:ext cx="6675120" cy="4434840"/>
+            <a:endParaRPr lang="en-US" sz="3400" dirty="0"/>
+          </a:p>
+        </p:txBody>
+      </p:sp>
+      <p:sp>
+        <p:nvSpPr>
+          <p:cNvPr id="11" name="Text 9"/>
+          <p:cNvSpPr/>
+          <p:nvPr/>
+        </p:nvSpPr>
+        <p:spPr>
+          <a:xfrm>
+            <a:off x="868680" y="1508760"/>
+            <a:ext cx="6537960" cy="4160520"/>
           </a:xfrm>
           <a:prstGeom prst="rect">
             <a:avLst/>
@@ -12431,7 +13532,7 @@
           <a:lstStyle/>
           <a:p>
             <a:r>
-              <a:rPr lang="en-US" sz="1700" dirty="0">
+              <a:rPr lang="en-US" sz="2100" dirty="0">
                 <a:solidFill>
                   <a:srgbClr val="17364A"/>
                 </a:solidFill>
@@ -12439,13 +13540,13 @@
                 <a:ea typeface="Aptos" pitchFamily="34" charset="-122"/>
                 <a:cs typeface="Aptos" pitchFamily="34" charset="-120"/>
               </a:rPr>
-              <a:t>Describe the major steps in public health data pipelines, including ingestion, validation, transformation, storage, access,.</a:t>
-            </a:r>
-            <a:endParaRPr lang="en-US" sz="1700" dirty="0"/>
-          </a:p>
-          <a:p>
-            <a:r>
-              <a:rPr lang="en-US" sz="1700" dirty="0">
+              <a:t>Describe the major steps in public health data pipelines, including ingestion, validation,.</a:t>
+            </a:r>
+            <a:endParaRPr lang="en-US" sz="2100" dirty="0"/>
+          </a:p>
+          <a:p>
+            <a:r>
+              <a:rPr lang="en-US" sz="2100" dirty="0">
                 <a:solidFill>
                   <a:srgbClr val="17364A"/>
                 </a:solidFill>
@@ -12455,11 +13556,11 @@
               </a:rPr>
               <a:t>Distinguish between batch, real-time, and event-driven data flows.</a:t>
             </a:r>
-            <a:endParaRPr lang="en-US" sz="1700" dirty="0"/>
-          </a:p>
-          <a:p>
-            <a:r>
-              <a:rPr lang="en-US" sz="1700" dirty="0">
+            <a:endParaRPr lang="en-US" sz="2100" dirty="0"/>
+          </a:p>
+          <a:p>
+            <a:r>
+              <a:rPr lang="en-US" sz="2100" dirty="0">
                 <a:solidFill>
                   <a:srgbClr val="17364A"/>
                 </a:solidFill>
@@ -12469,27 +13570,13 @@
               </a:rPr>
               <a:t>Explain how pipeline failures can affect AI outputs and operational decisions.</a:t>
             </a:r>
-            <a:endParaRPr lang="en-US" sz="1700" dirty="0"/>
-          </a:p>
-          <a:p>
-            <a:r>
-              <a:rPr lang="en-US" sz="1700" dirty="0">
-                <a:solidFill>
-                  <a:srgbClr val="17364A"/>
-                </a:solidFill>
-                <a:latin typeface="Aptos" pitchFamily="34" charset="0"/>
-                <a:ea typeface="Aptos" pitchFamily="34" charset="-122"/>
-                <a:cs typeface="Aptos" pitchFamily="34" charset="-120"/>
-              </a:rPr>
-              <a:t>Identify metadata, lineage, version control, and audit needs for AI-supported workflows.</a:t>
-            </a:r>
-            <a:endParaRPr lang="en-US" sz="1700" dirty="0"/>
-          </a:p>
-        </p:txBody>
-      </p:sp>
-      <p:sp>
-        <p:nvSpPr>
-          <p:cNvPr id="11" name="Shape 9"/>
+            <a:endParaRPr lang="en-US" sz="2100" dirty="0"/>
+          </a:p>
+        </p:txBody>
+      </p:sp>
+      <p:sp>
+        <p:nvSpPr>
+          <p:cNvPr id="12" name="Shape 10"/>
           <p:cNvSpPr/>
           <p:nvPr/>
         </p:nvSpPr>
@@ -12516,14 +13603,14 @@
       </p:sp>
       <p:sp>
         <p:nvSpPr>
-          <p:cNvPr id="12" name="Text 10"/>
+          <p:cNvPr id="13" name="Text 11"/>
           <p:cNvSpPr/>
           <p:nvPr/>
         </p:nvSpPr>
         <p:spPr>
           <a:xfrm>
             <a:off x="8074152" y="1563624"/>
-            <a:ext cx="2825496" cy="201168"/>
+            <a:ext cx="2825496" cy="256032"/>
           </a:xfrm>
           <a:prstGeom prst="rect">
             <a:avLst/>
@@ -12539,7 +13626,7 @@
               <a:buNone/>
             </a:pPr>
             <a:r>
-              <a:rPr lang="en-US" sz="950" b="1" dirty="0">
+              <a:rPr lang="en-US" sz="1300" b="1" dirty="0">
                 <a:solidFill>
                   <a:srgbClr val="0068B7"/>
                 </a:solidFill>
@@ -12549,20 +13636,20 @@
               </a:rPr>
               <a:t>Key idea</a:t>
             </a:r>
-            <a:endParaRPr lang="en-US" sz="950" dirty="0"/>
-          </a:p>
-        </p:txBody>
-      </p:sp>
-      <p:sp>
-        <p:nvSpPr>
-          <p:cNvPr id="13" name="Text 11"/>
-          <p:cNvSpPr/>
-          <p:nvPr/>
-        </p:nvSpPr>
-        <p:spPr>
-          <a:xfrm>
-            <a:off x="8074152" y="1856232"/>
-            <a:ext cx="2825496" cy="1261872"/>
+            <a:endParaRPr lang="en-US" sz="1300" dirty="0"/>
+          </a:p>
+        </p:txBody>
+      </p:sp>
+      <p:sp>
+        <p:nvSpPr>
+          <p:cNvPr id="14" name="Text 12"/>
+          <p:cNvSpPr/>
+          <p:nvPr/>
+        </p:nvSpPr>
+        <p:spPr>
+          <a:xfrm>
+            <a:off x="8074152" y="1920240"/>
+            <a:ext cx="2825496" cy="1188720"/>
           </a:xfrm>
           <a:prstGeom prst="rect">
             <a:avLst/>
@@ -12580,7 +13667,7 @@
               <a:buNone/>
             </a:pPr>
             <a:r>
-              <a:rPr lang="en-US" sz="1250" dirty="0">
+              <a:rPr lang="en-US" sz="1550" dirty="0">
                 <a:solidFill>
                   <a:srgbClr val="17364A"/>
                 </a:solidFill>
@@ -12588,15 +13675,15 @@
                 <a:ea typeface="Aptos" pitchFamily="34" charset="-122"/>
                 <a:cs typeface="Aptos" pitchFamily="34" charset="-120"/>
               </a:rPr>
-              <a:t>Describe the major steps in public health data pipelines, including ingestion, validation, transformation, storage, access,.</a:t>
-            </a:r>
-            <a:endParaRPr lang="en-US" sz="1250" dirty="0"/>
-          </a:p>
-        </p:txBody>
-      </p:sp>
-      <p:sp>
-        <p:nvSpPr>
-          <p:cNvPr id="14" name="Shape 12"/>
+              <a:t>Describe the major steps in public health data pipelines, including ingestion, validation,.</a:t>
+            </a:r>
+            <a:endParaRPr lang="en-US" sz="1550" dirty="0"/>
+          </a:p>
+        </p:txBody>
+      </p:sp>
+      <p:sp>
+        <p:nvSpPr>
+          <p:cNvPr id="15" name="Shape 13"/>
           <p:cNvSpPr/>
           <p:nvPr/>
         </p:nvSpPr>
@@ -12623,14 +13710,14 @@
       </p:sp>
       <p:sp>
         <p:nvSpPr>
-          <p:cNvPr id="15" name="Text 13"/>
+          <p:cNvPr id="16" name="Text 14"/>
           <p:cNvSpPr/>
           <p:nvPr/>
         </p:nvSpPr>
         <p:spPr>
           <a:xfrm>
             <a:off x="8074152" y="3666744"/>
-            <a:ext cx="2825496" cy="201168"/>
+            <a:ext cx="2825496" cy="256032"/>
           </a:xfrm>
           <a:prstGeom prst="rect">
             <a:avLst/>
@@ -12646,7 +13733,7 @@
               <a:buNone/>
             </a:pPr>
             <a:r>
-              <a:rPr lang="en-US" sz="950" b="1" dirty="0">
+              <a:rPr lang="en-US" sz="1300" b="1" dirty="0">
                 <a:solidFill>
                   <a:srgbClr val="0068B7"/>
                 </a:solidFill>
@@ -12656,20 +13743,20 @@
               </a:rPr>
               <a:t>Use this for</a:t>
             </a:r>
-            <a:endParaRPr lang="en-US" sz="950" dirty="0"/>
-          </a:p>
-        </p:txBody>
-      </p:sp>
-      <p:sp>
-        <p:nvSpPr>
-          <p:cNvPr id="16" name="Text 14"/>
-          <p:cNvSpPr/>
-          <p:nvPr/>
-        </p:nvSpPr>
-        <p:spPr>
-          <a:xfrm>
-            <a:off x="8074152" y="3959352"/>
-            <a:ext cx="2825496" cy="1170432"/>
+            <a:endParaRPr lang="en-US" sz="1300" dirty="0"/>
+          </a:p>
+        </p:txBody>
+      </p:sp>
+      <p:sp>
+        <p:nvSpPr>
+          <p:cNvPr id="17" name="Text 15"/>
+          <p:cNvSpPr/>
+          <p:nvPr/>
+        </p:nvSpPr>
+        <p:spPr>
+          <a:xfrm>
+            <a:off x="8074152" y="4023360"/>
+            <a:ext cx="2825496" cy="1097280"/>
           </a:xfrm>
           <a:prstGeom prst="rect">
             <a:avLst/>
@@ -12687,7 +13774,7 @@
               <a:buNone/>
             </a:pPr>
             <a:r>
-              <a:rPr lang="en-US" sz="1250" dirty="0">
+              <a:rPr lang="en-US" sz="1550" dirty="0">
                 <a:solidFill>
                   <a:srgbClr val="17364A"/>
                 </a:solidFill>
@@ -12697,7 +13784,7 @@
               </a:rPr>
               <a:t>Connect the concept to public health decisions, safeguards, documentation, or implementation work.</a:t>
             </a:r>
-            <a:endParaRPr lang="en-US" sz="1250" dirty="0"/>
+            <a:endParaRPr lang="en-US" sz="1550" dirty="0"/>
           </a:p>
         </p:txBody>
       </p:sp>
@@ -12894,7 +13981,7 @@
                 <a:ea typeface="Aptos" pitchFamily="34" charset="-122"/>
                 <a:cs typeface="Aptos" pitchFamily="34" charset="-120"/>
               </a:rPr>
-              <a:t>© Paula Soper</a:t>
+              <a:t>Â© Paula Soper</a:t>
             </a:r>
             <a:endParaRPr lang="en-US" sz="800" dirty="0"/>
           </a:p>
@@ -12902,7 +13989,46 @@
       </p:sp>
       <p:sp>
         <p:nvSpPr>
-          <p:cNvPr id="7" name="Shape 5"/>
+          <p:cNvPr id="7" name="Text 5"/>
+          <p:cNvSpPr/>
+          <p:nvPr/>
+        </p:nvSpPr>
+        <p:spPr>
+          <a:xfrm>
+            <a:off x="11137392" y="6510528"/>
+            <a:ext cx="411480" cy="201168"/>
+          </a:xfrm>
+          <a:prstGeom prst="rect">
+            <a:avLst/>
+          </a:prstGeom>
+          <a:noFill/>
+          <a:ln/>
+        </p:spPr>
+        <p:txBody>
+          <a:bodyPr wrap="square" lIns="0" tIns="0" rIns="0" bIns="0" rtlCol="0" anchor="ctr"/>
+          <a:lstStyle/>
+          <a:p>
+            <a:pPr algn="r" indent="0" marL="0">
+              <a:buNone/>
+            </a:pPr>
+            <a:r>
+              <a:rPr lang="en-US" sz="900" dirty="0">
+                <a:solidFill>
+                  <a:srgbClr val="5F7181"/>
+                </a:solidFill>
+                <a:latin typeface="Aptos" pitchFamily="34" charset="0"/>
+                <a:ea typeface="Aptos" pitchFamily="34" charset="-122"/>
+                <a:cs typeface="Aptos" pitchFamily="34" charset="-120"/>
+              </a:rPr>
+              <a:t>6</a:t>
+            </a:r>
+            <a:endParaRPr lang="en-US" sz="900" dirty="0"/>
+          </a:p>
+        </p:txBody>
+      </p:sp>
+      <p:sp>
+        <p:nvSpPr>
+          <p:cNvPr id="8" name="Shape 6"/>
           <p:cNvSpPr/>
           <p:nvPr/>
         </p:nvSpPr>
@@ -12927,7 +14053,7 @@
       </p:sp>
       <p:sp>
         <p:nvSpPr>
-          <p:cNvPr id="8" name="Text 6"/>
+          <p:cNvPr id="9" name="Text 7"/>
           <p:cNvSpPr/>
           <p:nvPr/>
         </p:nvSpPr>
@@ -12966,14 +14092,14 @@
       </p:sp>
       <p:sp>
         <p:nvSpPr>
-          <p:cNvPr id="9" name="Text 7"/>
+          <p:cNvPr id="10" name="Text 8"/>
           <p:cNvSpPr/>
           <p:nvPr/>
         </p:nvSpPr>
         <p:spPr>
           <a:xfrm>
             <a:off x="640080" y="621792"/>
-            <a:ext cx="10881360" cy="566928"/>
+            <a:ext cx="10881360" cy="713232"/>
           </a:xfrm>
           <a:prstGeom prst="rect">
             <a:avLst/>
@@ -12991,7 +14117,7 @@
               <a:buNone/>
             </a:pPr>
             <a:r>
-              <a:rPr lang="en-US" sz="2700" b="1" dirty="0">
+              <a:rPr lang="en-US" sz="3400" b="1" dirty="0">
                 <a:solidFill>
                   <a:srgbClr val="003A63"/>
                 </a:solidFill>
@@ -13001,20 +14127,20 @@
               </a:rPr>
               <a:t>Module Overview</a:t>
             </a:r>
-            <a:endParaRPr lang="en-US" sz="2700" dirty="0"/>
-          </a:p>
-        </p:txBody>
-      </p:sp>
-      <p:sp>
-        <p:nvSpPr>
-          <p:cNvPr id="10" name="Text 8"/>
-          <p:cNvSpPr/>
-          <p:nvPr/>
-        </p:nvSpPr>
-        <p:spPr>
-          <a:xfrm>
-            <a:off x="868680" y="1417320"/>
-            <a:ext cx="6675120" cy="4434840"/>
+            <a:endParaRPr lang="en-US" sz="3400" dirty="0"/>
+          </a:p>
+        </p:txBody>
+      </p:sp>
+      <p:sp>
+        <p:nvSpPr>
+          <p:cNvPr id="11" name="Text 9"/>
+          <p:cNvSpPr/>
+          <p:nvPr/>
+        </p:nvSpPr>
+        <p:spPr>
+          <a:xfrm>
+            <a:off x="868680" y="1508760"/>
+            <a:ext cx="6537960" cy="4160520"/>
           </a:xfrm>
           <a:prstGeom prst="rect">
             <a:avLst/>
@@ -13029,7 +14155,7 @@
           <a:lstStyle/>
           <a:p>
             <a:r>
-              <a:rPr lang="en-US" sz="1700" dirty="0">
+              <a:rPr lang="en-US" sz="2100" dirty="0">
                 <a:solidFill>
                   <a:srgbClr val="17364A"/>
                 </a:solidFill>
@@ -13037,13 +14163,13 @@
                 <a:ea typeface="Aptos" pitchFamily="34" charset="-122"/>
                 <a:cs typeface="Aptos" pitchFamily="34" charset="-120"/>
               </a:rPr>
-              <a:t>Data pipelines are the operational pathways that move public health data from source systems into analytic, reporting, and.</a:t>
-            </a:r>
-            <a:endParaRPr lang="en-US" sz="1700" dirty="0"/>
-          </a:p>
-          <a:p>
-            <a:r>
-              <a:rPr lang="en-US" sz="1700" dirty="0">
+              <a:t>Data pipelines are the operational pathways that move public health data from source systems into.</a:t>
+            </a:r>
+            <a:endParaRPr lang="en-US" sz="2100" dirty="0"/>
+          </a:p>
+          <a:p>
+            <a:r>
+              <a:rPr lang="en-US" sz="2100" dirty="0">
                 <a:solidFill>
                   <a:srgbClr val="17364A"/>
                 </a:solidFill>
@@ -13053,11 +14179,11 @@
               </a:rPr>
               <a:t>AI tools depend on these pathways even when users do not see them.</a:t>
             </a:r>
-            <a:endParaRPr lang="en-US" sz="1700" dirty="0"/>
-          </a:p>
-          <a:p>
-            <a:r>
-              <a:rPr lang="en-US" sz="1700" dirty="0">
+            <a:endParaRPr lang="en-US" sz="2100" dirty="0"/>
+          </a:p>
+          <a:p>
+            <a:r>
+              <a:rPr lang="en-US" sz="2100" dirty="0">
                 <a:solidFill>
                   <a:srgbClr val="17364A"/>
                 </a:solidFill>
@@ -13065,29 +14191,15 @@
                 <a:ea typeface="Aptos" pitchFamily="34" charset="-122"/>
                 <a:cs typeface="Aptos" pitchFamily="34" charset="-120"/>
               </a:rPr>
-              <a:t>A model that classifies cases, summarizes laboratory reports, or predicts service demand can only work responsibly if the.</a:t>
-            </a:r>
-            <a:endParaRPr lang="en-US" sz="1700" dirty="0"/>
-          </a:p>
-          <a:p>
-            <a:r>
-              <a:rPr lang="en-US" sz="1700" dirty="0">
-                <a:solidFill>
-                  <a:srgbClr val="17364A"/>
-                </a:solidFill>
-                <a:latin typeface="Aptos" pitchFamily="34" charset="0"/>
-                <a:ea typeface="Aptos" pitchFamily="34" charset="-122"/>
-                <a:cs typeface="Aptos" pitchFamily="34" charset="-120"/>
-              </a:rPr>
-              <a:t>This module helps learners understand the pipeline steps that shape AI outputs and the safeguards needed when pipeline.</a:t>
-            </a:r>
-            <a:endParaRPr lang="en-US" sz="1700" dirty="0"/>
-          </a:p>
-        </p:txBody>
-      </p:sp>
-      <p:sp>
-        <p:nvSpPr>
-          <p:cNvPr id="11" name="Shape 9"/>
+              <a:t>A model that classifies cases, summarizes laboratory reports, or predicts service demand can only work.</a:t>
+            </a:r>
+            <a:endParaRPr lang="en-US" sz="2100" dirty="0"/>
+          </a:p>
+        </p:txBody>
+      </p:sp>
+      <p:sp>
+        <p:nvSpPr>
+          <p:cNvPr id="12" name="Shape 10"/>
           <p:cNvSpPr/>
           <p:nvPr/>
         </p:nvSpPr>
@@ -13114,14 +14226,14 @@
       </p:sp>
       <p:sp>
         <p:nvSpPr>
-          <p:cNvPr id="12" name="Text 10"/>
+          <p:cNvPr id="13" name="Text 11"/>
           <p:cNvSpPr/>
           <p:nvPr/>
         </p:nvSpPr>
         <p:spPr>
           <a:xfrm>
             <a:off x="8074152" y="1563624"/>
-            <a:ext cx="2825496" cy="201168"/>
+            <a:ext cx="2825496" cy="256032"/>
           </a:xfrm>
           <a:prstGeom prst="rect">
             <a:avLst/>
@@ -13137,7 +14249,7 @@
               <a:buNone/>
             </a:pPr>
             <a:r>
-              <a:rPr lang="en-US" sz="950" b="1" dirty="0">
+              <a:rPr lang="en-US" sz="1300" b="1" dirty="0">
                 <a:solidFill>
                   <a:srgbClr val="0068B7"/>
                 </a:solidFill>
@@ -13147,20 +14259,20 @@
               </a:rPr>
               <a:t>Key idea</a:t>
             </a:r>
-            <a:endParaRPr lang="en-US" sz="950" dirty="0"/>
-          </a:p>
-        </p:txBody>
-      </p:sp>
-      <p:sp>
-        <p:nvSpPr>
-          <p:cNvPr id="13" name="Text 11"/>
-          <p:cNvSpPr/>
-          <p:nvPr/>
-        </p:nvSpPr>
-        <p:spPr>
-          <a:xfrm>
-            <a:off x="8074152" y="1856232"/>
-            <a:ext cx="2825496" cy="1261872"/>
+            <a:endParaRPr lang="en-US" sz="1300" dirty="0"/>
+          </a:p>
+        </p:txBody>
+      </p:sp>
+      <p:sp>
+        <p:nvSpPr>
+          <p:cNvPr id="14" name="Text 12"/>
+          <p:cNvSpPr/>
+          <p:nvPr/>
+        </p:nvSpPr>
+        <p:spPr>
+          <a:xfrm>
+            <a:off x="8074152" y="1920240"/>
+            <a:ext cx="2825496" cy="1188720"/>
           </a:xfrm>
           <a:prstGeom prst="rect">
             <a:avLst/>
@@ -13178,7 +14290,7 @@
               <a:buNone/>
             </a:pPr>
             <a:r>
-              <a:rPr lang="en-US" sz="1250" dirty="0">
+              <a:rPr lang="en-US" sz="1550" dirty="0">
                 <a:solidFill>
                   <a:srgbClr val="17364A"/>
                 </a:solidFill>
@@ -13186,15 +14298,15 @@
                 <a:ea typeface="Aptos" pitchFamily="34" charset="-122"/>
                 <a:cs typeface="Aptos" pitchFamily="34" charset="-120"/>
               </a:rPr>
-              <a:t>Data pipelines are the operational pathways that move public health data from source systems into analytic, reporting, and.</a:t>
-            </a:r>
-            <a:endParaRPr lang="en-US" sz="1250" dirty="0"/>
-          </a:p>
-        </p:txBody>
-      </p:sp>
-      <p:sp>
-        <p:nvSpPr>
-          <p:cNvPr id="14" name="Shape 12"/>
+              <a:t>Data pipelines are the operational pathways that move public health data from source systems into.</a:t>
+            </a:r>
+            <a:endParaRPr lang="en-US" sz="1550" dirty="0"/>
+          </a:p>
+        </p:txBody>
+      </p:sp>
+      <p:sp>
+        <p:nvSpPr>
+          <p:cNvPr id="15" name="Shape 13"/>
           <p:cNvSpPr/>
           <p:nvPr/>
         </p:nvSpPr>
@@ -13221,14 +14333,14 @@
       </p:sp>
       <p:sp>
         <p:nvSpPr>
-          <p:cNvPr id="15" name="Text 13"/>
+          <p:cNvPr id="16" name="Text 14"/>
           <p:cNvSpPr/>
           <p:nvPr/>
         </p:nvSpPr>
         <p:spPr>
           <a:xfrm>
             <a:off x="8074152" y="3666744"/>
-            <a:ext cx="2825496" cy="201168"/>
+            <a:ext cx="2825496" cy="256032"/>
           </a:xfrm>
           <a:prstGeom prst="rect">
             <a:avLst/>
@@ -13244,7 +14356,7 @@
               <a:buNone/>
             </a:pPr>
             <a:r>
-              <a:rPr lang="en-US" sz="950" b="1" dirty="0">
+              <a:rPr lang="en-US" sz="1300" b="1" dirty="0">
                 <a:solidFill>
                   <a:srgbClr val="0068B7"/>
                 </a:solidFill>
@@ -13254,20 +14366,20 @@
               </a:rPr>
               <a:t>Use this for</a:t>
             </a:r>
-            <a:endParaRPr lang="en-US" sz="950" dirty="0"/>
-          </a:p>
-        </p:txBody>
-      </p:sp>
-      <p:sp>
-        <p:nvSpPr>
-          <p:cNvPr id="16" name="Text 14"/>
-          <p:cNvSpPr/>
-          <p:nvPr/>
-        </p:nvSpPr>
-        <p:spPr>
-          <a:xfrm>
-            <a:off x="8074152" y="3959352"/>
-            <a:ext cx="2825496" cy="1170432"/>
+            <a:endParaRPr lang="en-US" sz="1300" dirty="0"/>
+          </a:p>
+        </p:txBody>
+      </p:sp>
+      <p:sp>
+        <p:nvSpPr>
+          <p:cNvPr id="17" name="Text 15"/>
+          <p:cNvSpPr/>
+          <p:nvPr/>
+        </p:nvSpPr>
+        <p:spPr>
+          <a:xfrm>
+            <a:off x="8074152" y="4023360"/>
+            <a:ext cx="2825496" cy="1097280"/>
           </a:xfrm>
           <a:prstGeom prst="rect">
             <a:avLst/>
@@ -13285,7 +14397,7 @@
               <a:buNone/>
             </a:pPr>
             <a:r>
-              <a:rPr lang="en-US" sz="1250" dirty="0">
+              <a:rPr lang="en-US" sz="1550" dirty="0">
                 <a:solidFill>
                   <a:srgbClr val="17364A"/>
                 </a:solidFill>
@@ -13295,7 +14407,7 @@
               </a:rPr>
               <a:t>Connect the concept to public health decisions, safeguards, documentation, or implementation work.</a:t>
             </a:r>
-            <a:endParaRPr lang="en-US" sz="1250" dirty="0"/>
+            <a:endParaRPr lang="en-US" sz="1550" dirty="0"/>
           </a:p>
         </p:txBody>
       </p:sp>
@@ -13492,7 +14604,7 @@
                 <a:ea typeface="Aptos" pitchFamily="34" charset="-122"/>
                 <a:cs typeface="Aptos" pitchFamily="34" charset="-120"/>
               </a:rPr>
-              <a:t>© Paula Soper</a:t>
+              <a:t>Â© Paula Soper</a:t>
             </a:r>
             <a:endParaRPr lang="en-US" sz="800" dirty="0"/>
           </a:p>
@@ -13500,7 +14612,46 @@
       </p:sp>
       <p:sp>
         <p:nvSpPr>
-          <p:cNvPr id="7" name="Shape 5"/>
+          <p:cNvPr id="7" name="Text 5"/>
+          <p:cNvSpPr/>
+          <p:nvPr/>
+        </p:nvSpPr>
+        <p:spPr>
+          <a:xfrm>
+            <a:off x="11137392" y="6510528"/>
+            <a:ext cx="411480" cy="201168"/>
+          </a:xfrm>
+          <a:prstGeom prst="rect">
+            <a:avLst/>
+          </a:prstGeom>
+          <a:noFill/>
+          <a:ln/>
+        </p:spPr>
+        <p:txBody>
+          <a:bodyPr wrap="square" lIns="0" tIns="0" rIns="0" bIns="0" rtlCol="0" anchor="ctr"/>
+          <a:lstStyle/>
+          <a:p>
+            <a:pPr algn="r" indent="0" marL="0">
+              <a:buNone/>
+            </a:pPr>
+            <a:r>
+              <a:rPr lang="en-US" sz="900" dirty="0">
+                <a:solidFill>
+                  <a:srgbClr val="5F7181"/>
+                </a:solidFill>
+                <a:latin typeface="Aptos" pitchFamily="34" charset="0"/>
+                <a:ea typeface="Aptos" pitchFamily="34" charset="-122"/>
+                <a:cs typeface="Aptos" pitchFamily="34" charset="-120"/>
+              </a:rPr>
+              <a:t>7</a:t>
+            </a:r>
+            <a:endParaRPr lang="en-US" sz="900" dirty="0"/>
+          </a:p>
+        </p:txBody>
+      </p:sp>
+      <p:sp>
+        <p:nvSpPr>
+          <p:cNvPr id="8" name="Shape 6"/>
           <p:cNvSpPr/>
           <p:nvPr/>
         </p:nvSpPr>
@@ -13525,7 +14676,7 @@
       </p:sp>
       <p:sp>
         <p:nvSpPr>
-          <p:cNvPr id="8" name="Text 6"/>
+          <p:cNvPr id="9" name="Text 7"/>
           <p:cNvSpPr/>
           <p:nvPr/>
         </p:nvSpPr>
@@ -13564,14 +14715,14 @@
       </p:sp>
       <p:sp>
         <p:nvSpPr>
-          <p:cNvPr id="9" name="Text 7"/>
+          <p:cNvPr id="10" name="Text 8"/>
           <p:cNvSpPr/>
           <p:nvPr/>
         </p:nvSpPr>
         <p:spPr>
           <a:xfrm>
             <a:off x="640080" y="621792"/>
-            <a:ext cx="10881360" cy="566928"/>
+            <a:ext cx="10881360" cy="713232"/>
           </a:xfrm>
           <a:prstGeom prst="rect">
             <a:avLst/>
@@ -13589,7 +14740,7 @@
               <a:buNone/>
             </a:pPr>
             <a:r>
-              <a:rPr lang="en-US" sz="2700" b="1" dirty="0">
+              <a:rPr lang="en-US" sz="3400" b="1" dirty="0">
                 <a:solidFill>
                   <a:srgbClr val="003A63"/>
                 </a:solidFill>
@@ -13599,20 +14750,20 @@
               </a:rPr>
               <a:t>Why This Topic Matters for Public Health AI</a:t>
             </a:r>
-            <a:endParaRPr lang="en-US" sz="2700" dirty="0"/>
-          </a:p>
-        </p:txBody>
-      </p:sp>
-      <p:sp>
-        <p:nvSpPr>
-          <p:cNvPr id="10" name="Text 8"/>
-          <p:cNvSpPr/>
-          <p:nvPr/>
-        </p:nvSpPr>
-        <p:spPr>
-          <a:xfrm>
-            <a:off x="868680" y="1417320"/>
-            <a:ext cx="6675120" cy="4434840"/>
+            <a:endParaRPr lang="en-US" sz="3400" dirty="0"/>
+          </a:p>
+        </p:txBody>
+      </p:sp>
+      <p:sp>
+        <p:nvSpPr>
+          <p:cNvPr id="11" name="Text 9"/>
+          <p:cNvSpPr/>
+          <p:nvPr/>
+        </p:nvSpPr>
+        <p:spPr>
+          <a:xfrm>
+            <a:off x="868680" y="1508760"/>
+            <a:ext cx="6537960" cy="4160520"/>
           </a:xfrm>
           <a:prstGeom prst="rect">
             <a:avLst/>
@@ -13627,7 +14778,7 @@
           <a:lstStyle/>
           <a:p>
             <a:r>
-              <a:rPr lang="en-US" sz="1700" dirty="0">
+              <a:rPr lang="en-US" sz="2100" dirty="0">
                 <a:solidFill>
                   <a:srgbClr val="17364A"/>
                 </a:solidFill>
@@ -13637,11 +14788,11 @@
               </a:rPr>
               <a:t>Data pipeline readiness matters because AI systems can amplify routine data management problems.</a:t>
             </a:r>
-            <a:endParaRPr lang="en-US" sz="1700" dirty="0"/>
-          </a:p>
-          <a:p>
-            <a:r>
-              <a:rPr lang="en-US" sz="1700" dirty="0">
+            <a:endParaRPr lang="en-US" sz="2100" dirty="0"/>
+          </a:p>
+          <a:p>
+            <a:r>
+              <a:rPr lang="en-US" sz="2100" dirty="0">
                 <a:solidFill>
                   <a:srgbClr val="17364A"/>
                 </a:solidFill>
@@ -13649,13 +14800,13 @@
                 <a:ea typeface="Aptos" pitchFamily="34" charset="-122"/>
                 <a:cs typeface="Aptos" pitchFamily="34" charset="-120"/>
               </a:rPr>
-              <a:t>A delayed file, changed field name, failed interface, missing date, duplicate record, or outdated transformation rule may.</a:t>
-            </a:r>
-            <a:endParaRPr lang="en-US" sz="1700" dirty="0"/>
-          </a:p>
-          <a:p>
-            <a:r>
-              <a:rPr lang="en-US" sz="1700" dirty="0">
+              <a:t>A delayed file, changed field name, failed interface, missing date, duplicate record, or outdated.</a:t>
+            </a:r>
+            <a:endParaRPr lang="en-US" sz="2100" dirty="0"/>
+          </a:p>
+          <a:p>
+            <a:r>
+              <a:rPr lang="en-US" sz="2100" dirty="0">
                 <a:solidFill>
                   <a:srgbClr val="17364A"/>
                 </a:solidFill>
@@ -13663,29 +14814,15 @@
                 <a:ea typeface="Aptos" pitchFamily="34" charset="-122"/>
                 <a:cs typeface="Aptos" pitchFamily="34" charset="-120"/>
               </a:rPr>
-              <a:t>The AI tool may continue generating fluent summaries or confident classifications even after the data feed has become.</a:t>
-            </a:r>
-            <a:endParaRPr lang="en-US" sz="1700" dirty="0"/>
-          </a:p>
-          <a:p>
-            <a:r>
-              <a:rPr lang="en-US" sz="1700" dirty="0">
-                <a:solidFill>
-                  <a:srgbClr val="17364A"/>
-                </a:solidFill>
-                <a:latin typeface="Aptos" pitchFamily="34" charset="0"/>
-                <a:ea typeface="Aptos" pitchFamily="34" charset="-122"/>
-                <a:cs typeface="Aptos" pitchFamily="34" charset="-120"/>
-              </a:rPr>
-              <a:t>Public health agencies need pipeline visibility before they rely on AI for operational workflows.</a:t>
-            </a:r>
-            <a:endParaRPr lang="en-US" sz="1700" dirty="0"/>
-          </a:p>
-        </p:txBody>
-      </p:sp>
-      <p:sp>
-        <p:nvSpPr>
-          <p:cNvPr id="11" name="Shape 9"/>
+              <a:t>The AI tool may continue generating fluent summaries or confident classifications even after the data.</a:t>
+            </a:r>
+            <a:endParaRPr lang="en-US" sz="2100" dirty="0"/>
+          </a:p>
+        </p:txBody>
+      </p:sp>
+      <p:sp>
+        <p:nvSpPr>
+          <p:cNvPr id="12" name="Shape 10"/>
           <p:cNvSpPr/>
           <p:nvPr/>
         </p:nvSpPr>
@@ -13712,14 +14849,14 @@
       </p:sp>
       <p:sp>
         <p:nvSpPr>
-          <p:cNvPr id="12" name="Text 10"/>
+          <p:cNvPr id="13" name="Text 11"/>
           <p:cNvSpPr/>
           <p:nvPr/>
         </p:nvSpPr>
         <p:spPr>
           <a:xfrm>
             <a:off x="8074152" y="1563624"/>
-            <a:ext cx="2825496" cy="201168"/>
+            <a:ext cx="2825496" cy="256032"/>
           </a:xfrm>
           <a:prstGeom prst="rect">
             <a:avLst/>
@@ -13735,7 +14872,7 @@
               <a:buNone/>
             </a:pPr>
             <a:r>
-              <a:rPr lang="en-US" sz="950" b="1" dirty="0">
+              <a:rPr lang="en-US" sz="1300" b="1" dirty="0">
                 <a:solidFill>
                   <a:srgbClr val="0068B7"/>
                 </a:solidFill>
@@ -13745,20 +14882,20 @@
               </a:rPr>
               <a:t>Key idea</a:t>
             </a:r>
-            <a:endParaRPr lang="en-US" sz="950" dirty="0"/>
-          </a:p>
-        </p:txBody>
-      </p:sp>
-      <p:sp>
-        <p:nvSpPr>
-          <p:cNvPr id="13" name="Text 11"/>
-          <p:cNvSpPr/>
-          <p:nvPr/>
-        </p:nvSpPr>
-        <p:spPr>
-          <a:xfrm>
-            <a:off x="8074152" y="1856232"/>
-            <a:ext cx="2825496" cy="1261872"/>
+            <a:endParaRPr lang="en-US" sz="1300" dirty="0"/>
+          </a:p>
+        </p:txBody>
+      </p:sp>
+      <p:sp>
+        <p:nvSpPr>
+          <p:cNvPr id="14" name="Text 12"/>
+          <p:cNvSpPr/>
+          <p:nvPr/>
+        </p:nvSpPr>
+        <p:spPr>
+          <a:xfrm>
+            <a:off x="8074152" y="1920240"/>
+            <a:ext cx="2825496" cy="1188720"/>
           </a:xfrm>
           <a:prstGeom prst="rect">
             <a:avLst/>
@@ -13776,7 +14913,7 @@
               <a:buNone/>
             </a:pPr>
             <a:r>
-              <a:rPr lang="en-US" sz="1250" dirty="0">
+              <a:rPr lang="en-US" sz="1550" dirty="0">
                 <a:solidFill>
                   <a:srgbClr val="17364A"/>
                 </a:solidFill>
@@ -13786,13 +14923,13 @@
               </a:rPr>
               <a:t>Data pipeline readiness matters because AI systems can amplify routine data management problems.</a:t>
             </a:r>
-            <a:endParaRPr lang="en-US" sz="1250" dirty="0"/>
-          </a:p>
-        </p:txBody>
-      </p:sp>
-      <p:sp>
-        <p:nvSpPr>
-          <p:cNvPr id="14" name="Shape 12"/>
+            <a:endParaRPr lang="en-US" sz="1550" dirty="0"/>
+          </a:p>
+        </p:txBody>
+      </p:sp>
+      <p:sp>
+        <p:nvSpPr>
+          <p:cNvPr id="15" name="Shape 13"/>
           <p:cNvSpPr/>
           <p:nvPr/>
         </p:nvSpPr>
@@ -13819,14 +14956,14 @@
       </p:sp>
       <p:sp>
         <p:nvSpPr>
-          <p:cNvPr id="15" name="Text 13"/>
+          <p:cNvPr id="16" name="Text 14"/>
           <p:cNvSpPr/>
           <p:nvPr/>
         </p:nvSpPr>
         <p:spPr>
           <a:xfrm>
             <a:off x="8074152" y="3666744"/>
-            <a:ext cx="2825496" cy="201168"/>
+            <a:ext cx="2825496" cy="256032"/>
           </a:xfrm>
           <a:prstGeom prst="rect">
             <a:avLst/>
@@ -13842,7 +14979,7 @@
               <a:buNone/>
             </a:pPr>
             <a:r>
-              <a:rPr lang="en-US" sz="950" b="1" dirty="0">
+              <a:rPr lang="en-US" sz="1300" b="1" dirty="0">
                 <a:solidFill>
                   <a:srgbClr val="0068B7"/>
                 </a:solidFill>
@@ -13852,20 +14989,20 @@
               </a:rPr>
               <a:t>Use this for</a:t>
             </a:r>
-            <a:endParaRPr lang="en-US" sz="950" dirty="0"/>
-          </a:p>
-        </p:txBody>
-      </p:sp>
-      <p:sp>
-        <p:nvSpPr>
-          <p:cNvPr id="16" name="Text 14"/>
-          <p:cNvSpPr/>
-          <p:nvPr/>
-        </p:nvSpPr>
-        <p:spPr>
-          <a:xfrm>
-            <a:off x="8074152" y="3959352"/>
-            <a:ext cx="2825496" cy="1170432"/>
+            <a:endParaRPr lang="en-US" sz="1300" dirty="0"/>
+          </a:p>
+        </p:txBody>
+      </p:sp>
+      <p:sp>
+        <p:nvSpPr>
+          <p:cNvPr id="17" name="Text 15"/>
+          <p:cNvSpPr/>
+          <p:nvPr/>
+        </p:nvSpPr>
+        <p:spPr>
+          <a:xfrm>
+            <a:off x="8074152" y="4023360"/>
+            <a:ext cx="2825496" cy="1097280"/>
           </a:xfrm>
           <a:prstGeom prst="rect">
             <a:avLst/>
@@ -13883,7 +15020,7 @@
               <a:buNone/>
             </a:pPr>
             <a:r>
-              <a:rPr lang="en-US" sz="1250" dirty="0">
+              <a:rPr lang="en-US" sz="1550" dirty="0">
                 <a:solidFill>
                   <a:srgbClr val="17364A"/>
                 </a:solidFill>
@@ -13893,7 +15030,7 @@
               </a:rPr>
               <a:t>Connect the concept to public health decisions, safeguards, documentation, or implementation work.</a:t>
             </a:r>
-            <a:endParaRPr lang="en-US" sz="1250" dirty="0"/>
+            <a:endParaRPr lang="en-US" sz="1550" dirty="0"/>
           </a:p>
         </p:txBody>
       </p:sp>
@@ -14090,7 +15227,7 @@
                 <a:ea typeface="Aptos" pitchFamily="34" charset="-122"/>
                 <a:cs typeface="Aptos" pitchFamily="34" charset="-120"/>
               </a:rPr>
-              <a:t>© Paula Soper</a:t>
+              <a:t>Â© Paula Soper</a:t>
             </a:r>
             <a:endParaRPr lang="en-US" sz="800" dirty="0"/>
           </a:p>
@@ -14098,7 +15235,46 @@
       </p:sp>
       <p:sp>
         <p:nvSpPr>
-          <p:cNvPr id="7" name="Shape 5"/>
+          <p:cNvPr id="7" name="Text 5"/>
+          <p:cNvSpPr/>
+          <p:nvPr/>
+        </p:nvSpPr>
+        <p:spPr>
+          <a:xfrm>
+            <a:off x="11137392" y="6510528"/>
+            <a:ext cx="411480" cy="201168"/>
+          </a:xfrm>
+          <a:prstGeom prst="rect">
+            <a:avLst/>
+          </a:prstGeom>
+          <a:noFill/>
+          <a:ln/>
+        </p:spPr>
+        <p:txBody>
+          <a:bodyPr wrap="square" lIns="0" tIns="0" rIns="0" bIns="0" rtlCol="0" anchor="ctr"/>
+          <a:lstStyle/>
+          <a:p>
+            <a:pPr algn="r" indent="0" marL="0">
+              <a:buNone/>
+            </a:pPr>
+            <a:r>
+              <a:rPr lang="en-US" sz="900" dirty="0">
+                <a:solidFill>
+                  <a:srgbClr val="5F7181"/>
+                </a:solidFill>
+                <a:latin typeface="Aptos" pitchFamily="34" charset="0"/>
+                <a:ea typeface="Aptos" pitchFamily="34" charset="-122"/>
+                <a:cs typeface="Aptos" pitchFamily="34" charset="-120"/>
+              </a:rPr>
+              <a:t>8</a:t>
+            </a:r>
+            <a:endParaRPr lang="en-US" sz="900" dirty="0"/>
+          </a:p>
+        </p:txBody>
+      </p:sp>
+      <p:sp>
+        <p:nvSpPr>
+          <p:cNvPr id="8" name="Shape 6"/>
           <p:cNvSpPr/>
           <p:nvPr/>
         </p:nvSpPr>
@@ -14123,7 +15299,7 @@
       </p:sp>
       <p:sp>
         <p:nvSpPr>
-          <p:cNvPr id="8" name="Text 6"/>
+          <p:cNvPr id="9" name="Text 7"/>
           <p:cNvSpPr/>
           <p:nvPr/>
         </p:nvSpPr>
@@ -14162,14 +15338,14 @@
       </p:sp>
       <p:sp>
         <p:nvSpPr>
-          <p:cNvPr id="9" name="Text 7"/>
+          <p:cNvPr id="10" name="Text 8"/>
           <p:cNvSpPr/>
           <p:nvPr/>
         </p:nvSpPr>
         <p:spPr>
           <a:xfrm>
             <a:off x="640080" y="621792"/>
-            <a:ext cx="10881360" cy="566928"/>
+            <a:ext cx="10881360" cy="713232"/>
           </a:xfrm>
           <a:prstGeom prst="rect">
             <a:avLst/>
@@ -14187,7 +15363,7 @@
               <a:buNone/>
             </a:pPr>
             <a:r>
-              <a:rPr lang="en-US" sz="2700" b="1" dirty="0">
+              <a:rPr lang="en-US" sz="3400" b="1" dirty="0">
                 <a:solidFill>
                   <a:srgbClr val="003A63"/>
                 </a:solidFill>
@@ -14197,20 +15373,20 @@
               </a:rPr>
               <a:t>Core Concepts</a:t>
             </a:r>
-            <a:endParaRPr lang="en-US" sz="2700" dirty="0"/>
-          </a:p>
-        </p:txBody>
-      </p:sp>
-      <p:sp>
-        <p:nvSpPr>
-          <p:cNvPr id="10" name="Text 8"/>
-          <p:cNvSpPr/>
-          <p:nvPr/>
-        </p:nvSpPr>
-        <p:spPr>
-          <a:xfrm>
-            <a:off x="868680" y="1417320"/>
-            <a:ext cx="6675120" cy="4434840"/>
+            <a:endParaRPr lang="en-US" sz="3400" dirty="0"/>
+          </a:p>
+        </p:txBody>
+      </p:sp>
+      <p:sp>
+        <p:nvSpPr>
+          <p:cNvPr id="11" name="Text 9"/>
+          <p:cNvSpPr/>
+          <p:nvPr/>
+        </p:nvSpPr>
+        <p:spPr>
+          <a:xfrm>
+            <a:off x="868680" y="1508760"/>
+            <a:ext cx="6537960" cy="4160520"/>
           </a:xfrm>
           <a:prstGeom prst="rect">
             <a:avLst/>
@@ -14225,7 +15401,7 @@
           <a:lstStyle/>
           <a:p>
             <a:r>
-              <a:rPr lang="en-US" sz="1700" dirty="0">
+              <a:rPr lang="en-US" sz="2100" dirty="0">
                 <a:solidFill>
                   <a:srgbClr val="17364A"/>
                 </a:solidFill>
@@ -14235,11 +15411,11 @@
               </a:rPr>
               <a:t>Data pipeline.</a:t>
             </a:r>
-            <a:endParaRPr lang="en-US" sz="1700" dirty="0"/>
-          </a:p>
-          <a:p>
-            <a:r>
-              <a:rPr lang="en-US" sz="1700" dirty="0">
+            <a:endParaRPr lang="en-US" sz="2100" dirty="0"/>
+          </a:p>
+          <a:p>
+            <a:r>
+              <a:rPr lang="en-US" sz="2100" dirty="0">
                 <a:solidFill>
                   <a:srgbClr val="17364A"/>
                 </a:solidFill>
@@ -14247,13 +15423,13 @@
                 <a:ea typeface="Aptos" pitchFamily="34" charset="-122"/>
                 <a:cs typeface="Aptos" pitchFamily="34" charset="-120"/>
               </a:rPr>
-              <a:t>A data pipeline is a set of technical and operational steps that moves data from a source to a destination where the data.</a:t>
-            </a:r>
-            <a:endParaRPr lang="en-US" sz="1700" dirty="0"/>
-          </a:p>
-          <a:p>
-            <a:r>
-              <a:rPr lang="en-US" sz="1700" dirty="0">
+              <a:t>A data pipeline is a set of technical and operational steps that moves data from a source to a.</a:t>
+            </a:r>
+            <a:endParaRPr lang="en-US" sz="2100" dirty="0"/>
+          </a:p>
+          <a:p>
+            <a:r>
+              <a:rPr lang="en-US" sz="2100" dirty="0">
                 <a:solidFill>
                   <a:srgbClr val="17364A"/>
                 </a:solidFill>
@@ -14261,29 +15437,15 @@
                 <a:ea typeface="Aptos" pitchFamily="34" charset="-122"/>
                 <a:cs typeface="Aptos" pitchFamily="34" charset="-120"/>
               </a:rPr>
-              <a:t>In public health, pipelines may include laboratory interfaces, EHR feeds, IIS submissions, syndromic surveillance feeds,.</a:t>
-            </a:r>
-            <a:endParaRPr lang="en-US" sz="1700" dirty="0"/>
-          </a:p>
-          <a:p>
-            <a:r>
-              <a:rPr lang="en-US" sz="1700" dirty="0">
-                <a:solidFill>
-                  <a:srgbClr val="17364A"/>
-                </a:solidFill>
-                <a:latin typeface="Aptos" pitchFamily="34" charset="0"/>
-                <a:ea typeface="Aptos" pitchFamily="34" charset="-122"/>
-                <a:cs typeface="Aptos" pitchFamily="34" charset="-120"/>
-              </a:rPr>
-              <a:t>Each step creates an opportunity to improve or degrade data quality.</a:t>
-            </a:r>
-            <a:endParaRPr lang="en-US" sz="1700" dirty="0"/>
-          </a:p>
-        </p:txBody>
-      </p:sp>
-      <p:sp>
-        <p:nvSpPr>
-          <p:cNvPr id="11" name="Shape 9"/>
+              <a:t>In public health, pipelines may include laboratory interfaces, EHR feeds, IIS submissions, syndromic.</a:t>
+            </a:r>
+            <a:endParaRPr lang="en-US" sz="2100" dirty="0"/>
+          </a:p>
+        </p:txBody>
+      </p:sp>
+      <p:sp>
+        <p:nvSpPr>
+          <p:cNvPr id="12" name="Shape 10"/>
           <p:cNvSpPr/>
           <p:nvPr/>
         </p:nvSpPr>
@@ -14310,14 +15472,14 @@
       </p:sp>
       <p:sp>
         <p:nvSpPr>
-          <p:cNvPr id="12" name="Text 10"/>
+          <p:cNvPr id="13" name="Text 11"/>
           <p:cNvSpPr/>
           <p:nvPr/>
         </p:nvSpPr>
         <p:spPr>
           <a:xfrm>
             <a:off x="8074152" y="1563624"/>
-            <a:ext cx="2825496" cy="201168"/>
+            <a:ext cx="2825496" cy="256032"/>
           </a:xfrm>
           <a:prstGeom prst="rect">
             <a:avLst/>
@@ -14333,7 +15495,7 @@
               <a:buNone/>
             </a:pPr>
             <a:r>
-              <a:rPr lang="en-US" sz="950" b="1" dirty="0">
+              <a:rPr lang="en-US" sz="1300" b="1" dirty="0">
                 <a:solidFill>
                   <a:srgbClr val="0068B7"/>
                 </a:solidFill>
@@ -14343,20 +15505,20 @@
               </a:rPr>
               <a:t>Key idea</a:t>
             </a:r>
-            <a:endParaRPr lang="en-US" sz="950" dirty="0"/>
-          </a:p>
-        </p:txBody>
-      </p:sp>
-      <p:sp>
-        <p:nvSpPr>
-          <p:cNvPr id="13" name="Text 11"/>
-          <p:cNvSpPr/>
-          <p:nvPr/>
-        </p:nvSpPr>
-        <p:spPr>
-          <a:xfrm>
-            <a:off x="8074152" y="1856232"/>
-            <a:ext cx="2825496" cy="1261872"/>
+            <a:endParaRPr lang="en-US" sz="1300" dirty="0"/>
+          </a:p>
+        </p:txBody>
+      </p:sp>
+      <p:sp>
+        <p:nvSpPr>
+          <p:cNvPr id="14" name="Text 12"/>
+          <p:cNvSpPr/>
+          <p:nvPr/>
+        </p:nvSpPr>
+        <p:spPr>
+          <a:xfrm>
+            <a:off x="8074152" y="1920240"/>
+            <a:ext cx="2825496" cy="1188720"/>
           </a:xfrm>
           <a:prstGeom prst="rect">
             <a:avLst/>
@@ -14374,7 +15536,7 @@
               <a:buNone/>
             </a:pPr>
             <a:r>
-              <a:rPr lang="en-US" sz="1250" dirty="0">
+              <a:rPr lang="en-US" sz="1550" dirty="0">
                 <a:solidFill>
                   <a:srgbClr val="17364A"/>
                 </a:solidFill>
@@ -14384,13 +15546,13 @@
               </a:rPr>
               <a:t>Data pipeline.</a:t>
             </a:r>
-            <a:endParaRPr lang="en-US" sz="1250" dirty="0"/>
-          </a:p>
-        </p:txBody>
-      </p:sp>
-      <p:sp>
-        <p:nvSpPr>
-          <p:cNvPr id="14" name="Shape 12"/>
+            <a:endParaRPr lang="en-US" sz="1550" dirty="0"/>
+          </a:p>
+        </p:txBody>
+      </p:sp>
+      <p:sp>
+        <p:nvSpPr>
+          <p:cNvPr id="15" name="Shape 13"/>
           <p:cNvSpPr/>
           <p:nvPr/>
         </p:nvSpPr>
@@ -14417,14 +15579,14 @@
       </p:sp>
       <p:sp>
         <p:nvSpPr>
-          <p:cNvPr id="15" name="Text 13"/>
+          <p:cNvPr id="16" name="Text 14"/>
           <p:cNvSpPr/>
           <p:nvPr/>
         </p:nvSpPr>
         <p:spPr>
           <a:xfrm>
             <a:off x="8074152" y="3666744"/>
-            <a:ext cx="2825496" cy="201168"/>
+            <a:ext cx="2825496" cy="256032"/>
           </a:xfrm>
           <a:prstGeom prst="rect">
             <a:avLst/>
@@ -14440,7 +15602,7 @@
               <a:buNone/>
             </a:pPr>
             <a:r>
-              <a:rPr lang="en-US" sz="950" b="1" dirty="0">
+              <a:rPr lang="en-US" sz="1300" b="1" dirty="0">
                 <a:solidFill>
                   <a:srgbClr val="0068B7"/>
                 </a:solidFill>
@@ -14450,20 +15612,20 @@
               </a:rPr>
               <a:t>Use this for</a:t>
             </a:r>
-            <a:endParaRPr lang="en-US" sz="950" dirty="0"/>
-          </a:p>
-        </p:txBody>
-      </p:sp>
-      <p:sp>
-        <p:nvSpPr>
-          <p:cNvPr id="16" name="Text 14"/>
-          <p:cNvSpPr/>
-          <p:nvPr/>
-        </p:nvSpPr>
-        <p:spPr>
-          <a:xfrm>
-            <a:off x="8074152" y="3959352"/>
-            <a:ext cx="2825496" cy="1170432"/>
+            <a:endParaRPr lang="en-US" sz="1300" dirty="0"/>
+          </a:p>
+        </p:txBody>
+      </p:sp>
+      <p:sp>
+        <p:nvSpPr>
+          <p:cNvPr id="17" name="Text 15"/>
+          <p:cNvSpPr/>
+          <p:nvPr/>
+        </p:nvSpPr>
+        <p:spPr>
+          <a:xfrm>
+            <a:off x="8074152" y="4023360"/>
+            <a:ext cx="2825496" cy="1097280"/>
           </a:xfrm>
           <a:prstGeom prst="rect">
             <a:avLst/>
@@ -14481,7 +15643,7 @@
               <a:buNone/>
             </a:pPr>
             <a:r>
-              <a:rPr lang="en-US" sz="1250" dirty="0">
+              <a:rPr lang="en-US" sz="1550" dirty="0">
                 <a:solidFill>
                   <a:srgbClr val="17364A"/>
                 </a:solidFill>
@@ -14491,7 +15653,7 @@
               </a:rPr>
               <a:t>Connect the concept to public health decisions, safeguards, documentation, or implementation work.</a:t>
             </a:r>
-            <a:endParaRPr lang="en-US" sz="1250" dirty="0"/>
+            <a:endParaRPr lang="en-US" sz="1550" dirty="0"/>
           </a:p>
         </p:txBody>
       </p:sp>
@@ -14688,7 +15850,7 @@
                 <a:ea typeface="Aptos" pitchFamily="34" charset="-122"/>
                 <a:cs typeface="Aptos" pitchFamily="34" charset="-120"/>
               </a:rPr>
-              <a:t>© Paula Soper</a:t>
+              <a:t>Â© Paula Soper</a:t>
             </a:r>
             <a:endParaRPr lang="en-US" sz="800" dirty="0"/>
           </a:p>
@@ -14702,8 +15864,47 @@
         </p:nvSpPr>
         <p:spPr>
           <a:xfrm>
+            <a:off x="11137392" y="6510528"/>
+            <a:ext cx="411480" cy="201168"/>
+          </a:xfrm>
+          <a:prstGeom prst="rect">
+            <a:avLst/>
+          </a:prstGeom>
+          <a:noFill/>
+          <a:ln/>
+        </p:spPr>
+        <p:txBody>
+          <a:bodyPr wrap="square" lIns="0" tIns="0" rIns="0" bIns="0" rtlCol="0" anchor="ctr"/>
+          <a:lstStyle/>
+          <a:p>
+            <a:pPr algn="r" indent="0" marL="0">
+              <a:buNone/>
+            </a:pPr>
+            <a:r>
+              <a:rPr lang="en-US" sz="900" dirty="0">
+                <a:solidFill>
+                  <a:srgbClr val="5F7181"/>
+                </a:solidFill>
+                <a:latin typeface="Aptos" pitchFamily="34" charset="0"/>
+                <a:ea typeface="Aptos" pitchFamily="34" charset="-122"/>
+                <a:cs typeface="Aptos" pitchFamily="34" charset="-120"/>
+              </a:rPr>
+              <a:t>9</a:t>
+            </a:r>
+            <a:endParaRPr lang="en-US" sz="900" dirty="0"/>
+          </a:p>
+        </p:txBody>
+      </p:sp>
+      <p:sp>
+        <p:nvSpPr>
+          <p:cNvPr id="8" name="Text 6"/>
+          <p:cNvSpPr/>
+          <p:nvPr/>
+        </p:nvSpPr>
+        <p:spPr>
+          <a:xfrm>
             <a:off x="640080" y="658368"/>
-            <a:ext cx="10881360" cy="566928"/>
+            <a:ext cx="10881360" cy="713232"/>
           </a:xfrm>
           <a:prstGeom prst="rect">
             <a:avLst/>
@@ -14721,7 +15922,7 @@
               <a:buNone/>
             </a:pPr>
             <a:r>
-              <a:rPr lang="en-US" sz="2700" b="1" dirty="0">
+              <a:rPr lang="en-US" sz="3400" b="1" dirty="0">
                 <a:solidFill>
                   <a:srgbClr val="003A63"/>
                 </a:solidFill>
@@ -14731,20 +15932,20 @@
               </a:rPr>
               <a:t>Core Concepts Continued</a:t>
             </a:r>
-            <a:endParaRPr lang="en-US" sz="2700" dirty="0"/>
-          </a:p>
-        </p:txBody>
-      </p:sp>
-      <p:sp>
-        <p:nvSpPr>
-          <p:cNvPr id="8" name="Text 6"/>
-          <p:cNvSpPr/>
-          <p:nvPr/>
-        </p:nvSpPr>
-        <p:spPr>
-          <a:xfrm>
-            <a:off x="868680" y="1417320"/>
-            <a:ext cx="6675120" cy="4434840"/>
+            <a:endParaRPr lang="en-US" sz="3400" dirty="0"/>
+          </a:p>
+        </p:txBody>
+      </p:sp>
+      <p:sp>
+        <p:nvSpPr>
+          <p:cNvPr id="9" name="Text 7"/>
+          <p:cNvSpPr/>
+          <p:nvPr/>
+        </p:nvSpPr>
+        <p:spPr>
+          <a:xfrm>
+            <a:off x="868680" y="1508760"/>
+            <a:ext cx="6537960" cy="4160520"/>
           </a:xfrm>
           <a:prstGeom prst="rect">
             <a:avLst/>
@@ -14759,7 +15960,7 @@
           <a:lstStyle/>
           <a:p>
             <a:r>
-              <a:rPr lang="en-US" sz="1700" dirty="0">
+              <a:rPr lang="en-US" sz="2100" dirty="0">
                 <a:solidFill>
                   <a:srgbClr val="17364A"/>
                 </a:solidFill>
@@ -14769,11 +15970,11 @@
               </a:rPr>
               <a:t>Data lineage.</a:t>
             </a:r>
-            <a:endParaRPr lang="en-US" sz="1700" dirty="0"/>
-          </a:p>
-          <a:p>
-            <a:r>
-              <a:rPr lang="en-US" sz="1700" dirty="0">
+            <a:endParaRPr lang="en-US" sz="2100" dirty="0"/>
+          </a:p>
+          <a:p>
+            <a:r>
+              <a:rPr lang="en-US" sz="2100" dirty="0">
                 <a:solidFill>
                   <a:srgbClr val="17364A"/>
                 </a:solidFill>
@@ -14783,11 +15984,11 @@
               </a:rPr>
               <a:t>Data lineage shows where data came from, what happened to them, and where they were used.</a:t>
             </a:r>
-            <a:endParaRPr lang="en-US" sz="1700" dirty="0"/>
-          </a:p>
-          <a:p>
-            <a:r>
-              <a:rPr lang="en-US" sz="1700" dirty="0">
+            <a:endParaRPr lang="en-US" sz="2100" dirty="0"/>
+          </a:p>
+          <a:p>
+            <a:r>
+              <a:rPr lang="en-US" sz="2100" dirty="0">
                 <a:solidFill>
                   <a:srgbClr val="17364A"/>
                 </a:solidFill>
@@ -14797,27 +15998,13 @@
               </a:rPr>
               <a:t>Lineage supports validation, troubleshooting, incident response, and public records review.</a:t>
             </a:r>
-            <a:endParaRPr lang="en-US" sz="1700" dirty="0"/>
-          </a:p>
-          <a:p>
-            <a:r>
-              <a:rPr lang="en-US" sz="1700" dirty="0">
-                <a:solidFill>
-                  <a:srgbClr val="17364A"/>
-                </a:solidFill>
-                <a:latin typeface="Aptos" pitchFamily="34" charset="0"/>
-                <a:ea typeface="Aptos" pitchFamily="34" charset="-122"/>
-                <a:cs typeface="Aptos" pitchFamily="34" charset="-120"/>
-              </a:rPr>
-              <a:t>In AI workflows, lineage helps staff trace a questionable output back to its source data and transformation history.</a:t>
-            </a:r>
-            <a:endParaRPr lang="en-US" sz="1700" dirty="0"/>
-          </a:p>
-        </p:txBody>
-      </p:sp>
-      <p:sp>
-        <p:nvSpPr>
-          <p:cNvPr id="9" name="Shape 7"/>
+            <a:endParaRPr lang="en-US" sz="2100" dirty="0"/>
+          </a:p>
+        </p:txBody>
+      </p:sp>
+      <p:sp>
+        <p:nvSpPr>
+          <p:cNvPr id="10" name="Shape 8"/>
           <p:cNvSpPr/>
           <p:nvPr/>
         </p:nvSpPr>
@@ -14844,14 +16031,14 @@
       </p:sp>
       <p:sp>
         <p:nvSpPr>
-          <p:cNvPr id="10" name="Text 8"/>
+          <p:cNvPr id="11" name="Text 9"/>
           <p:cNvSpPr/>
           <p:nvPr/>
         </p:nvSpPr>
         <p:spPr>
           <a:xfrm>
             <a:off x="8074152" y="1563624"/>
-            <a:ext cx="2825496" cy="201168"/>
+            <a:ext cx="2825496" cy="256032"/>
           </a:xfrm>
           <a:prstGeom prst="rect">
             <a:avLst/>
@@ -14867,7 +16054,7 @@
               <a:buNone/>
             </a:pPr>
             <a:r>
-              <a:rPr lang="en-US" sz="950" b="1" dirty="0">
+              <a:rPr lang="en-US" sz="1300" b="1" dirty="0">
                 <a:solidFill>
                   <a:srgbClr val="0068B7"/>
                 </a:solidFill>
@@ -14877,20 +16064,20 @@
               </a:rPr>
               <a:t>Key idea</a:t>
             </a:r>
-            <a:endParaRPr lang="en-US" sz="950" dirty="0"/>
-          </a:p>
-        </p:txBody>
-      </p:sp>
-      <p:sp>
-        <p:nvSpPr>
-          <p:cNvPr id="11" name="Text 9"/>
-          <p:cNvSpPr/>
-          <p:nvPr/>
-        </p:nvSpPr>
-        <p:spPr>
-          <a:xfrm>
-            <a:off x="8074152" y="1856232"/>
-            <a:ext cx="2825496" cy="1261872"/>
+            <a:endParaRPr lang="en-US" sz="1300" dirty="0"/>
+          </a:p>
+        </p:txBody>
+      </p:sp>
+      <p:sp>
+        <p:nvSpPr>
+          <p:cNvPr id="12" name="Text 10"/>
+          <p:cNvSpPr/>
+          <p:nvPr/>
+        </p:nvSpPr>
+        <p:spPr>
+          <a:xfrm>
+            <a:off x="8074152" y="1920240"/>
+            <a:ext cx="2825496" cy="1188720"/>
           </a:xfrm>
           <a:prstGeom prst="rect">
             <a:avLst/>
@@ -14908,7 +16095,7 @@
               <a:buNone/>
             </a:pPr>
             <a:r>
-              <a:rPr lang="en-US" sz="1250" dirty="0">
+              <a:rPr lang="en-US" sz="1550" dirty="0">
                 <a:solidFill>
                   <a:srgbClr val="17364A"/>
                 </a:solidFill>
@@ -14918,13 +16105,13 @@
               </a:rPr>
               <a:t>Data lineage.</a:t>
             </a:r>
-            <a:endParaRPr lang="en-US" sz="1250" dirty="0"/>
-          </a:p>
-        </p:txBody>
-      </p:sp>
-      <p:sp>
-        <p:nvSpPr>
-          <p:cNvPr id="12" name="Shape 10"/>
+            <a:endParaRPr lang="en-US" sz="1550" dirty="0"/>
+          </a:p>
+        </p:txBody>
+      </p:sp>
+      <p:sp>
+        <p:nvSpPr>
+          <p:cNvPr id="13" name="Shape 11"/>
           <p:cNvSpPr/>
           <p:nvPr/>
         </p:nvSpPr>
@@ -14951,14 +16138,14 @@
       </p:sp>
       <p:sp>
         <p:nvSpPr>
-          <p:cNvPr id="13" name="Text 11"/>
+          <p:cNvPr id="14" name="Text 12"/>
           <p:cNvSpPr/>
           <p:nvPr/>
         </p:nvSpPr>
         <p:spPr>
           <a:xfrm>
             <a:off x="8074152" y="3666744"/>
-            <a:ext cx="2825496" cy="201168"/>
+            <a:ext cx="2825496" cy="256032"/>
           </a:xfrm>
           <a:prstGeom prst="rect">
             <a:avLst/>
@@ -14974,7 +16161,7 @@
               <a:buNone/>
             </a:pPr>
             <a:r>
-              <a:rPr lang="en-US" sz="950" b="1" dirty="0">
+              <a:rPr lang="en-US" sz="1300" b="1" dirty="0">
                 <a:solidFill>
                   <a:srgbClr val="0068B7"/>
                 </a:solidFill>
@@ -14984,20 +16171,20 @@
               </a:rPr>
               <a:t>Use this for</a:t>
             </a:r>
-            <a:endParaRPr lang="en-US" sz="950" dirty="0"/>
-          </a:p>
-        </p:txBody>
-      </p:sp>
-      <p:sp>
-        <p:nvSpPr>
-          <p:cNvPr id="14" name="Text 12"/>
-          <p:cNvSpPr/>
-          <p:nvPr/>
-        </p:nvSpPr>
-        <p:spPr>
-          <a:xfrm>
-            <a:off x="8074152" y="3959352"/>
-            <a:ext cx="2825496" cy="1170432"/>
+            <a:endParaRPr lang="en-US" sz="1300" dirty="0"/>
+          </a:p>
+        </p:txBody>
+      </p:sp>
+      <p:sp>
+        <p:nvSpPr>
+          <p:cNvPr id="15" name="Text 13"/>
+          <p:cNvSpPr/>
+          <p:nvPr/>
+        </p:nvSpPr>
+        <p:spPr>
+          <a:xfrm>
+            <a:off x="8074152" y="4023360"/>
+            <a:ext cx="2825496" cy="1097280"/>
           </a:xfrm>
           <a:prstGeom prst="rect">
             <a:avLst/>
@@ -15015,7 +16202,7 @@
               <a:buNone/>
             </a:pPr>
             <a:r>
-              <a:rPr lang="en-US" sz="1250" dirty="0">
+              <a:rPr lang="en-US" sz="1550" dirty="0">
                 <a:solidFill>
                   <a:srgbClr val="17364A"/>
                 </a:solidFill>
@@ -15025,7 +16212,7 @@
               </a:rPr>
               <a:t>Connect the concept to public health decisions, safeguards, documentation, or implementation work.</a:t>
             </a:r>
-            <a:endParaRPr lang="en-US" sz="1250" dirty="0"/>
+            <a:endParaRPr lang="en-US" sz="1550" dirty="0"/>
           </a:p>
         </p:txBody>
       </p:sp>
